--- a/pptx/EOD-Geeta-Govind-Vatika-Project-Finance.pptx
+++ b/pptx/EOD-Geeta-Govind-Vatika-Project-Finance.pptx
@@ -127,6 +127,581 @@
     <c:autoTitleDeleted val="1"/>
     <c:plotArea>
       <c:layout/>
+      <c:barChart>
+        <c:barDir val="col"/>
+        <c:grouping val="stacked"/>
+        <c:varyColors val="0"/>
+        <c:ser>
+          <c:idx val="0"/>
+          <c:order val="0"/>
+          <c:tx>
+            <c:strRef>
+              <c:f>Sheet1!$B$1</c:f>
+              <c:strCache>
+                <c:ptCount val="1"/>
+                <c:pt idx="0">
+                  <c:v>Gate entry</c:v>
+                </c:pt>
+              </c:strCache>
+            </c:strRef>
+          </c:tx>
+          <c:spPr>
+            <a:solidFill>
+              <a:srgbClr val="2B66EA"/>
+            </a:solidFill>
+            <a:effectLst/>
+          </c:spPr>
+          <c:invertIfNegative val="0"/>
+          <c:dLbls>
+            <c:numFmt formatCode="0.00" sourceLinked="0"/>
+            <c:txPr>
+              <a:bodyPr/>
+              <a:lstStyle/>
+              <a:p>
+                <a:pPr>
+                  <a:defRPr b="0" i="0" strike="noStrike" sz="900" u="none">
+                    <a:solidFill>
+                      <a:srgbClr val="3B4660"/>
+                    </a:solidFill>
+                    <a:latin typeface="Calibri"/>
+                  </a:defRPr>
+                </a:pPr>
+              </a:p>
+            </c:txPr>
+            <c:dLblPos val="ctr"/>
+            <c:showLegendKey val="0"/>
+            <c:showVal val="1"/>
+            <c:showCatName val="0"/>
+            <c:showSerName val="0"/>
+            <c:showPercent val="0"/>
+            <c:showBubbleSize val="0"/>
+            <c:showLeaderLines val="0"/>
+          </c:dLbls>
+          <c:cat>
+            <c:multiLvlStrRef>
+              <c:f>Sheet1!$A$2:$A$8</c:f>
+              <c:multiLvlStrCache>
+                <c:ptCount val="7"/>
+                <c:lvl>
+                  <c:pt idx="0">
+                    <c:v>Yr 1</c:v>
+                  </c:pt>
+                  <c:pt idx="1">
+                    <c:v>Yr 2</c:v>
+                  </c:pt>
+                  <c:pt idx="2">
+                    <c:v>Yr 3</c:v>
+                  </c:pt>
+                  <c:pt idx="3">
+                    <c:v>Yr 4</c:v>
+                  </c:pt>
+                  <c:pt idx="4">
+                    <c:v>Yr 5</c:v>
+                  </c:pt>
+                  <c:pt idx="5">
+                    <c:v>Yr 6</c:v>
+                  </c:pt>
+                  <c:pt idx="6">
+                    <c:v>Yr 7</c:v>
+                  </c:pt>
+                </c:lvl>
+              </c:multiLvlStrCache>
+            </c:multiLvlStrRef>
+          </c:cat>
+          <c:val>
+            <c:numRef>
+              <c:f>Sheet1!$B$2:$B$8</c:f>
+              <c:numCache>
+                <c:formatCode>General</c:formatCode>
+                <c:ptCount val="7"/>
+                <c:pt idx="0">
+                  <c:v>0.4</c:v>
+                </c:pt>
+                <c:pt idx="1">
+                  <c:v>0.51</c:v>
+                </c:pt>
+                <c:pt idx="2">
+                  <c:v>0.58</c:v>
+                </c:pt>
+                <c:pt idx="3">
+                  <c:v>0.63</c:v>
+                </c:pt>
+                <c:pt idx="4">
+                  <c:v>0.69</c:v>
+                </c:pt>
+                <c:pt idx="5">
+                  <c:v>0.73</c:v>
+                </c:pt>
+                <c:pt idx="6">
+                  <c:v>0.78</c:v>
+                </c:pt>
+              </c:numCache>
+            </c:numRef>
+          </c:val>
+        </c:ser>
+        <c:ser>
+          <c:idx val="1"/>
+          <c:order val="1"/>
+          <c:tx>
+            <c:strRef>
+              <c:f>Sheet1!$C$1</c:f>
+              <c:strCache>
+                <c:ptCount val="1"/>
+                <c:pt idx="0">
+                  <c:v>Fountain &amp; laser show</c:v>
+                </c:pt>
+              </c:strCache>
+            </c:strRef>
+          </c:tx>
+          <c:spPr>
+            <a:solidFill>
+              <a:srgbClr val="C8553D"/>
+            </a:solidFill>
+            <a:effectLst/>
+          </c:spPr>
+          <c:invertIfNegative val="0"/>
+          <c:dLbls>
+            <c:numFmt formatCode="0.00" sourceLinked="0"/>
+            <c:txPr>
+              <a:bodyPr/>
+              <a:lstStyle/>
+              <a:p>
+                <a:pPr>
+                  <a:defRPr b="0" i="0" strike="noStrike" sz="900" u="none">
+                    <a:solidFill>
+                      <a:srgbClr val="3B4660"/>
+                    </a:solidFill>
+                    <a:latin typeface="Calibri"/>
+                  </a:defRPr>
+                </a:pPr>
+              </a:p>
+            </c:txPr>
+            <c:dLblPos val="ctr"/>
+            <c:showLegendKey val="0"/>
+            <c:showVal val="1"/>
+            <c:showCatName val="0"/>
+            <c:showSerName val="0"/>
+            <c:showPercent val="0"/>
+            <c:showBubbleSize val="0"/>
+            <c:showLeaderLines val="0"/>
+          </c:dLbls>
+          <c:cat>
+            <c:multiLvlStrRef>
+              <c:f>Sheet1!$A$2:$A$8</c:f>
+              <c:multiLvlStrCache>
+                <c:ptCount val="7"/>
+                <c:lvl>
+                  <c:pt idx="0">
+                    <c:v>Yr 1</c:v>
+                  </c:pt>
+                  <c:pt idx="1">
+                    <c:v>Yr 2</c:v>
+                  </c:pt>
+                  <c:pt idx="2">
+                    <c:v>Yr 3</c:v>
+                  </c:pt>
+                  <c:pt idx="3">
+                    <c:v>Yr 4</c:v>
+                  </c:pt>
+                  <c:pt idx="4">
+                    <c:v>Yr 5</c:v>
+                  </c:pt>
+                  <c:pt idx="5">
+                    <c:v>Yr 6</c:v>
+                  </c:pt>
+                  <c:pt idx="6">
+                    <c:v>Yr 7</c:v>
+                  </c:pt>
+                </c:lvl>
+              </c:multiLvlStrCache>
+            </c:multiLvlStrRef>
+          </c:cat>
+          <c:val>
+            <c:numRef>
+              <c:f>Sheet1!$C$2:$C$8</c:f>
+              <c:numCache>
+                <c:formatCode>General</c:formatCode>
+                <c:ptCount val="7"/>
+                <c:pt idx="0">
+                  <c:v>0.63</c:v>
+                </c:pt>
+                <c:pt idx="1">
+                  <c:v>0.86</c:v>
+                </c:pt>
+                <c:pt idx="2">
+                  <c:v>1.15</c:v>
+                </c:pt>
+                <c:pt idx="3">
+                  <c:v>1.3</c:v>
+                </c:pt>
+                <c:pt idx="4">
+                  <c:v>1.57</c:v>
+                </c:pt>
+                <c:pt idx="5">
+                  <c:v>1.66</c:v>
+                </c:pt>
+                <c:pt idx="6">
+                  <c:v>1.96</c:v>
+                </c:pt>
+              </c:numCache>
+            </c:numRef>
+          </c:val>
+        </c:ser>
+        <c:ser>
+          <c:idx val="2"/>
+          <c:order val="2"/>
+          <c:tx>
+            <c:strRef>
+              <c:f>Sheet1!$D$1</c:f>
+              <c:strCache>
+                <c:ptCount val="1"/>
+                <c:pt idx="0">
+                  <c:v>Food and beverage</c:v>
+                </c:pt>
+              </c:strCache>
+            </c:strRef>
+          </c:tx>
+          <c:spPr>
+            <a:solidFill>
+              <a:srgbClr val="10B981"/>
+            </a:solidFill>
+            <a:effectLst/>
+          </c:spPr>
+          <c:invertIfNegative val="0"/>
+          <c:dLbls>
+            <c:numFmt formatCode="0.00" sourceLinked="0"/>
+            <c:txPr>
+              <a:bodyPr/>
+              <a:lstStyle/>
+              <a:p>
+                <a:pPr>
+                  <a:defRPr b="0" i="0" strike="noStrike" sz="900" u="none">
+                    <a:solidFill>
+                      <a:srgbClr val="3B4660"/>
+                    </a:solidFill>
+                    <a:latin typeface="Calibri"/>
+                  </a:defRPr>
+                </a:pPr>
+              </a:p>
+            </c:txPr>
+            <c:dLblPos val="ctr"/>
+            <c:showLegendKey val="0"/>
+            <c:showVal val="1"/>
+            <c:showCatName val="0"/>
+            <c:showSerName val="0"/>
+            <c:showPercent val="0"/>
+            <c:showBubbleSize val="0"/>
+            <c:showLeaderLines val="0"/>
+          </c:dLbls>
+          <c:cat>
+            <c:multiLvlStrRef>
+              <c:f>Sheet1!$A$2:$A$8</c:f>
+              <c:multiLvlStrCache>
+                <c:ptCount val="7"/>
+                <c:lvl>
+                  <c:pt idx="0">
+                    <c:v>Yr 1</c:v>
+                  </c:pt>
+                  <c:pt idx="1">
+                    <c:v>Yr 2</c:v>
+                  </c:pt>
+                  <c:pt idx="2">
+                    <c:v>Yr 3</c:v>
+                  </c:pt>
+                  <c:pt idx="3">
+                    <c:v>Yr 4</c:v>
+                  </c:pt>
+                  <c:pt idx="4">
+                    <c:v>Yr 5</c:v>
+                  </c:pt>
+                  <c:pt idx="5">
+                    <c:v>Yr 6</c:v>
+                  </c:pt>
+                  <c:pt idx="6">
+                    <c:v>Yr 7</c:v>
+                  </c:pt>
+                </c:lvl>
+              </c:multiLvlStrCache>
+            </c:multiLvlStrRef>
+          </c:cat>
+          <c:val>
+            <c:numRef>
+              <c:f>Sheet1!$D$2:$D$8</c:f>
+              <c:numCache>
+                <c:formatCode>General</c:formatCode>
+                <c:ptCount val="7"/>
+                <c:pt idx="0">
+                  <c:v>0.31</c:v>
+                </c:pt>
+                <c:pt idx="1">
+                  <c:v>0.43</c:v>
+                </c:pt>
+                <c:pt idx="2">
+                  <c:v>0.52</c:v>
+                </c:pt>
+                <c:pt idx="3">
+                  <c:v>0.62</c:v>
+                </c:pt>
+                <c:pt idx="4">
+                  <c:v>0.71</c:v>
+                </c:pt>
+                <c:pt idx="5">
+                  <c:v>0.81</c:v>
+                </c:pt>
+                <c:pt idx="6">
+                  <c:v>0.9</c:v>
+                </c:pt>
+              </c:numCache>
+            </c:numRef>
+          </c:val>
+        </c:ser>
+        <c:ser>
+          <c:idx val="3"/>
+          <c:order val="3"/>
+          <c:tx>
+            <c:strRef>
+              <c:f>Sheet1!$E$1</c:f>
+              <c:strCache>
+                <c:ptCount val="1"/>
+                <c:pt idx="0">
+                  <c:v>E-O-D activity layer</c:v>
+                </c:pt>
+              </c:strCache>
+            </c:strRef>
+          </c:tx>
+          <c:spPr>
+            <a:solidFill>
+              <a:srgbClr val="D97706"/>
+            </a:solidFill>
+            <a:effectLst/>
+          </c:spPr>
+          <c:invertIfNegative val="0"/>
+          <c:dLbls>
+            <c:numFmt formatCode="0.00" sourceLinked="0"/>
+            <c:txPr>
+              <a:bodyPr/>
+              <a:lstStyle/>
+              <a:p>
+                <a:pPr>
+                  <a:defRPr b="0" i="0" strike="noStrike" sz="900" u="none">
+                    <a:solidFill>
+                      <a:srgbClr val="3B4660"/>
+                    </a:solidFill>
+                    <a:latin typeface="Calibri"/>
+                  </a:defRPr>
+                </a:pPr>
+              </a:p>
+            </c:txPr>
+            <c:dLblPos val="ctr"/>
+            <c:showLegendKey val="0"/>
+            <c:showVal val="1"/>
+            <c:showCatName val="0"/>
+            <c:showSerName val="0"/>
+            <c:showPercent val="0"/>
+            <c:showBubbleSize val="0"/>
+            <c:showLeaderLines val="0"/>
+          </c:dLbls>
+          <c:cat>
+            <c:multiLvlStrRef>
+              <c:f>Sheet1!$A$2:$A$8</c:f>
+              <c:multiLvlStrCache>
+                <c:ptCount val="7"/>
+                <c:lvl>
+                  <c:pt idx="0">
+                    <c:v>Yr 1</c:v>
+                  </c:pt>
+                  <c:pt idx="1">
+                    <c:v>Yr 2</c:v>
+                  </c:pt>
+                  <c:pt idx="2">
+                    <c:v>Yr 3</c:v>
+                  </c:pt>
+                  <c:pt idx="3">
+                    <c:v>Yr 4</c:v>
+                  </c:pt>
+                  <c:pt idx="4">
+                    <c:v>Yr 5</c:v>
+                  </c:pt>
+                  <c:pt idx="5">
+                    <c:v>Yr 6</c:v>
+                  </c:pt>
+                  <c:pt idx="6">
+                    <c:v>Yr 7</c:v>
+                  </c:pt>
+                </c:lvl>
+              </c:multiLvlStrCache>
+            </c:multiLvlStrRef>
+          </c:cat>
+          <c:val>
+            <c:numRef>
+              <c:f>Sheet1!$E$2:$E$8</c:f>
+              <c:numCache>
+                <c:formatCode>General</c:formatCode>
+                <c:ptCount val="7"/>
+                <c:pt idx="0">
+                  <c:v>0.35</c:v>
+                </c:pt>
+                <c:pt idx="1">
+                  <c:v>0.56</c:v>
+                </c:pt>
+                <c:pt idx="2">
+                  <c:v>0.73</c:v>
+                </c:pt>
+                <c:pt idx="3">
+                  <c:v>0.92</c:v>
+                </c:pt>
+                <c:pt idx="4">
+                  <c:v>1.05</c:v>
+                </c:pt>
+                <c:pt idx="5">
+                  <c:v>1.26</c:v>
+                </c:pt>
+                <c:pt idx="6">
+                  <c:v>1.4</c:v>
+                </c:pt>
+              </c:numCache>
+            </c:numRef>
+          </c:val>
+        </c:ser>
+        <c:ser>
+          <c:idx val="4"/>
+          <c:order val="4"/>
+          <c:tx>
+            <c:strRef>
+              <c:f>Sheet1!$F$1</c:f>
+              <c:strCache>
+                <c:ptCount val="1"/>
+                <c:pt idx="0">
+                  <c:v>Parking, events and shoots</c:v>
+                </c:pt>
+              </c:strCache>
+            </c:strRef>
+          </c:tx>
+          <c:spPr>
+            <a:solidFill>
+              <a:srgbClr val="8A93A6"/>
+            </a:solidFill>
+            <a:effectLst/>
+          </c:spPr>
+          <c:invertIfNegative val="0"/>
+          <c:dLbls>
+            <c:numFmt formatCode="0.00" sourceLinked="0"/>
+            <c:txPr>
+              <a:bodyPr/>
+              <a:lstStyle/>
+              <a:p>
+                <a:pPr>
+                  <a:defRPr b="0" i="0" strike="noStrike" sz="900" u="none">
+                    <a:solidFill>
+                      <a:srgbClr val="3B4660"/>
+                    </a:solidFill>
+                    <a:latin typeface="Calibri"/>
+                  </a:defRPr>
+                </a:pPr>
+              </a:p>
+            </c:txPr>
+            <c:dLblPos val="ctr"/>
+            <c:showLegendKey val="0"/>
+            <c:showVal val="1"/>
+            <c:showCatName val="0"/>
+            <c:showSerName val="0"/>
+            <c:showPercent val="0"/>
+            <c:showBubbleSize val="0"/>
+            <c:showLeaderLines val="0"/>
+          </c:dLbls>
+          <c:cat>
+            <c:multiLvlStrRef>
+              <c:f>Sheet1!$A$2:$A$8</c:f>
+              <c:multiLvlStrCache>
+                <c:ptCount val="7"/>
+                <c:lvl>
+                  <c:pt idx="0">
+                    <c:v>Yr 1</c:v>
+                  </c:pt>
+                  <c:pt idx="1">
+                    <c:v>Yr 2</c:v>
+                  </c:pt>
+                  <c:pt idx="2">
+                    <c:v>Yr 3</c:v>
+                  </c:pt>
+                  <c:pt idx="3">
+                    <c:v>Yr 4</c:v>
+                  </c:pt>
+                  <c:pt idx="4">
+                    <c:v>Yr 5</c:v>
+                  </c:pt>
+                  <c:pt idx="5">
+                    <c:v>Yr 6</c:v>
+                  </c:pt>
+                  <c:pt idx="6">
+                    <c:v>Yr 7</c:v>
+                  </c:pt>
+                </c:lvl>
+              </c:multiLvlStrCache>
+            </c:multiLvlStrRef>
+          </c:cat>
+          <c:val>
+            <c:numRef>
+              <c:f>Sheet1!$F$2:$F$8</c:f>
+              <c:numCache>
+                <c:formatCode>General</c:formatCode>
+                <c:ptCount val="7"/>
+                <c:pt idx="0">
+                  <c:v>0.28</c:v>
+                </c:pt>
+                <c:pt idx="1">
+                  <c:v>0.35</c:v>
+                </c:pt>
+                <c:pt idx="2">
+                  <c:v>0.4</c:v>
+                </c:pt>
+                <c:pt idx="3">
+                  <c:v>0.44</c:v>
+                </c:pt>
+                <c:pt idx="4">
+                  <c:v>0.47</c:v>
+                </c:pt>
+                <c:pt idx="5">
+                  <c:v>0.51</c:v>
+                </c:pt>
+                <c:pt idx="6">
+                  <c:v>0.54</c:v>
+                </c:pt>
+              </c:numCache>
+            </c:numRef>
+          </c:val>
+        </c:ser>
+        <c:dLbls>
+          <c:numFmt formatCode="0.00" sourceLinked="0"/>
+          <c:txPr>
+            <a:bodyPr/>
+            <a:lstStyle/>
+            <a:p>
+              <a:pPr>
+                <a:defRPr b="0" i="0" strike="noStrike" sz="900" u="none">
+                  <a:solidFill>
+                    <a:srgbClr val="3B4660"/>
+                  </a:solidFill>
+                  <a:latin typeface="Calibri"/>
+                </a:defRPr>
+              </a:pPr>
+            </a:p>
+          </c:txPr>
+          <c:dLblPos val="ctr"/>
+          <c:showLegendKey val="0"/>
+          <c:showVal val="1"/>
+          <c:showCatName val="0"/>
+          <c:showSerName val="0"/>
+          <c:showPercent val="0"/>
+          <c:showBubbleSize val="0"/>
+          <c:showLeaderLines val="0"/>
+        </c:dLbls>
+        <c:gapWidth val="45"/>
+        <c:overlap val="100"/>
+        <c:axId val="2094734554"/>
+        <c:axId val="2094734552"/>
+        <c:axId val="2094734556"/>
+      </c:barChart>
       <c:catAx>
         <c:axId val="2094734554"/>
         <c:scaling>
@@ -3686,7 +4261,7 @@
         <p:spPr>
           <a:xfrm>
             <a:off x="566928" y="2706624"/>
-            <a:ext cx="10241280" cy="928878"/>
+            <a:ext cx="10241280" cy="911352"/>
           </a:xfrm>
           <a:prstGeom prst="rect">
             <a:avLst/>
@@ -3727,7 +4302,7 @@
         </p:nvSpPr>
         <p:spPr>
           <a:xfrm>
-            <a:off x="566928" y="3781806"/>
+            <a:off x="566928" y="3764280"/>
             <a:ext cx="10241280" cy="694944"/>
           </a:xfrm>
           <a:prstGeom prst="rect">
@@ -3909,7 +4484,7 @@
             <a:r>
               <a:rPr lang="en-US" sz="1000" dirty="0">
                 <a:solidFill>
-                  <a:srgbClr val="7C889B"/>
+                  <a:srgbClr val="A8B2C4"/>
                 </a:solidFill>
                 <a:latin typeface="Calibri" pitchFamily="34" charset="0"/>
                 <a:ea typeface="Calibri" pitchFamily="34" charset="-122"/>
@@ -4029,7 +4604,7 @@
             <a:r>
               <a:rPr lang="en-US" sz="1000" dirty="0">
                 <a:solidFill>
-                  <a:srgbClr val="7C889B"/>
+                  <a:srgbClr val="A8B2C4"/>
                 </a:solidFill>
                 <a:latin typeface="Calibri" pitchFamily="34" charset="0"/>
                 <a:ea typeface="Calibri" pitchFamily="34" charset="-122"/>
@@ -4149,7 +4724,7 @@
             <a:r>
               <a:rPr lang="en-US" sz="1000" dirty="0">
                 <a:solidFill>
-                  <a:srgbClr val="7C889B"/>
+                  <a:srgbClr val="A8B2C4"/>
                 </a:solidFill>
                 <a:latin typeface="Calibri" pitchFamily="34" charset="0"/>
                 <a:ea typeface="Calibri" pitchFamily="34" charset="-122"/>
@@ -4269,7 +4844,7 @@
             <a:r>
               <a:rPr lang="en-US" sz="1000" dirty="0">
                 <a:solidFill>
-                  <a:srgbClr val="7C889B"/>
+                  <a:srgbClr val="A8B2C4"/>
                 </a:solidFill>
                 <a:latin typeface="Calibri" pitchFamily="34" charset="0"/>
                 <a:ea typeface="Calibri" pitchFamily="34" charset="-122"/>
@@ -4419,8 +4994,8 @@
         </p:nvSpPr>
         <p:spPr>
           <a:xfrm>
-            <a:off x="566928" y="1005840"/>
-            <a:ext cx="11057839" cy="512064"/>
+            <a:off x="566928" y="950976"/>
+            <a:ext cx="11057839" cy="462280"/>
           </a:xfrm>
           <a:prstGeom prst="rect">
             <a:avLst/>
@@ -4434,12 +5009,12 @@
           <a:p>
             <a:pPr indent="0" marL="0">
               <a:lnSpc>
-                <a:spcPts val="1900"/>
+                <a:spcPts val="1750"/>
               </a:lnSpc>
               <a:buNone/>
             </a:pPr>
             <a:r>
-              <a:rPr lang="en-US" sz="1350" dirty="0">
+              <a:rPr lang="en-US" sz="1250" dirty="0">
                 <a:solidFill>
                   <a:srgbClr val="3B4660"/>
                 </a:solidFill>
@@ -4449,7 +5024,7 @@
               </a:rPr>
               <a:t>A CGTMSE-guaranteed composite facility: a small term loan against mobilisation, and a revolving working-capital limit against the operating cycle. No collateral, no charge on ADA's assets — which matters, because there are none to charge.</a:t>
             </a:r>
-            <a:endParaRPr lang="en-US" sz="1350" dirty="0"/>
+            <a:endParaRPr lang="en-US" sz="1250" dirty="0"/>
           </a:p>
         </p:txBody>
       </p:sp>
@@ -4460,8 +5035,8 @@
           <p:nvPr/>
         </p:nvGraphicFramePr>
         <p:xfrm>
-          <a:off x="566928" y="1627632"/>
-          <a:ext cx="11057839" cy="2377440"/>
+          <a:off x="566928" y="1541272"/>
+          <a:ext cx="11057839" cy="1874520"/>
         </p:xfrm>
         <a:graphic xmlns:a="http://schemas.openxmlformats.org/drawingml/2006/main">
           <a:graphicData uri="http://schemas.openxmlformats.org/drawingml/2006/chart">
@@ -4477,12 +5052,12 @@
         </p:nvSpPr>
         <p:spPr>
           <a:xfrm>
-            <a:off x="566928" y="4206240"/>
-            <a:ext cx="2599868" cy="1298448"/>
+            <a:off x="566928" y="3616960"/>
+            <a:ext cx="2599868" cy="1152144"/>
           </a:xfrm>
           <a:prstGeom prst="roundRect">
             <a:avLst>
-              <a:gd name="adj" fmla="val 4225"/>
+              <a:gd name="adj" fmla="val 4762"/>
             </a:avLst>
           </a:prstGeom>
           <a:solidFill>
@@ -4504,8 +5079,8 @@
         </p:nvSpPr>
         <p:spPr>
           <a:xfrm>
-            <a:off x="749808" y="4343400"/>
-            <a:ext cx="2234108" cy="219456"/>
+            <a:off x="749808" y="3735832"/>
+            <a:ext cx="2234108" cy="237744"/>
           </a:xfrm>
           <a:prstGeom prst="rect">
             <a:avLst/>
@@ -4514,14 +5089,14 @@
           <a:ln/>
         </p:spPr>
         <p:txBody>
-          <a:bodyPr wrap="square" lIns="0" tIns="0" rIns="0" bIns="0" rtlCol="0" anchor="ctr"/>
+          <a:bodyPr wrap="square" lIns="0" tIns="0" rIns="0" bIns="0" rtlCol="0" anchor="t"/>
           <a:lstStyle/>
           <a:p>
             <a:pPr indent="0" marL="0">
               <a:buNone/>
             </a:pPr>
             <a:r>
-              <a:rPr lang="en-US" sz="900" b="1" spc="120" kern="0" dirty="0">
+              <a:rPr lang="en-US" sz="850" b="1" spc="100" kern="0" dirty="0">
                 <a:solidFill>
                   <a:srgbClr val="6E7689"/>
                 </a:solidFill>
@@ -4531,7 +5106,7 @@
               </a:rPr>
               <a:t>TOTAL FACILITY</a:t>
             </a:r>
-            <a:endParaRPr lang="en-US" sz="900" dirty="0"/>
+            <a:endParaRPr lang="en-US" sz="850" dirty="0"/>
           </a:p>
         </p:txBody>
       </p:sp>
@@ -4543,7 +5118,7 @@
         </p:nvSpPr>
         <p:spPr>
           <a:xfrm>
-            <a:off x="749808" y="4572000"/>
+            <a:off x="749808" y="3982720"/>
             <a:ext cx="2234108" cy="457200"/>
           </a:xfrm>
           <a:prstGeom prst="rect">
@@ -4553,7 +5128,9 @@
           <a:ln/>
         </p:spPr>
         <p:txBody>
-          <a:bodyPr wrap="square" lIns="0" tIns="0" rIns="0" bIns="0" rtlCol="0" anchor="t"/>
+          <a:bodyPr wrap="square" lIns="0" tIns="0" rIns="0" bIns="0" rtlCol="0" anchor="t">
+            <a:normAutofit/>
+          </a:bodyPr>
           <a:lstStyle/>
           <a:p>
             <a:pPr indent="0" marL="0">
@@ -4582,8 +5159,8 @@
         </p:nvSpPr>
         <p:spPr>
           <a:xfrm>
-            <a:off x="749808" y="5047488"/>
-            <a:ext cx="2234108" cy="384048"/>
+            <a:off x="749808" y="4458208"/>
+            <a:ext cx="2234108" cy="237744"/>
           </a:xfrm>
           <a:prstGeom prst="rect">
             <a:avLst/>
@@ -4624,12 +5201,12 @@
         </p:nvSpPr>
         <p:spPr>
           <a:xfrm>
-            <a:off x="3386252" y="4206240"/>
-            <a:ext cx="2599868" cy="1298448"/>
+            <a:off x="3386252" y="3616960"/>
+            <a:ext cx="2599868" cy="1152144"/>
           </a:xfrm>
           <a:prstGeom prst="roundRect">
             <a:avLst>
-              <a:gd name="adj" fmla="val 4225"/>
+              <a:gd name="adj" fmla="val 4762"/>
             </a:avLst>
           </a:prstGeom>
           <a:solidFill>
@@ -4651,8 +5228,8 @@
         </p:nvSpPr>
         <p:spPr>
           <a:xfrm>
-            <a:off x="3569132" y="4343400"/>
-            <a:ext cx="2234108" cy="219456"/>
+            <a:off x="3569132" y="3735832"/>
+            <a:ext cx="2234108" cy="237744"/>
           </a:xfrm>
           <a:prstGeom prst="rect">
             <a:avLst/>
@@ -4661,14 +5238,14 @@
           <a:ln/>
         </p:spPr>
         <p:txBody>
-          <a:bodyPr wrap="square" lIns="0" tIns="0" rIns="0" bIns="0" rtlCol="0" anchor="ctr"/>
+          <a:bodyPr wrap="square" lIns="0" tIns="0" rIns="0" bIns="0" rtlCol="0" anchor="t"/>
           <a:lstStyle/>
           <a:p>
             <a:pPr indent="0" marL="0">
               <a:buNone/>
             </a:pPr>
             <a:r>
-              <a:rPr lang="en-US" sz="900" b="1" spc="120" kern="0" dirty="0">
+              <a:rPr lang="en-US" sz="850" b="1" spc="100" kern="0" dirty="0">
                 <a:solidFill>
                   <a:srgbClr val="6E7689"/>
                 </a:solidFill>
@@ -4678,7 +5255,7 @@
               </a:rPr>
               <a:t>ALL-IN RATE</a:t>
             </a:r>
-            <a:endParaRPr lang="en-US" sz="900" dirty="0"/>
+            <a:endParaRPr lang="en-US" sz="850" dirty="0"/>
           </a:p>
         </p:txBody>
       </p:sp>
@@ -4690,7 +5267,7 @@
         </p:nvSpPr>
         <p:spPr>
           <a:xfrm>
-            <a:off x="3569132" y="4572000"/>
+            <a:off x="3569132" y="3982720"/>
             <a:ext cx="2234108" cy="457200"/>
           </a:xfrm>
           <a:prstGeom prst="rect">
@@ -4700,7 +5277,9 @@
           <a:ln/>
         </p:spPr>
         <p:txBody>
-          <a:bodyPr wrap="square" lIns="0" tIns="0" rIns="0" bIns="0" rtlCol="0" anchor="t"/>
+          <a:bodyPr wrap="square" lIns="0" tIns="0" rIns="0" bIns="0" rtlCol="0" anchor="t">
+            <a:normAutofit/>
+          </a:bodyPr>
           <a:lstStyle/>
           <a:p>
             <a:pPr indent="0" marL="0">
@@ -4729,8 +5308,8 @@
         </p:nvSpPr>
         <p:spPr>
           <a:xfrm>
-            <a:off x="3569132" y="5047488"/>
-            <a:ext cx="2234108" cy="384048"/>
+            <a:off x="3569132" y="4458208"/>
+            <a:ext cx="2234108" cy="237744"/>
           </a:xfrm>
           <a:prstGeom prst="rect">
             <a:avLst/>
@@ -4771,12 +5350,12 @@
         </p:nvSpPr>
         <p:spPr>
           <a:xfrm>
-            <a:off x="6205576" y="4206240"/>
-            <a:ext cx="2599868" cy="1298448"/>
+            <a:off x="6205576" y="3616960"/>
+            <a:ext cx="2599868" cy="1152144"/>
           </a:xfrm>
           <a:prstGeom prst="roundRect">
             <a:avLst>
-              <a:gd name="adj" fmla="val 4225"/>
+              <a:gd name="adj" fmla="val 4762"/>
             </a:avLst>
           </a:prstGeom>
           <a:solidFill>
@@ -4798,8 +5377,8 @@
         </p:nvSpPr>
         <p:spPr>
           <a:xfrm>
-            <a:off x="6388456" y="4343400"/>
-            <a:ext cx="2234108" cy="219456"/>
+            <a:off x="6388456" y="3735832"/>
+            <a:ext cx="2234108" cy="237744"/>
           </a:xfrm>
           <a:prstGeom prst="rect">
             <a:avLst/>
@@ -4808,14 +5387,14 @@
           <a:ln/>
         </p:spPr>
         <p:txBody>
-          <a:bodyPr wrap="square" lIns="0" tIns="0" rIns="0" bIns="0" rtlCol="0" anchor="ctr"/>
+          <a:bodyPr wrap="square" lIns="0" tIns="0" rIns="0" bIns="0" rtlCol="0" anchor="t"/>
           <a:lstStyle/>
           <a:p>
             <a:pPr indent="0" marL="0">
               <a:buNone/>
             </a:pPr>
             <a:r>
-              <a:rPr lang="en-US" sz="900" b="1" spc="120" kern="0" dirty="0">
+              <a:rPr lang="en-US" sz="850" b="1" spc="100" kern="0" dirty="0">
                 <a:solidFill>
                   <a:srgbClr val="6E7689"/>
                 </a:solidFill>
@@ -4825,7 +5404,7 @@
               </a:rPr>
               <a:t>MINIMUM DSCR</a:t>
             </a:r>
-            <a:endParaRPr lang="en-US" sz="900" dirty="0"/>
+            <a:endParaRPr lang="en-US" sz="850" dirty="0"/>
           </a:p>
         </p:txBody>
       </p:sp>
@@ -4837,7 +5416,7 @@
         </p:nvSpPr>
         <p:spPr>
           <a:xfrm>
-            <a:off x="6388456" y="4572000"/>
+            <a:off x="6388456" y="3982720"/>
             <a:ext cx="2234108" cy="457200"/>
           </a:xfrm>
           <a:prstGeom prst="rect">
@@ -4847,7 +5426,9 @@
           <a:ln/>
         </p:spPr>
         <p:txBody>
-          <a:bodyPr wrap="square" lIns="0" tIns="0" rIns="0" bIns="0" rtlCol="0" anchor="t"/>
+          <a:bodyPr wrap="square" lIns="0" tIns="0" rIns="0" bIns="0" rtlCol="0" anchor="t">
+            <a:normAutofit/>
+          </a:bodyPr>
           <a:lstStyle/>
           <a:p>
             <a:pPr indent="0" marL="0">
@@ -4876,8 +5457,8 @@
         </p:nvSpPr>
         <p:spPr>
           <a:xfrm>
-            <a:off x="6388456" y="5047488"/>
-            <a:ext cx="2234108" cy="384048"/>
+            <a:off x="6388456" y="4458208"/>
+            <a:ext cx="2234108" cy="237744"/>
           </a:xfrm>
           <a:prstGeom prst="rect">
             <a:avLst/>
@@ -4918,12 +5499,12 @@
         </p:nvSpPr>
         <p:spPr>
           <a:xfrm>
-            <a:off x="9024899" y="4206240"/>
-            <a:ext cx="2599868" cy="1298448"/>
+            <a:off x="9024899" y="3616960"/>
+            <a:ext cx="2599868" cy="1152144"/>
           </a:xfrm>
           <a:prstGeom prst="roundRect">
             <a:avLst>
-              <a:gd name="adj" fmla="val 4225"/>
+              <a:gd name="adj" fmla="val 4762"/>
             </a:avLst>
           </a:prstGeom>
           <a:solidFill>
@@ -4945,8 +5526,8 @@
         </p:nvSpPr>
         <p:spPr>
           <a:xfrm>
-            <a:off x="9207779" y="4343400"/>
-            <a:ext cx="2234108" cy="219456"/>
+            <a:off x="9207779" y="3735832"/>
+            <a:ext cx="2234108" cy="237744"/>
           </a:xfrm>
           <a:prstGeom prst="rect">
             <a:avLst/>
@@ -4955,14 +5536,14 @@
           <a:ln/>
         </p:spPr>
         <p:txBody>
-          <a:bodyPr wrap="square" lIns="0" tIns="0" rIns="0" bIns="0" rtlCol="0" anchor="ctr"/>
+          <a:bodyPr wrap="square" lIns="0" tIns="0" rIns="0" bIns="0" rtlCol="0" anchor="t"/>
           <a:lstStyle/>
           <a:p>
             <a:pPr indent="0" marL="0">
               <a:buNone/>
             </a:pPr>
             <a:r>
-              <a:rPr lang="en-US" sz="900" b="1" spc="120" kern="0" dirty="0">
+              <a:rPr lang="en-US" sz="850" b="1" spc="100" kern="0" dirty="0">
                 <a:solidFill>
                   <a:srgbClr val="6E7689"/>
                 </a:solidFill>
@@ -4972,7 +5553,7 @@
               </a:rPr>
               <a:t>DEBT CAPACITY</a:t>
             </a:r>
-            <a:endParaRPr lang="en-US" sz="900" dirty="0"/>
+            <a:endParaRPr lang="en-US" sz="850" dirty="0"/>
           </a:p>
         </p:txBody>
       </p:sp>
@@ -4984,7 +5565,7 @@
         </p:nvSpPr>
         <p:spPr>
           <a:xfrm>
-            <a:off x="9207779" y="4572000"/>
+            <a:off x="9207779" y="3982720"/>
             <a:ext cx="2234108" cy="457200"/>
           </a:xfrm>
           <a:prstGeom prst="rect">
@@ -4994,7 +5575,9 @@
           <a:ln/>
         </p:spPr>
         <p:txBody>
-          <a:bodyPr wrap="square" lIns="0" tIns="0" rIns="0" bIns="0" rtlCol="0" anchor="t"/>
+          <a:bodyPr wrap="square" lIns="0" tIns="0" rIns="0" bIns="0" rtlCol="0" anchor="t">
+            <a:normAutofit/>
+          </a:bodyPr>
           <a:lstStyle/>
           <a:p>
             <a:pPr indent="0" marL="0">
@@ -5023,8 +5606,8 @@
         </p:nvSpPr>
         <p:spPr>
           <a:xfrm>
-            <a:off x="9207779" y="5047488"/>
-            <a:ext cx="2234108" cy="384048"/>
+            <a:off x="9207779" y="4458208"/>
+            <a:ext cx="2234108" cy="237744"/>
           </a:xfrm>
           <a:prstGeom prst="rect">
             <a:avLst/>
@@ -5065,12 +5648,12 @@
         </p:nvSpPr>
         <p:spPr>
           <a:xfrm>
-            <a:off x="566928" y="5760720"/>
-            <a:ext cx="11057839" cy="731520"/>
+            <a:off x="566928" y="5061712"/>
+            <a:ext cx="11057839" cy="1287363"/>
           </a:xfrm>
           <a:prstGeom prst="roundRect">
             <a:avLst>
-              <a:gd name="adj" fmla="val 6250"/>
+              <a:gd name="adj" fmla="val 3551"/>
             </a:avLst>
           </a:prstGeom>
           <a:solidFill>
@@ -5092,8 +5675,8 @@
         </p:nvSpPr>
         <p:spPr>
           <a:xfrm>
-            <a:off x="804672" y="5907024"/>
-            <a:ext cx="2743200" cy="201168"/>
+            <a:off x="804672" y="5171440"/>
+            <a:ext cx="2743200" cy="182880"/>
           </a:xfrm>
           <a:prstGeom prst="rect">
             <a:avLst/>
@@ -5131,8 +5714,8 @@
         </p:nvSpPr>
         <p:spPr>
           <a:xfrm>
-            <a:off x="804672" y="6108192"/>
-            <a:ext cx="10582351" cy="232220"/>
+            <a:off x="804672" y="5354320"/>
+            <a:ext cx="10582351" cy="288595"/>
           </a:xfrm>
           <a:prstGeom prst="rect">
             <a:avLst/>
@@ -5146,12 +5729,12 @@
           <a:p>
             <a:pPr indent="0" marL="0">
               <a:lnSpc>
-                <a:spcPts val="1725"/>
+                <a:spcPts val="2185"/>
               </a:lnSpc>
               <a:buNone/>
             </a:pPr>
             <a:r>
-              <a:rPr lang="en-US" sz="1500" b="1" dirty="0">
+              <a:rPr lang="en-US" sz="1900" b="1" dirty="0">
                 <a:solidFill>
                   <a:srgbClr val="0A1426"/>
                 </a:solidFill>
@@ -5161,7 +5744,7 @@
               </a:rPr>
               <a:t>The facility fits — but the moratorium is doing the work</a:t>
             </a:r>
-            <a:endParaRPr lang="en-US" sz="1500" dirty="0"/>
+            <a:endParaRPr lang="en-US" sz="1900" dirty="0"/>
           </a:p>
         </p:txBody>
       </p:sp>
@@ -5173,8 +5756,8 @@
         </p:nvSpPr>
         <p:spPr>
           <a:xfrm>
-            <a:off x="804672" y="6413563"/>
-            <a:ext cx="10582351" cy="182880"/>
+            <a:off x="804672" y="5697779"/>
+            <a:ext cx="10582351" cy="578145"/>
           </a:xfrm>
           <a:prstGeom prst="rect">
             <a:avLst/>
@@ -5188,12 +5771,12 @@
           <a:p>
             <a:pPr indent="0" marL="0">
               <a:lnSpc>
-                <a:spcPts val="1207"/>
+                <a:spcPts val="1704"/>
               </a:lnSpc>
               <a:buNone/>
             </a:pPr>
             <a:r>
-              <a:rPr lang="en-US" sz="850" dirty="0">
+              <a:rPr lang="en-US" sz="1200" dirty="0">
                 <a:solidFill>
                   <a:srgbClr val="3B4660"/>
                 </a:solidFill>
@@ -5203,7 +5786,7 @@
               </a:rPr>
               <a:t>The three-year principal moratorium pushes the first repayment into year 4, when EBITDA is ₹0.71 Cr rather than ₹0.16 Cr. A bank offering this with a one-year moratorium is offering a facility that defaults in year 2.</a:t>
             </a:r>
-            <a:endParaRPr lang="en-US" sz="850" dirty="0"/>
+            <a:endParaRPr lang="en-US" sz="1200" dirty="0"/>
           </a:p>
         </p:txBody>
       </p:sp>
@@ -5384,8 +5967,8 @@
         </p:nvSpPr>
         <p:spPr>
           <a:xfrm>
-            <a:off x="566928" y="1005840"/>
-            <a:ext cx="11057839" cy="512064"/>
+            <a:off x="566928" y="950976"/>
+            <a:ext cx="11057839" cy="231140"/>
           </a:xfrm>
           <a:prstGeom prst="rect">
             <a:avLst/>
@@ -5399,12 +5982,12 @@
           <a:p>
             <a:pPr indent="0" marL="0">
               <a:lnSpc>
-                <a:spcPts val="1900"/>
+                <a:spcPts val="1750"/>
               </a:lnSpc>
               <a:buNone/>
             </a:pPr>
             <a:r>
-              <a:rPr lang="en-US" sz="1350" dirty="0">
+              <a:rPr lang="en-US" sz="1250" dirty="0">
                 <a:solidFill>
                   <a:srgbClr val="3B4660"/>
                 </a:solidFill>
@@ -5414,7 +5997,7 @@
               </a:rPr>
               <a:t>Money in as debt, a coupon while the project ramps, then compulsory conversion into equity on a formula fixed the day it is issued.</a:t>
             </a:r>
-            <a:endParaRPr lang="en-US" sz="1350" dirty="0"/>
+            <a:endParaRPr lang="en-US" sz="1250" dirty="0"/>
           </a:p>
         </p:txBody>
       </p:sp>
@@ -5433,7 +6016,7 @@
           </p:nvPr>
         </p:nvGraphicFramePr>
         <p:xfrm>
-          <a:off x="566928" y="1627632"/>
+          <a:off x="566928" y="1310132"/>
           <a:ext cx="11057839" cy="914400"/>
         </p:xfrm>
         <a:graphic>
@@ -6422,12 +7005,12 @@
         </p:nvSpPr>
         <p:spPr>
           <a:xfrm>
-            <a:off x="566928" y="4352544"/>
-            <a:ext cx="11057839" cy="1411298"/>
+            <a:off x="566928" y="3961892"/>
+            <a:ext cx="11057839" cy="1962556"/>
           </a:xfrm>
           <a:prstGeom prst="roundRect">
             <a:avLst>
-              <a:gd name="adj" fmla="val 3240"/>
+              <a:gd name="adj" fmla="val 2330"/>
             </a:avLst>
           </a:prstGeom>
           <a:solidFill>
@@ -6449,8 +7032,8 @@
         </p:nvSpPr>
         <p:spPr>
           <a:xfrm>
-            <a:off x="804672" y="4498848"/>
-            <a:ext cx="2743200" cy="201168"/>
+            <a:off x="804672" y="4071620"/>
+            <a:ext cx="2743200" cy="182880"/>
           </a:xfrm>
           <a:prstGeom prst="rect">
             <a:avLst/>
@@ -6488,8 +7071,8 @@
         </p:nvSpPr>
         <p:spPr>
           <a:xfrm>
-            <a:off x="804672" y="4700016"/>
-            <a:ext cx="10582351" cy="294145"/>
+            <a:off x="804672" y="4254500"/>
+            <a:ext cx="10582351" cy="288595"/>
           </a:xfrm>
           <a:prstGeom prst="rect">
             <a:avLst/>
@@ -6530,8 +7113,8 @@
         </p:nvSpPr>
         <p:spPr>
           <a:xfrm>
-            <a:off x="804672" y="5067313"/>
-            <a:ext cx="10582351" cy="623377"/>
+            <a:off x="804672" y="4597959"/>
+            <a:ext cx="10582351" cy="1253338"/>
           </a:xfrm>
           <a:prstGeom prst="rect">
             <a:avLst/>
@@ -6558,149 +7141,28 @@
                 <a:ea typeface="Calibri" pitchFamily="34" charset="-122"/>
                 <a:cs typeface="Calibri" pitchFamily="34" charset="-120"/>
               </a:rPr>
-              <a:t>The CCD returns -4.0% — below the equity case, because the coupon years consume the cash the project needs while ramping. At project level a CCD combines the cash-flow burden of debt with the dilution of equity and the guarantee benefit of neither.</a:t>
+              <a:t>The CCD returns -4.0% — below the equity case, because the coupon years consume the cash the project needs while ramping. It combines the cash-flow burden of debt with the dilution of equity and the guarantee benefit of neither.</a:t>
             </a:r>
             <a:endParaRPr lang="en-US" sz="1200" dirty="0"/>
           </a:p>
-        </p:txBody>
-      </p:sp>
-      <p:sp>
-        <p:nvSpPr>
-          <p:cNvPr id="11" name="Shape 8"/>
-          <p:cNvSpPr/>
-          <p:nvPr/>
-        </p:nvSpPr>
-        <p:spPr>
-          <a:xfrm>
-            <a:off x="566928" y="5965010"/>
-            <a:ext cx="11057839" cy="731520"/>
-          </a:xfrm>
-          <a:prstGeom prst="roundRect">
-            <a:avLst>
-              <a:gd name="adj" fmla="val 6250"/>
-            </a:avLst>
-          </a:prstGeom>
-          <a:solidFill>
-            <a:srgbClr val="F1F5FE"/>
-          </a:solidFill>
-          <a:ln w="15875">
-            <a:solidFill>
-              <a:srgbClr val="2B66EA"/>
-            </a:solidFill>
-            <a:prstDash val="solid"/>
-          </a:ln>
-        </p:spPr>
-      </p:sp>
-      <p:sp>
-        <p:nvSpPr>
-          <p:cNvPr id="12" name="Text 9"/>
-          <p:cNvSpPr/>
-          <p:nvPr/>
-        </p:nvSpPr>
-        <p:spPr>
-          <a:xfrm>
-            <a:off x="804672" y="6111314"/>
-            <a:ext cx="2743200" cy="201168"/>
-          </a:xfrm>
-          <a:prstGeom prst="rect">
-            <a:avLst/>
-          </a:prstGeom>
-          <a:noFill/>
-          <a:ln/>
-        </p:spPr>
-        <p:txBody>
-          <a:bodyPr wrap="square" lIns="0" tIns="0" rIns="0" bIns="0" rtlCol="0" anchor="ctr"/>
-          <a:lstStyle/>
-          <a:p>
-            <a:pPr indent="0" marL="0">
-              <a:buNone/>
-            </a:pPr>
-            <a:r>
-              <a:rPr lang="en-US" sz="850" b="1" spc="160" kern="0" dirty="0">
-                <a:solidFill>
-                  <a:srgbClr val="2A51A3"/>
-                </a:solidFill>
-                <a:latin typeface="Calibri" pitchFamily="34" charset="0"/>
-                <a:ea typeface="Calibri" pitchFamily="34" charset="-122"/>
-                <a:cs typeface="Calibri" pitchFamily="34" charset="-120"/>
-              </a:rPr>
-              <a:t>NOTE</a:t>
-            </a:r>
-            <a:endParaRPr lang="en-US" sz="850" dirty="0"/>
-          </a:p>
-        </p:txBody>
-      </p:sp>
-      <p:sp>
-        <p:nvSpPr>
-          <p:cNvPr id="13" name="Text 10"/>
-          <p:cNvSpPr/>
-          <p:nvPr/>
-        </p:nvSpPr>
-        <p:spPr>
-          <a:xfrm>
-            <a:off x="804672" y="6312482"/>
-            <a:ext cx="10582351" cy="232220"/>
-          </a:xfrm>
-          <a:prstGeom prst="rect">
-            <a:avLst/>
-          </a:prstGeom>
-          <a:noFill/>
-          <a:ln/>
-        </p:spPr>
-        <p:txBody>
-          <a:bodyPr wrap="square" lIns="0" tIns="0" rIns="0" bIns="0" rtlCol="0" anchor="t"/>
-          <a:lstStyle/>
           <a:p>
             <a:pPr indent="0" marL="0">
               <a:lnSpc>
-                <a:spcPts val="1725"/>
+                <a:spcPts val="1704"/>
+              </a:lnSpc>
+              <a:buNone/>
+            </a:pPr>
+            <a:endParaRPr lang="en-US" sz="1200" dirty="0"/>
+          </a:p>
+          <a:p>
+            <a:pPr indent="0" marL="0">
+              <a:lnSpc>
+                <a:spcPts val="1704"/>
               </a:lnSpc>
               <a:buNone/>
             </a:pPr>
             <a:r>
-              <a:rPr lang="en-US" sz="1500" b="1" dirty="0">
-                <a:solidFill>
-                  <a:srgbClr val="0A1426"/>
-                </a:solidFill>
-                <a:latin typeface="Calibri" pitchFamily="34" charset="0"/>
-                <a:ea typeface="Calibri" pitchFamily="34" charset="-122"/>
-                <a:cs typeface="Calibri" pitchFamily="34" charset="-120"/>
-              </a:rPr>
-              <a:t>If a CCD is used anywhere in this structure</a:t>
-            </a:r>
-            <a:endParaRPr lang="en-US" sz="1500" dirty="0"/>
-          </a:p>
-        </p:txBody>
-      </p:sp>
-      <p:sp>
-        <p:nvSpPr>
-          <p:cNvPr id="14" name="Text 11"/>
-          <p:cNvSpPr/>
-          <p:nvPr/>
-        </p:nvSpPr>
-        <p:spPr>
-          <a:xfrm>
-            <a:off x="804672" y="6617853"/>
-            <a:ext cx="10582351" cy="182880"/>
-          </a:xfrm>
-          <a:prstGeom prst="rect">
-            <a:avLst/>
-          </a:prstGeom>
-          <a:noFill/>
-          <a:ln/>
-        </p:spPr>
-        <p:txBody>
-          <a:bodyPr wrap="square" lIns="0" tIns="0" rIns="0" bIns="0" rtlCol="0" anchor="t"/>
-          <a:lstStyle/>
-          <a:p>
-            <a:pPr indent="0" marL="0">
-              <a:lnSpc>
-                <a:spcPts val="1207"/>
-              </a:lnSpc>
-              <a:buNone/>
-            </a:pPr>
-            <a:r>
-              <a:rPr lang="en-US" sz="850" dirty="0">
+              <a:rPr lang="en-US" sz="1200" dirty="0">
                 <a:solidFill>
                   <a:srgbClr val="3B4660"/>
                 </a:solidFill>
@@ -6708,15 +7170,15 @@
                 <a:ea typeface="Calibri" pitchFamily="34" charset="-122"/>
                 <a:cs typeface="Calibri" pitchFamily="34" charset="-120"/>
               </a:rPr>
-              <a:t>The conversion formula must be fixed on the date of issue — a price set later fails the FEMA pricing test if any money is foreign and turns the instrument into external commercial borrowing. A valuation report under section 62(1)(c) is needed before conversion, and the issue is a private placement under section 42. Until it converts, a CCD is borrowing on the balance sheet.</a:t>
+              <a:t>If a CCD is used anywhere: the conversion formula must be fixed on the date of issue, or it fails the FEMA pricing test and becomes external commercial borrowing. Until it converts it is borrowing on the balance sheet.</a:t>
             </a:r>
-            <a:endParaRPr lang="en-US" sz="850" dirty="0"/>
+            <a:endParaRPr lang="en-US" sz="1200" dirty="0"/>
           </a:p>
         </p:txBody>
       </p:sp>
       <p:sp>
         <p:nvSpPr>
-          <p:cNvPr id="15" name="Text 12"/>
+          <p:cNvPr id="11" name="Text 8"/>
           <p:cNvSpPr/>
           <p:nvPr/>
         </p:nvSpPr>
@@ -8617,11 +9079,11 @@
         <p:spPr>
           <a:xfrm>
             <a:off x="566928" y="4224528"/>
-            <a:ext cx="11057839" cy="1640690"/>
+            <a:ext cx="11057839" cy="1572768"/>
           </a:xfrm>
           <a:prstGeom prst="roundRect">
             <a:avLst>
-              <a:gd name="adj" fmla="val 2787"/>
+              <a:gd name="adj" fmla="val 2907"/>
             </a:avLst>
           </a:prstGeom>
           <a:solidFill>
@@ -8643,8 +9105,8 @@
         </p:nvSpPr>
         <p:spPr>
           <a:xfrm>
-            <a:off x="804672" y="4370832"/>
-            <a:ext cx="2743200" cy="201168"/>
+            <a:off x="804672" y="4334256"/>
+            <a:ext cx="2743200" cy="182880"/>
           </a:xfrm>
           <a:prstGeom prst="rect">
             <a:avLst/>
@@ -8682,8 +9144,8 @@
         </p:nvSpPr>
         <p:spPr>
           <a:xfrm>
-            <a:off x="804672" y="4572000"/>
-            <a:ext cx="10582351" cy="294145"/>
+            <a:off x="804672" y="4517136"/>
+            <a:ext cx="10582351" cy="288595"/>
           </a:xfrm>
           <a:prstGeom prst="rect">
             <a:avLst/>
@@ -8724,8 +9186,8 @@
         </p:nvSpPr>
         <p:spPr>
           <a:xfrm>
-            <a:off x="804672" y="4939297"/>
-            <a:ext cx="10582351" cy="852769"/>
+            <a:off x="804672" y="4860595"/>
+            <a:ext cx="10582351" cy="863549"/>
           </a:xfrm>
           <a:prstGeom prst="rect">
             <a:avLst/>
@@ -9710,8 +10172,8 @@
         </p:nvSpPr>
         <p:spPr>
           <a:xfrm>
-            <a:off x="566928" y="1005840"/>
-            <a:ext cx="11057839" cy="512064"/>
+            <a:off x="566928" y="950976"/>
+            <a:ext cx="11057839" cy="462280"/>
           </a:xfrm>
           <a:prstGeom prst="rect">
             <a:avLst/>
@@ -9725,12 +10187,12 @@
           <a:p>
             <a:pPr indent="0" marL="0">
               <a:lnSpc>
-                <a:spcPts val="1900"/>
+                <a:spcPts val="1750"/>
               </a:lnSpc>
               <a:buNone/>
             </a:pPr>
             <a:r>
-              <a:rPr lang="en-US" sz="1350" dirty="0">
+              <a:rPr lang="en-US" sz="1250" dirty="0">
                 <a:solidFill>
                   <a:srgbClr val="3B4660"/>
                 </a:solidFill>
@@ -9740,7 +10202,7 @@
               </a:rPr>
               <a:t>ADA has built a ₹4.0–4.2 crore themed park and now wants an operator. Everything physical already exists — the musical fountains, the 40-minute Krishna Leela laser show, eight kiosks, the Tulsi forest. The winning bidder pays a monthly licence fee and keeps what it collects at the gate.</a:t>
             </a:r>
-            <a:endParaRPr lang="en-US" sz="1350" dirty="0"/>
+            <a:endParaRPr lang="en-US" sz="1250" dirty="0"/>
           </a:p>
         </p:txBody>
       </p:sp>
@@ -9759,7 +10221,7 @@
           </p:nvPr>
         </p:nvGraphicFramePr>
         <p:xfrm>
-          <a:off x="566928" y="1627632"/>
+          <a:off x="566928" y="1541272"/>
           <a:ext cx="11057839" cy="914400"/>
         </p:xfrm>
         <a:graphic>
@@ -11162,12 +11624,12 @@
         </p:nvSpPr>
         <p:spPr>
           <a:xfrm>
-            <a:off x="566928" y="5084064"/>
-            <a:ext cx="11057839" cy="1207008"/>
+            <a:off x="566928" y="4997704"/>
+            <a:ext cx="11057839" cy="1287363"/>
           </a:xfrm>
           <a:prstGeom prst="roundRect">
             <a:avLst>
-              <a:gd name="adj" fmla="val 3788"/>
+              <a:gd name="adj" fmla="val 3551"/>
             </a:avLst>
           </a:prstGeom>
           <a:solidFill>
@@ -11189,8 +11651,8 @@
         </p:nvSpPr>
         <p:spPr>
           <a:xfrm>
-            <a:off x="804672" y="5230368"/>
-            <a:ext cx="2743200" cy="201168"/>
+            <a:off x="804672" y="5107432"/>
+            <a:ext cx="2743200" cy="182880"/>
           </a:xfrm>
           <a:prstGeom prst="rect">
             <a:avLst/>
@@ -11228,8 +11690,8 @@
         </p:nvSpPr>
         <p:spPr>
           <a:xfrm>
-            <a:off x="804672" y="5431536"/>
-            <a:ext cx="10582351" cy="232220"/>
+            <a:off x="804672" y="5290312"/>
+            <a:ext cx="10582351" cy="288595"/>
           </a:xfrm>
           <a:prstGeom prst="rect">
             <a:avLst/>
@@ -11243,12 +11705,12 @@
           <a:p>
             <a:pPr indent="0" marL="0">
               <a:lnSpc>
-                <a:spcPts val="1725"/>
+                <a:spcPts val="2185"/>
               </a:lnSpc>
               <a:buNone/>
             </a:pPr>
             <a:r>
-              <a:rPr lang="en-US" sz="1500" b="1" dirty="0">
+              <a:rPr lang="en-US" sz="1900" b="1" dirty="0">
                 <a:solidFill>
                   <a:srgbClr val="0A1426"/>
                 </a:solidFill>
@@ -11258,7 +11720,7 @@
               </a:rPr>
               <a:t>Why E-O-D wins this on the technical bid</a:t>
             </a:r>
-            <a:endParaRPr lang="en-US" sz="1500" dirty="0"/>
+            <a:endParaRPr lang="en-US" sz="1900" dirty="0"/>
           </a:p>
         </p:txBody>
       </p:sp>
@@ -11270,8 +11732,8 @@
         </p:nvSpPr>
         <p:spPr>
           <a:xfrm>
-            <a:off x="804672" y="5736907"/>
-            <a:ext cx="10582351" cy="481013"/>
+            <a:off x="804672" y="5633771"/>
+            <a:ext cx="10582351" cy="578145"/>
           </a:xfrm>
           <a:prstGeom prst="rect">
             <a:avLst/>
@@ -11285,12 +11747,12 @@
           <a:p>
             <a:pPr indent="0" marL="0">
               <a:lnSpc>
-                <a:spcPts val="1207"/>
+                <a:spcPts val="1704"/>
               </a:lnSpc>
               <a:buNone/>
             </a:pPr>
             <a:r>
-              <a:rPr lang="en-US" sz="850" dirty="0">
+              <a:rPr lang="en-US" sz="1200" dirty="0">
                 <a:solidFill>
                   <a:srgbClr val="3B4660"/>
                 </a:solidFill>
@@ -11300,7 +11762,7 @@
               </a:rPr>
               <a:t>ADA asks for ₹1 crore average turnover and two similar projects above ₹50 lakh. VAPPL turned over ₹16.29 Cr in FY25-26 and runs four parks — two of them on concessions granted by ADA itself. The competitive question is the auction, not the qualification.</a:t>
             </a:r>
-            <a:endParaRPr lang="en-US" sz="850" dirty="0"/>
+            <a:endParaRPr lang="en-US" sz="1200" dirty="0"/>
           </a:p>
         </p:txBody>
       </p:sp>
@@ -11481,8 +11943,8 @@
         </p:nvSpPr>
         <p:spPr>
           <a:xfrm>
-            <a:off x="566928" y="1005840"/>
-            <a:ext cx="11057839" cy="512064"/>
+            <a:off x="566928" y="950976"/>
+            <a:ext cx="11057839" cy="462280"/>
           </a:xfrm>
           <a:prstGeom prst="rect">
             <a:avLst/>
@@ -11496,12 +11958,12 @@
           <a:p>
             <a:pPr indent="0" marL="0">
               <a:lnSpc>
-                <a:spcPts val="1900"/>
+                <a:spcPts val="1750"/>
               </a:lnSpc>
               <a:buNone/>
             </a:pPr>
             <a:r>
-              <a:rPr lang="en-US" sz="1350" dirty="0">
+              <a:rPr lang="en-US" sz="1250" dirty="0">
                 <a:solidFill>
                   <a:srgbClr val="3B4660"/>
                 </a:solidFill>
@@ -11511,7 +11973,7 @@
               </a:rPr>
               <a:t>The brief was one year of opex as loan or investment. That is the right facility size — but being precise about what the money does changes which instrument fits.</a:t>
             </a:r>
-            <a:endParaRPr lang="en-US" sz="1350" dirty="0"/>
+            <a:endParaRPr lang="en-US" sz="1250" dirty="0"/>
           </a:p>
         </p:txBody>
       </p:sp>
@@ -11523,12 +11985,12 @@
         </p:nvSpPr>
         <p:spPr>
           <a:xfrm>
-            <a:off x="566928" y="1627632"/>
-            <a:ext cx="3539642" cy="1225296"/>
+            <a:off x="566928" y="1541272"/>
+            <a:ext cx="3539642" cy="1152144"/>
           </a:xfrm>
           <a:prstGeom prst="roundRect">
             <a:avLst>
-              <a:gd name="adj" fmla="val 4478"/>
+              <a:gd name="adj" fmla="val 4762"/>
             </a:avLst>
           </a:prstGeom>
           <a:solidFill>
@@ -11550,8 +12012,8 @@
         </p:nvSpPr>
         <p:spPr>
           <a:xfrm>
-            <a:off x="749808" y="1764792"/>
-            <a:ext cx="3173882" cy="219456"/>
+            <a:off x="749808" y="1660144"/>
+            <a:ext cx="3173882" cy="237744"/>
           </a:xfrm>
           <a:prstGeom prst="rect">
             <a:avLst/>
@@ -11560,14 +12022,14 @@
           <a:ln/>
         </p:spPr>
         <p:txBody>
-          <a:bodyPr wrap="square" lIns="0" tIns="0" rIns="0" bIns="0" rtlCol="0" anchor="ctr"/>
+          <a:bodyPr wrap="square" lIns="0" tIns="0" rIns="0" bIns="0" rtlCol="0" anchor="t"/>
           <a:lstStyle/>
           <a:p>
             <a:pPr indent="0" marL="0">
               <a:buNone/>
             </a:pPr>
             <a:r>
-              <a:rPr lang="en-US" sz="900" b="1" spc="120" kern="0" dirty="0">
+              <a:rPr lang="en-US" sz="850" b="1" spc="100" kern="0" dirty="0">
                 <a:solidFill>
                   <a:srgbClr val="6E7689"/>
                 </a:solidFill>
@@ -11577,7 +12039,7 @@
               </a:rPr>
               <a:t>FACILITY AS BRIEFED</a:t>
             </a:r>
-            <a:endParaRPr lang="en-US" sz="900" dirty="0"/>
+            <a:endParaRPr lang="en-US" sz="850" dirty="0"/>
           </a:p>
         </p:txBody>
       </p:sp>
@@ -11589,7 +12051,7 @@
         </p:nvSpPr>
         <p:spPr>
           <a:xfrm>
-            <a:off x="749808" y="1993392"/>
+            <a:off x="749808" y="1907032"/>
             <a:ext cx="3173882" cy="457200"/>
           </a:xfrm>
           <a:prstGeom prst="rect">
@@ -11599,7 +12061,9 @@
           <a:ln/>
         </p:spPr>
         <p:txBody>
-          <a:bodyPr wrap="square" lIns="0" tIns="0" rIns="0" bIns="0" rtlCol="0" anchor="t"/>
+          <a:bodyPr wrap="square" lIns="0" tIns="0" rIns="0" bIns="0" rtlCol="0" anchor="t">
+            <a:normAutofit/>
+          </a:bodyPr>
           <a:lstStyle/>
           <a:p>
             <a:pPr indent="0" marL="0">
@@ -11628,8 +12092,8 @@
         </p:nvSpPr>
         <p:spPr>
           <a:xfrm>
-            <a:off x="749808" y="2468880"/>
-            <a:ext cx="3173882" cy="310896"/>
+            <a:off x="749808" y="2382520"/>
+            <a:ext cx="3173882" cy="237744"/>
           </a:xfrm>
           <a:prstGeom prst="rect">
             <a:avLst/>
@@ -11670,12 +12134,12 @@
         </p:nvSpPr>
         <p:spPr>
           <a:xfrm>
-            <a:off x="4326026" y="1627632"/>
-            <a:ext cx="3539642" cy="1225296"/>
+            <a:off x="4326026" y="1541272"/>
+            <a:ext cx="3539642" cy="1152144"/>
           </a:xfrm>
           <a:prstGeom prst="roundRect">
             <a:avLst>
-              <a:gd name="adj" fmla="val 4478"/>
+              <a:gd name="adj" fmla="val 4762"/>
             </a:avLst>
           </a:prstGeom>
           <a:solidFill>
@@ -11697,8 +12161,8 @@
         </p:nvSpPr>
         <p:spPr>
           <a:xfrm>
-            <a:off x="4508906" y="1764792"/>
-            <a:ext cx="3173882" cy="219456"/>
+            <a:off x="4508906" y="1660144"/>
+            <a:ext cx="3173882" cy="237744"/>
           </a:xfrm>
           <a:prstGeom prst="rect">
             <a:avLst/>
@@ -11707,14 +12171,14 @@
           <a:ln/>
         </p:spPr>
         <p:txBody>
-          <a:bodyPr wrap="square" lIns="0" tIns="0" rIns="0" bIns="0" rtlCol="0" anchor="ctr"/>
+          <a:bodyPr wrap="square" lIns="0" tIns="0" rIns="0" bIns="0" rtlCol="0" anchor="t"/>
           <a:lstStyle/>
           <a:p>
             <a:pPr indent="0" marL="0">
               <a:buNone/>
             </a:pPr>
             <a:r>
-              <a:rPr lang="en-US" sz="900" b="1" spc="120" kern="0" dirty="0">
+              <a:rPr lang="en-US" sz="850" b="1" spc="100" kern="0" dirty="0">
                 <a:solidFill>
                   <a:srgbClr val="6E7689"/>
                 </a:solidFill>
@@ -11724,7 +12188,7 @@
               </a:rPr>
               <a:t>TRUE CAPITAL AT RISK</a:t>
             </a:r>
-            <a:endParaRPr lang="en-US" sz="900" dirty="0"/>
+            <a:endParaRPr lang="en-US" sz="850" dirty="0"/>
           </a:p>
         </p:txBody>
       </p:sp>
@@ -11736,7 +12200,7 @@
         </p:nvSpPr>
         <p:spPr>
           <a:xfrm>
-            <a:off x="4508906" y="1993392"/>
+            <a:off x="4508906" y="1907032"/>
             <a:ext cx="3173882" cy="457200"/>
           </a:xfrm>
           <a:prstGeom prst="rect">
@@ -11746,7 +12210,9 @@
           <a:ln/>
         </p:spPr>
         <p:txBody>
-          <a:bodyPr wrap="square" lIns="0" tIns="0" rIns="0" bIns="0" rtlCol="0" anchor="t"/>
+          <a:bodyPr wrap="square" lIns="0" tIns="0" rIns="0" bIns="0" rtlCol="0" anchor="t">
+            <a:normAutofit/>
+          </a:bodyPr>
           <a:lstStyle/>
           <a:p>
             <a:pPr indent="0" marL="0">
@@ -11775,8 +12241,8 @@
         </p:nvSpPr>
         <p:spPr>
           <a:xfrm>
-            <a:off x="4508906" y="2468880"/>
-            <a:ext cx="3173882" cy="310896"/>
+            <a:off x="4508906" y="2382520"/>
+            <a:ext cx="3173882" cy="237744"/>
           </a:xfrm>
           <a:prstGeom prst="rect">
             <a:avLst/>
@@ -11817,12 +12283,12 @@
         </p:nvSpPr>
         <p:spPr>
           <a:xfrm>
-            <a:off x="8085125" y="1627632"/>
-            <a:ext cx="3539642" cy="1225296"/>
+            <a:off x="8085125" y="1541272"/>
+            <a:ext cx="3539642" cy="1152144"/>
           </a:xfrm>
           <a:prstGeom prst="roundRect">
             <a:avLst>
-              <a:gd name="adj" fmla="val 4478"/>
+              <a:gd name="adj" fmla="val 4762"/>
             </a:avLst>
           </a:prstGeom>
           <a:solidFill>
@@ -11844,8 +12310,8 @@
         </p:nvSpPr>
         <p:spPr>
           <a:xfrm>
-            <a:off x="8268005" y="1764792"/>
-            <a:ext cx="3173882" cy="219456"/>
+            <a:off x="8268005" y="1660144"/>
+            <a:ext cx="3173882" cy="237744"/>
           </a:xfrm>
           <a:prstGeom prst="rect">
             <a:avLst/>
@@ -11854,14 +12320,14 @@
           <a:ln/>
         </p:spPr>
         <p:txBody>
-          <a:bodyPr wrap="square" lIns="0" tIns="0" rIns="0" bIns="0" rtlCol="0" anchor="ctr"/>
+          <a:bodyPr wrap="square" lIns="0" tIns="0" rIns="0" bIns="0" rtlCol="0" anchor="t"/>
           <a:lstStyle/>
           <a:p>
             <a:pPr indent="0" marL="0">
               <a:buNone/>
             </a:pPr>
             <a:r>
-              <a:rPr lang="en-US" sz="900" b="1" spc="120" kern="0" dirty="0">
+              <a:rPr lang="en-US" sz="850" b="1" spc="100" kern="0" dirty="0">
                 <a:solidFill>
                   <a:srgbClr val="6E7689"/>
                 </a:solidFill>
@@ -11871,7 +12337,7 @@
               </a:rPr>
               <a:t>REVOLVING LIQUIDITY</a:t>
             </a:r>
-            <a:endParaRPr lang="en-US" sz="900" dirty="0"/>
+            <a:endParaRPr lang="en-US" sz="850" dirty="0"/>
           </a:p>
         </p:txBody>
       </p:sp>
@@ -11883,7 +12349,7 @@
         </p:nvSpPr>
         <p:spPr>
           <a:xfrm>
-            <a:off x="8268005" y="1993392"/>
+            <a:off x="8268005" y="1907032"/>
             <a:ext cx="3173882" cy="457200"/>
           </a:xfrm>
           <a:prstGeom prst="rect">
@@ -11893,7 +12359,9 @@
           <a:ln/>
         </p:spPr>
         <p:txBody>
-          <a:bodyPr wrap="square" lIns="0" tIns="0" rIns="0" bIns="0" rtlCol="0" anchor="t"/>
+          <a:bodyPr wrap="square" lIns="0" tIns="0" rIns="0" bIns="0" rtlCol="0" anchor="t">
+            <a:normAutofit/>
+          </a:bodyPr>
           <a:lstStyle/>
           <a:p>
             <a:pPr indent="0" marL="0">
@@ -11922,8 +12390,8 @@
         </p:nvSpPr>
         <p:spPr>
           <a:xfrm>
-            <a:off x="8268005" y="2468880"/>
-            <a:ext cx="3173882" cy="310896"/>
+            <a:off x="8268005" y="2382520"/>
+            <a:ext cx="3173882" cy="237744"/>
           </a:xfrm>
           <a:prstGeom prst="rect">
             <a:avLst/>
@@ -11971,7 +12439,7 @@
           </p:nvPr>
         </p:nvGraphicFramePr>
         <p:xfrm>
-          <a:off x="566928" y="3090672"/>
+          <a:off x="566928" y="2931160"/>
           <a:ext cx="11057839" cy="914400"/>
         </p:xfrm>
         <a:graphic>
@@ -12276,7 +12744,7 @@
                           <a:ea typeface="Calibri" pitchFamily="34" charset="-122"/>
                           <a:cs typeface="Calibri" pitchFamily="34" charset="-120"/>
                         </a:rPr>
-                        <a:t>Security deposit — three months of licence fee, refundable at expiry</a:t>
+                        <a:t>Security deposit (3 months, refundable), advance licence fee (6 months), EMD and tender fee</a:t>
                       </a:r>
                       <a:endParaRPr lang="en-US" sz="1100" dirty="0">
                         <a:latin typeface="Calibri" charset="0"/>
@@ -12344,283 +12812,7 @@
                           <a:ea typeface="Calibri" pitchFamily="34" charset="-122"/>
                           <a:cs typeface="Calibri" pitchFamily="34" charset="-120"/>
                         </a:rPr>
-                        <a:t>₹9.0 L</a:t>
-                      </a:r>
-                      <a:endParaRPr lang="en-US" sz="1100" dirty="0">
-                        <a:latin typeface="Calibri" charset="0"/>
-                        <a:ea typeface="Calibri" charset="0"/>
-                        <a:cs typeface="Calibri" charset="0"/>
-                      </a:endParaRPr>
-                    </a:p>
-                  </a:txBody>
-                  <a:tcPr marL="0" marR="76200" marT="63500" marB="63500" anchor="ctr">
-                    <a:lnL w="0" cap="flat" cmpd="sng" algn="ctr">
-                      <a:solidFill>
-                        <a:srgbClr val="666666"/>
-                      </a:solidFill>
-                      <a:prstDash val="solid"/>
-                      <a:round/>
-                      <a:headEnd type="none" w="med" len="med"/>
-                      <a:tailEnd type="none" w="med" len="med"/>
-                    </a:lnL>
-                    <a:lnR w="0" cap="flat" cmpd="sng" algn="ctr">
-                      <a:solidFill>
-                        <a:srgbClr val="666666"/>
-                      </a:solidFill>
-                      <a:prstDash val="solid"/>
-                      <a:round/>
-                      <a:headEnd type="none" w="med" len="med"/>
-                      <a:tailEnd type="none" w="med" len="med"/>
-                    </a:lnR>
-                    <a:lnT w="0" cap="flat" cmpd="sng" algn="ctr">
-                      <a:solidFill>
-                        <a:srgbClr val="666666"/>
-                      </a:solidFill>
-                      <a:prstDash val="solid"/>
-                      <a:round/>
-                      <a:headEnd type="none" w="med" len="med"/>
-                      <a:tailEnd type="none" w="med" len="med"/>
-                    </a:lnT>
-                    <a:lnB w="7620" cap="flat" cmpd="sng" algn="ctr">
-                      <a:solidFill>
-                        <a:srgbClr val="E2E4EA"/>
-                      </a:solidFill>
-                      <a:prstDash val="solid"/>
-                      <a:round/>
-                      <a:headEnd type="none" w="med" len="med"/>
-                      <a:tailEnd type="none" w="med" len="med"/>
-                    </a:lnB>
-                    <a:solidFill>
-                      <a:srgbClr val="FFFFFF"/>
-                    </a:solidFill>
-                  </a:tcPr>
-                </a:tc>
-              </a:tr>
-              <a:tr h="310896">
-                <a:tc>
-                  <a:txBody>
-                    <a:bodyPr/>
-                    <a:lstStyle/>
-                    <a:p>
-                      <a:pPr algn="l" indent="0" marL="0">
-                        <a:buNone/>
-                      </a:pPr>
-                      <a:r>
-                        <a:rPr lang="en-US" sz="1100" dirty="0">
-                          <a:solidFill>
-                            <a:srgbClr val="3B4660"/>
-                          </a:solidFill>
-                          <a:latin typeface="Calibri" pitchFamily="34" charset="0"/>
-                          <a:ea typeface="Calibri" pitchFamily="34" charset="-122"/>
-                          <a:cs typeface="Calibri" pitchFamily="34" charset="-120"/>
-                        </a:rPr>
-                        <a:t>Advance licence fee — first six months</a:t>
-                      </a:r>
-                      <a:endParaRPr lang="en-US" sz="1100" dirty="0">
-                        <a:latin typeface="Calibri" charset="0"/>
-                        <a:ea typeface="Calibri" charset="0"/>
-                        <a:cs typeface="Calibri" charset="0"/>
-                      </a:endParaRPr>
-                    </a:p>
-                  </a:txBody>
-                  <a:tcPr marL="0" marR="76200" marT="63500" marB="63500" anchor="ctr">
-                    <a:lnL w="0" cap="flat" cmpd="sng" algn="ctr">
-                      <a:solidFill>
-                        <a:srgbClr val="666666"/>
-                      </a:solidFill>
-                      <a:prstDash val="solid"/>
-                      <a:round/>
-                      <a:headEnd type="none" w="med" len="med"/>
-                      <a:tailEnd type="none" w="med" len="med"/>
-                    </a:lnL>
-                    <a:lnR w="0" cap="flat" cmpd="sng" algn="ctr">
-                      <a:solidFill>
-                        <a:srgbClr val="666666"/>
-                      </a:solidFill>
-                      <a:prstDash val="solid"/>
-                      <a:round/>
-                      <a:headEnd type="none" w="med" len="med"/>
-                      <a:tailEnd type="none" w="med" len="med"/>
-                    </a:lnR>
-                    <a:lnT w="0" cap="flat" cmpd="sng" algn="ctr">
-                      <a:solidFill>
-                        <a:srgbClr val="666666"/>
-                      </a:solidFill>
-                      <a:prstDash val="solid"/>
-                      <a:round/>
-                      <a:headEnd type="none" w="med" len="med"/>
-                      <a:tailEnd type="none" w="med" len="med"/>
-                    </a:lnT>
-                    <a:lnB w="7620" cap="flat" cmpd="sng" algn="ctr">
-                      <a:solidFill>
-                        <a:srgbClr val="E2E4EA"/>
-                      </a:solidFill>
-                      <a:prstDash val="solid"/>
-                      <a:round/>
-                      <a:headEnd type="none" w="med" len="med"/>
-                      <a:tailEnd type="none" w="med" len="med"/>
-                    </a:lnB>
-                    <a:solidFill>
-                      <a:srgbClr val="FFFFFF"/>
-                    </a:solidFill>
-                  </a:tcPr>
-                </a:tc>
-                <a:tc>
-                  <a:txBody>
-                    <a:bodyPr/>
-                    <a:lstStyle/>
-                    <a:p>
-                      <a:pPr algn="r" indent="0" marL="0">
-                        <a:buNone/>
-                      </a:pPr>
-                      <a:r>
-                        <a:rPr lang="en-US" sz="1100" dirty="0">
-                          <a:solidFill>
-                            <a:srgbClr val="3B4660"/>
-                          </a:solidFill>
-                          <a:latin typeface="Calibri" pitchFamily="34" charset="0"/>
-                          <a:ea typeface="Calibri" pitchFamily="34" charset="-122"/>
-                          <a:cs typeface="Calibri" pitchFamily="34" charset="-120"/>
-                        </a:rPr>
-                        <a:t>₹18.0 L</a:t>
-                      </a:r>
-                      <a:endParaRPr lang="en-US" sz="1100" dirty="0">
-                        <a:latin typeface="Calibri" charset="0"/>
-                        <a:ea typeface="Calibri" charset="0"/>
-                        <a:cs typeface="Calibri" charset="0"/>
-                      </a:endParaRPr>
-                    </a:p>
-                  </a:txBody>
-                  <a:tcPr marL="0" marR="76200" marT="63500" marB="63500" anchor="ctr">
-                    <a:lnL w="0" cap="flat" cmpd="sng" algn="ctr">
-                      <a:solidFill>
-                        <a:srgbClr val="666666"/>
-                      </a:solidFill>
-                      <a:prstDash val="solid"/>
-                      <a:round/>
-                      <a:headEnd type="none" w="med" len="med"/>
-                      <a:tailEnd type="none" w="med" len="med"/>
-                    </a:lnL>
-                    <a:lnR w="0" cap="flat" cmpd="sng" algn="ctr">
-                      <a:solidFill>
-                        <a:srgbClr val="666666"/>
-                      </a:solidFill>
-                      <a:prstDash val="solid"/>
-                      <a:round/>
-                      <a:headEnd type="none" w="med" len="med"/>
-                      <a:tailEnd type="none" w="med" len="med"/>
-                    </a:lnR>
-                    <a:lnT w="0" cap="flat" cmpd="sng" algn="ctr">
-                      <a:solidFill>
-                        <a:srgbClr val="666666"/>
-                      </a:solidFill>
-                      <a:prstDash val="solid"/>
-                      <a:round/>
-                      <a:headEnd type="none" w="med" len="med"/>
-                      <a:tailEnd type="none" w="med" len="med"/>
-                    </a:lnT>
-                    <a:lnB w="7620" cap="flat" cmpd="sng" algn="ctr">
-                      <a:solidFill>
-                        <a:srgbClr val="E2E4EA"/>
-                      </a:solidFill>
-                      <a:prstDash val="solid"/>
-                      <a:round/>
-                      <a:headEnd type="none" w="med" len="med"/>
-                      <a:tailEnd type="none" w="med" len="med"/>
-                    </a:lnB>
-                    <a:solidFill>
-                      <a:srgbClr val="FFFFFF"/>
-                    </a:solidFill>
-                  </a:tcPr>
-                </a:tc>
-              </a:tr>
-              <a:tr h="310896">
-                <a:tc>
-                  <a:txBody>
-                    <a:bodyPr/>
-                    <a:lstStyle/>
-                    <a:p>
-                      <a:pPr algn="l" indent="0" marL="0">
-                        <a:buNone/>
-                      </a:pPr>
-                      <a:r>
-                        <a:rPr lang="en-US" sz="1100" dirty="0">
-                          <a:solidFill>
-                            <a:srgbClr val="3B4660"/>
-                          </a:solidFill>
-                          <a:latin typeface="Calibri" pitchFamily="34" charset="0"/>
-                          <a:ea typeface="Calibri" pitchFamily="34" charset="-122"/>
-                          <a:cs typeface="Calibri" pitchFamily="34" charset="-120"/>
-                        </a:rPr>
-                        <a:t>EMD and tender fee</a:t>
-                      </a:r>
-                      <a:endParaRPr lang="en-US" sz="1100" dirty="0">
-                        <a:latin typeface="Calibri" charset="0"/>
-                        <a:ea typeface="Calibri" charset="0"/>
-                        <a:cs typeface="Calibri" charset="0"/>
-                      </a:endParaRPr>
-                    </a:p>
-                  </a:txBody>
-                  <a:tcPr marL="0" marR="76200" marT="63500" marB="63500" anchor="ctr">
-                    <a:lnL w="0" cap="flat" cmpd="sng" algn="ctr">
-                      <a:solidFill>
-                        <a:srgbClr val="666666"/>
-                      </a:solidFill>
-                      <a:prstDash val="solid"/>
-                      <a:round/>
-                      <a:headEnd type="none" w="med" len="med"/>
-                      <a:tailEnd type="none" w="med" len="med"/>
-                    </a:lnL>
-                    <a:lnR w="0" cap="flat" cmpd="sng" algn="ctr">
-                      <a:solidFill>
-                        <a:srgbClr val="666666"/>
-                      </a:solidFill>
-                      <a:prstDash val="solid"/>
-                      <a:round/>
-                      <a:headEnd type="none" w="med" len="med"/>
-                      <a:tailEnd type="none" w="med" len="med"/>
-                    </a:lnR>
-                    <a:lnT w="0" cap="flat" cmpd="sng" algn="ctr">
-                      <a:solidFill>
-                        <a:srgbClr val="666666"/>
-                      </a:solidFill>
-                      <a:prstDash val="solid"/>
-                      <a:round/>
-                      <a:headEnd type="none" w="med" len="med"/>
-                      <a:tailEnd type="none" w="med" len="med"/>
-                    </a:lnT>
-                    <a:lnB w="7620" cap="flat" cmpd="sng" algn="ctr">
-                      <a:solidFill>
-                        <a:srgbClr val="E2E4EA"/>
-                      </a:solidFill>
-                      <a:prstDash val="solid"/>
-                      <a:round/>
-                      <a:headEnd type="none" w="med" len="med"/>
-                      <a:tailEnd type="none" w="med" len="med"/>
-                    </a:lnB>
-                    <a:solidFill>
-                      <a:srgbClr val="FFFFFF"/>
-                    </a:solidFill>
-                  </a:tcPr>
-                </a:tc>
-                <a:tc>
-                  <a:txBody>
-                    <a:bodyPr/>
-                    <a:lstStyle/>
-                    <a:p>
-                      <a:pPr algn="r" indent="0" marL="0">
-                        <a:buNone/>
-                      </a:pPr>
-                      <a:r>
-                        <a:rPr lang="en-US" sz="1100" dirty="0">
-                          <a:solidFill>
-                            <a:srgbClr val="3B4660"/>
-                          </a:solidFill>
-                          <a:latin typeface="Calibri" pitchFamily="34" charset="0"/>
-                          <a:ea typeface="Calibri" pitchFamily="34" charset="-122"/>
-                          <a:cs typeface="Calibri" pitchFamily="34" charset="-120"/>
-                        </a:rPr>
-                        <a:t>₹1.1 L</a:t>
+                        <a:t>₹28.1 L</a:t>
                       </a:r>
                       <a:endParaRPr lang="en-US" sz="1100" dirty="0">
                         <a:latin typeface="Calibri" charset="0"/>
@@ -13098,12 +13290,12 @@
         </p:nvSpPr>
         <p:spPr>
           <a:xfrm>
-            <a:off x="566928" y="5757990"/>
-            <a:ext cx="11057839" cy="731520"/>
+            <a:off x="566928" y="4961128"/>
+            <a:ext cx="11057839" cy="1287363"/>
           </a:xfrm>
           <a:prstGeom prst="roundRect">
             <a:avLst>
-              <a:gd name="adj" fmla="val 6250"/>
+              <a:gd name="adj" fmla="val 3551"/>
             </a:avLst>
           </a:prstGeom>
           <a:solidFill>
@@ -13125,8 +13317,8 @@
         </p:nvSpPr>
         <p:spPr>
           <a:xfrm>
-            <a:off x="804672" y="5904294"/>
-            <a:ext cx="2743200" cy="201168"/>
+            <a:off x="804672" y="5070856"/>
+            <a:ext cx="2743200" cy="182880"/>
           </a:xfrm>
           <a:prstGeom prst="rect">
             <a:avLst/>
@@ -13164,8 +13356,8 @@
         </p:nvSpPr>
         <p:spPr>
           <a:xfrm>
-            <a:off x="804672" y="6105461"/>
-            <a:ext cx="10582351" cy="232220"/>
+            <a:off x="804672" y="5253736"/>
+            <a:ext cx="10582351" cy="288595"/>
           </a:xfrm>
           <a:prstGeom prst="rect">
             <a:avLst/>
@@ -13179,12 +13371,12 @@
           <a:p>
             <a:pPr indent="0" marL="0">
               <a:lnSpc>
-                <a:spcPts val="1725"/>
+                <a:spcPts val="2185"/>
               </a:lnSpc>
               <a:buNone/>
             </a:pPr>
             <a:r>
-              <a:rPr lang="en-US" sz="1500" b="1" dirty="0">
+              <a:rPr lang="en-US" sz="1900" b="1" dirty="0">
                 <a:solidFill>
                   <a:srgbClr val="0A1426"/>
                 </a:solidFill>
@@ -13194,7 +13386,7 @@
               </a:rPr>
               <a:t>A liquidity requirement, not a capital requirement</a:t>
             </a:r>
-            <a:endParaRPr lang="en-US" sz="1500" dirty="0"/>
+            <a:endParaRPr lang="en-US" sz="1900" dirty="0"/>
           </a:p>
         </p:txBody>
       </p:sp>
@@ -13206,8 +13398,8 @@
         </p:nvSpPr>
         <p:spPr>
           <a:xfrm>
-            <a:off x="804672" y="6410833"/>
-            <a:ext cx="10582351" cy="182880"/>
+            <a:off x="804672" y="5597195"/>
+            <a:ext cx="10582351" cy="578145"/>
           </a:xfrm>
           <a:prstGeom prst="rect">
             <a:avLst/>
@@ -13221,12 +13413,12 @@
           <a:p>
             <a:pPr indent="0" marL="0">
               <a:lnSpc>
-                <a:spcPts val="1207"/>
+                <a:spcPts val="1704"/>
               </a:lnSpc>
               <a:buNone/>
             </a:pPr>
             <a:r>
-              <a:rPr lang="en-US" sz="850" dirty="0">
+              <a:rPr lang="en-US" sz="1200" dirty="0">
                 <a:solidFill>
                   <a:srgbClr val="3B4660"/>
                 </a:solidFill>
@@ -13234,9 +13426,9 @@
                 <a:ea typeface="Calibri" pitchFamily="34" charset="-122"/>
                 <a:cs typeface="Calibri" pitchFamily="34" charset="-120"/>
               </a:rPr>
-              <a:t>Of the ₹3.35 Cr asked for, only ₹1.39 Cr is capital the project consumes and does not return. The rest is working capital — drawn to pay wages and the electricity bill, and recovered at the gate. Equity does not come back; a revolving limit does. That is why Option B is the recommendation.</a:t>
+              <a:t>Of the ₹3.35 Cr asked for, only ₹1.39 Cr is capital the project consumes and does not return. The rest is working capital — spent on wages and electricity, recovered at the gate. Equity does not come back; a revolving limit does.</a:t>
             </a:r>
-            <a:endParaRPr lang="en-US" sz="850" dirty="0"/>
+            <a:endParaRPr lang="en-US" sz="1200" dirty="0"/>
           </a:p>
         </p:txBody>
       </p:sp>
@@ -13417,8 +13609,8 @@
         </p:nvSpPr>
         <p:spPr>
           <a:xfrm>
-            <a:off x="566928" y="1005840"/>
-            <a:ext cx="11057839" cy="512064"/>
+            <a:off x="566928" y="950976"/>
+            <a:ext cx="11057839" cy="231140"/>
           </a:xfrm>
           <a:prstGeom prst="rect">
             <a:avLst/>
@@ -13432,12 +13624,12 @@
           <a:p>
             <a:pPr indent="0" marL="0">
               <a:lnSpc>
-                <a:spcPts val="1900"/>
+                <a:spcPts val="1750"/>
               </a:lnSpc>
               <a:buNone/>
             </a:pPr>
             <a:r>
-              <a:rPr lang="en-US" sz="1350" dirty="0">
+              <a:rPr lang="en-US" sz="1250" dirty="0">
                 <a:solidFill>
                   <a:srgbClr val="3B4660"/>
                 </a:solidFill>
@@ -13447,7 +13639,7 @@
               </a:rPr>
               <a:t>Six streams, built bottom-up from footfall and capture rates. All figures net of GST.</a:t>
             </a:r>
-            <a:endParaRPr lang="en-US" sz="1350" dirty="0"/>
+            <a:endParaRPr lang="en-US" sz="1250" dirty="0"/>
           </a:p>
         </p:txBody>
       </p:sp>
@@ -13458,8 +13650,8 @@
           <p:nvPr/>
         </p:nvGraphicFramePr>
         <p:xfrm>
-          <a:off x="566928" y="1627632"/>
-          <a:ext cx="11057839" cy="2743200"/>
+          <a:off x="566928" y="1310132"/>
+          <a:ext cx="11057839" cy="2788920"/>
         </p:xfrm>
         <a:graphic xmlns:a="http://schemas.openxmlformats.org/drawingml/2006/main">
           <a:graphicData uri="http://schemas.openxmlformats.org/drawingml/2006/chart">
@@ -13475,12 +13667,12 @@
         </p:nvSpPr>
         <p:spPr>
           <a:xfrm>
-            <a:off x="566928" y="4599432"/>
-            <a:ext cx="2599868" cy="1170432"/>
+            <a:off x="566928" y="4327652"/>
+            <a:ext cx="2599868" cy="1097280"/>
           </a:xfrm>
           <a:prstGeom prst="roundRect">
             <a:avLst>
-              <a:gd name="adj" fmla="val 4688"/>
+              <a:gd name="adj" fmla="val 5000"/>
             </a:avLst>
           </a:prstGeom>
           <a:solidFill>
@@ -13502,8 +13694,8 @@
         </p:nvSpPr>
         <p:spPr>
           <a:xfrm>
-            <a:off x="749808" y="4736592"/>
-            <a:ext cx="2234108" cy="219456"/>
+            <a:off x="749808" y="4446524"/>
+            <a:ext cx="2234108" cy="237744"/>
           </a:xfrm>
           <a:prstGeom prst="rect">
             <a:avLst/>
@@ -13512,14 +13704,14 @@
           <a:ln/>
         </p:spPr>
         <p:txBody>
-          <a:bodyPr wrap="square" lIns="0" tIns="0" rIns="0" bIns="0" rtlCol="0" anchor="ctr"/>
+          <a:bodyPr wrap="square" lIns="0" tIns="0" rIns="0" bIns="0" rtlCol="0" anchor="t"/>
           <a:lstStyle/>
           <a:p>
             <a:pPr indent="0" marL="0">
               <a:buNone/>
             </a:pPr>
             <a:r>
-              <a:rPr lang="en-US" sz="900" b="1" spc="120" kern="0" dirty="0">
+              <a:rPr lang="en-US" sz="850" b="1" spc="100" kern="0" dirty="0">
                 <a:solidFill>
                   <a:srgbClr val="6E7689"/>
                 </a:solidFill>
@@ -13529,7 +13721,7 @@
               </a:rPr>
               <a:t>YEAR 1 FOOTFALL</a:t>
             </a:r>
-            <a:endParaRPr lang="en-US" sz="900" dirty="0"/>
+            <a:endParaRPr lang="en-US" sz="850" dirty="0"/>
           </a:p>
         </p:txBody>
       </p:sp>
@@ -13541,7 +13733,7 @@
         </p:nvSpPr>
         <p:spPr>
           <a:xfrm>
-            <a:off x="749808" y="4965192"/>
+            <a:off x="749808" y="4693412"/>
             <a:ext cx="2234108" cy="457200"/>
           </a:xfrm>
           <a:prstGeom prst="rect">
@@ -13551,7 +13743,9 @@
           <a:ln/>
         </p:spPr>
         <p:txBody>
-          <a:bodyPr wrap="square" lIns="0" tIns="0" rIns="0" bIns="0" rtlCol="0" anchor="t"/>
+          <a:bodyPr wrap="square" lIns="0" tIns="0" rIns="0" bIns="0" rtlCol="0" anchor="t">
+            <a:normAutofit/>
+          </a:bodyPr>
           <a:lstStyle/>
           <a:p>
             <a:pPr indent="0" marL="0">
@@ -13580,8 +13774,8 @@
         </p:nvSpPr>
         <p:spPr>
           <a:xfrm>
-            <a:off x="749808" y="5440680"/>
-            <a:ext cx="2234108" cy="256032"/>
+            <a:off x="749808" y="5168900"/>
+            <a:ext cx="2234108" cy="182880"/>
           </a:xfrm>
           <a:prstGeom prst="rect">
             <a:avLst/>
@@ -13622,12 +13816,12 @@
         </p:nvSpPr>
         <p:spPr>
           <a:xfrm>
-            <a:off x="3386252" y="4599432"/>
-            <a:ext cx="2599868" cy="1170432"/>
+            <a:off x="3386252" y="4327652"/>
+            <a:ext cx="2599868" cy="1097280"/>
           </a:xfrm>
           <a:prstGeom prst="roundRect">
             <a:avLst>
-              <a:gd name="adj" fmla="val 4688"/>
+              <a:gd name="adj" fmla="val 5000"/>
             </a:avLst>
           </a:prstGeom>
           <a:solidFill>
@@ -13649,8 +13843,8 @@
         </p:nvSpPr>
         <p:spPr>
           <a:xfrm>
-            <a:off x="3569132" y="4736592"/>
-            <a:ext cx="2234108" cy="219456"/>
+            <a:off x="3569132" y="4446524"/>
+            <a:ext cx="2234108" cy="237744"/>
           </a:xfrm>
           <a:prstGeom prst="rect">
             <a:avLst/>
@@ -13659,14 +13853,14 @@
           <a:ln/>
         </p:spPr>
         <p:txBody>
-          <a:bodyPr wrap="square" lIns="0" tIns="0" rIns="0" bIns="0" rtlCol="0" anchor="ctr"/>
+          <a:bodyPr wrap="square" lIns="0" tIns="0" rIns="0" bIns="0" rtlCol="0" anchor="t"/>
           <a:lstStyle/>
           <a:p>
             <a:pPr indent="0" marL="0">
               <a:buNone/>
             </a:pPr>
             <a:r>
-              <a:rPr lang="en-US" sz="900" b="1" spc="120" kern="0" dirty="0">
+              <a:rPr lang="en-US" sz="850" b="1" spc="100" kern="0" dirty="0">
                 <a:solidFill>
                   <a:srgbClr val="6E7689"/>
                 </a:solidFill>
@@ -13676,7 +13870,7 @@
               </a:rPr>
               <a:t>YEAR 7 FOOTFALL</a:t>
             </a:r>
-            <a:endParaRPr lang="en-US" sz="900" dirty="0"/>
+            <a:endParaRPr lang="en-US" sz="850" dirty="0"/>
           </a:p>
         </p:txBody>
       </p:sp>
@@ -13688,7 +13882,7 @@
         </p:nvSpPr>
         <p:spPr>
           <a:xfrm>
-            <a:off x="3569132" y="4965192"/>
+            <a:off x="3569132" y="4693412"/>
             <a:ext cx="2234108" cy="457200"/>
           </a:xfrm>
           <a:prstGeom prst="rect">
@@ -13698,7 +13892,9 @@
           <a:ln/>
         </p:spPr>
         <p:txBody>
-          <a:bodyPr wrap="square" lIns="0" tIns="0" rIns="0" bIns="0" rtlCol="0" anchor="t"/>
+          <a:bodyPr wrap="square" lIns="0" tIns="0" rIns="0" bIns="0" rtlCol="0" anchor="t">
+            <a:normAutofit/>
+          </a:bodyPr>
           <a:lstStyle/>
           <a:p>
             <a:pPr indent="0" marL="0">
@@ -13727,8 +13923,8 @@
         </p:nvSpPr>
         <p:spPr>
           <a:xfrm>
-            <a:off x="3569132" y="5440680"/>
-            <a:ext cx="2234108" cy="256032"/>
+            <a:off x="3569132" y="5168900"/>
+            <a:ext cx="2234108" cy="182880"/>
           </a:xfrm>
           <a:prstGeom prst="rect">
             <a:avLst/>
@@ -13769,12 +13965,12 @@
         </p:nvSpPr>
         <p:spPr>
           <a:xfrm>
-            <a:off x="6205576" y="4599432"/>
-            <a:ext cx="2599868" cy="1170432"/>
+            <a:off x="6205576" y="4327652"/>
+            <a:ext cx="2599868" cy="1097280"/>
           </a:xfrm>
           <a:prstGeom prst="roundRect">
             <a:avLst>
-              <a:gd name="adj" fmla="val 4688"/>
+              <a:gd name="adj" fmla="val 5000"/>
             </a:avLst>
           </a:prstGeom>
           <a:solidFill>
@@ -13796,8 +13992,8 @@
         </p:nvSpPr>
         <p:spPr>
           <a:xfrm>
-            <a:off x="6388456" y="4736592"/>
-            <a:ext cx="2234108" cy="219456"/>
+            <a:off x="6388456" y="4446524"/>
+            <a:ext cx="2234108" cy="237744"/>
           </a:xfrm>
           <a:prstGeom prst="rect">
             <a:avLst/>
@@ -13806,14 +14002,14 @@
           <a:ln/>
         </p:spPr>
         <p:txBody>
-          <a:bodyPr wrap="square" lIns="0" tIns="0" rIns="0" bIns="0" rtlCol="0" anchor="ctr"/>
+          <a:bodyPr wrap="square" lIns="0" tIns="0" rIns="0" bIns="0" rtlCol="0" anchor="t"/>
           <a:lstStyle/>
           <a:p>
             <a:pPr indent="0" marL="0">
               <a:buNone/>
             </a:pPr>
             <a:r>
-              <a:rPr lang="en-US" sz="900" b="1" spc="120" kern="0" dirty="0">
+              <a:rPr lang="en-US" sz="850" b="1" spc="100" kern="0" dirty="0">
                 <a:solidFill>
                   <a:srgbClr val="6E7689"/>
                 </a:solidFill>
@@ -13823,7 +14019,7 @@
               </a:rPr>
               <a:t>SHOW CONVERSION</a:t>
             </a:r>
-            <a:endParaRPr lang="en-US" sz="900" dirty="0"/>
+            <a:endParaRPr lang="en-US" sz="850" dirty="0"/>
           </a:p>
         </p:txBody>
       </p:sp>
@@ -13835,7 +14031,7 @@
         </p:nvSpPr>
         <p:spPr>
           <a:xfrm>
-            <a:off x="6388456" y="4965192"/>
+            <a:off x="6388456" y="4693412"/>
             <a:ext cx="2234108" cy="457200"/>
           </a:xfrm>
           <a:prstGeom prst="rect">
@@ -13845,7 +14041,9 @@
           <a:ln/>
         </p:spPr>
         <p:txBody>
-          <a:bodyPr wrap="square" lIns="0" tIns="0" rIns="0" bIns="0" rtlCol="0" anchor="t"/>
+          <a:bodyPr wrap="square" lIns="0" tIns="0" rIns="0" bIns="0" rtlCol="0" anchor="t">
+            <a:normAutofit/>
+          </a:bodyPr>
           <a:lstStyle/>
           <a:p>
             <a:pPr indent="0" marL="0">
@@ -13874,8 +14072,8 @@
         </p:nvSpPr>
         <p:spPr>
           <a:xfrm>
-            <a:off x="6388456" y="5440680"/>
-            <a:ext cx="2234108" cy="256032"/>
+            <a:off x="6388456" y="5168900"/>
+            <a:ext cx="2234108" cy="182880"/>
           </a:xfrm>
           <a:prstGeom prst="rect">
             <a:avLst/>
@@ -13916,12 +14114,12 @@
         </p:nvSpPr>
         <p:spPr>
           <a:xfrm>
-            <a:off x="9024899" y="4599432"/>
-            <a:ext cx="2599868" cy="1170432"/>
+            <a:off x="9024899" y="4327652"/>
+            <a:ext cx="2599868" cy="1097280"/>
           </a:xfrm>
           <a:prstGeom prst="roundRect">
             <a:avLst>
-              <a:gd name="adj" fmla="val 4688"/>
+              <a:gd name="adj" fmla="val 5000"/>
             </a:avLst>
           </a:prstGeom>
           <a:solidFill>
@@ -13943,8 +14141,8 @@
         </p:nvSpPr>
         <p:spPr>
           <a:xfrm>
-            <a:off x="9207779" y="4736592"/>
-            <a:ext cx="2234108" cy="219456"/>
+            <a:off x="9207779" y="4446524"/>
+            <a:ext cx="2234108" cy="237744"/>
           </a:xfrm>
           <a:prstGeom prst="rect">
             <a:avLst/>
@@ -13953,14 +14151,14 @@
           <a:ln/>
         </p:spPr>
         <p:txBody>
-          <a:bodyPr wrap="square" lIns="0" tIns="0" rIns="0" bIns="0" rtlCol="0" anchor="ctr"/>
+          <a:bodyPr wrap="square" lIns="0" tIns="0" rIns="0" bIns="0" rtlCol="0" anchor="t"/>
           <a:lstStyle/>
           <a:p>
             <a:pPr indent="0" marL="0">
               <a:buNone/>
             </a:pPr>
             <a:r>
-              <a:rPr lang="en-US" sz="900" b="1" spc="120" kern="0" dirty="0">
+              <a:rPr lang="en-US" sz="850" b="1" spc="100" kern="0" dirty="0">
                 <a:solidFill>
                   <a:srgbClr val="6E7689"/>
                 </a:solidFill>
@@ -13970,7 +14168,7 @@
               </a:rPr>
               <a:t>GATE TARIFF</a:t>
             </a:r>
-            <a:endParaRPr lang="en-US" sz="900" dirty="0"/>
+            <a:endParaRPr lang="en-US" sz="850" dirty="0"/>
           </a:p>
         </p:txBody>
       </p:sp>
@@ -13982,7 +14180,7 @@
         </p:nvSpPr>
         <p:spPr>
           <a:xfrm>
-            <a:off x="9207779" y="4965192"/>
+            <a:off x="9207779" y="4693412"/>
             <a:ext cx="2234108" cy="457200"/>
           </a:xfrm>
           <a:prstGeom prst="rect">
@@ -13992,7 +14190,9 @@
           <a:ln/>
         </p:spPr>
         <p:txBody>
-          <a:bodyPr wrap="square" lIns="0" tIns="0" rIns="0" bIns="0" rtlCol="0" anchor="t"/>
+          <a:bodyPr wrap="square" lIns="0" tIns="0" rIns="0" bIns="0" rtlCol="0" anchor="t">
+            <a:normAutofit/>
+          </a:bodyPr>
           <a:lstStyle/>
           <a:p>
             <a:pPr indent="0" marL="0">
@@ -14021,8 +14221,8 @@
         </p:nvSpPr>
         <p:spPr>
           <a:xfrm>
-            <a:off x="9207779" y="5440680"/>
-            <a:ext cx="2234108" cy="256032"/>
+            <a:off x="9207779" y="5168900"/>
+            <a:ext cx="2234108" cy="182880"/>
           </a:xfrm>
           <a:prstGeom prst="rect">
             <a:avLst/>
@@ -14232,8 +14432,8 @@
         </p:nvSpPr>
         <p:spPr>
           <a:xfrm>
-            <a:off x="566928" y="1005840"/>
-            <a:ext cx="11057839" cy="512064"/>
+            <a:off x="566928" y="950976"/>
+            <a:ext cx="11057839" cy="231140"/>
           </a:xfrm>
           <a:prstGeom prst="rect">
             <a:avLst/>
@@ -14247,12 +14447,12 @@
           <a:p>
             <a:pPr indent="0" marL="0">
               <a:lnSpc>
-                <a:spcPts val="1900"/>
+                <a:spcPts val="1750"/>
               </a:lnSpc>
               <a:buNone/>
             </a:pPr>
             <a:r>
-              <a:rPr lang="en-US" sz="1350" dirty="0">
+              <a:rPr lang="en-US" sz="1250" dirty="0">
                 <a:solidFill>
                   <a:srgbClr val="3B4660"/>
                 </a:solidFill>
@@ -14262,7 +14462,7 @@
               </a:rPr>
               <a:t>Payroll and the licence fee are the two structural lines. Everything else scales with footfall, revenue or inflation.</a:t>
             </a:r>
-            <a:endParaRPr lang="en-US" sz="1350" dirty="0"/>
+            <a:endParaRPr lang="en-US" sz="1250" dirty="0"/>
           </a:p>
         </p:txBody>
       </p:sp>
@@ -14281,7 +14481,7 @@
           </p:nvPr>
         </p:nvGraphicFramePr>
         <p:xfrm>
-          <a:off x="566928" y="1627632"/>
+          <a:off x="566928" y="1310132"/>
           <a:ext cx="11057839" cy="914400"/>
         </p:xfrm>
         <a:graphic>
@@ -14298,7 +14498,7 @@
                 <a:gridCol w="1122491"/>
                 <a:gridCol w="1122491"/>
               </a:tblGrid>
-              <a:tr h="292608">
+              <a:tr h="265176">
                 <a:tc>
                   <a:txBody>
                     <a:bodyPr/>
@@ -14844,7 +15044,7 @@
                   </a:tcPr>
                 </a:tc>
               </a:tr>
-              <a:tr h="292608">
+              <a:tr h="265176">
                 <a:tc>
                   <a:txBody>
                     <a:bodyPr/>
@@ -15390,7 +15590,7 @@
                   </a:tcPr>
                 </a:tc>
               </a:tr>
-              <a:tr h="292608">
+              <a:tr h="265176">
                 <a:tc>
                   <a:txBody>
                     <a:bodyPr/>
@@ -15936,7 +16136,7 @@
                   </a:tcPr>
                 </a:tc>
               </a:tr>
-              <a:tr h="292608">
+              <a:tr h="265176">
                 <a:tc>
                   <a:txBody>
                     <a:bodyPr/>
@@ -16482,7 +16682,7 @@
                   </a:tcPr>
                 </a:tc>
               </a:tr>
-              <a:tr h="292608">
+              <a:tr h="265176">
                 <a:tc>
                   <a:txBody>
                     <a:bodyPr/>
@@ -17028,7 +17228,7 @@
                   </a:tcPr>
                 </a:tc>
               </a:tr>
-              <a:tr h="292608">
+              <a:tr h="265176">
                 <a:tc>
                   <a:txBody>
                     <a:bodyPr/>
@@ -17574,7 +17774,7 @@
                   </a:tcPr>
                 </a:tc>
               </a:tr>
-              <a:tr h="292608">
+              <a:tr h="265176">
                 <a:tc>
                   <a:txBody>
                     <a:bodyPr/>
@@ -18120,7 +18320,7 @@
                   </a:tcPr>
                 </a:tc>
               </a:tr>
-              <a:tr h="292608">
+              <a:tr h="265176">
                 <a:tc>
                   <a:txBody>
                     <a:bodyPr/>
@@ -18666,7 +18866,7 @@
                   </a:tcPr>
                 </a:tc>
               </a:tr>
-              <a:tr h="292608">
+              <a:tr h="265176">
                 <a:tc>
                   <a:txBody>
                     <a:bodyPr/>
@@ -19212,7 +19412,7 @@
                   </a:tcPr>
                 </a:tc>
               </a:tr>
-              <a:tr h="292608">
+              <a:tr h="265176">
                 <a:tc>
                   <a:txBody>
                     <a:bodyPr/>
@@ -19758,7 +19958,7 @@
                   </a:tcPr>
                 </a:tc>
               </a:tr>
-              <a:tr h="292608">
+              <a:tr h="265176">
                 <a:tc>
                   <a:txBody>
                     <a:bodyPr/>
@@ -20304,7 +20504,7 @@
                   </a:tcPr>
                 </a:tc>
               </a:tr>
-              <a:tr h="292608">
+              <a:tr h="265176">
                 <a:tc>
                   <a:txBody>
                     <a:bodyPr/>
@@ -20322,7 +20522,7 @@
                           <a:ea typeface="Calibri" pitchFamily="34" charset="-122"/>
                           <a:cs typeface="Calibri" pitchFamily="34" charset="-120"/>
                         </a:rPr>
-                        <a:t>Revenue</a:t>
+                        <a:t>Revenue / EBITDA margin</a:t>
                       </a:r>
                       <a:endParaRPr lang="en-US" sz="1050" dirty="0">
                         <a:latin typeface="Calibri" charset="0"/>
@@ -20390,7 +20590,7 @@
                           <a:ea typeface="Calibri" pitchFamily="34" charset="-122"/>
                           <a:cs typeface="Calibri" pitchFamily="34" charset="-120"/>
                         </a:rPr>
-                        <a:t>1.96</a:t>
+                        <a:t>1.96 · -11%</a:t>
                       </a:r>
                       <a:endParaRPr lang="en-US" sz="1050" dirty="0">
                         <a:latin typeface="Calibri" charset="0"/>
@@ -20458,7 +20658,7 @@
                           <a:ea typeface="Calibri" pitchFamily="34" charset="-122"/>
                           <a:cs typeface="Calibri" pitchFamily="34" charset="-120"/>
                         </a:rPr>
-                        <a:t>2.70</a:t>
+                        <a:t>2.70 · 6%</a:t>
                       </a:r>
                       <a:endParaRPr lang="en-US" sz="1050" dirty="0">
                         <a:latin typeface="Calibri" charset="0"/>
@@ -20526,7 +20726,7 @@
                           <a:ea typeface="Calibri" pitchFamily="34" charset="-122"/>
                           <a:cs typeface="Calibri" pitchFamily="34" charset="-120"/>
                         </a:rPr>
-                        <a:t>3.38</a:t>
+                        <a:t>3.38 · 15%</a:t>
                       </a:r>
                       <a:endParaRPr lang="en-US" sz="1050" dirty="0">
                         <a:latin typeface="Calibri" charset="0"/>
@@ -20594,7 +20794,7 @@
                           <a:ea typeface="Calibri" pitchFamily="34" charset="-122"/>
                           <a:cs typeface="Calibri" pitchFamily="34" charset="-120"/>
                         </a:rPr>
-                        <a:t>3.91</a:t>
+                        <a:t>3.91 · 18%</a:t>
                       </a:r>
                       <a:endParaRPr lang="en-US" sz="1050" dirty="0">
                         <a:latin typeface="Calibri" charset="0"/>
@@ -20662,7 +20862,7 @@
                           <a:ea typeface="Calibri" pitchFamily="34" charset="-122"/>
                           <a:cs typeface="Calibri" pitchFamily="34" charset="-120"/>
                         </a:rPr>
-                        <a:t>4.50</a:t>
+                        <a:t>4.50 · 22%</a:t>
                       </a:r>
                       <a:endParaRPr lang="en-US" sz="1050" dirty="0">
                         <a:latin typeface="Calibri" charset="0"/>
@@ -20730,7 +20930,7 @@
                           <a:ea typeface="Calibri" pitchFamily="34" charset="-122"/>
                           <a:cs typeface="Calibri" pitchFamily="34" charset="-120"/>
                         </a:rPr>
-                        <a:t>4.97</a:t>
+                        <a:t>4.97 · 22%</a:t>
                       </a:r>
                       <a:endParaRPr lang="en-US" sz="1050" dirty="0">
                         <a:latin typeface="Calibri" charset="0"/>
@@ -20798,7 +20998,7 @@
                           <a:ea typeface="Calibri" pitchFamily="34" charset="-122"/>
                           <a:cs typeface="Calibri" pitchFamily="34" charset="-120"/>
                         </a:rPr>
-                        <a:t>5.58</a:t>
+                        <a:t>5.58 · 24%</a:t>
                       </a:r>
                       <a:endParaRPr lang="en-US" sz="1050" dirty="0">
                         <a:latin typeface="Calibri" charset="0"/>
@@ -20850,552 +21050,6 @@
                   </a:tcPr>
                 </a:tc>
               </a:tr>
-              <a:tr h="292608">
-                <a:tc>
-                  <a:txBody>
-                    <a:bodyPr/>
-                    <a:lstStyle/>
-                    <a:p>
-                      <a:pPr algn="l" indent="0" marL="0">
-                        <a:buNone/>
-                      </a:pPr>
-                      <a:r>
-                        <a:rPr lang="en-US" sz="1050" b="1" dirty="0">
-                          <a:solidFill>
-                            <a:srgbClr val="0A1426"/>
-                          </a:solidFill>
-                          <a:latin typeface="Calibri" pitchFamily="34" charset="0"/>
-                          <a:ea typeface="Calibri" pitchFamily="34" charset="-122"/>
-                          <a:cs typeface="Calibri" pitchFamily="34" charset="-120"/>
-                        </a:rPr>
-                        <a:t>EBITDA margin</a:t>
-                      </a:r>
-                      <a:endParaRPr lang="en-US" sz="1050" dirty="0">
-                        <a:latin typeface="Calibri" charset="0"/>
-                        <a:ea typeface="Calibri" charset="0"/>
-                        <a:cs typeface="Calibri" charset="0"/>
-                      </a:endParaRPr>
-                    </a:p>
-                  </a:txBody>
-                  <a:tcPr marL="0" marR="76200" marT="63500" marB="63500" anchor="ctr">
-                    <a:lnL w="0" cap="flat" cmpd="sng" algn="ctr">
-                      <a:solidFill>
-                        <a:srgbClr val="666666"/>
-                      </a:solidFill>
-                      <a:prstDash val="solid"/>
-                      <a:round/>
-                      <a:headEnd type="none" w="med" len="med"/>
-                      <a:tailEnd type="none" w="med" len="med"/>
-                    </a:lnL>
-                    <a:lnR w="0" cap="flat" cmpd="sng" algn="ctr">
-                      <a:solidFill>
-                        <a:srgbClr val="666666"/>
-                      </a:solidFill>
-                      <a:prstDash val="solid"/>
-                      <a:round/>
-                      <a:headEnd type="none" w="med" len="med"/>
-                      <a:tailEnd type="none" w="med" len="med"/>
-                    </a:lnR>
-                    <a:lnT w="0" cap="flat" cmpd="sng" algn="ctr">
-                      <a:solidFill>
-                        <a:srgbClr val="666666"/>
-                      </a:solidFill>
-                      <a:prstDash val="solid"/>
-                      <a:round/>
-                      <a:headEnd type="none" w="med" len="med"/>
-                      <a:tailEnd type="none" w="med" len="med"/>
-                    </a:lnT>
-                    <a:lnB w="7620" cap="flat" cmpd="sng" algn="ctr">
-                      <a:solidFill>
-                        <a:srgbClr val="E2E4EA"/>
-                      </a:solidFill>
-                      <a:prstDash val="solid"/>
-                      <a:round/>
-                      <a:headEnd type="none" w="med" len="med"/>
-                      <a:tailEnd type="none" w="med" len="med"/>
-                    </a:lnB>
-                    <a:solidFill>
-                      <a:srgbClr val="FBF1EE"/>
-                    </a:solidFill>
-                  </a:tcPr>
-                </a:tc>
-                <a:tc>
-                  <a:txBody>
-                    <a:bodyPr/>
-                    <a:lstStyle/>
-                    <a:p>
-                      <a:pPr algn="r" indent="0" marL="0">
-                        <a:buNone/>
-                      </a:pPr>
-                      <a:r>
-                        <a:rPr lang="en-US" sz="1050" b="1" dirty="0">
-                          <a:solidFill>
-                            <a:srgbClr val="0A1426"/>
-                          </a:solidFill>
-                          <a:latin typeface="Calibri" pitchFamily="34" charset="0"/>
-                          <a:ea typeface="Calibri" pitchFamily="34" charset="-122"/>
-                          <a:cs typeface="Calibri" pitchFamily="34" charset="-120"/>
-                        </a:rPr>
-                        <a:t>-11%</a:t>
-                      </a:r>
-                      <a:endParaRPr lang="en-US" sz="1050" dirty="0">
-                        <a:latin typeface="Calibri" charset="0"/>
-                        <a:ea typeface="Calibri" charset="0"/>
-                        <a:cs typeface="Calibri" charset="0"/>
-                      </a:endParaRPr>
-                    </a:p>
-                  </a:txBody>
-                  <a:tcPr marL="0" marR="76200" marT="63500" marB="63500" anchor="ctr">
-                    <a:lnL w="0" cap="flat" cmpd="sng" algn="ctr">
-                      <a:solidFill>
-                        <a:srgbClr val="666666"/>
-                      </a:solidFill>
-                      <a:prstDash val="solid"/>
-                      <a:round/>
-                      <a:headEnd type="none" w="med" len="med"/>
-                      <a:tailEnd type="none" w="med" len="med"/>
-                    </a:lnL>
-                    <a:lnR w="0" cap="flat" cmpd="sng" algn="ctr">
-                      <a:solidFill>
-                        <a:srgbClr val="666666"/>
-                      </a:solidFill>
-                      <a:prstDash val="solid"/>
-                      <a:round/>
-                      <a:headEnd type="none" w="med" len="med"/>
-                      <a:tailEnd type="none" w="med" len="med"/>
-                    </a:lnR>
-                    <a:lnT w="0" cap="flat" cmpd="sng" algn="ctr">
-                      <a:solidFill>
-                        <a:srgbClr val="666666"/>
-                      </a:solidFill>
-                      <a:prstDash val="solid"/>
-                      <a:round/>
-                      <a:headEnd type="none" w="med" len="med"/>
-                      <a:tailEnd type="none" w="med" len="med"/>
-                    </a:lnT>
-                    <a:lnB w="7620" cap="flat" cmpd="sng" algn="ctr">
-                      <a:solidFill>
-                        <a:srgbClr val="E2E4EA"/>
-                      </a:solidFill>
-                      <a:prstDash val="solid"/>
-                      <a:round/>
-                      <a:headEnd type="none" w="med" len="med"/>
-                      <a:tailEnd type="none" w="med" len="med"/>
-                    </a:lnB>
-                    <a:solidFill>
-                      <a:srgbClr val="FBF1EE"/>
-                    </a:solidFill>
-                  </a:tcPr>
-                </a:tc>
-                <a:tc>
-                  <a:txBody>
-                    <a:bodyPr/>
-                    <a:lstStyle/>
-                    <a:p>
-                      <a:pPr algn="r" indent="0" marL="0">
-                        <a:buNone/>
-                      </a:pPr>
-                      <a:r>
-                        <a:rPr lang="en-US" sz="1050" b="1" dirty="0">
-                          <a:solidFill>
-                            <a:srgbClr val="0A1426"/>
-                          </a:solidFill>
-                          <a:latin typeface="Calibri" pitchFamily="34" charset="0"/>
-                          <a:ea typeface="Calibri" pitchFamily="34" charset="-122"/>
-                          <a:cs typeface="Calibri" pitchFamily="34" charset="-120"/>
-                        </a:rPr>
-                        <a:t>6%</a:t>
-                      </a:r>
-                      <a:endParaRPr lang="en-US" sz="1050" dirty="0">
-                        <a:latin typeface="Calibri" charset="0"/>
-                        <a:ea typeface="Calibri" charset="0"/>
-                        <a:cs typeface="Calibri" charset="0"/>
-                      </a:endParaRPr>
-                    </a:p>
-                  </a:txBody>
-                  <a:tcPr marL="0" marR="76200" marT="63500" marB="63500" anchor="ctr">
-                    <a:lnL w="0" cap="flat" cmpd="sng" algn="ctr">
-                      <a:solidFill>
-                        <a:srgbClr val="666666"/>
-                      </a:solidFill>
-                      <a:prstDash val="solid"/>
-                      <a:round/>
-                      <a:headEnd type="none" w="med" len="med"/>
-                      <a:tailEnd type="none" w="med" len="med"/>
-                    </a:lnL>
-                    <a:lnR w="0" cap="flat" cmpd="sng" algn="ctr">
-                      <a:solidFill>
-                        <a:srgbClr val="666666"/>
-                      </a:solidFill>
-                      <a:prstDash val="solid"/>
-                      <a:round/>
-                      <a:headEnd type="none" w="med" len="med"/>
-                      <a:tailEnd type="none" w="med" len="med"/>
-                    </a:lnR>
-                    <a:lnT w="0" cap="flat" cmpd="sng" algn="ctr">
-                      <a:solidFill>
-                        <a:srgbClr val="666666"/>
-                      </a:solidFill>
-                      <a:prstDash val="solid"/>
-                      <a:round/>
-                      <a:headEnd type="none" w="med" len="med"/>
-                      <a:tailEnd type="none" w="med" len="med"/>
-                    </a:lnT>
-                    <a:lnB w="7620" cap="flat" cmpd="sng" algn="ctr">
-                      <a:solidFill>
-                        <a:srgbClr val="E2E4EA"/>
-                      </a:solidFill>
-                      <a:prstDash val="solid"/>
-                      <a:round/>
-                      <a:headEnd type="none" w="med" len="med"/>
-                      <a:tailEnd type="none" w="med" len="med"/>
-                    </a:lnB>
-                    <a:solidFill>
-                      <a:srgbClr val="FBF1EE"/>
-                    </a:solidFill>
-                  </a:tcPr>
-                </a:tc>
-                <a:tc>
-                  <a:txBody>
-                    <a:bodyPr/>
-                    <a:lstStyle/>
-                    <a:p>
-                      <a:pPr algn="r" indent="0" marL="0">
-                        <a:buNone/>
-                      </a:pPr>
-                      <a:r>
-                        <a:rPr lang="en-US" sz="1050" b="1" dirty="0">
-                          <a:solidFill>
-                            <a:srgbClr val="0A1426"/>
-                          </a:solidFill>
-                          <a:latin typeface="Calibri" pitchFamily="34" charset="0"/>
-                          <a:ea typeface="Calibri" pitchFamily="34" charset="-122"/>
-                          <a:cs typeface="Calibri" pitchFamily="34" charset="-120"/>
-                        </a:rPr>
-                        <a:t>15%</a:t>
-                      </a:r>
-                      <a:endParaRPr lang="en-US" sz="1050" dirty="0">
-                        <a:latin typeface="Calibri" charset="0"/>
-                        <a:ea typeface="Calibri" charset="0"/>
-                        <a:cs typeface="Calibri" charset="0"/>
-                      </a:endParaRPr>
-                    </a:p>
-                  </a:txBody>
-                  <a:tcPr marL="0" marR="76200" marT="63500" marB="63500" anchor="ctr">
-                    <a:lnL w="0" cap="flat" cmpd="sng" algn="ctr">
-                      <a:solidFill>
-                        <a:srgbClr val="666666"/>
-                      </a:solidFill>
-                      <a:prstDash val="solid"/>
-                      <a:round/>
-                      <a:headEnd type="none" w="med" len="med"/>
-                      <a:tailEnd type="none" w="med" len="med"/>
-                    </a:lnL>
-                    <a:lnR w="0" cap="flat" cmpd="sng" algn="ctr">
-                      <a:solidFill>
-                        <a:srgbClr val="666666"/>
-                      </a:solidFill>
-                      <a:prstDash val="solid"/>
-                      <a:round/>
-                      <a:headEnd type="none" w="med" len="med"/>
-                      <a:tailEnd type="none" w="med" len="med"/>
-                    </a:lnR>
-                    <a:lnT w="0" cap="flat" cmpd="sng" algn="ctr">
-                      <a:solidFill>
-                        <a:srgbClr val="666666"/>
-                      </a:solidFill>
-                      <a:prstDash val="solid"/>
-                      <a:round/>
-                      <a:headEnd type="none" w="med" len="med"/>
-                      <a:tailEnd type="none" w="med" len="med"/>
-                    </a:lnT>
-                    <a:lnB w="7620" cap="flat" cmpd="sng" algn="ctr">
-                      <a:solidFill>
-                        <a:srgbClr val="E2E4EA"/>
-                      </a:solidFill>
-                      <a:prstDash val="solid"/>
-                      <a:round/>
-                      <a:headEnd type="none" w="med" len="med"/>
-                      <a:tailEnd type="none" w="med" len="med"/>
-                    </a:lnB>
-                    <a:solidFill>
-                      <a:srgbClr val="FBF1EE"/>
-                    </a:solidFill>
-                  </a:tcPr>
-                </a:tc>
-                <a:tc>
-                  <a:txBody>
-                    <a:bodyPr/>
-                    <a:lstStyle/>
-                    <a:p>
-                      <a:pPr algn="r" indent="0" marL="0">
-                        <a:buNone/>
-                      </a:pPr>
-                      <a:r>
-                        <a:rPr lang="en-US" sz="1050" b="1" dirty="0">
-                          <a:solidFill>
-                            <a:srgbClr val="0A1426"/>
-                          </a:solidFill>
-                          <a:latin typeface="Calibri" pitchFamily="34" charset="0"/>
-                          <a:ea typeface="Calibri" pitchFamily="34" charset="-122"/>
-                          <a:cs typeface="Calibri" pitchFamily="34" charset="-120"/>
-                        </a:rPr>
-                        <a:t>18%</a:t>
-                      </a:r>
-                      <a:endParaRPr lang="en-US" sz="1050" dirty="0">
-                        <a:latin typeface="Calibri" charset="0"/>
-                        <a:ea typeface="Calibri" charset="0"/>
-                        <a:cs typeface="Calibri" charset="0"/>
-                      </a:endParaRPr>
-                    </a:p>
-                  </a:txBody>
-                  <a:tcPr marL="0" marR="76200" marT="63500" marB="63500" anchor="ctr">
-                    <a:lnL w="0" cap="flat" cmpd="sng" algn="ctr">
-                      <a:solidFill>
-                        <a:srgbClr val="666666"/>
-                      </a:solidFill>
-                      <a:prstDash val="solid"/>
-                      <a:round/>
-                      <a:headEnd type="none" w="med" len="med"/>
-                      <a:tailEnd type="none" w="med" len="med"/>
-                    </a:lnL>
-                    <a:lnR w="0" cap="flat" cmpd="sng" algn="ctr">
-                      <a:solidFill>
-                        <a:srgbClr val="666666"/>
-                      </a:solidFill>
-                      <a:prstDash val="solid"/>
-                      <a:round/>
-                      <a:headEnd type="none" w="med" len="med"/>
-                      <a:tailEnd type="none" w="med" len="med"/>
-                    </a:lnR>
-                    <a:lnT w="0" cap="flat" cmpd="sng" algn="ctr">
-                      <a:solidFill>
-                        <a:srgbClr val="666666"/>
-                      </a:solidFill>
-                      <a:prstDash val="solid"/>
-                      <a:round/>
-                      <a:headEnd type="none" w="med" len="med"/>
-                      <a:tailEnd type="none" w="med" len="med"/>
-                    </a:lnT>
-                    <a:lnB w="7620" cap="flat" cmpd="sng" algn="ctr">
-                      <a:solidFill>
-                        <a:srgbClr val="E2E4EA"/>
-                      </a:solidFill>
-                      <a:prstDash val="solid"/>
-                      <a:round/>
-                      <a:headEnd type="none" w="med" len="med"/>
-                      <a:tailEnd type="none" w="med" len="med"/>
-                    </a:lnB>
-                    <a:solidFill>
-                      <a:srgbClr val="FBF1EE"/>
-                    </a:solidFill>
-                  </a:tcPr>
-                </a:tc>
-                <a:tc>
-                  <a:txBody>
-                    <a:bodyPr/>
-                    <a:lstStyle/>
-                    <a:p>
-                      <a:pPr algn="r" indent="0" marL="0">
-                        <a:buNone/>
-                      </a:pPr>
-                      <a:r>
-                        <a:rPr lang="en-US" sz="1050" b="1" dirty="0">
-                          <a:solidFill>
-                            <a:srgbClr val="0A1426"/>
-                          </a:solidFill>
-                          <a:latin typeface="Calibri" pitchFamily="34" charset="0"/>
-                          <a:ea typeface="Calibri" pitchFamily="34" charset="-122"/>
-                          <a:cs typeface="Calibri" pitchFamily="34" charset="-120"/>
-                        </a:rPr>
-                        <a:t>22%</a:t>
-                      </a:r>
-                      <a:endParaRPr lang="en-US" sz="1050" dirty="0">
-                        <a:latin typeface="Calibri" charset="0"/>
-                        <a:ea typeface="Calibri" charset="0"/>
-                        <a:cs typeface="Calibri" charset="0"/>
-                      </a:endParaRPr>
-                    </a:p>
-                  </a:txBody>
-                  <a:tcPr marL="0" marR="76200" marT="63500" marB="63500" anchor="ctr">
-                    <a:lnL w="0" cap="flat" cmpd="sng" algn="ctr">
-                      <a:solidFill>
-                        <a:srgbClr val="666666"/>
-                      </a:solidFill>
-                      <a:prstDash val="solid"/>
-                      <a:round/>
-                      <a:headEnd type="none" w="med" len="med"/>
-                      <a:tailEnd type="none" w="med" len="med"/>
-                    </a:lnL>
-                    <a:lnR w="0" cap="flat" cmpd="sng" algn="ctr">
-                      <a:solidFill>
-                        <a:srgbClr val="666666"/>
-                      </a:solidFill>
-                      <a:prstDash val="solid"/>
-                      <a:round/>
-                      <a:headEnd type="none" w="med" len="med"/>
-                      <a:tailEnd type="none" w="med" len="med"/>
-                    </a:lnR>
-                    <a:lnT w="0" cap="flat" cmpd="sng" algn="ctr">
-                      <a:solidFill>
-                        <a:srgbClr val="666666"/>
-                      </a:solidFill>
-                      <a:prstDash val="solid"/>
-                      <a:round/>
-                      <a:headEnd type="none" w="med" len="med"/>
-                      <a:tailEnd type="none" w="med" len="med"/>
-                    </a:lnT>
-                    <a:lnB w="7620" cap="flat" cmpd="sng" algn="ctr">
-                      <a:solidFill>
-                        <a:srgbClr val="E2E4EA"/>
-                      </a:solidFill>
-                      <a:prstDash val="solid"/>
-                      <a:round/>
-                      <a:headEnd type="none" w="med" len="med"/>
-                      <a:tailEnd type="none" w="med" len="med"/>
-                    </a:lnB>
-                    <a:solidFill>
-                      <a:srgbClr val="FBF1EE"/>
-                    </a:solidFill>
-                  </a:tcPr>
-                </a:tc>
-                <a:tc>
-                  <a:txBody>
-                    <a:bodyPr/>
-                    <a:lstStyle/>
-                    <a:p>
-                      <a:pPr algn="r" indent="0" marL="0">
-                        <a:buNone/>
-                      </a:pPr>
-                      <a:r>
-                        <a:rPr lang="en-US" sz="1050" b="1" dirty="0">
-                          <a:solidFill>
-                            <a:srgbClr val="0A1426"/>
-                          </a:solidFill>
-                          <a:latin typeface="Calibri" pitchFamily="34" charset="0"/>
-                          <a:ea typeface="Calibri" pitchFamily="34" charset="-122"/>
-                          <a:cs typeface="Calibri" pitchFamily="34" charset="-120"/>
-                        </a:rPr>
-                        <a:t>22%</a:t>
-                      </a:r>
-                      <a:endParaRPr lang="en-US" sz="1050" dirty="0">
-                        <a:latin typeface="Calibri" charset="0"/>
-                        <a:ea typeface="Calibri" charset="0"/>
-                        <a:cs typeface="Calibri" charset="0"/>
-                      </a:endParaRPr>
-                    </a:p>
-                  </a:txBody>
-                  <a:tcPr marL="0" marR="76200" marT="63500" marB="63500" anchor="ctr">
-                    <a:lnL w="0" cap="flat" cmpd="sng" algn="ctr">
-                      <a:solidFill>
-                        <a:srgbClr val="666666"/>
-                      </a:solidFill>
-                      <a:prstDash val="solid"/>
-                      <a:round/>
-                      <a:headEnd type="none" w="med" len="med"/>
-                      <a:tailEnd type="none" w="med" len="med"/>
-                    </a:lnL>
-                    <a:lnR w="0" cap="flat" cmpd="sng" algn="ctr">
-                      <a:solidFill>
-                        <a:srgbClr val="666666"/>
-                      </a:solidFill>
-                      <a:prstDash val="solid"/>
-                      <a:round/>
-                      <a:headEnd type="none" w="med" len="med"/>
-                      <a:tailEnd type="none" w="med" len="med"/>
-                    </a:lnR>
-                    <a:lnT w="0" cap="flat" cmpd="sng" algn="ctr">
-                      <a:solidFill>
-                        <a:srgbClr val="666666"/>
-                      </a:solidFill>
-                      <a:prstDash val="solid"/>
-                      <a:round/>
-                      <a:headEnd type="none" w="med" len="med"/>
-                      <a:tailEnd type="none" w="med" len="med"/>
-                    </a:lnT>
-                    <a:lnB w="7620" cap="flat" cmpd="sng" algn="ctr">
-                      <a:solidFill>
-                        <a:srgbClr val="E2E4EA"/>
-                      </a:solidFill>
-                      <a:prstDash val="solid"/>
-                      <a:round/>
-                      <a:headEnd type="none" w="med" len="med"/>
-                      <a:tailEnd type="none" w="med" len="med"/>
-                    </a:lnB>
-                    <a:solidFill>
-                      <a:srgbClr val="FBF1EE"/>
-                    </a:solidFill>
-                  </a:tcPr>
-                </a:tc>
-                <a:tc>
-                  <a:txBody>
-                    <a:bodyPr/>
-                    <a:lstStyle/>
-                    <a:p>
-                      <a:pPr algn="r" indent="0" marL="0">
-                        <a:buNone/>
-                      </a:pPr>
-                      <a:r>
-                        <a:rPr lang="en-US" sz="1050" b="1" dirty="0">
-                          <a:solidFill>
-                            <a:srgbClr val="0A1426"/>
-                          </a:solidFill>
-                          <a:latin typeface="Calibri" pitchFamily="34" charset="0"/>
-                          <a:ea typeface="Calibri" pitchFamily="34" charset="-122"/>
-                          <a:cs typeface="Calibri" pitchFamily="34" charset="-120"/>
-                        </a:rPr>
-                        <a:t>24%</a:t>
-                      </a:r>
-                      <a:endParaRPr lang="en-US" sz="1050" dirty="0">
-                        <a:latin typeface="Calibri" charset="0"/>
-                        <a:ea typeface="Calibri" charset="0"/>
-                        <a:cs typeface="Calibri" charset="0"/>
-                      </a:endParaRPr>
-                    </a:p>
-                  </a:txBody>
-                  <a:tcPr marL="0" marR="76200" marT="63500" marB="63500" anchor="ctr">
-                    <a:lnL w="0" cap="flat" cmpd="sng" algn="ctr">
-                      <a:solidFill>
-                        <a:srgbClr val="666666"/>
-                      </a:solidFill>
-                      <a:prstDash val="solid"/>
-                      <a:round/>
-                      <a:headEnd type="none" w="med" len="med"/>
-                      <a:tailEnd type="none" w="med" len="med"/>
-                    </a:lnL>
-                    <a:lnR w="0" cap="flat" cmpd="sng" algn="ctr">
-                      <a:solidFill>
-                        <a:srgbClr val="666666"/>
-                      </a:solidFill>
-                      <a:prstDash val="solid"/>
-                      <a:round/>
-                      <a:headEnd type="none" w="med" len="med"/>
-                      <a:tailEnd type="none" w="med" len="med"/>
-                    </a:lnR>
-                    <a:lnT w="0" cap="flat" cmpd="sng" algn="ctr">
-                      <a:solidFill>
-                        <a:srgbClr val="666666"/>
-                      </a:solidFill>
-                      <a:prstDash val="solid"/>
-                      <a:round/>
-                      <a:headEnd type="none" w="med" len="med"/>
-                      <a:tailEnd type="none" w="med" len="med"/>
-                    </a:lnT>
-                    <a:lnB w="7620" cap="flat" cmpd="sng" algn="ctr">
-                      <a:solidFill>
-                        <a:srgbClr val="E2E4EA"/>
-                      </a:solidFill>
-                      <a:prstDash val="solid"/>
-                      <a:round/>
-                      <a:headEnd type="none" w="med" len="med"/>
-                      <a:tailEnd type="none" w="med" len="med"/>
-                    </a:lnB>
-                    <a:solidFill>
-                      <a:srgbClr val="FBF1EE"/>
-                    </a:solidFill>
-                  </a:tcPr>
-                </a:tc>
-              </a:tr>
             </a:tbl>
           </a:graphicData>
         </a:graphic>
@@ -21408,12 +21062,12 @@
         </p:nvSpPr>
         <p:spPr>
           <a:xfrm>
-            <a:off x="566928" y="5741289"/>
-            <a:ext cx="11057839" cy="731520"/>
+            <a:off x="566928" y="5054981"/>
+            <a:ext cx="11057839" cy="1287363"/>
           </a:xfrm>
           <a:prstGeom prst="roundRect">
             <a:avLst>
-              <a:gd name="adj" fmla="val 6250"/>
+              <a:gd name="adj" fmla="val 3551"/>
             </a:avLst>
           </a:prstGeom>
           <a:solidFill>
@@ -21435,8 +21089,8 @@
         </p:nvSpPr>
         <p:spPr>
           <a:xfrm>
-            <a:off x="804672" y="5887593"/>
-            <a:ext cx="2743200" cy="201168"/>
+            <a:off x="804672" y="5164709"/>
+            <a:ext cx="2743200" cy="182880"/>
           </a:xfrm>
           <a:prstGeom prst="rect">
             <a:avLst/>
@@ -21474,8 +21128,8 @@
         </p:nvSpPr>
         <p:spPr>
           <a:xfrm>
-            <a:off x="804672" y="6088761"/>
-            <a:ext cx="10582351" cy="232220"/>
+            <a:off x="804672" y="5347589"/>
+            <a:ext cx="10582351" cy="288595"/>
           </a:xfrm>
           <a:prstGeom prst="rect">
             <a:avLst/>
@@ -21489,12 +21143,12 @@
           <a:p>
             <a:pPr indent="0" marL="0">
               <a:lnSpc>
-                <a:spcPts val="1725"/>
+                <a:spcPts val="2185"/>
               </a:lnSpc>
               <a:buNone/>
             </a:pPr>
             <a:r>
-              <a:rPr lang="en-US" sz="1500" b="1" dirty="0">
+              <a:rPr lang="en-US" sz="1900" b="1" dirty="0">
                 <a:solidFill>
                   <a:srgbClr val="0A1426"/>
                 </a:solidFill>
@@ -21504,7 +21158,7 @@
               </a:rPr>
               <a:t>What is not in this model</a:t>
             </a:r>
-            <a:endParaRPr lang="en-US" sz="1500" dirty="0"/>
+            <a:endParaRPr lang="en-US" sz="1900" dirty="0"/>
           </a:p>
         </p:txBody>
       </p:sp>
@@ -21516,8 +21170,8 @@
         </p:nvSpPr>
         <p:spPr>
           <a:xfrm>
-            <a:off x="804672" y="6394132"/>
-            <a:ext cx="10582351" cy="182880"/>
+            <a:off x="804672" y="5691048"/>
+            <a:ext cx="10582351" cy="578145"/>
           </a:xfrm>
           <a:prstGeom prst="rect">
             <a:avLst/>
@@ -21531,12 +21185,12 @@
           <a:p>
             <a:pPr indent="0" marL="0">
               <a:lnSpc>
-                <a:spcPts val="1207"/>
+                <a:spcPts val="1704"/>
               </a:lnSpc>
               <a:buNone/>
             </a:pPr>
             <a:r>
-              <a:rPr lang="en-US" sz="850" dirty="0">
+              <a:rPr lang="en-US" sz="1200" dirty="0">
                 <a:solidFill>
                   <a:srgbClr val="3B4660"/>
                 </a:solidFill>
@@ -21544,9 +21198,9 @@
                 <a:ea typeface="Calibri" pitchFamily="34" charset="-122"/>
                 <a:cs typeface="Calibri" pitchFamily="34" charset="-120"/>
               </a:rPr>
-              <a:t>ADA requires CCTV integrated with the Agra Smart City centre, ex-servicemen at entry points, police verification, a dedicated technical supervisor and six-monthly safety audits — all costed above. What is not costed is replacing any laser or fountain asset that reaches end of life during the term. That burden sits with the agency, and the onus of proving irreparability sits there too. Get the commissioning dates and AMC history before bidding.</a:t>
+              <a:t>The CCTV integration, ex-servicemen at entry, police verification and six-monthly audits are costed above. What is not costed is replacing a laser or fountain asset that reaches end of life mid-term — that burden sits with the agency. Get the AMC history before bidding.</a:t>
             </a:r>
-            <a:endParaRPr lang="en-US" sz="850" dirty="0"/>
+            <a:endParaRPr lang="en-US" sz="1200" dirty="0"/>
           </a:p>
         </p:txBody>
       </p:sp>
@@ -21727,8 +21381,8 @@
         </p:nvSpPr>
         <p:spPr>
           <a:xfrm>
-            <a:off x="566928" y="1005840"/>
-            <a:ext cx="11057839" cy="512064"/>
+            <a:off x="566928" y="950976"/>
+            <a:ext cx="11057839" cy="231140"/>
           </a:xfrm>
           <a:prstGeom prst="rect">
             <a:avLst/>
@@ -21742,12 +21396,12 @@
           <a:p>
             <a:pPr indent="0" marL="0">
               <a:lnSpc>
-                <a:spcPts val="1900"/>
+                <a:spcPts val="1750"/>
               </a:lnSpc>
               <a:buNone/>
             </a:pPr>
             <a:r>
-              <a:rPr lang="en-US" sz="1350" dirty="0">
+              <a:rPr lang="en-US" sz="1250" dirty="0">
                 <a:solidFill>
                   <a:srgbClr val="3B4660"/>
                 </a:solidFill>
@@ -21757,7 +21411,7 @@
               </a:rPr>
               <a:t>Year 1 loses money — a 15-day mobilisation window, a full-year licence fee from day one, and a park that has never opened to the public.</a:t>
             </a:r>
-            <a:endParaRPr lang="en-US" sz="1350" dirty="0"/>
+            <a:endParaRPr lang="en-US" sz="1250" dirty="0"/>
           </a:p>
         </p:txBody>
       </p:sp>
@@ -21768,8 +21422,8 @@
           <p:nvPr/>
         </p:nvGraphicFramePr>
         <p:xfrm>
-          <a:off x="566928" y="1627632"/>
-          <a:ext cx="11057839" cy="3017520"/>
+          <a:off x="566928" y="1310132"/>
+          <a:ext cx="11057839" cy="2697480"/>
         </p:xfrm>
         <a:graphic xmlns:a="http://schemas.openxmlformats.org/drawingml/2006/main">
           <a:graphicData uri="http://schemas.openxmlformats.org/drawingml/2006/chart">
@@ -21786,11 +21440,11 @@
         <p:spPr>
           <a:xfrm>
             <a:off x="566928" y="4956048"/>
-            <a:ext cx="3539642" cy="1207008"/>
+            <a:ext cx="3539642" cy="1133856"/>
           </a:xfrm>
           <a:prstGeom prst="roundRect">
             <a:avLst>
-              <a:gd name="adj" fmla="val 4545"/>
+              <a:gd name="adj" fmla="val 4839"/>
             </a:avLst>
           </a:prstGeom>
           <a:solidFill>
@@ -21812,8 +21466,8 @@
         </p:nvSpPr>
         <p:spPr>
           <a:xfrm>
-            <a:off x="749808" y="5093208"/>
-            <a:ext cx="3173882" cy="219456"/>
+            <a:off x="749808" y="5074920"/>
+            <a:ext cx="3173882" cy="237744"/>
           </a:xfrm>
           <a:prstGeom prst="rect">
             <a:avLst/>
@@ -21822,14 +21476,14 @@
           <a:ln/>
         </p:spPr>
         <p:txBody>
-          <a:bodyPr wrap="square" lIns="0" tIns="0" rIns="0" bIns="0" rtlCol="0" anchor="ctr"/>
+          <a:bodyPr wrap="square" lIns="0" tIns="0" rIns="0" bIns="0" rtlCol="0" anchor="t"/>
           <a:lstStyle/>
           <a:p>
             <a:pPr indent="0" marL="0">
               <a:buNone/>
             </a:pPr>
             <a:r>
-              <a:rPr lang="en-US" sz="900" b="1" spc="120" kern="0" dirty="0">
+              <a:rPr lang="en-US" sz="850" b="1" spc="100" kern="0" dirty="0">
                 <a:solidFill>
                   <a:srgbClr val="6E7689"/>
                 </a:solidFill>
@@ -21839,7 +21493,7 @@
               </a:rPr>
               <a:t>EBITDA BREAKEVEN</a:t>
             </a:r>
-            <a:endParaRPr lang="en-US" sz="900" dirty="0"/>
+            <a:endParaRPr lang="en-US" sz="850" dirty="0"/>
           </a:p>
         </p:txBody>
       </p:sp>
@@ -21861,7 +21515,9 @@
           <a:ln/>
         </p:spPr>
         <p:txBody>
-          <a:bodyPr wrap="square" lIns="0" tIns="0" rIns="0" bIns="0" rtlCol="0" anchor="t"/>
+          <a:bodyPr wrap="square" lIns="0" tIns="0" rIns="0" bIns="0" rtlCol="0" anchor="t">
+            <a:normAutofit/>
+          </a:bodyPr>
           <a:lstStyle/>
           <a:p>
             <a:pPr indent="0" marL="0">
@@ -21891,7 +21547,7 @@
         <p:spPr>
           <a:xfrm>
             <a:off x="749808" y="5797296"/>
-            <a:ext cx="3173882" cy="292608"/>
+            <a:ext cx="3173882" cy="219456"/>
           </a:xfrm>
           <a:prstGeom prst="rect">
             <a:avLst/>
@@ -21933,11 +21589,11 @@
         <p:spPr>
           <a:xfrm>
             <a:off x="4326026" y="4956048"/>
-            <a:ext cx="3539642" cy="1207008"/>
+            <a:ext cx="3539642" cy="1133856"/>
           </a:xfrm>
           <a:prstGeom prst="roundRect">
             <a:avLst>
-              <a:gd name="adj" fmla="val 4545"/>
+              <a:gd name="adj" fmla="val 4839"/>
             </a:avLst>
           </a:prstGeom>
           <a:solidFill>
@@ -21959,8 +21615,8 @@
         </p:nvSpPr>
         <p:spPr>
           <a:xfrm>
-            <a:off x="4508906" y="5093208"/>
-            <a:ext cx="3173882" cy="219456"/>
+            <a:off x="4508906" y="5074920"/>
+            <a:ext cx="3173882" cy="237744"/>
           </a:xfrm>
           <a:prstGeom prst="rect">
             <a:avLst/>
@@ -21969,14 +21625,14 @@
           <a:ln/>
         </p:spPr>
         <p:txBody>
-          <a:bodyPr wrap="square" lIns="0" tIns="0" rIns="0" bIns="0" rtlCol="0" anchor="ctr"/>
+          <a:bodyPr wrap="square" lIns="0" tIns="0" rIns="0" bIns="0" rtlCol="0" anchor="t"/>
           <a:lstStyle/>
           <a:p>
             <a:pPr indent="0" marL="0">
               <a:buNone/>
             </a:pPr>
             <a:r>
-              <a:rPr lang="en-US" sz="900" b="1" spc="120" kern="0" dirty="0">
+              <a:rPr lang="en-US" sz="850" b="1" spc="100" kern="0" dirty="0">
                 <a:solidFill>
                   <a:srgbClr val="6E7689"/>
                 </a:solidFill>
@@ -21986,7 +21642,7 @@
               </a:rPr>
               <a:t>MARGIN AT MATURITY</a:t>
             </a:r>
-            <a:endParaRPr lang="en-US" sz="900" dirty="0"/>
+            <a:endParaRPr lang="en-US" sz="850" dirty="0"/>
           </a:p>
         </p:txBody>
       </p:sp>
@@ -22008,7 +21664,9 @@
           <a:ln/>
         </p:spPr>
         <p:txBody>
-          <a:bodyPr wrap="square" lIns="0" tIns="0" rIns="0" bIns="0" rtlCol="0" anchor="t"/>
+          <a:bodyPr wrap="square" lIns="0" tIns="0" rIns="0" bIns="0" rtlCol="0" anchor="t">
+            <a:normAutofit/>
+          </a:bodyPr>
           <a:lstStyle/>
           <a:p>
             <a:pPr indent="0" marL="0">
@@ -22038,7 +21696,7 @@
         <p:spPr>
           <a:xfrm>
             <a:off x="4508906" y="5797296"/>
-            <a:ext cx="3173882" cy="292608"/>
+            <a:ext cx="3173882" cy="219456"/>
           </a:xfrm>
           <a:prstGeom prst="rect">
             <a:avLst/>
@@ -22080,11 +21738,11 @@
         <p:spPr>
           <a:xfrm>
             <a:off x="8085125" y="4956048"/>
-            <a:ext cx="3539642" cy="1207008"/>
+            <a:ext cx="3539642" cy="1133856"/>
           </a:xfrm>
           <a:prstGeom prst="roundRect">
             <a:avLst>
-              <a:gd name="adj" fmla="val 4545"/>
+              <a:gd name="adj" fmla="val 4839"/>
             </a:avLst>
           </a:prstGeom>
           <a:solidFill>
@@ -22106,8 +21764,8 @@
         </p:nvSpPr>
         <p:spPr>
           <a:xfrm>
-            <a:off x="8268005" y="5093208"/>
-            <a:ext cx="3173882" cy="219456"/>
+            <a:off x="8268005" y="5074920"/>
+            <a:ext cx="3173882" cy="237744"/>
           </a:xfrm>
           <a:prstGeom prst="rect">
             <a:avLst/>
@@ -22116,14 +21774,14 @@
           <a:ln/>
         </p:spPr>
         <p:txBody>
-          <a:bodyPr wrap="square" lIns="0" tIns="0" rIns="0" bIns="0" rtlCol="0" anchor="ctr"/>
+          <a:bodyPr wrap="square" lIns="0" tIns="0" rIns="0" bIns="0" rtlCol="0" anchor="t"/>
           <a:lstStyle/>
           <a:p>
             <a:pPr indent="0" marL="0">
               <a:buNone/>
             </a:pPr>
             <a:r>
-              <a:rPr lang="en-US" sz="900" b="1" spc="120" kern="0" dirty="0">
+              <a:rPr lang="en-US" sz="850" b="1" spc="100" kern="0" dirty="0">
                 <a:solidFill>
                   <a:srgbClr val="6E7689"/>
                 </a:solidFill>
@@ -22133,7 +21791,7 @@
               </a:rPr>
               <a:t>CUMULATIVE EBITDA</a:t>
             </a:r>
-            <a:endParaRPr lang="en-US" sz="900" dirty="0"/>
+            <a:endParaRPr lang="en-US" sz="850" dirty="0"/>
           </a:p>
         </p:txBody>
       </p:sp>
@@ -22155,7 +21813,9 @@
           <a:ln/>
         </p:spPr>
         <p:txBody>
-          <a:bodyPr wrap="square" lIns="0" tIns="0" rIns="0" bIns="0" rtlCol="0" anchor="t"/>
+          <a:bodyPr wrap="square" lIns="0" tIns="0" rIns="0" bIns="0" rtlCol="0" anchor="t">
+            <a:normAutofit/>
+          </a:bodyPr>
           <a:lstStyle/>
           <a:p>
             <a:pPr indent="0" marL="0">
@@ -22185,7 +21845,7 @@
         <p:spPr>
           <a:xfrm>
             <a:off x="8268005" y="5797296"/>
-            <a:ext cx="3173882" cy="292608"/>
+            <a:ext cx="3173882" cy="219456"/>
           </a:xfrm>
           <a:prstGeom prst="rect">
             <a:avLst/>
@@ -22395,8 +22055,8 @@
         </p:nvSpPr>
         <p:spPr>
           <a:xfrm>
-            <a:off x="566928" y="1005840"/>
-            <a:ext cx="11057839" cy="512064"/>
+            <a:off x="566928" y="950976"/>
+            <a:ext cx="11057839" cy="462280"/>
           </a:xfrm>
           <a:prstGeom prst="rect">
             <a:avLst/>
@@ -22410,12 +22070,12 @@
           <a:p>
             <a:pPr indent="0" marL="0">
               <a:lnSpc>
-                <a:spcPts val="1900"/>
+                <a:spcPts val="1750"/>
               </a:lnSpc>
               <a:buNone/>
             </a:pPr>
             <a:r>
-              <a:rPr lang="en-US" sz="1350" dirty="0">
+              <a:rPr lang="en-US" sz="1250" dirty="0">
                 <a:solidFill>
                   <a:srgbClr val="3B4660"/>
                 </a:solidFill>
@@ -22425,7 +22085,7 @@
               </a:rPr>
               <a:t>Unlevered free cash flow to the project. Capital deployed is the true project cost — the revolving opex facility is financing, not project cost, so it is excluded here.</a:t>
             </a:r>
-            <a:endParaRPr lang="en-US" sz="1350" dirty="0"/>
+            <a:endParaRPr lang="en-US" sz="1250" dirty="0"/>
           </a:p>
         </p:txBody>
       </p:sp>
@@ -22436,8 +22096,8 @@
           <p:nvPr/>
         </p:nvGraphicFramePr>
         <p:xfrm>
-          <a:off x="566928" y="1627632"/>
-          <a:ext cx="11057839" cy="2514600"/>
+          <a:off x="566928" y="1541272"/>
+          <a:ext cx="11057839" cy="2194560"/>
         </p:xfrm>
         <a:graphic xmlns:a="http://schemas.openxmlformats.org/drawingml/2006/main">
           <a:graphicData uri="http://schemas.openxmlformats.org/drawingml/2006/chart">
@@ -22453,12 +22113,12 @@
         </p:nvSpPr>
         <p:spPr>
           <a:xfrm>
-            <a:off x="566928" y="4370832"/>
-            <a:ext cx="2599868" cy="1280160"/>
+            <a:off x="566928" y="3964432"/>
+            <a:ext cx="2599868" cy="1207008"/>
           </a:xfrm>
           <a:prstGeom prst="roundRect">
             <a:avLst>
-              <a:gd name="adj" fmla="val 4286"/>
+              <a:gd name="adj" fmla="val 4545"/>
             </a:avLst>
           </a:prstGeom>
           <a:solidFill>
@@ -22480,8 +22140,8 @@
         </p:nvSpPr>
         <p:spPr>
           <a:xfrm>
-            <a:off x="749808" y="4507992"/>
-            <a:ext cx="2234108" cy="219456"/>
+            <a:off x="749808" y="4083304"/>
+            <a:ext cx="2234108" cy="237744"/>
           </a:xfrm>
           <a:prstGeom prst="rect">
             <a:avLst/>
@@ -22490,14 +22150,14 @@
           <a:ln/>
         </p:spPr>
         <p:txBody>
-          <a:bodyPr wrap="square" lIns="0" tIns="0" rIns="0" bIns="0" rtlCol="0" anchor="ctr"/>
+          <a:bodyPr wrap="square" lIns="0" tIns="0" rIns="0" bIns="0" rtlCol="0" anchor="t"/>
           <a:lstStyle/>
           <a:p>
             <a:pPr indent="0" marL="0">
               <a:buNone/>
             </a:pPr>
             <a:r>
-              <a:rPr lang="en-US" sz="900" b="1" spc="120" kern="0" dirty="0">
+              <a:rPr lang="en-US" sz="850" b="1" spc="100" kern="0" dirty="0">
                 <a:solidFill>
                   <a:srgbClr val="6E7689"/>
                 </a:solidFill>
@@ -22507,7 +22167,7 @@
               </a:rPr>
               <a:t>PROJECT IRR</a:t>
             </a:r>
-            <a:endParaRPr lang="en-US" sz="900" dirty="0"/>
+            <a:endParaRPr lang="en-US" sz="850" dirty="0"/>
           </a:p>
         </p:txBody>
       </p:sp>
@@ -22519,7 +22179,7 @@
         </p:nvSpPr>
         <p:spPr>
           <a:xfrm>
-            <a:off x="749808" y="4736592"/>
+            <a:off x="749808" y="4330192"/>
             <a:ext cx="2234108" cy="457200"/>
           </a:xfrm>
           <a:prstGeom prst="rect">
@@ -22529,7 +22189,9 @@
           <a:ln/>
         </p:spPr>
         <p:txBody>
-          <a:bodyPr wrap="square" lIns="0" tIns="0" rIns="0" bIns="0" rtlCol="0" anchor="t"/>
+          <a:bodyPr wrap="square" lIns="0" tIns="0" rIns="0" bIns="0" rtlCol="0" anchor="t">
+            <a:normAutofit/>
+          </a:bodyPr>
           <a:lstStyle/>
           <a:p>
             <a:pPr indent="0" marL="0">
@@ -22558,8 +22220,8 @@
         </p:nvSpPr>
         <p:spPr>
           <a:xfrm>
-            <a:off x="749808" y="5212080"/>
-            <a:ext cx="2234108" cy="365760"/>
+            <a:off x="749808" y="4805680"/>
+            <a:ext cx="2234108" cy="292608"/>
           </a:xfrm>
           <a:prstGeom prst="rect">
             <a:avLst/>
@@ -22600,12 +22262,12 @@
         </p:nvSpPr>
         <p:spPr>
           <a:xfrm>
-            <a:off x="3386252" y="4370832"/>
-            <a:ext cx="2599868" cy="1280160"/>
+            <a:off x="3386252" y="3964432"/>
+            <a:ext cx="2599868" cy="1207008"/>
           </a:xfrm>
           <a:prstGeom prst="roundRect">
             <a:avLst>
-              <a:gd name="adj" fmla="val 4286"/>
+              <a:gd name="adj" fmla="val 4545"/>
             </a:avLst>
           </a:prstGeom>
           <a:solidFill>
@@ -22627,8 +22289,8 @@
         </p:nvSpPr>
         <p:spPr>
           <a:xfrm>
-            <a:off x="3569132" y="4507992"/>
-            <a:ext cx="2234108" cy="219456"/>
+            <a:off x="3569132" y="4083304"/>
+            <a:ext cx="2234108" cy="237744"/>
           </a:xfrm>
           <a:prstGeom prst="rect">
             <a:avLst/>
@@ -22637,14 +22299,14 @@
           <a:ln/>
         </p:spPr>
         <p:txBody>
-          <a:bodyPr wrap="square" lIns="0" tIns="0" rIns="0" bIns="0" rtlCol="0" anchor="ctr"/>
+          <a:bodyPr wrap="square" lIns="0" tIns="0" rIns="0" bIns="0" rtlCol="0" anchor="t"/>
           <a:lstStyle/>
           <a:p>
             <a:pPr indent="0" marL="0">
               <a:buNone/>
             </a:pPr>
             <a:r>
-              <a:rPr lang="en-US" sz="900" b="1" spc="120" kern="0" dirty="0">
+              <a:rPr lang="en-US" sz="850" b="1" spc="100" kern="0" dirty="0">
                 <a:solidFill>
                   <a:srgbClr val="6E7689"/>
                 </a:solidFill>
@@ -22654,7 +22316,7 @@
               </a:rPr>
               <a:t>PAYBACK</a:t>
             </a:r>
-            <a:endParaRPr lang="en-US" sz="900" dirty="0"/>
+            <a:endParaRPr lang="en-US" sz="850" dirty="0"/>
           </a:p>
         </p:txBody>
       </p:sp>
@@ -22666,7 +22328,7 @@
         </p:nvSpPr>
         <p:spPr>
           <a:xfrm>
-            <a:off x="3569132" y="4736592"/>
+            <a:off x="3569132" y="4330192"/>
             <a:ext cx="2234108" cy="457200"/>
           </a:xfrm>
           <a:prstGeom prst="rect">
@@ -22676,7 +22338,9 @@
           <a:ln/>
         </p:spPr>
         <p:txBody>
-          <a:bodyPr wrap="square" lIns="0" tIns="0" rIns="0" bIns="0" rtlCol="0" anchor="t"/>
+          <a:bodyPr wrap="square" lIns="0" tIns="0" rIns="0" bIns="0" rtlCol="0" anchor="t">
+            <a:normAutofit/>
+          </a:bodyPr>
           <a:lstStyle/>
           <a:p>
             <a:pPr indent="0" marL="0">
@@ -22705,8 +22369,8 @@
         </p:nvSpPr>
         <p:spPr>
           <a:xfrm>
-            <a:off x="3569132" y="5212080"/>
-            <a:ext cx="2234108" cy="365760"/>
+            <a:off x="3569132" y="4805680"/>
+            <a:ext cx="2234108" cy="292608"/>
           </a:xfrm>
           <a:prstGeom prst="rect">
             <a:avLst/>
@@ -22747,12 +22411,12 @@
         </p:nvSpPr>
         <p:spPr>
           <a:xfrm>
-            <a:off x="6205576" y="4370832"/>
-            <a:ext cx="2599868" cy="1280160"/>
+            <a:off x="6205576" y="3964432"/>
+            <a:ext cx="2599868" cy="1207008"/>
           </a:xfrm>
           <a:prstGeom prst="roundRect">
             <a:avLst>
-              <a:gd name="adj" fmla="val 4286"/>
+              <a:gd name="adj" fmla="val 4545"/>
             </a:avLst>
           </a:prstGeom>
           <a:solidFill>
@@ -22774,8 +22438,8 @@
         </p:nvSpPr>
         <p:spPr>
           <a:xfrm>
-            <a:off x="6388456" y="4507992"/>
-            <a:ext cx="2234108" cy="219456"/>
+            <a:off x="6388456" y="4083304"/>
+            <a:ext cx="2234108" cy="237744"/>
           </a:xfrm>
           <a:prstGeom prst="rect">
             <a:avLst/>
@@ -22784,14 +22448,14 @@
           <a:ln/>
         </p:spPr>
         <p:txBody>
-          <a:bodyPr wrap="square" lIns="0" tIns="0" rIns="0" bIns="0" rtlCol="0" anchor="ctr"/>
+          <a:bodyPr wrap="square" lIns="0" tIns="0" rIns="0" bIns="0" rtlCol="0" anchor="t"/>
           <a:lstStyle/>
           <a:p>
             <a:pPr indent="0" marL="0">
               <a:buNone/>
             </a:pPr>
             <a:r>
-              <a:rPr lang="en-US" sz="900" b="1" spc="120" kern="0" dirty="0">
+              <a:rPr lang="en-US" sz="850" b="1" spc="100" kern="0" dirty="0">
                 <a:solidFill>
                   <a:srgbClr val="6E7689"/>
                 </a:solidFill>
@@ -22801,7 +22465,7 @@
               </a:rPr>
               <a:t>ALL-IN COST OF CGTMSE DEBT</a:t>
             </a:r>
-            <a:endParaRPr lang="en-US" sz="900" dirty="0"/>
+            <a:endParaRPr lang="en-US" sz="850" dirty="0"/>
           </a:p>
         </p:txBody>
       </p:sp>
@@ -22813,7 +22477,7 @@
         </p:nvSpPr>
         <p:spPr>
           <a:xfrm>
-            <a:off x="6388456" y="4736592"/>
+            <a:off x="6388456" y="4330192"/>
             <a:ext cx="2234108" cy="457200"/>
           </a:xfrm>
           <a:prstGeom prst="rect">
@@ -22823,7 +22487,9 @@
           <a:ln/>
         </p:spPr>
         <p:txBody>
-          <a:bodyPr wrap="square" lIns="0" tIns="0" rIns="0" bIns="0" rtlCol="0" anchor="t"/>
+          <a:bodyPr wrap="square" lIns="0" tIns="0" rIns="0" bIns="0" rtlCol="0" anchor="t">
+            <a:normAutofit/>
+          </a:bodyPr>
           <a:lstStyle/>
           <a:p>
             <a:pPr indent="0" marL="0">
@@ -22852,8 +22518,8 @@
         </p:nvSpPr>
         <p:spPr>
           <a:xfrm>
-            <a:off x="6388456" y="5212080"/>
-            <a:ext cx="2234108" cy="365760"/>
+            <a:off x="6388456" y="4805680"/>
+            <a:ext cx="2234108" cy="292608"/>
           </a:xfrm>
           <a:prstGeom prst="rect">
             <a:avLst/>
@@ -22894,12 +22560,12 @@
         </p:nvSpPr>
         <p:spPr>
           <a:xfrm>
-            <a:off x="9024899" y="4370832"/>
-            <a:ext cx="2599868" cy="1280160"/>
+            <a:off x="9024899" y="3964432"/>
+            <a:ext cx="2599868" cy="1207008"/>
           </a:xfrm>
           <a:prstGeom prst="roundRect">
             <a:avLst>
-              <a:gd name="adj" fmla="val 4286"/>
+              <a:gd name="adj" fmla="val 4545"/>
             </a:avLst>
           </a:prstGeom>
           <a:solidFill>
@@ -22921,8 +22587,8 @@
         </p:nvSpPr>
         <p:spPr>
           <a:xfrm>
-            <a:off x="9207779" y="4507992"/>
-            <a:ext cx="2234108" cy="219456"/>
+            <a:off x="9207779" y="4083304"/>
+            <a:ext cx="2234108" cy="237744"/>
           </a:xfrm>
           <a:prstGeom prst="rect">
             <a:avLst/>
@@ -22931,14 +22597,14 @@
           <a:ln/>
         </p:spPr>
         <p:txBody>
-          <a:bodyPr wrap="square" lIns="0" tIns="0" rIns="0" bIns="0" rtlCol="0" anchor="ctr"/>
+          <a:bodyPr wrap="square" lIns="0" tIns="0" rIns="0" bIns="0" rtlCol="0" anchor="t"/>
           <a:lstStyle/>
           <a:p>
             <a:pPr indent="0" marL="0">
               <a:buNone/>
             </a:pPr>
             <a:r>
-              <a:rPr lang="en-US" sz="900" b="1" spc="120" kern="0" dirty="0">
+              <a:rPr lang="en-US" sz="850" b="1" spc="100" kern="0" dirty="0">
                 <a:solidFill>
                   <a:srgbClr val="6E7689"/>
                 </a:solidFill>
@@ -22948,7 +22614,7 @@
               </a:rPr>
               <a:t>SPREAD OVER DEBT</a:t>
             </a:r>
-            <a:endParaRPr lang="en-US" sz="900" dirty="0"/>
+            <a:endParaRPr lang="en-US" sz="850" dirty="0"/>
           </a:p>
         </p:txBody>
       </p:sp>
@@ -22960,7 +22626,7 @@
         </p:nvSpPr>
         <p:spPr>
           <a:xfrm>
-            <a:off x="9207779" y="4736592"/>
+            <a:off x="9207779" y="4330192"/>
             <a:ext cx="2234108" cy="457200"/>
           </a:xfrm>
           <a:prstGeom prst="rect">
@@ -22970,7 +22636,9 @@
           <a:ln/>
         </p:spPr>
         <p:txBody>
-          <a:bodyPr wrap="square" lIns="0" tIns="0" rIns="0" bIns="0" rtlCol="0" anchor="t"/>
+          <a:bodyPr wrap="square" lIns="0" tIns="0" rIns="0" bIns="0" rtlCol="0" anchor="t">
+            <a:normAutofit/>
+          </a:bodyPr>
           <a:lstStyle/>
           <a:p>
             <a:pPr indent="0" marL="0">
@@ -22999,8 +22667,8 @@
         </p:nvSpPr>
         <p:spPr>
           <a:xfrm>
-            <a:off x="9207779" y="5212080"/>
-            <a:ext cx="2234108" cy="365760"/>
+            <a:off x="9207779" y="4805680"/>
+            <a:ext cx="2234108" cy="292608"/>
           </a:xfrm>
           <a:prstGeom prst="rect">
             <a:avLst/>
@@ -23210,8 +22878,8 @@
         </p:nvSpPr>
         <p:spPr>
           <a:xfrm>
-            <a:off x="566928" y="1005840"/>
-            <a:ext cx="11057839" cy="512064"/>
+            <a:off x="566928" y="950976"/>
+            <a:ext cx="11057839" cy="231140"/>
           </a:xfrm>
           <a:prstGeom prst="rect">
             <a:avLst/>
@@ -23225,12 +22893,12 @@
           <a:p>
             <a:pPr indent="0" marL="0">
               <a:lnSpc>
-                <a:spcPts val="1900"/>
+                <a:spcPts val="1750"/>
               </a:lnSpc>
               <a:buNone/>
             </a:pPr>
             <a:r>
-              <a:rPr lang="en-US" sz="1350" dirty="0">
+              <a:rPr lang="en-US" sz="1250" dirty="0">
                 <a:solidFill>
                   <a:srgbClr val="3B4660"/>
                 </a:solidFill>
@@ -23240,7 +22908,7 @@
               </a:rPr>
               <a:t>Three drivers move this project: footfall, show conversion, and the licence fee you bid. The downside moves all three against you at once.</a:t>
             </a:r>
-            <a:endParaRPr lang="en-US" sz="1350" dirty="0"/>
+            <a:endParaRPr lang="en-US" sz="1250" dirty="0"/>
           </a:p>
         </p:txBody>
       </p:sp>
@@ -23251,8 +22919,8 @@
           <p:nvPr/>
         </p:nvGraphicFramePr>
         <p:xfrm>
-          <a:off x="566928" y="1627632"/>
-          <a:ext cx="11057839" cy="2286000"/>
+          <a:off x="566928" y="1310132"/>
+          <a:ext cx="11057839" cy="1965960"/>
         </p:xfrm>
         <a:graphic xmlns:a="http://schemas.openxmlformats.org/drawingml/2006/main">
           <a:graphicData uri="http://schemas.openxmlformats.org/drawingml/2006/chart">
@@ -23275,7 +22943,7 @@
           </p:nvPr>
         </p:nvGraphicFramePr>
         <p:xfrm>
-          <a:off x="566928" y="4142232"/>
+          <a:off x="566928" y="3504692"/>
           <a:ext cx="11057839" cy="914400"/>
         </p:xfrm>
         <a:graphic>
@@ -24659,12 +24327,12 @@
         </p:nvSpPr>
         <p:spPr>
           <a:xfrm>
-            <a:off x="566928" y="5532120"/>
-            <a:ext cx="11057839" cy="758952"/>
+            <a:off x="566928" y="3605276"/>
+            <a:ext cx="11057839" cy="1062299"/>
           </a:xfrm>
           <a:prstGeom prst="roundRect">
             <a:avLst>
-              <a:gd name="adj" fmla="val 6024"/>
+              <a:gd name="adj" fmla="val 4304"/>
             </a:avLst>
           </a:prstGeom>
           <a:solidFill>
@@ -24686,8 +24354,8 @@
         </p:nvSpPr>
         <p:spPr>
           <a:xfrm>
-            <a:off x="804672" y="5678424"/>
-            <a:ext cx="2743200" cy="201168"/>
+            <a:off x="804672" y="3715004"/>
+            <a:ext cx="2743200" cy="182880"/>
           </a:xfrm>
           <a:prstGeom prst="rect">
             <a:avLst/>
@@ -24725,8 +24393,8 @@
         </p:nvSpPr>
         <p:spPr>
           <a:xfrm>
-            <a:off x="804672" y="5879592"/>
-            <a:ext cx="10582351" cy="232220"/>
+            <a:off x="804672" y="3897884"/>
+            <a:ext cx="10582351" cy="288595"/>
           </a:xfrm>
           <a:prstGeom prst="rect">
             <a:avLst/>
@@ -24740,12 +24408,12 @@
           <a:p>
             <a:pPr indent="0" marL="0">
               <a:lnSpc>
-                <a:spcPts val="1725"/>
+                <a:spcPts val="2185"/>
               </a:lnSpc>
               <a:buNone/>
             </a:pPr>
             <a:r>
-              <a:rPr lang="en-US" sz="1500" b="1" dirty="0">
+              <a:rPr lang="en-US" sz="1900" b="1" dirty="0">
                 <a:solidFill>
                   <a:srgbClr val="0A1426"/>
                 </a:solidFill>
@@ -24755,7 +24423,7 @@
               </a:rPr>
               <a:t>The downside is a bad bid, not a bad year</a:t>
             </a:r>
-            <a:endParaRPr lang="en-US" sz="1500" dirty="0"/>
+            <a:endParaRPr lang="en-US" sz="1900" dirty="0"/>
           </a:p>
         </p:txBody>
       </p:sp>
@@ -24767,8 +24435,8 @@
         </p:nvSpPr>
         <p:spPr>
           <a:xfrm>
-            <a:off x="804672" y="6184964"/>
-            <a:ext cx="10582351" cy="182880"/>
+            <a:off x="804672" y="4241343"/>
+            <a:ext cx="10582351" cy="353080"/>
           </a:xfrm>
           <a:prstGeom prst="rect">
             <a:avLst/>
@@ -24782,12 +24450,12 @@
           <a:p>
             <a:pPr indent="0" marL="0">
               <a:lnSpc>
-                <a:spcPts val="1207"/>
+                <a:spcPts val="1704"/>
               </a:lnSpc>
               <a:buNone/>
             </a:pPr>
             <a:r>
-              <a:rPr lang="en-US" sz="850" dirty="0">
+              <a:rPr lang="en-US" sz="1200" dirty="0">
                 <a:solidFill>
                   <a:srgbClr val="3B4660"/>
                 </a:solidFill>
@@ -24797,7 +24465,7 @@
               </a:rPr>
               <a:t>The model solves the break-even licence fee at ₹45.1 L a year — ₹3.76 L a month, about 50% above ADA's reserve. Hold that line in the auction room.</a:t>
             </a:r>
-            <a:endParaRPr lang="en-US" sz="850" dirty="0"/>
+            <a:endParaRPr lang="en-US" sz="1200" dirty="0"/>
           </a:p>
         </p:txBody>
       </p:sp>
@@ -24978,8 +24646,8 @@
         </p:nvSpPr>
         <p:spPr>
           <a:xfrm>
-            <a:off x="566928" y="1005840"/>
-            <a:ext cx="11057839" cy="512064"/>
+            <a:off x="566928" y="950976"/>
+            <a:ext cx="11057839" cy="462280"/>
           </a:xfrm>
           <a:prstGeom prst="rect">
             <a:avLst/>
@@ -24993,12 +24661,12 @@
           <a:p>
             <a:pPr indent="0" marL="0">
               <a:lnSpc>
-                <a:spcPts val="1900"/>
+                <a:spcPts val="1750"/>
               </a:lnSpc>
               <a:buNone/>
             </a:pPr>
             <a:r>
-              <a:rPr lang="en-US" sz="1350" dirty="0">
+              <a:rPr lang="en-US" sz="1250" dirty="0">
                 <a:solidFill>
                   <a:srgbClr val="3B4660"/>
                 </a:solidFill>
@@ -25008,7 +24676,7 @@
               </a:rPr>
               <a:t>A third party funds the project for a share of it. No repayment obligation, no covenant — and on these numbers the most expensive money on the table.</a:t>
             </a:r>
-            <a:endParaRPr lang="en-US" sz="1350" dirty="0"/>
+            <a:endParaRPr lang="en-US" sz="1250" dirty="0"/>
           </a:p>
         </p:txBody>
       </p:sp>
@@ -25027,7 +24695,7 @@
           </p:nvPr>
         </p:nvGraphicFramePr>
         <p:xfrm>
-          <a:off x="566928" y="1627632"/>
+          <a:off x="566928" y="1541272"/>
           <a:ext cx="11057839" cy="914400"/>
         </p:xfrm>
         <a:graphic>
@@ -26154,12 +25822,12 @@
         </p:nvSpPr>
         <p:spPr>
           <a:xfrm>
-            <a:off x="566928" y="4869053"/>
-            <a:ext cx="11057839" cy="1422019"/>
+            <a:off x="566928" y="4775708"/>
+            <a:ext cx="11057839" cy="1512428"/>
           </a:xfrm>
           <a:prstGeom prst="roundRect">
             <a:avLst>
-              <a:gd name="adj" fmla="val 3215"/>
+              <a:gd name="adj" fmla="val 3023"/>
             </a:avLst>
           </a:prstGeom>
           <a:solidFill>
@@ -26181,8 +25849,8 @@
         </p:nvSpPr>
         <p:spPr>
           <a:xfrm>
-            <a:off x="804672" y="5015357"/>
-            <a:ext cx="2743200" cy="201168"/>
+            <a:off x="804672" y="4885436"/>
+            <a:ext cx="2743200" cy="182880"/>
           </a:xfrm>
           <a:prstGeom prst="rect">
             <a:avLst/>
@@ -26220,8 +25888,8 @@
         </p:nvSpPr>
         <p:spPr>
           <a:xfrm>
-            <a:off x="804672" y="5216525"/>
-            <a:ext cx="10582351" cy="278663"/>
+            <a:off x="804672" y="5068316"/>
+            <a:ext cx="10582351" cy="288595"/>
           </a:xfrm>
           <a:prstGeom prst="rect">
             <a:avLst/>
@@ -26235,12 +25903,12 @@
           <a:p>
             <a:pPr indent="0" marL="0">
               <a:lnSpc>
-                <a:spcPts val="2070"/>
+                <a:spcPts val="2185"/>
               </a:lnSpc>
               <a:buNone/>
             </a:pPr>
             <a:r>
-              <a:rPr lang="en-US" sz="1800" b="1" dirty="0">
+              <a:rPr lang="en-US" sz="1900" b="1" dirty="0">
                 <a:solidFill>
                   <a:srgbClr val="0A1426"/>
                 </a:solidFill>
@@ -26250,7 +25918,7 @@
               </a:rPr>
               <a:t>Project-level equity is the wrong instrument here</a:t>
             </a:r>
-            <a:endParaRPr lang="en-US" sz="1800" dirty="0"/>
+            <a:endParaRPr lang="en-US" sz="1900" dirty="0"/>
           </a:p>
         </p:txBody>
       </p:sp>
@@ -26262,8 +25930,8 @@
         </p:nvSpPr>
         <p:spPr>
           <a:xfrm>
-            <a:off x="804672" y="5568340"/>
-            <a:ext cx="10582351" cy="649580"/>
+            <a:off x="804672" y="5411775"/>
+            <a:ext cx="10582351" cy="803209"/>
           </a:xfrm>
           <a:prstGeom prst="rect">
             <a:avLst/>
@@ -26277,12 +25945,12 @@
           <a:p>
             <a:pPr indent="0" marL="0">
               <a:lnSpc>
-                <a:spcPts val="1491"/>
+                <a:spcPts val="1704"/>
               </a:lnSpc>
               <a:buNone/>
             </a:pPr>
             <a:r>
-              <a:rPr lang="en-US" sz="1050" dirty="0">
+              <a:rPr lang="en-US" sz="1200" dirty="0">
                 <a:solidFill>
                   <a:srgbClr val="3B4660"/>
                 </a:solidFill>
@@ -26292,7 +25960,7 @@
               </a:rPr>
               <a:t>At 60% the investor earns 4.7% — below a deposit rate. Clearing a conventional 22% hurdle would take 100% of the project. A seven-year concession generating ₹3.16 Cr of lifetime free cash flow cannot pay an equity return on ₹1.39 Cr and still leave E-O-D a reason to operate it. If equity is wanted, raise it at company level.</a:t>
             </a:r>
-            <a:endParaRPr lang="en-US" sz="1050" dirty="0"/>
+            <a:endParaRPr lang="en-US" sz="1200" dirty="0"/>
           </a:p>
         </p:txBody>
       </p:sp>

--- a/pptx/EOD-Geeta-Govind-Vatika-Project-Finance.pptx
+++ b/pptx/EOD-Geeta-Govind-Vatika-Project-Finance.pptx
@@ -215,25 +215,25 @@
                 <c:formatCode>General</c:formatCode>
                 <c:ptCount val="7"/>
                 <c:pt idx="0">
-                  <c:v>0.4</c:v>
+                  <c:v>0.48</c:v>
                 </c:pt>
                 <c:pt idx="1">
-                  <c:v>0.51</c:v>
+                  <c:v>0.57</c:v>
                 </c:pt>
                 <c:pt idx="2">
-                  <c:v>0.58</c:v>
+                  <c:v>0.63</c:v>
                 </c:pt>
                 <c:pt idx="3">
-                  <c:v>0.63</c:v>
+                  <c:v>0.67</c:v>
                 </c:pt>
                 <c:pt idx="4">
-                  <c:v>0.69</c:v>
+                  <c:v>0.71</c:v>
                 </c:pt>
                 <c:pt idx="5">
-                  <c:v>0.73</c:v>
+                  <c:v>0.74</c:v>
                 </c:pt>
                 <c:pt idx="6">
-                  <c:v>0.78</c:v>
+                  <c:v>0.79</c:v>
                 </c:pt>
               </c:numCache>
             </c:numRef>
@@ -323,25 +323,25 @@
                 <c:formatCode>General</c:formatCode>
                 <c:ptCount val="7"/>
                 <c:pt idx="0">
-                  <c:v>0.63</c:v>
+                  <c:v>0.76</c:v>
                 </c:pt>
                 <c:pt idx="1">
-                  <c:v>0.86</c:v>
+                  <c:v>0.96</c:v>
                 </c:pt>
                 <c:pt idx="2">
-                  <c:v>1.15</c:v>
+                  <c:v>1.24</c:v>
                 </c:pt>
                 <c:pt idx="3">
-                  <c:v>1.3</c:v>
+                  <c:v>1.37</c:v>
                 </c:pt>
                 <c:pt idx="4">
-                  <c:v>1.57</c:v>
+                  <c:v>1.62</c:v>
                 </c:pt>
                 <c:pt idx="5">
-                  <c:v>1.66</c:v>
+                  <c:v>1.69</c:v>
                 </c:pt>
                 <c:pt idx="6">
-                  <c:v>1.96</c:v>
+                  <c:v>1.98</c:v>
                 </c:pt>
               </c:numCache>
             </c:numRef>
@@ -431,25 +431,25 @@
                 <c:formatCode>General</c:formatCode>
                 <c:ptCount val="7"/>
                 <c:pt idx="0">
-                  <c:v>0.31</c:v>
+                  <c:v>0.37</c:v>
                 </c:pt>
                 <c:pt idx="1">
-                  <c:v>0.43</c:v>
+                  <c:v>0.48</c:v>
                 </c:pt>
                 <c:pt idx="2">
-                  <c:v>0.52</c:v>
+                  <c:v>0.56</c:v>
                 </c:pt>
                 <c:pt idx="3">
-                  <c:v>0.62</c:v>
+                  <c:v>0.65</c:v>
                 </c:pt>
                 <c:pt idx="4">
-                  <c:v>0.71</c:v>
+                  <c:v>0.74</c:v>
                 </c:pt>
                 <c:pt idx="5">
-                  <c:v>0.81</c:v>
+                  <c:v>0.83</c:v>
                 </c:pt>
                 <c:pt idx="6">
-                  <c:v>0.9</c:v>
+                  <c:v>0.91</c:v>
                 </c:pt>
               </c:numCache>
             </c:numRef>
@@ -539,25 +539,25 @@
                 <c:formatCode>General</c:formatCode>
                 <c:ptCount val="7"/>
                 <c:pt idx="0">
-                  <c:v>0.35</c:v>
+                  <c:v>0.42</c:v>
                 </c:pt>
                 <c:pt idx="1">
-                  <c:v>0.56</c:v>
+                  <c:v>0.62</c:v>
                 </c:pt>
                 <c:pt idx="2">
-                  <c:v>0.73</c:v>
+                  <c:v>0.79</c:v>
                 </c:pt>
                 <c:pt idx="3">
-                  <c:v>0.92</c:v>
+                  <c:v>0.96</c:v>
                 </c:pt>
                 <c:pt idx="4">
-                  <c:v>1.05</c:v>
+                  <c:v>1.08</c:v>
                 </c:pt>
                 <c:pt idx="5">
-                  <c:v>1.26</c:v>
+                  <c:v>1.28</c:v>
                 </c:pt>
                 <c:pt idx="6">
-                  <c:v>1.4</c:v>
+                  <c:v>1.42</c:v>
                 </c:pt>
               </c:numCache>
             </c:numRef>
@@ -647,25 +647,25 @@
                 <c:formatCode>General</c:formatCode>
                 <c:ptCount val="7"/>
                 <c:pt idx="0">
-                  <c:v>0.28</c:v>
+                  <c:v>0.44</c:v>
                 </c:pt>
                 <c:pt idx="1">
-                  <c:v>0.35</c:v>
+                  <c:v>0.5</c:v>
                 </c:pt>
                 <c:pt idx="2">
-                  <c:v>0.4</c:v>
+                  <c:v>0.54</c:v>
                 </c:pt>
                 <c:pt idx="3">
-                  <c:v>0.44</c:v>
+                  <c:v>0.57</c:v>
                 </c:pt>
                 <c:pt idx="4">
-                  <c:v>0.47</c:v>
+                  <c:v>0.6</c:v>
                 </c:pt>
                 <c:pt idx="5">
-                  <c:v>0.51</c:v>
+                  <c:v>0.63</c:v>
                 </c:pt>
                 <c:pt idx="6">
-                  <c:v>0.54</c:v>
+                  <c:v>0.66</c:v>
                 </c:pt>
               </c:numCache>
             </c:numRef>
@@ -965,25 +965,25 @@
                 <c:formatCode>General</c:formatCode>
                 <c:ptCount val="7"/>
                 <c:pt idx="0">
-                  <c:v>1.96</c:v>
+                  <c:v>2.48</c:v>
                 </c:pt>
                 <c:pt idx="1">
-                  <c:v>2.7</c:v>
+                  <c:v>3.13</c:v>
                 </c:pt>
                 <c:pt idx="2">
-                  <c:v>3.38</c:v>
+                  <c:v>3.76</c:v>
                 </c:pt>
                 <c:pt idx="3">
-                  <c:v>3.91</c:v>
+                  <c:v>4.22</c:v>
                 </c:pt>
                 <c:pt idx="4">
-                  <c:v>4.5</c:v>
+                  <c:v>4.74</c:v>
                 </c:pt>
                 <c:pt idx="5">
-                  <c:v>4.97</c:v>
+                  <c:v>5.17</c:v>
                 </c:pt>
                 <c:pt idx="6">
-                  <c:v>5.58</c:v>
+                  <c:v>5.75</c:v>
                 </c:pt>
               </c:numCache>
             </c:numRef>
@@ -1072,25 +1072,25 @@
                 <c:formatCode>General</c:formatCode>
                 <c:ptCount val="7"/>
                 <c:pt idx="0">
-                  <c:v>-0.21</c:v>
+                  <c:v>0.17</c:v>
                 </c:pt>
                 <c:pt idx="1">
-                  <c:v>0.16</c:v>
+                  <c:v>0.51</c:v>
                 </c:pt>
                 <c:pt idx="2">
-                  <c:v>0.5</c:v>
+                  <c:v>0.87</c:v>
                 </c:pt>
                 <c:pt idx="3">
-                  <c:v>0.71</c:v>
+                  <c:v>1.06</c:v>
                 </c:pt>
                 <c:pt idx="4">
-                  <c:v>0.97</c:v>
+                  <c:v>1.33</c:v>
                 </c:pt>
                 <c:pt idx="5">
-                  <c:v>1.1</c:v>
+                  <c:v>1.45</c:v>
                 </c:pt>
                 <c:pt idx="6">
-                  <c:v>1.36</c:v>
+                  <c:v>1.71</c:v>
                 </c:pt>
               </c:numCache>
             </c:numRef>
@@ -1392,28 +1392,28 @@
                 <c:formatCode>General</c:formatCode>
                 <c:ptCount val="8"/>
                 <c:pt idx="0">
-                  <c:v>-1.18</c:v>
+                  <c:v>-1</c:v>
                 </c:pt>
                 <c:pt idx="1">
-                  <c:v>-0.25</c:v>
+                  <c:v>0.1</c:v>
                 </c:pt>
                 <c:pt idx="2">
-                  <c:v>0.1</c:v>
+                  <c:v>0.35</c:v>
                 </c:pt>
                 <c:pt idx="3">
-                  <c:v>0.35</c:v>
+                  <c:v>0.61</c:v>
                 </c:pt>
                 <c:pt idx="4">
-                  <c:v>0.49</c:v>
+                  <c:v>0.74</c:v>
                 </c:pt>
                 <c:pt idx="5">
-                  <c:v>0.67</c:v>
+                  <c:v>0.93</c:v>
                 </c:pt>
                 <c:pt idx="6">
-                  <c:v>0.76</c:v>
+                  <c:v>1.01</c:v>
                 </c:pt>
                 <c:pt idx="7">
-                  <c:v>1.04</c:v>
+                  <c:v>1.3</c:v>
                 </c:pt>
               </c:numCache>
             </c:numRef>
@@ -1713,13 +1713,13 @@
                 <c:formatCode>General</c:formatCode>
                 <c:ptCount val="3"/>
                 <c:pt idx="0">
-                  <c:v>-28</c:v>
+                  <c:v>-1.4</c:v>
                 </c:pt>
                 <c:pt idx="1">
-                  <c:v>18.7</c:v>
+                  <c:v>43.3</c:v>
                 </c:pt>
                 <c:pt idx="2">
-                  <c:v>45.9</c:v>
+                  <c:v>74.4</c:v>
                 </c:pt>
               </c:numCache>
             </c:numRef>
@@ -1998,25 +1998,25 @@
                 <c:formatCode>General</c:formatCode>
                 <c:ptCount val="7"/>
                 <c:pt idx="0">
-                  <c:v>0.24</c:v>
+                  <c:v>0.12</c:v>
                 </c:pt>
                 <c:pt idx="1">
+                  <c:v>0.25</c:v>
+                </c:pt>
+                <c:pt idx="2">
+                  <c:v>0.23</c:v>
+                </c:pt>
+                <c:pt idx="3">
                   <c:v>0.21</c:v>
                 </c:pt>
-                <c:pt idx="2">
+                <c:pt idx="4">
                   <c:v>0.19</c:v>
                 </c:pt>
-                <c:pt idx="3">
-                  <c:v>0.47</c:v>
-                </c:pt>
-                <c:pt idx="4">
-                  <c:v>0.43</c:v>
-                </c:pt>
                 <c:pt idx="5">
-                  <c:v>0.39</c:v>
+                  <c:v>0.17</c:v>
                 </c:pt>
                 <c:pt idx="6">
-                  <c:v>0.34</c:v>
+                  <c:v>0.15</c:v>
                 </c:pt>
               </c:numCache>
             </c:numRef>
@@ -2105,25 +2105,25 @@
                 <c:formatCode>General</c:formatCode>
                 <c:ptCount val="7"/>
                 <c:pt idx="0">
-                  <c:v>-0.21</c:v>
+                  <c:v>0.17</c:v>
                 </c:pt>
                 <c:pt idx="1">
-                  <c:v>0.16</c:v>
+                  <c:v>0.51</c:v>
                 </c:pt>
                 <c:pt idx="2">
-                  <c:v>0.5</c:v>
+                  <c:v>0.87</c:v>
                 </c:pt>
                 <c:pt idx="3">
-                  <c:v>0.71</c:v>
+                  <c:v>1.06</c:v>
                 </c:pt>
                 <c:pt idx="4">
-                  <c:v>0.97</c:v>
+                  <c:v>1.33</c:v>
                 </c:pt>
                 <c:pt idx="5">
-                  <c:v>1.1</c:v>
+                  <c:v>1.45</c:v>
                 </c:pt>
                 <c:pt idx="6">
-                  <c:v>1.36</c:v>
+                  <c:v>1.71</c:v>
                 </c:pt>
               </c:numCache>
             </c:numRef>
@@ -4288,7 +4288,7 @@
                 <a:ea typeface="Calibri" pitchFamily="34" charset="-122"/>
                 <a:cs typeface="Calibri" pitchFamily="34" charset="-120"/>
               </a:rPr>
-              <a:t>A 19-acre cultural park in Taj Nagri Phase-II, five minutes from the park E-O-D already runs. Seven years of operating rights, no land to buy, no structures to build — and one year of operating expenditure to fund before it pays for itself.</a:t>
+              <a:t>Nineteen acres in Taj Nagri Phase-II, next door to the park E-O-D already runs. Seven years of operating rights, no land to buy, no structures to build. One crore to open the doors — and from there it pays for itself at the gate.</a:t>
             </a:r>
             <a:endParaRPr lang="en-US" sz="1500" dirty="0"/>
           </a:p>
@@ -4330,7 +4330,7 @@
                 <a:ea typeface="Calibri" pitchFamily="34" charset="-122"/>
                 <a:cs typeface="Calibri" pitchFamily="34" charset="-120"/>
               </a:rPr>
-              <a:t>Agra Development Authority · Licence-fee model · 7 + 4 years</a:t>
+              <a:t>Agra Development Authority · Licence-fee model · 7 + 4 years · 19 acres</a:t>
             </a:r>
             <a:endParaRPr lang="en-US" sz="1150" dirty="0"/>
           </a:p>
@@ -4448,7 +4448,7 @@
                 <a:ea typeface="Calibri" pitchFamily="34" charset="-122"/>
                 <a:cs typeface="Calibri" pitchFamily="34" charset="-120"/>
               </a:rPr>
-              <a:t>₹3.35 Cr</a:t>
+              <a:t>₹1.00 Cr</a:t>
             </a:r>
             <a:endParaRPr lang="en-US" sz="2900" dirty="0"/>
           </a:p>
@@ -4490,7 +4490,7 @@
                 <a:ea typeface="Calibri" pitchFamily="34" charset="-122"/>
                 <a:cs typeface="Calibri" pitchFamily="34" charset="-120"/>
               </a:rPr>
-              <a:t>Mobilisation plus one year of operating cost</a:t>
+              <a:t>Mobilisation only — operating cost met from collections</a:t>
             </a:r>
             <a:endParaRPr lang="en-US" sz="1000" dirty="0"/>
           </a:p>
@@ -4529,7 +4529,7 @@
                 <a:ea typeface="Calibri" pitchFamily="34" charset="-122"/>
                 <a:cs typeface="Calibri" pitchFamily="34" charset="-120"/>
               </a:rPr>
-              <a:t>TRUE CAPITAL AT RISK</a:t>
+              <a:t>YEAR 1 EBITDA</a:t>
             </a:r>
             <a:endParaRPr lang="en-US" sz="950" dirty="0"/>
           </a:p>
@@ -4568,7 +4568,7 @@
                 <a:ea typeface="Calibri" pitchFamily="34" charset="-122"/>
                 <a:cs typeface="Calibri" pitchFamily="34" charset="-120"/>
               </a:rPr>
-              <a:t>₹1.39 Cr</a:t>
+              <a:t>₹0.17 Cr</a:t>
             </a:r>
             <a:endParaRPr lang="en-US" sz="2900" dirty="0"/>
           </a:p>
@@ -4610,7 +4610,7 @@
                 <a:ea typeface="Calibri" pitchFamily="34" charset="-122"/>
                 <a:cs typeface="Calibri" pitchFamily="34" charset="-120"/>
               </a:rPr>
-              <a:t>The rest is revolving liquidity</a:t>
+              <a:t>Positive from the opening season</a:t>
             </a:r>
             <a:endParaRPr lang="en-US" sz="1000" dirty="0"/>
           </a:p>
@@ -4688,7 +4688,7 @@
                 <a:ea typeface="Calibri" pitchFamily="34" charset="-122"/>
                 <a:cs typeface="Calibri" pitchFamily="34" charset="-120"/>
               </a:rPr>
-              <a:t>18.7%</a:t>
+              <a:t>43.3%</a:t>
             </a:r>
             <a:endParaRPr lang="en-US" sz="2900" dirty="0"/>
           </a:p>
@@ -4730,7 +4730,7 @@
                 <a:ea typeface="Calibri" pitchFamily="34" charset="-122"/>
                 <a:cs typeface="Calibri" pitchFamily="34" charset="-120"/>
               </a:rPr>
-              <a:t>Payback 4.7 years</a:t>
+              <a:t>Payback 2.9 years</a:t>
             </a:r>
             <a:endParaRPr lang="en-US" sz="1000" dirty="0"/>
           </a:p>
@@ -4808,7 +4808,7 @@
                 <a:ea typeface="Calibri" pitchFamily="34" charset="-122"/>
                 <a:cs typeface="Calibri" pitchFamily="34" charset="-120"/>
               </a:rPr>
-              <a:t>₹1.36 Cr</a:t>
+              <a:t>₹1.71 Cr</a:t>
             </a:r>
             <a:endParaRPr lang="en-US" sz="2900" dirty="0"/>
           </a:p>
@@ -4850,7 +4850,7 @@
                 <a:ea typeface="Calibri" pitchFamily="34" charset="-122"/>
                 <a:cs typeface="Calibri" pitchFamily="34" charset="-120"/>
               </a:rPr>
-              <a:t>24.3% margin</a:t>
+              <a:t>29.8% margin</a:t>
             </a:r>
             <a:endParaRPr lang="en-US" sz="1000" dirty="0"/>
           </a:p>
@@ -5145,7 +5145,7 @@
                 <a:ea typeface="Calibri" pitchFamily="34" charset="-122"/>
                 <a:cs typeface="Calibri" pitchFamily="34" charset="-120"/>
               </a:rPr>
-              <a:t>₹3.37 Cr</a:t>
+              <a:t>₹1.00 Cr</a:t>
             </a:r>
             <a:endParaRPr lang="en-US" sz="2600" dirty="0"/>
           </a:p>
@@ -5187,7 +5187,7 @@
                 <a:ea typeface="Calibri" pitchFamily="34" charset="-122"/>
                 <a:cs typeface="Calibri" pitchFamily="34" charset="-120"/>
               </a:rPr>
-              <a:t>Term loan ₹1.20 Cr + working capital ₹2.17 Cr</a:t>
+              <a:t>Term loan ₹0.80 Cr + working capital ₹0.20 Cr</a:t>
             </a:r>
             <a:endParaRPr lang="en-US" sz="950" dirty="0"/>
           </a:p>
@@ -5294,7 +5294,7 @@
                 <a:ea typeface="Calibri" pitchFamily="34" charset="-122"/>
                 <a:cs typeface="Calibri" pitchFamily="34" charset="-120"/>
               </a:rPr>
-              <a:t>11.50% + 1.00%</a:t>
+              <a:t>11.50% + 0.60%</a:t>
             </a:r>
             <a:endParaRPr lang="en-US" sz="2000" dirty="0"/>
           </a:p>
@@ -5443,7 +5443,7 @@
                 <a:ea typeface="Calibri" pitchFamily="34" charset="-122"/>
                 <a:cs typeface="Calibri" pitchFamily="34" charset="-120"/>
               </a:rPr>
-              <a:t>1.49×</a:t>
+              <a:t>2.07×</a:t>
             </a:r>
             <a:endParaRPr lang="en-US" sz="2600" dirty="0"/>
           </a:p>
@@ -5485,7 +5485,7 @@
                 <a:ea typeface="Calibri" pitchFamily="34" charset="-122"/>
                 <a:cs typeface="Calibri" pitchFamily="34" charset="-120"/>
               </a:rPr>
-              <a:t>After the 3-year moratorium. Banks underwrite to 1.30×</a:t>
+              <a:t>After the 1-year moratorium. Banks underwrite to 1.30×</a:t>
             </a:r>
             <a:endParaRPr lang="en-US" sz="950" dirty="0"/>
           </a:p>
@@ -5592,7 +5592,7 @@
                 <a:ea typeface="Calibri" pitchFamily="34" charset="-122"/>
                 <a:cs typeface="Calibri" pitchFamily="34" charset="-120"/>
               </a:rPr>
-              <a:t>₹3.46 Cr</a:t>
+              <a:t>₹1.62 Cr</a:t>
             </a:r>
             <a:endParaRPr lang="en-US" sz="2600" dirty="0"/>
           </a:p>
@@ -5784,7 +5784,7 @@
                 <a:ea typeface="Calibri" pitchFamily="34" charset="-122"/>
                 <a:cs typeface="Calibri" pitchFamily="34" charset="-120"/>
               </a:rPr>
-              <a:t>The three-year principal moratorium pushes the first repayment into year 4, when EBITDA is ₹0.71 Cr rather than ₹0.16 Cr. A bank offering this with a one-year moratorium is offering a facility that defaults in year 2.</a:t>
+              <a:t>The three-year principal moratorium pushes the first repayment into year 4, when EBITDA is ₹1.06 Cr rather than ₹0.51 Cr. A bank offering this with a one-year moratorium is offering a facility that defaults in year 2.</a:t>
             </a:r>
             <a:endParaRPr lang="en-US" sz="1200" dirty="0"/>
           </a:p>
@@ -6251,7 +6251,7 @@
                           <a:ea typeface="Calibri" pitchFamily="34" charset="-122"/>
                           <a:cs typeface="Calibri" pitchFamily="34" charset="-120"/>
                         </a:rPr>
-                        <a:t>₹1.39 Cr</a:t>
+                        <a:t>₹1.00 Cr</a:t>
                       </a:r>
                       <a:endParaRPr lang="en-US" sz="1100" dirty="0">
                         <a:latin typeface="Calibri" charset="0"/>
@@ -6665,7 +6665,7 @@
                           <a:ea typeface="Calibri" pitchFamily="34" charset="-122"/>
                           <a:cs typeface="Calibri" pitchFamily="34" charset="-120"/>
                         </a:rPr>
-                        <a:t>55%</a:t>
+                        <a:t>38%</a:t>
                       </a:r>
                       <a:endParaRPr lang="en-US" sz="1100" dirty="0">
                         <a:latin typeface="Calibri" charset="0"/>
@@ -6803,7 +6803,7 @@
                           <a:ea typeface="Calibri" pitchFamily="34" charset="-122"/>
                           <a:cs typeface="Calibri" pitchFamily="34" charset="-120"/>
                         </a:rPr>
-                        <a:t>₹0.33 Cr</a:t>
+                        <a:t>₹0.24 Cr</a:t>
                       </a:r>
                       <a:endParaRPr lang="en-US" sz="1100" dirty="0">
                         <a:latin typeface="Calibri" charset="0"/>
@@ -6941,7 +6941,7 @@
                           <a:ea typeface="Calibri" pitchFamily="34" charset="-122"/>
                           <a:cs typeface="Calibri" pitchFamily="34" charset="-120"/>
                         </a:rPr>
-                        <a:t>-4.0%</a:t>
+                        <a:t>11.7%</a:t>
                       </a:r>
                       <a:endParaRPr lang="en-US" sz="1100" dirty="0">
                         <a:latin typeface="Calibri" charset="0"/>
@@ -7141,7 +7141,7 @@
                 <a:ea typeface="Calibri" pitchFamily="34" charset="-122"/>
                 <a:cs typeface="Calibri" pitchFamily="34" charset="-120"/>
               </a:rPr>
-              <a:t>The CCD returns -4.0% — below the equity case, because the coupon years consume the cash the project needs while ramping. It combines the cash-flow burden of debt with the dilution of equity and the guarantee benefit of neither.</a:t>
+              <a:t>The CCD returns 11.7% — below the equity case, because the coupon years consume the cash the project needs while ramping. It combines the cash-flow burden of debt with the dilution of equity and the guarantee benefit of neither.</a:t>
             </a:r>
             <a:endParaRPr lang="en-US" sz="1200" dirty="0"/>
           </a:p>
@@ -7477,13 +7477,13 @@
             <a:r>
               <a:rPr lang="en-US" sz="3000" b="1" dirty="0">
                 <a:solidFill>
-                  <a:srgbClr val="C8553D"/>
+                  <a:srgbClr val="10B981"/>
                 </a:solidFill>
                 <a:latin typeface="Calibri" pitchFamily="34" charset="0"/>
                 <a:ea typeface="Calibri" pitchFamily="34" charset="-122"/>
                 <a:cs typeface="Calibri" pitchFamily="34" charset="-120"/>
               </a:rPr>
-              <a:t>4.7%</a:t>
+              <a:t>19.6%</a:t>
             </a:r>
             <a:endParaRPr lang="en-US" sz="3000" dirty="0"/>
           </a:p>
@@ -7620,7 +7620,7 @@
                 <a:ea typeface="Calibri" pitchFamily="34" charset="-122"/>
                 <a:cs typeface="Calibri" pitchFamily="34" charset="-120"/>
               </a:rPr>
-              <a:t>₹1.39 Cr</a:t>
+              <a:t>₹1.00 Cr</a:t>
             </a:r>
             <a:endParaRPr lang="en-US" sz="950" dirty="0"/>
           </a:p>
@@ -7718,7 +7718,7 @@
                 <a:ea typeface="Calibri" pitchFamily="34" charset="-122"/>
                 <a:cs typeface="Calibri" pitchFamily="34" charset="-120"/>
               </a:rPr>
-              <a:t>60%</a:t>
+              <a:t>45%</a:t>
             </a:r>
             <a:endParaRPr lang="en-US" sz="950" dirty="0"/>
           </a:p>
@@ -7816,7 +7816,7 @@
                 <a:ea typeface="Calibri" pitchFamily="34" charset="-122"/>
                 <a:cs typeface="Calibri" pitchFamily="34" charset="-120"/>
               </a:rPr>
-              <a:t>1.24×</a:t>
+              <a:t>2.10×</a:t>
             </a:r>
             <a:endParaRPr lang="en-US" sz="950" dirty="0"/>
           </a:p>
@@ -7914,7 +7914,7 @@
                 <a:ea typeface="Calibri" pitchFamily="34" charset="-122"/>
                 <a:cs typeface="Calibri" pitchFamily="34" charset="-120"/>
               </a:rPr>
-              <a:t>100%</a:t>
+              <a:t>49%</a:t>
             </a:r>
             <a:endParaRPr lang="en-US" sz="950" dirty="0"/>
           </a:p>
@@ -8058,7 +8058,7 @@
                 <a:ea typeface="Calibri" pitchFamily="34" charset="-122"/>
                 <a:cs typeface="Calibri" pitchFamily="34" charset="-120"/>
               </a:rPr>
-              <a:t>1.49×</a:t>
+              <a:t>2.07×</a:t>
             </a:r>
             <a:endParaRPr lang="en-US" sz="3000" dirty="0"/>
           </a:p>
@@ -8195,7 +8195,7 @@
                 <a:ea typeface="Calibri" pitchFamily="34" charset="-122"/>
                 <a:cs typeface="Calibri" pitchFamily="34" charset="-120"/>
               </a:rPr>
-              <a:t>₹3.37 Cr</a:t>
+              <a:t>₹1.00 Cr</a:t>
             </a:r>
             <a:endParaRPr lang="en-US" sz="950" dirty="0"/>
           </a:p>
@@ -8293,7 +8293,7 @@
                 <a:ea typeface="Calibri" pitchFamily="34" charset="-122"/>
                 <a:cs typeface="Calibri" pitchFamily="34" charset="-120"/>
               </a:rPr>
-              <a:t>1.20 / 2.17</a:t>
+              <a:t>0.80 / 0.20</a:t>
             </a:r>
             <a:endParaRPr lang="en-US" sz="950" dirty="0"/>
           </a:p>
@@ -8489,7 +8489,7 @@
                 <a:ea typeface="Calibri" pitchFamily="34" charset="-122"/>
                 <a:cs typeface="Calibri" pitchFamily="34" charset="-120"/>
               </a:rPr>
-              <a:t>₹1.07 Cr</a:t>
+              <a:t>₹0.51 Cr</a:t>
             </a:r>
             <a:endParaRPr lang="en-US" sz="950" dirty="0"/>
           </a:p>
@@ -8633,7 +8633,7 @@
                 <a:ea typeface="Calibri" pitchFamily="34" charset="-122"/>
                 <a:cs typeface="Calibri" pitchFamily="34" charset="-120"/>
               </a:rPr>
-              <a:t>-4.0%</a:t>
+              <a:t>11.7%</a:t>
             </a:r>
             <a:endParaRPr lang="en-US" sz="3000" dirty="0"/>
           </a:p>
@@ -8770,7 +8770,7 @@
                 <a:ea typeface="Calibri" pitchFamily="34" charset="-122"/>
                 <a:cs typeface="Calibri" pitchFamily="34" charset="-120"/>
               </a:rPr>
-              <a:t>₹1.39 Cr</a:t>
+              <a:t>₹1.00 Cr</a:t>
             </a:r>
             <a:endParaRPr lang="en-US" sz="950" dirty="0"/>
           </a:p>
@@ -8966,7 +8966,7 @@
                 <a:ea typeface="Calibri" pitchFamily="34" charset="-122"/>
                 <a:cs typeface="Calibri" pitchFamily="34" charset="-120"/>
               </a:rPr>
-              <a:t>55%</a:t>
+              <a:t>38%</a:t>
             </a:r>
             <a:endParaRPr lang="en-US" sz="950" dirty="0"/>
           </a:p>
@@ -9064,7 +9064,7 @@
                 <a:ea typeface="Calibri" pitchFamily="34" charset="-122"/>
                 <a:cs typeface="Calibri" pitchFamily="34" charset="-120"/>
               </a:rPr>
-              <a:t>0.84×</a:t>
+              <a:t>1.61×</a:t>
             </a:r>
             <a:endParaRPr lang="en-US" sz="950" dirty="0"/>
           </a:p>
@@ -9214,7 +9214,7 @@
                 <a:ea typeface="Calibri" pitchFamily="34" charset="-122"/>
                 <a:cs typeface="Calibri" pitchFamily="34" charset="-120"/>
               </a:rPr>
-              <a:t>The project earns 18.7% against 12.50% guaranteed debt. That +6.2 pp spread belongs to E-O-D, and debt is the only instrument that lets E-O-D keep it. Term loan ₹1.20 Cr over 7 years with a 3-year principal moratorium, plus a working-capital limit sanctioned at ₹0.90 Cr rather than the full year of opex — saving ₹1.27 L of guarantee fee and leaving more of the group's ₹10 Cr CGTMSE ceiling for Karnal.</a:t>
+              <a:t>The project earns 43.3% against 12.10% guaranteed debt. That +31.2 pp spread belongs to E-O-D, and debt is the only instrument that lets E-O-D keep it. Term loan ₹0.80 Cr over 7 years with a 1-year principal moratorium, plus a working-capital limit sanctioned at ₹0.20 Cr rather than the full year of opex — saving ₹0.00 L of guarantee fee and leaving more of the group's ₹10 Cr CGTMSE ceiling for Karnal.</a:t>
             </a:r>
             <a:endParaRPr lang="en-US" sz="1200" dirty="0"/>
           </a:p>
@@ -9484,7 +9484,7 @@
                 <a:ea typeface="Calibri" pitchFamily="34" charset="-122"/>
                 <a:cs typeface="Calibri" pitchFamily="34" charset="-120"/>
               </a:rPr>
-              <a:t>No cap on the forward e-auction. Every ₹1 lakh a year above the modelled ₹36 L costs about ₹8.1 lakh over the term. Mitigation: a board-approved walk-away of ₹45.1 L a year.</a:t>
+              <a:t>No cap on the forward e-auction. Every ₹1 lakh a year above the modelled ₹36 L costs about ₹8.1 lakh over the term. Mitigation: a board-approved walk-away of ₹80.9 L a year.</a:t>
             </a:r>
             <a:endParaRPr lang="en-US" sz="1050" dirty="0"/>
           </a:p>
@@ -9787,7 +9787,7 @@
                 <a:ea typeface="Calibri" pitchFamily="34" charset="-122"/>
                 <a:cs typeface="Calibri" pitchFamily="34" charset="-120"/>
               </a:rPr>
-              <a:t>The project loses ₹0.21 Cr at EBITDA in year 1 while paying six months of licence fee in advance. Mitigation: this is what the working-capital limit is for.</a:t>
+              <a:t>The project loses ₹-0.17 Cr at EBITDA in year 1 while paying six months of licence fee in advance. Mitigation: this is what the working-capital limit is for.</a:t>
             </a:r>
             <a:endParaRPr lang="en-US" sz="1050" dirty="0"/>
           </a:p>
@@ -10173,7 +10173,7 @@
         <p:spPr>
           <a:xfrm>
             <a:off x="566928" y="950976"/>
-            <a:ext cx="11057839" cy="462280"/>
+            <a:ext cx="11057839" cy="693420"/>
           </a:xfrm>
           <a:prstGeom prst="rect">
             <a:avLst/>
@@ -10200,7 +10200,7 @@
                 <a:ea typeface="Calibri" pitchFamily="34" charset="-122"/>
                 <a:cs typeface="Calibri" pitchFamily="34" charset="-120"/>
               </a:rPr>
-              <a:t>ADA has built a ₹4.0–4.2 crore themed park and now wants an operator. Everything physical already exists — the musical fountains, the 40-minute Krishna Leela laser show, eight kiosks, the Tulsi forest. The winning bidder pays a monthly licence fee and keeps what it collects at the gate.</a:t>
+              <a:t>Nineteen acres in Taj Nagri Phase-II, built and fitted out by ADA, now looking for an operator. The asset is already there — musical fountains, a 40-minute Krishna Leela laser show, an open-air amphitheatre, a waterbody, eight kiosks and a Tulsi forest. The operator pays a monthly licence fee and keeps what it collects at the gate.</a:t>
             </a:r>
             <a:endParaRPr lang="en-US" sz="1250" dirty="0"/>
           </a:p>
@@ -10221,7 +10221,7 @@
           </p:nvPr>
         </p:nvGraphicFramePr>
         <p:xfrm>
-          <a:off x="566928" y="1541272"/>
+          <a:off x="566928" y="1772412"/>
           <a:ext cx="11057839" cy="914400"/>
         </p:xfrm>
         <a:graphic>
@@ -11624,12 +11624,12 @@
         </p:nvSpPr>
         <p:spPr>
           <a:xfrm>
-            <a:off x="566928" y="4997704"/>
-            <a:ext cx="11057839" cy="1287363"/>
+            <a:off x="566928" y="5228844"/>
+            <a:ext cx="11057839" cy="1098885"/>
           </a:xfrm>
           <a:prstGeom prst="roundRect">
             <a:avLst>
-              <a:gd name="adj" fmla="val 3551"/>
+              <a:gd name="adj" fmla="val 4161"/>
             </a:avLst>
           </a:prstGeom>
           <a:solidFill>
@@ -11651,7 +11651,7 @@
         </p:nvSpPr>
         <p:spPr>
           <a:xfrm>
-            <a:off x="804672" y="5107432"/>
+            <a:off x="804672" y="5338572"/>
             <a:ext cx="2743200" cy="182880"/>
           </a:xfrm>
           <a:prstGeom prst="rect">
@@ -11690,8 +11690,8 @@
         </p:nvSpPr>
         <p:spPr>
           <a:xfrm>
-            <a:off x="804672" y="5290312"/>
-            <a:ext cx="10582351" cy="288595"/>
+            <a:off x="804672" y="5521452"/>
+            <a:ext cx="10582351" cy="212649"/>
           </a:xfrm>
           <a:prstGeom prst="rect">
             <a:avLst/>
@@ -11705,12 +11705,12 @@
           <a:p>
             <a:pPr indent="0" marL="0">
               <a:lnSpc>
-                <a:spcPts val="2185"/>
+                <a:spcPts val="1610"/>
               </a:lnSpc>
               <a:buNone/>
             </a:pPr>
             <a:r>
-              <a:rPr lang="en-US" sz="1900" b="1" dirty="0">
+              <a:rPr lang="en-US" sz="1400" b="1" dirty="0">
                 <a:solidFill>
                   <a:srgbClr val="0A1426"/>
                 </a:solidFill>
@@ -11718,9 +11718,9 @@
                 <a:ea typeface="Calibri" pitchFamily="34" charset="-122"/>
                 <a:cs typeface="Calibri" pitchFamily="34" charset="-120"/>
               </a:rPr>
-              <a:t>Why E-O-D wins this on the technical bid</a:t>
+              <a:t>What the Agra cluster does to the commercials</a:t>
             </a:r>
-            <a:endParaRPr lang="en-US" sz="1900" dirty="0"/>
+            <a:endParaRPr lang="en-US" sz="1400" dirty="0"/>
           </a:p>
         </p:txBody>
       </p:sp>
@@ -11732,8 +11732,8 @@
         </p:nvSpPr>
         <p:spPr>
           <a:xfrm>
-            <a:off x="804672" y="5633771"/>
-            <a:ext cx="10582351" cy="578145"/>
+            <a:off x="804672" y="5788965"/>
+            <a:ext cx="10582351" cy="465612"/>
           </a:xfrm>
           <a:prstGeom prst="rect">
             <a:avLst/>
@@ -11747,12 +11747,12 @@
           <a:p>
             <a:pPr indent="0" marL="0">
               <a:lnSpc>
-                <a:spcPts val="1704"/>
+                <a:spcPts val="1278"/>
               </a:lnSpc>
               <a:buNone/>
             </a:pPr>
             <a:r>
-              <a:rPr lang="en-US" sz="1200" dirty="0">
+              <a:rPr lang="en-US" sz="900" dirty="0">
                 <a:solidFill>
                   <a:srgbClr val="3B4660"/>
                 </a:solidFill>
@@ -11760,9 +11760,9 @@
                 <a:ea typeface="Calibri" pitchFamily="34" charset="-122"/>
                 <a:cs typeface="Calibri" pitchFamily="34" charset="-120"/>
               </a:rPr>
-              <a:t>ADA asks for ₹1 crore average turnover and two similar projects above ₹50 lakh. VAPPL turned over ₹16.29 Cr in FY25-26 and runs four parks — two of them on concessions granted by ADA itself. The competitive question is the auction, not the qualification.</a:t>
+              <a:t>The site adjoins Agra Chaupati and is a short drive from Subhash Park, both already operating. Overhead is charged at 5% of revenue rather than a standalone rate; food and beverage is supplied from the Chaupati kitchens, so the site needs counters rather than a built kitchen and runs at 44% cost of goods instead of 52%; and marketing reaches an audience already visiting the cluster.</a:t>
             </a:r>
-            <a:endParaRPr lang="en-US" sz="1200" dirty="0"/>
+            <a:endParaRPr lang="en-US" sz="900" dirty="0"/>
           </a:p>
         </p:txBody>
       </p:sp>
@@ -12078,7 +12078,7 @@
                 <a:ea typeface="Calibri" pitchFamily="34" charset="-122"/>
                 <a:cs typeface="Calibri" pitchFamily="34" charset="-120"/>
               </a:rPr>
-              <a:t>₹3.35 Cr</a:t>
+              <a:t>₹1.00 Cr</a:t>
             </a:r>
             <a:endParaRPr lang="en-US" sz="2600" dirty="0"/>
           </a:p>
@@ -12227,7 +12227,7 @@
                 <a:ea typeface="Calibri" pitchFamily="34" charset="-122"/>
                 <a:cs typeface="Calibri" pitchFamily="34" charset="-120"/>
               </a:rPr>
-              <a:t>₹1.39 Cr</a:t>
+              <a:t>₹1.00 Cr</a:t>
             </a:r>
             <a:endParaRPr lang="en-US" sz="2600" dirty="0"/>
           </a:p>
@@ -12376,7 +12376,7 @@
                 <a:ea typeface="Calibri" pitchFamily="34" charset="-122"/>
                 <a:cs typeface="Calibri" pitchFamily="34" charset="-120"/>
               </a:rPr>
-              <a:t>₹1.96 Cr</a:t>
+              <a:t>₹0.00 Cr</a:t>
             </a:r>
             <a:endParaRPr lang="en-US" sz="2600" dirty="0"/>
           </a:p>
@@ -12674,7 +12674,7 @@
                           <a:ea typeface="Calibri" pitchFamily="34" charset="-122"/>
                           <a:cs typeface="Calibri" pitchFamily="34" charset="-120"/>
                         </a:rPr>
-                        <a:t>₹90.0 L</a:t>
+                        <a:t>₹72.0 L</a:t>
                       </a:r>
                       <a:endParaRPr lang="en-US" sz="1100" dirty="0">
                         <a:latin typeface="Calibri" charset="0"/>
@@ -12950,7 +12950,7 @@
                           <a:ea typeface="Calibri" pitchFamily="34" charset="-122"/>
                           <a:cs typeface="Calibri" pitchFamily="34" charset="-120"/>
                         </a:rPr>
-                        <a:t>₹118.1 L</a:t>
+                        <a:t>₹100.1 L</a:t>
                       </a:r>
                       <a:endParaRPr lang="en-US" sz="1100" dirty="0">
                         <a:latin typeface="Calibri" charset="0"/>
@@ -13088,7 +13088,7 @@
                           <a:ea typeface="Calibri" pitchFamily="34" charset="-122"/>
                           <a:cs typeface="Calibri" pitchFamily="34" charset="-120"/>
                         </a:rPr>
-                        <a:t>₹217.3 L</a:t>
+                        <a:t>₹231.7 L</a:t>
                       </a:r>
                       <a:endParaRPr lang="en-US" sz="1100" dirty="0">
                         <a:latin typeface="Calibri" charset="0"/>
@@ -13226,7 +13226,7 @@
                           <a:ea typeface="Calibri" pitchFamily="34" charset="-122"/>
                           <a:cs typeface="Calibri" pitchFamily="34" charset="-120"/>
                         </a:rPr>
-                        <a:t>₹335.4 L</a:t>
+                        <a:t>₹100.1 L</a:t>
                       </a:r>
                       <a:endParaRPr lang="en-US" sz="1100" dirty="0">
                         <a:latin typeface="Calibri" charset="0"/>
@@ -13426,7 +13426,7 @@
                 <a:ea typeface="Calibri" pitchFamily="34" charset="-122"/>
                 <a:cs typeface="Calibri" pitchFamily="34" charset="-120"/>
               </a:rPr>
-              <a:t>Of the ₹3.35 Cr asked for, only ₹1.39 Cr is capital the project consumes and does not return. The rest is working capital — spent on wages and electricity, recovered at the gate. Equity does not come back; a revolving limit does.</a:t>
+              <a:t>Of the ₹1.00 Cr asked for, only ₹1.00 Cr is capital the project consumes and does not return. The rest is working capital — spent on wages and electricity, recovered at the gate. Equity does not come back; a revolving limit does.</a:t>
             </a:r>
             <a:endParaRPr lang="en-US" sz="1200" dirty="0"/>
           </a:p>
@@ -13760,7 +13760,7 @@
                 <a:ea typeface="Calibri" pitchFamily="34" charset="-122"/>
                 <a:cs typeface="Calibri" pitchFamily="34" charset="-120"/>
               </a:rPr>
-              <a:t>3.10 L</a:t>
+              <a:t>3.75 L</a:t>
             </a:r>
             <a:endParaRPr lang="en-US" sz="2600" dirty="0"/>
           </a:p>
@@ -13909,7 +13909,7 @@
                 <a:ea typeface="Calibri" pitchFamily="34" charset="-122"/>
                 <a:cs typeface="Calibri" pitchFamily="34" charset="-120"/>
               </a:rPr>
-              <a:t>5.75 L</a:t>
+              <a:t>5.80 L</a:t>
             </a:r>
             <a:endParaRPr lang="en-US" sz="2600" dirty="0"/>
           </a:p>
@@ -15744,7 +15744,7 @@
                           <a:ea typeface="Calibri" pitchFamily="34" charset="-122"/>
                           <a:cs typeface="Calibri" pitchFamily="34" charset="-120"/>
                         </a:rPr>
-                        <a:t>0.82</a:t>
+                        <a:t>0.80</a:t>
                       </a:r>
                       <a:endParaRPr lang="en-US" sz="1050" dirty="0">
                         <a:latin typeface="Calibri" charset="0"/>
@@ -15812,7 +15812,7 @@
                           <a:ea typeface="Calibri" pitchFamily="34" charset="-122"/>
                           <a:cs typeface="Calibri" pitchFamily="34" charset="-120"/>
                         </a:rPr>
-                        <a:t>0.92</a:t>
+                        <a:t>0.88</a:t>
                       </a:r>
                       <a:endParaRPr lang="en-US" sz="1050" dirty="0">
                         <a:latin typeface="Calibri" charset="0"/>
@@ -15880,7 +15880,7 @@
                           <a:ea typeface="Calibri" pitchFamily="34" charset="-122"/>
                           <a:cs typeface="Calibri" pitchFamily="34" charset="-120"/>
                         </a:rPr>
-                        <a:t>1.03</a:t>
+                        <a:t>0.97</a:t>
                       </a:r>
                       <a:endParaRPr lang="en-US" sz="1050" dirty="0">
                         <a:latin typeface="Calibri" charset="0"/>
@@ -15948,7 +15948,7 @@
                           <a:ea typeface="Calibri" pitchFamily="34" charset="-122"/>
                           <a:cs typeface="Calibri" pitchFamily="34" charset="-120"/>
                         </a:rPr>
-                        <a:t>1.14</a:t>
+                        <a:t>1.06</a:t>
                       </a:r>
                       <a:endParaRPr lang="en-US" sz="1050" dirty="0">
                         <a:latin typeface="Calibri" charset="0"/>
@@ -16016,7 +16016,7 @@
                           <a:ea typeface="Calibri" pitchFamily="34" charset="-122"/>
                           <a:cs typeface="Calibri" pitchFamily="34" charset="-120"/>
                         </a:rPr>
-                        <a:t>1.25</a:t>
+                        <a:t>1.15</a:t>
                       </a:r>
                       <a:endParaRPr lang="en-US" sz="1050" dirty="0">
                         <a:latin typeface="Calibri" charset="0"/>
@@ -16084,7 +16084,7 @@
                           <a:ea typeface="Calibri" pitchFamily="34" charset="-122"/>
                           <a:cs typeface="Calibri" pitchFamily="34" charset="-120"/>
                         </a:rPr>
-                        <a:t>1.37</a:t>
+                        <a:t>1.26</a:t>
                       </a:r>
                       <a:endParaRPr lang="en-US" sz="1050" dirty="0">
                         <a:latin typeface="Calibri" charset="0"/>
@@ -16358,7 +16358,7 @@
                           <a:ea typeface="Calibri" pitchFamily="34" charset="-122"/>
                           <a:cs typeface="Calibri" pitchFamily="34" charset="-120"/>
                         </a:rPr>
-                        <a:t>0.31</a:t>
+                        <a:t>0.30</a:t>
                       </a:r>
                       <a:endParaRPr lang="en-US" sz="1050" dirty="0">
                         <a:latin typeface="Calibri" charset="0"/>
@@ -16426,7 +16426,7 @@
                           <a:ea typeface="Calibri" pitchFamily="34" charset="-122"/>
                           <a:cs typeface="Calibri" pitchFamily="34" charset="-120"/>
                         </a:rPr>
-                        <a:t>0.33</a:t>
+                        <a:t>0.32</a:t>
                       </a:r>
                       <a:endParaRPr lang="en-US" sz="1050" dirty="0">
                         <a:latin typeface="Calibri" charset="0"/>
@@ -16562,7 +16562,7 @@
                           <a:ea typeface="Calibri" pitchFamily="34" charset="-122"/>
                           <a:cs typeface="Calibri" pitchFamily="34" charset="-120"/>
                         </a:rPr>
-                        <a:t>0.38</a:t>
+                        <a:t>0.37</a:t>
                       </a:r>
                       <a:endParaRPr lang="en-US" sz="1050" dirty="0">
                         <a:latin typeface="Calibri" charset="0"/>
@@ -16630,7 +16630,7 @@
                           <a:ea typeface="Calibri" pitchFamily="34" charset="-122"/>
                           <a:cs typeface="Calibri" pitchFamily="34" charset="-120"/>
                         </a:rPr>
-                        <a:t>0.41</a:t>
+                        <a:t>0.40</a:t>
                       </a:r>
                       <a:endParaRPr lang="en-US" sz="1050" dirty="0">
                         <a:latin typeface="Calibri" charset="0"/>
@@ -17928,7 +17928,7 @@
                           <a:ea typeface="Calibri" pitchFamily="34" charset="-122"/>
                           <a:cs typeface="Calibri" pitchFamily="34" charset="-120"/>
                         </a:rPr>
-                        <a:t>0.22</a:t>
+                        <a:t>0.21</a:t>
                       </a:r>
                       <a:endParaRPr lang="en-US" sz="1050" dirty="0">
                         <a:latin typeface="Calibri" charset="0"/>
@@ -17996,7 +17996,75 @@
                           <a:ea typeface="Calibri" pitchFamily="34" charset="-122"/>
                           <a:cs typeface="Calibri" pitchFamily="34" charset="-120"/>
                         </a:rPr>
-                        <a:t>0.27</a:t>
+                        <a:t>0.25</a:t>
+                      </a:r>
+                      <a:endParaRPr lang="en-US" sz="1050" dirty="0">
+                        <a:latin typeface="Calibri" charset="0"/>
+                        <a:ea typeface="Calibri" charset="0"/>
+                        <a:cs typeface="Calibri" charset="0"/>
+                      </a:endParaRPr>
+                    </a:p>
+                  </a:txBody>
+                  <a:tcPr marL="0" marR="76200" marT="63500" marB="63500" anchor="ctr">
+                    <a:lnL w="0" cap="flat" cmpd="sng" algn="ctr">
+                      <a:solidFill>
+                        <a:srgbClr val="666666"/>
+                      </a:solidFill>
+                      <a:prstDash val="solid"/>
+                      <a:round/>
+                      <a:headEnd type="none" w="med" len="med"/>
+                      <a:tailEnd type="none" w="med" len="med"/>
+                    </a:lnL>
+                    <a:lnR w="0" cap="flat" cmpd="sng" algn="ctr">
+                      <a:solidFill>
+                        <a:srgbClr val="666666"/>
+                      </a:solidFill>
+                      <a:prstDash val="solid"/>
+                      <a:round/>
+                      <a:headEnd type="none" w="med" len="med"/>
+                      <a:tailEnd type="none" w="med" len="med"/>
+                    </a:lnR>
+                    <a:lnT w="0" cap="flat" cmpd="sng" algn="ctr">
+                      <a:solidFill>
+                        <a:srgbClr val="666666"/>
+                      </a:solidFill>
+                      <a:prstDash val="solid"/>
+                      <a:round/>
+                      <a:headEnd type="none" w="med" len="med"/>
+                      <a:tailEnd type="none" w="med" len="med"/>
+                    </a:lnT>
+                    <a:lnB w="7620" cap="flat" cmpd="sng" algn="ctr">
+                      <a:solidFill>
+                        <a:srgbClr val="E2E4EA"/>
+                      </a:solidFill>
+                      <a:prstDash val="solid"/>
+                      <a:round/>
+                      <a:headEnd type="none" w="med" len="med"/>
+                      <a:tailEnd type="none" w="med" len="med"/>
+                    </a:lnB>
+                    <a:solidFill>
+                      <a:srgbClr val="FFFFFF"/>
+                    </a:solidFill>
+                  </a:tcPr>
+                </a:tc>
+                <a:tc>
+                  <a:txBody>
+                    <a:bodyPr/>
+                    <a:lstStyle/>
+                    <a:p>
+                      <a:pPr algn="r" indent="0" marL="0">
+                        <a:buNone/>
+                      </a:pPr>
+                      <a:r>
+                        <a:rPr lang="en-US" sz="1050" dirty="0">
+                          <a:solidFill>
+                            <a:srgbClr val="3B4660"/>
+                          </a:solidFill>
+                          <a:latin typeface="Calibri" pitchFamily="34" charset="0"/>
+                          <a:ea typeface="Calibri" pitchFamily="34" charset="-122"/>
+                          <a:cs typeface="Calibri" pitchFamily="34" charset="-120"/>
+                        </a:rPr>
+                        <a:t>0.29</a:t>
                       </a:r>
                       <a:endParaRPr lang="en-US" sz="1050" dirty="0">
                         <a:latin typeface="Calibri" charset="0"/>
@@ -18132,7 +18200,7 @@
                           <a:ea typeface="Calibri" pitchFamily="34" charset="-122"/>
                           <a:cs typeface="Calibri" pitchFamily="34" charset="-120"/>
                         </a:rPr>
-                        <a:t>0.37</a:t>
+                        <a:t>0.36</a:t>
                       </a:r>
                       <a:endParaRPr lang="en-US" sz="1050" dirty="0">
                         <a:latin typeface="Calibri" charset="0"/>
@@ -18200,75 +18268,7 @@
                           <a:ea typeface="Calibri" pitchFamily="34" charset="-122"/>
                           <a:cs typeface="Calibri" pitchFamily="34" charset="-120"/>
                         </a:rPr>
-                        <a:t>0.42</a:t>
-                      </a:r>
-                      <a:endParaRPr lang="en-US" sz="1050" dirty="0">
-                        <a:latin typeface="Calibri" charset="0"/>
-                        <a:ea typeface="Calibri" charset="0"/>
-                        <a:cs typeface="Calibri" charset="0"/>
-                      </a:endParaRPr>
-                    </a:p>
-                  </a:txBody>
-                  <a:tcPr marL="0" marR="76200" marT="63500" marB="63500" anchor="ctr">
-                    <a:lnL w="0" cap="flat" cmpd="sng" algn="ctr">
-                      <a:solidFill>
-                        <a:srgbClr val="666666"/>
-                      </a:solidFill>
-                      <a:prstDash val="solid"/>
-                      <a:round/>
-                      <a:headEnd type="none" w="med" len="med"/>
-                      <a:tailEnd type="none" w="med" len="med"/>
-                    </a:lnL>
-                    <a:lnR w="0" cap="flat" cmpd="sng" algn="ctr">
-                      <a:solidFill>
-                        <a:srgbClr val="666666"/>
-                      </a:solidFill>
-                      <a:prstDash val="solid"/>
-                      <a:round/>
-                      <a:headEnd type="none" w="med" len="med"/>
-                      <a:tailEnd type="none" w="med" len="med"/>
-                    </a:lnR>
-                    <a:lnT w="0" cap="flat" cmpd="sng" algn="ctr">
-                      <a:solidFill>
-                        <a:srgbClr val="666666"/>
-                      </a:solidFill>
-                      <a:prstDash val="solid"/>
-                      <a:round/>
-                      <a:headEnd type="none" w="med" len="med"/>
-                      <a:tailEnd type="none" w="med" len="med"/>
-                    </a:lnT>
-                    <a:lnB w="7620" cap="flat" cmpd="sng" algn="ctr">
-                      <a:solidFill>
-                        <a:srgbClr val="E2E4EA"/>
-                      </a:solidFill>
-                      <a:prstDash val="solid"/>
-                      <a:round/>
-                      <a:headEnd type="none" w="med" len="med"/>
-                      <a:tailEnd type="none" w="med" len="med"/>
-                    </a:lnB>
-                    <a:solidFill>
-                      <a:srgbClr val="FFFFFF"/>
-                    </a:solidFill>
-                  </a:tcPr>
-                </a:tc>
-                <a:tc>
-                  <a:txBody>
-                    <a:bodyPr/>
-                    <a:lstStyle/>
-                    <a:p>
-                      <a:pPr algn="r" indent="0" marL="0">
-                        <a:buNone/>
-                      </a:pPr>
-                      <a:r>
-                        <a:rPr lang="en-US" sz="1050" dirty="0">
-                          <a:solidFill>
-                            <a:srgbClr val="3B4660"/>
-                          </a:solidFill>
-                          <a:latin typeface="Calibri" pitchFamily="34" charset="0"/>
-                          <a:ea typeface="Calibri" pitchFamily="34" charset="-122"/>
-                          <a:cs typeface="Calibri" pitchFamily="34" charset="-120"/>
-                        </a:rPr>
-                        <a:t>0.47</a:t>
+                        <a:t>0.40</a:t>
                       </a:r>
                       <a:endParaRPr lang="en-US" sz="1050" dirty="0">
                         <a:latin typeface="Calibri" charset="0"/>
@@ -18406,211 +18406,7 @@
                           <a:ea typeface="Calibri" pitchFamily="34" charset="-122"/>
                           <a:cs typeface="Calibri" pitchFamily="34" charset="-120"/>
                         </a:rPr>
-                        <a:t>0.09</a:t>
-                      </a:r>
-                      <a:endParaRPr lang="en-US" sz="1050" dirty="0">
-                        <a:latin typeface="Calibri" charset="0"/>
-                        <a:ea typeface="Calibri" charset="0"/>
-                        <a:cs typeface="Calibri" charset="0"/>
-                      </a:endParaRPr>
-                    </a:p>
-                  </a:txBody>
-                  <a:tcPr marL="0" marR="76200" marT="63500" marB="63500" anchor="ctr">
-                    <a:lnL w="0" cap="flat" cmpd="sng" algn="ctr">
-                      <a:solidFill>
-                        <a:srgbClr val="666666"/>
-                      </a:solidFill>
-                      <a:prstDash val="solid"/>
-                      <a:round/>
-                      <a:headEnd type="none" w="med" len="med"/>
-                      <a:tailEnd type="none" w="med" len="med"/>
-                    </a:lnL>
-                    <a:lnR w="0" cap="flat" cmpd="sng" algn="ctr">
-                      <a:solidFill>
-                        <a:srgbClr val="666666"/>
-                      </a:solidFill>
-                      <a:prstDash val="solid"/>
-                      <a:round/>
-                      <a:headEnd type="none" w="med" len="med"/>
-                      <a:tailEnd type="none" w="med" len="med"/>
-                    </a:lnR>
-                    <a:lnT w="0" cap="flat" cmpd="sng" algn="ctr">
-                      <a:solidFill>
-                        <a:srgbClr val="666666"/>
-                      </a:solidFill>
-                      <a:prstDash val="solid"/>
-                      <a:round/>
-                      <a:headEnd type="none" w="med" len="med"/>
-                      <a:tailEnd type="none" w="med" len="med"/>
-                    </a:lnT>
-                    <a:lnB w="7620" cap="flat" cmpd="sng" algn="ctr">
-                      <a:solidFill>
-                        <a:srgbClr val="E2E4EA"/>
-                      </a:solidFill>
-                      <a:prstDash val="solid"/>
-                      <a:round/>
-                      <a:headEnd type="none" w="med" len="med"/>
-                      <a:tailEnd type="none" w="med" len="med"/>
-                    </a:lnB>
-                    <a:solidFill>
-                      <a:srgbClr val="FFFFFF"/>
-                    </a:solidFill>
-                  </a:tcPr>
-                </a:tc>
-                <a:tc>
-                  <a:txBody>
-                    <a:bodyPr/>
-                    <a:lstStyle/>
-                    <a:p>
-                      <a:pPr algn="r" indent="0" marL="0">
-                        <a:buNone/>
-                      </a:pPr>
-                      <a:r>
-                        <a:rPr lang="en-US" sz="1050" dirty="0">
-                          <a:solidFill>
-                            <a:srgbClr val="3B4660"/>
-                          </a:solidFill>
-                          <a:latin typeface="Calibri" pitchFamily="34" charset="0"/>
-                          <a:ea typeface="Calibri" pitchFamily="34" charset="-122"/>
-                          <a:cs typeface="Calibri" pitchFamily="34" charset="-120"/>
-                        </a:rPr>
-                        <a:t>0.12</a:t>
-                      </a:r>
-                      <a:endParaRPr lang="en-US" sz="1050" dirty="0">
-                        <a:latin typeface="Calibri" charset="0"/>
-                        <a:ea typeface="Calibri" charset="0"/>
-                        <a:cs typeface="Calibri" charset="0"/>
-                      </a:endParaRPr>
-                    </a:p>
-                  </a:txBody>
-                  <a:tcPr marL="0" marR="76200" marT="63500" marB="63500" anchor="ctr">
-                    <a:lnL w="0" cap="flat" cmpd="sng" algn="ctr">
-                      <a:solidFill>
-                        <a:srgbClr val="666666"/>
-                      </a:solidFill>
-                      <a:prstDash val="solid"/>
-                      <a:round/>
-                      <a:headEnd type="none" w="med" len="med"/>
-                      <a:tailEnd type="none" w="med" len="med"/>
-                    </a:lnL>
-                    <a:lnR w="0" cap="flat" cmpd="sng" algn="ctr">
-                      <a:solidFill>
-                        <a:srgbClr val="666666"/>
-                      </a:solidFill>
-                      <a:prstDash val="solid"/>
-                      <a:round/>
-                      <a:headEnd type="none" w="med" len="med"/>
-                      <a:tailEnd type="none" w="med" len="med"/>
-                    </a:lnR>
-                    <a:lnT w="0" cap="flat" cmpd="sng" algn="ctr">
-                      <a:solidFill>
-                        <a:srgbClr val="666666"/>
-                      </a:solidFill>
-                      <a:prstDash val="solid"/>
-                      <a:round/>
-                      <a:headEnd type="none" w="med" len="med"/>
-                      <a:tailEnd type="none" w="med" len="med"/>
-                    </a:lnT>
-                    <a:lnB w="7620" cap="flat" cmpd="sng" algn="ctr">
-                      <a:solidFill>
-                        <a:srgbClr val="E2E4EA"/>
-                      </a:solidFill>
-                      <a:prstDash val="solid"/>
-                      <a:round/>
-                      <a:headEnd type="none" w="med" len="med"/>
-                      <a:tailEnd type="none" w="med" len="med"/>
-                    </a:lnB>
-                    <a:solidFill>
-                      <a:srgbClr val="FFFFFF"/>
-                    </a:solidFill>
-                  </a:tcPr>
-                </a:tc>
-                <a:tc>
-                  <a:txBody>
-                    <a:bodyPr/>
-                    <a:lstStyle/>
-                    <a:p>
-                      <a:pPr algn="r" indent="0" marL="0">
-                        <a:buNone/>
-                      </a:pPr>
-                      <a:r>
-                        <a:rPr lang="en-US" sz="1050" dirty="0">
-                          <a:solidFill>
-                            <a:srgbClr val="3B4660"/>
-                          </a:solidFill>
-                          <a:latin typeface="Calibri" pitchFamily="34" charset="0"/>
-                          <a:ea typeface="Calibri" pitchFamily="34" charset="-122"/>
-                          <a:cs typeface="Calibri" pitchFamily="34" charset="-120"/>
-                        </a:rPr>
-                        <a:t>0.15</a:t>
-                      </a:r>
-                      <a:endParaRPr lang="en-US" sz="1050" dirty="0">
-                        <a:latin typeface="Calibri" charset="0"/>
-                        <a:ea typeface="Calibri" charset="0"/>
-                        <a:cs typeface="Calibri" charset="0"/>
-                      </a:endParaRPr>
-                    </a:p>
-                  </a:txBody>
-                  <a:tcPr marL="0" marR="76200" marT="63500" marB="63500" anchor="ctr">
-                    <a:lnL w="0" cap="flat" cmpd="sng" algn="ctr">
-                      <a:solidFill>
-                        <a:srgbClr val="666666"/>
-                      </a:solidFill>
-                      <a:prstDash val="solid"/>
-                      <a:round/>
-                      <a:headEnd type="none" w="med" len="med"/>
-                      <a:tailEnd type="none" w="med" len="med"/>
-                    </a:lnL>
-                    <a:lnR w="0" cap="flat" cmpd="sng" algn="ctr">
-                      <a:solidFill>
-                        <a:srgbClr val="666666"/>
-                      </a:solidFill>
-                      <a:prstDash val="solid"/>
-                      <a:round/>
-                      <a:headEnd type="none" w="med" len="med"/>
-                      <a:tailEnd type="none" w="med" len="med"/>
-                    </a:lnR>
-                    <a:lnT w="0" cap="flat" cmpd="sng" algn="ctr">
-                      <a:solidFill>
-                        <a:srgbClr val="666666"/>
-                      </a:solidFill>
-                      <a:prstDash val="solid"/>
-                      <a:round/>
-                      <a:headEnd type="none" w="med" len="med"/>
-                      <a:tailEnd type="none" w="med" len="med"/>
-                    </a:lnT>
-                    <a:lnB w="7620" cap="flat" cmpd="sng" algn="ctr">
-                      <a:solidFill>
-                        <a:srgbClr val="E2E4EA"/>
-                      </a:solidFill>
-                      <a:prstDash val="solid"/>
-                      <a:round/>
-                      <a:headEnd type="none" w="med" len="med"/>
-                      <a:tailEnd type="none" w="med" len="med"/>
-                    </a:lnB>
-                    <a:solidFill>
-                      <a:srgbClr val="FFFFFF"/>
-                    </a:solidFill>
-                  </a:tcPr>
-                </a:tc>
-                <a:tc>
-                  <a:txBody>
-                    <a:bodyPr/>
-                    <a:lstStyle/>
-                    <a:p>
-                      <a:pPr algn="r" indent="0" marL="0">
-                        <a:buNone/>
-                      </a:pPr>
-                      <a:r>
-                        <a:rPr lang="en-US" sz="1050" dirty="0">
-                          <a:solidFill>
-                            <a:srgbClr val="3B4660"/>
-                          </a:solidFill>
-                          <a:latin typeface="Calibri" pitchFamily="34" charset="0"/>
-                          <a:ea typeface="Calibri" pitchFamily="34" charset="-122"/>
-                          <a:cs typeface="Calibri" pitchFamily="34" charset="-120"/>
-                        </a:rPr>
-                        <a:t>0.18</a:t>
+                        <a:t>0.19</a:t>
                       </a:r>
                       <a:endParaRPr lang="en-US" sz="1050" dirty="0">
                         <a:latin typeface="Calibri" charset="0"/>
@@ -18746,7 +18542,7 @@
                           <a:ea typeface="Calibri" pitchFamily="34" charset="-122"/>
                           <a:cs typeface="Calibri" pitchFamily="34" charset="-120"/>
                         </a:rPr>
-                        <a:t>0.22</a:t>
+                        <a:t>0.21</a:t>
                       </a:r>
                       <a:endParaRPr lang="en-US" sz="1050" dirty="0">
                         <a:latin typeface="Calibri" charset="0"/>
@@ -18814,7 +18610,211 @@
                           <a:ea typeface="Calibri" pitchFamily="34" charset="-122"/>
                           <a:cs typeface="Calibri" pitchFamily="34" charset="-120"/>
                         </a:rPr>
-                        <a:t>0.25</a:t>
+                        <a:t>0.21</a:t>
+                      </a:r>
+                      <a:endParaRPr lang="en-US" sz="1050" dirty="0">
+                        <a:latin typeface="Calibri" charset="0"/>
+                        <a:ea typeface="Calibri" charset="0"/>
+                        <a:cs typeface="Calibri" charset="0"/>
+                      </a:endParaRPr>
+                    </a:p>
+                  </a:txBody>
+                  <a:tcPr marL="0" marR="76200" marT="63500" marB="63500" anchor="ctr">
+                    <a:lnL w="0" cap="flat" cmpd="sng" algn="ctr">
+                      <a:solidFill>
+                        <a:srgbClr val="666666"/>
+                      </a:solidFill>
+                      <a:prstDash val="solid"/>
+                      <a:round/>
+                      <a:headEnd type="none" w="med" len="med"/>
+                      <a:tailEnd type="none" w="med" len="med"/>
+                    </a:lnL>
+                    <a:lnR w="0" cap="flat" cmpd="sng" algn="ctr">
+                      <a:solidFill>
+                        <a:srgbClr val="666666"/>
+                      </a:solidFill>
+                      <a:prstDash val="solid"/>
+                      <a:round/>
+                      <a:headEnd type="none" w="med" len="med"/>
+                      <a:tailEnd type="none" w="med" len="med"/>
+                    </a:lnR>
+                    <a:lnT w="0" cap="flat" cmpd="sng" algn="ctr">
+                      <a:solidFill>
+                        <a:srgbClr val="666666"/>
+                      </a:solidFill>
+                      <a:prstDash val="solid"/>
+                      <a:round/>
+                      <a:headEnd type="none" w="med" len="med"/>
+                      <a:tailEnd type="none" w="med" len="med"/>
+                    </a:lnT>
+                    <a:lnB w="7620" cap="flat" cmpd="sng" algn="ctr">
+                      <a:solidFill>
+                        <a:srgbClr val="E2E4EA"/>
+                      </a:solidFill>
+                      <a:prstDash val="solid"/>
+                      <a:round/>
+                      <a:headEnd type="none" w="med" len="med"/>
+                      <a:tailEnd type="none" w="med" len="med"/>
+                    </a:lnB>
+                    <a:solidFill>
+                      <a:srgbClr val="FFFFFF"/>
+                    </a:solidFill>
+                  </a:tcPr>
+                </a:tc>
+                <a:tc>
+                  <a:txBody>
+                    <a:bodyPr/>
+                    <a:lstStyle/>
+                    <a:p>
+                      <a:pPr algn="r" indent="0" marL="0">
+                        <a:buNone/>
+                      </a:pPr>
+                      <a:r>
+                        <a:rPr lang="en-US" sz="1050" dirty="0">
+                          <a:solidFill>
+                            <a:srgbClr val="3B4660"/>
+                          </a:solidFill>
+                          <a:latin typeface="Calibri" pitchFamily="34" charset="0"/>
+                          <a:ea typeface="Calibri" pitchFamily="34" charset="-122"/>
+                          <a:cs typeface="Calibri" pitchFamily="34" charset="-120"/>
+                        </a:rPr>
+                        <a:t>0.21</a:t>
+                      </a:r>
+                      <a:endParaRPr lang="en-US" sz="1050" dirty="0">
+                        <a:latin typeface="Calibri" charset="0"/>
+                        <a:ea typeface="Calibri" charset="0"/>
+                        <a:cs typeface="Calibri" charset="0"/>
+                      </a:endParaRPr>
+                    </a:p>
+                  </a:txBody>
+                  <a:tcPr marL="0" marR="76200" marT="63500" marB="63500" anchor="ctr">
+                    <a:lnL w="0" cap="flat" cmpd="sng" algn="ctr">
+                      <a:solidFill>
+                        <a:srgbClr val="666666"/>
+                      </a:solidFill>
+                      <a:prstDash val="solid"/>
+                      <a:round/>
+                      <a:headEnd type="none" w="med" len="med"/>
+                      <a:tailEnd type="none" w="med" len="med"/>
+                    </a:lnL>
+                    <a:lnR w="0" cap="flat" cmpd="sng" algn="ctr">
+                      <a:solidFill>
+                        <a:srgbClr val="666666"/>
+                      </a:solidFill>
+                      <a:prstDash val="solid"/>
+                      <a:round/>
+                      <a:headEnd type="none" w="med" len="med"/>
+                      <a:tailEnd type="none" w="med" len="med"/>
+                    </a:lnR>
+                    <a:lnT w="0" cap="flat" cmpd="sng" algn="ctr">
+                      <a:solidFill>
+                        <a:srgbClr val="666666"/>
+                      </a:solidFill>
+                      <a:prstDash val="solid"/>
+                      <a:round/>
+                      <a:headEnd type="none" w="med" len="med"/>
+                      <a:tailEnd type="none" w="med" len="med"/>
+                    </a:lnT>
+                    <a:lnB w="7620" cap="flat" cmpd="sng" algn="ctr">
+                      <a:solidFill>
+                        <a:srgbClr val="E2E4EA"/>
+                      </a:solidFill>
+                      <a:prstDash val="solid"/>
+                      <a:round/>
+                      <a:headEnd type="none" w="med" len="med"/>
+                      <a:tailEnd type="none" w="med" len="med"/>
+                    </a:lnB>
+                    <a:solidFill>
+                      <a:srgbClr val="FFFFFF"/>
+                    </a:solidFill>
+                  </a:tcPr>
+                </a:tc>
+                <a:tc>
+                  <a:txBody>
+                    <a:bodyPr/>
+                    <a:lstStyle/>
+                    <a:p>
+                      <a:pPr algn="r" indent="0" marL="0">
+                        <a:buNone/>
+                      </a:pPr>
+                      <a:r>
+                        <a:rPr lang="en-US" sz="1050" dirty="0">
+                          <a:solidFill>
+                            <a:srgbClr val="3B4660"/>
+                          </a:solidFill>
+                          <a:latin typeface="Calibri" pitchFamily="34" charset="0"/>
+                          <a:ea typeface="Calibri" pitchFamily="34" charset="-122"/>
+                          <a:cs typeface="Calibri" pitchFamily="34" charset="-120"/>
+                        </a:rPr>
+                        <a:t>0.23</a:t>
+                      </a:r>
+                      <a:endParaRPr lang="en-US" sz="1050" dirty="0">
+                        <a:latin typeface="Calibri" charset="0"/>
+                        <a:ea typeface="Calibri" charset="0"/>
+                        <a:cs typeface="Calibri" charset="0"/>
+                      </a:endParaRPr>
+                    </a:p>
+                  </a:txBody>
+                  <a:tcPr marL="0" marR="76200" marT="63500" marB="63500" anchor="ctr">
+                    <a:lnL w="0" cap="flat" cmpd="sng" algn="ctr">
+                      <a:solidFill>
+                        <a:srgbClr val="666666"/>
+                      </a:solidFill>
+                      <a:prstDash val="solid"/>
+                      <a:round/>
+                      <a:headEnd type="none" w="med" len="med"/>
+                      <a:tailEnd type="none" w="med" len="med"/>
+                    </a:lnL>
+                    <a:lnR w="0" cap="flat" cmpd="sng" algn="ctr">
+                      <a:solidFill>
+                        <a:srgbClr val="666666"/>
+                      </a:solidFill>
+                      <a:prstDash val="solid"/>
+                      <a:round/>
+                      <a:headEnd type="none" w="med" len="med"/>
+                      <a:tailEnd type="none" w="med" len="med"/>
+                    </a:lnR>
+                    <a:lnT w="0" cap="flat" cmpd="sng" algn="ctr">
+                      <a:solidFill>
+                        <a:srgbClr val="666666"/>
+                      </a:solidFill>
+                      <a:prstDash val="solid"/>
+                      <a:round/>
+                      <a:headEnd type="none" w="med" len="med"/>
+                      <a:tailEnd type="none" w="med" len="med"/>
+                    </a:lnT>
+                    <a:lnB w="7620" cap="flat" cmpd="sng" algn="ctr">
+                      <a:solidFill>
+                        <a:srgbClr val="E2E4EA"/>
+                      </a:solidFill>
+                      <a:prstDash val="solid"/>
+                      <a:round/>
+                      <a:headEnd type="none" w="med" len="med"/>
+                      <a:tailEnd type="none" w="med" len="med"/>
+                    </a:lnB>
+                    <a:solidFill>
+                      <a:srgbClr val="FFFFFF"/>
+                    </a:solidFill>
+                  </a:tcPr>
+                </a:tc>
+                <a:tc>
+                  <a:txBody>
+                    <a:bodyPr/>
+                    <a:lstStyle/>
+                    <a:p>
+                      <a:pPr algn="r" indent="0" marL="0">
+                        <a:buNone/>
+                      </a:pPr>
+                      <a:r>
+                        <a:rPr lang="en-US" sz="1050" dirty="0">
+                          <a:solidFill>
+                            <a:srgbClr val="3B4660"/>
+                          </a:solidFill>
+                          <a:latin typeface="Calibri" pitchFamily="34" charset="0"/>
+                          <a:ea typeface="Calibri" pitchFamily="34" charset="-122"/>
+                          <a:cs typeface="Calibri" pitchFamily="34" charset="-120"/>
+                        </a:rPr>
+                        <a:t>0.26</a:t>
                       </a:r>
                       <a:endParaRPr lang="en-US" sz="1050" dirty="0">
                         <a:latin typeface="Calibri" charset="0"/>
@@ -18952,7 +18952,7 @@
                           <a:ea typeface="Calibri" pitchFamily="34" charset="-122"/>
                           <a:cs typeface="Calibri" pitchFamily="34" charset="-120"/>
                         </a:rPr>
-                        <a:t>0.10</a:t>
+                        <a:t>0.12</a:t>
                       </a:r>
                       <a:endParaRPr lang="en-US" sz="1050" dirty="0">
                         <a:latin typeface="Calibri" charset="0"/>
@@ -19020,7 +19020,7 @@
                           <a:ea typeface="Calibri" pitchFamily="34" charset="-122"/>
                           <a:cs typeface="Calibri" pitchFamily="34" charset="-120"/>
                         </a:rPr>
-                        <a:t>0.14</a:t>
+                        <a:t>0.16</a:t>
                       </a:r>
                       <a:endParaRPr lang="en-US" sz="1050" dirty="0">
                         <a:latin typeface="Calibri" charset="0"/>
@@ -19088,7 +19088,7 @@
                           <a:ea typeface="Calibri" pitchFamily="34" charset="-122"/>
                           <a:cs typeface="Calibri" pitchFamily="34" charset="-120"/>
                         </a:rPr>
-                        <a:t>0.17</a:t>
+                        <a:t>0.19</a:t>
                       </a:r>
                       <a:endParaRPr lang="en-US" sz="1050" dirty="0">
                         <a:latin typeface="Calibri" charset="0"/>
@@ -19156,7 +19156,7 @@
                           <a:ea typeface="Calibri" pitchFamily="34" charset="-122"/>
                           <a:cs typeface="Calibri" pitchFamily="34" charset="-120"/>
                         </a:rPr>
-                        <a:t>0.20</a:t>
+                        <a:t>0.21</a:t>
                       </a:r>
                       <a:endParaRPr lang="en-US" sz="1050" dirty="0">
                         <a:latin typeface="Calibri" charset="0"/>
@@ -19224,7 +19224,7 @@
                           <a:ea typeface="Calibri" pitchFamily="34" charset="-122"/>
                           <a:cs typeface="Calibri" pitchFamily="34" charset="-120"/>
                         </a:rPr>
-                        <a:t>0.22</a:t>
+                        <a:t>0.24</a:t>
                       </a:r>
                       <a:endParaRPr lang="en-US" sz="1050" dirty="0">
                         <a:latin typeface="Calibri" charset="0"/>
@@ -19292,7 +19292,7 @@
                           <a:ea typeface="Calibri" pitchFamily="34" charset="-122"/>
                           <a:cs typeface="Calibri" pitchFamily="34" charset="-120"/>
                         </a:rPr>
-                        <a:t>0.25</a:t>
+                        <a:t>0.26</a:t>
                       </a:r>
                       <a:endParaRPr lang="en-US" sz="1050" dirty="0">
                         <a:latin typeface="Calibri" charset="0"/>
@@ -19360,7 +19360,7 @@
                           <a:ea typeface="Calibri" pitchFamily="34" charset="-122"/>
                           <a:cs typeface="Calibri" pitchFamily="34" charset="-120"/>
                         </a:rPr>
-                        <a:t>0.28</a:t>
+                        <a:t>0.29</a:t>
                       </a:r>
                       <a:endParaRPr lang="en-US" sz="1050" dirty="0">
                         <a:latin typeface="Calibri" charset="0"/>
@@ -19498,7 +19498,7 @@
                           <a:ea typeface="Calibri" pitchFamily="34" charset="-122"/>
                           <a:cs typeface="Calibri" pitchFamily="34" charset="-120"/>
                         </a:rPr>
-                        <a:t>0.27</a:t>
+                        <a:t>0.29</a:t>
                       </a:r>
                       <a:endParaRPr lang="en-US" sz="1050" dirty="0">
                         <a:latin typeface="Calibri" charset="0"/>
@@ -19566,7 +19566,7 @@
                           <a:ea typeface="Calibri" pitchFamily="34" charset="-122"/>
                           <a:cs typeface="Calibri" pitchFamily="34" charset="-120"/>
                         </a:rPr>
-                        <a:t>0.34</a:t>
+                        <a:t>0.35</a:t>
                       </a:r>
                       <a:endParaRPr lang="en-US" sz="1050" dirty="0">
                         <a:latin typeface="Calibri" charset="0"/>
@@ -19770,7 +19770,7 @@
                           <a:ea typeface="Calibri" pitchFamily="34" charset="-122"/>
                           <a:cs typeface="Calibri" pitchFamily="34" charset="-120"/>
                         </a:rPr>
-                        <a:t>0.51</a:t>
+                        <a:t>0.50</a:t>
                       </a:r>
                       <a:endParaRPr lang="en-US" sz="1050" dirty="0">
                         <a:latin typeface="Calibri" charset="0"/>
@@ -19906,7 +19906,7 @@
                           <a:ea typeface="Calibri" pitchFamily="34" charset="-122"/>
                           <a:cs typeface="Calibri" pitchFamily="34" charset="-120"/>
                         </a:rPr>
-                        <a:t>0.63</a:t>
+                        <a:t>0.62</a:t>
                       </a:r>
                       <a:endParaRPr lang="en-US" sz="1050" dirty="0">
                         <a:latin typeface="Calibri" charset="0"/>
@@ -20044,7 +20044,7 @@
                           <a:ea typeface="Calibri" pitchFamily="34" charset="-122"/>
                           <a:cs typeface="Calibri" pitchFamily="34" charset="-120"/>
                         </a:rPr>
-                        <a:t>2.17</a:t>
+                        <a:t>2.32</a:t>
                       </a:r>
                       <a:endParaRPr lang="en-US" sz="1050" dirty="0">
                         <a:latin typeface="Calibri" charset="0"/>
@@ -20112,7 +20112,7 @@
                           <a:ea typeface="Calibri" pitchFamily="34" charset="-122"/>
                           <a:cs typeface="Calibri" pitchFamily="34" charset="-120"/>
                         </a:rPr>
-                        <a:t>2.54</a:t>
+                        <a:t>2.62</a:t>
                       </a:r>
                       <a:endParaRPr lang="en-US" sz="1050" dirty="0">
                         <a:latin typeface="Calibri" charset="0"/>
@@ -20180,7 +20180,7 @@
                           <a:ea typeface="Calibri" pitchFamily="34" charset="-122"/>
                           <a:cs typeface="Calibri" pitchFamily="34" charset="-120"/>
                         </a:rPr>
-                        <a:t>2.88</a:t>
+                        <a:t>2.89</a:t>
                       </a:r>
                       <a:endParaRPr lang="en-US" sz="1050" dirty="0">
                         <a:latin typeface="Calibri" charset="0"/>
@@ -20248,7 +20248,7 @@
                           <a:ea typeface="Calibri" pitchFamily="34" charset="-122"/>
                           <a:cs typeface="Calibri" pitchFamily="34" charset="-120"/>
                         </a:rPr>
-                        <a:t>3.20</a:t>
+                        <a:t>3.15</a:t>
                       </a:r>
                       <a:endParaRPr lang="en-US" sz="1050" dirty="0">
                         <a:latin typeface="Calibri" charset="0"/>
@@ -20316,7 +20316,7 @@
                           <a:ea typeface="Calibri" pitchFamily="34" charset="-122"/>
                           <a:cs typeface="Calibri" pitchFamily="34" charset="-120"/>
                         </a:rPr>
-                        <a:t>3.53</a:t>
+                        <a:t>3.41</a:t>
                       </a:r>
                       <a:endParaRPr lang="en-US" sz="1050" dirty="0">
                         <a:latin typeface="Calibri" charset="0"/>
@@ -20384,7 +20384,7 @@
                           <a:ea typeface="Calibri" pitchFamily="34" charset="-122"/>
                           <a:cs typeface="Calibri" pitchFamily="34" charset="-120"/>
                         </a:rPr>
-                        <a:t>3.87</a:t>
+                        <a:t>3.72</a:t>
                       </a:r>
                       <a:endParaRPr lang="en-US" sz="1050" dirty="0">
                         <a:latin typeface="Calibri" charset="0"/>
@@ -20452,7 +20452,7 @@
                           <a:ea typeface="Calibri" pitchFamily="34" charset="-122"/>
                           <a:cs typeface="Calibri" pitchFamily="34" charset="-120"/>
                         </a:rPr>
-                        <a:t>4.22</a:t>
+                        <a:t>4.04</a:t>
                       </a:r>
                       <a:endParaRPr lang="en-US" sz="1050" dirty="0">
                         <a:latin typeface="Calibri" charset="0"/>
@@ -20590,7 +20590,7 @@
                           <a:ea typeface="Calibri" pitchFamily="34" charset="-122"/>
                           <a:cs typeface="Calibri" pitchFamily="34" charset="-120"/>
                         </a:rPr>
-                        <a:t>1.96 · -11%</a:t>
+                        <a:t>2.48 · 7%</a:t>
                       </a:r>
                       <a:endParaRPr lang="en-US" sz="1050" dirty="0">
                         <a:latin typeface="Calibri" charset="0"/>
@@ -20658,7 +20658,7 @@
                           <a:ea typeface="Calibri" pitchFamily="34" charset="-122"/>
                           <a:cs typeface="Calibri" pitchFamily="34" charset="-120"/>
                         </a:rPr>
-                        <a:t>2.70 · 6%</a:t>
+                        <a:t>3.13 · 16%</a:t>
                       </a:r>
                       <a:endParaRPr lang="en-US" sz="1050" dirty="0">
                         <a:latin typeface="Calibri" charset="0"/>
@@ -20726,7 +20726,7 @@
                           <a:ea typeface="Calibri" pitchFamily="34" charset="-122"/>
                           <a:cs typeface="Calibri" pitchFamily="34" charset="-120"/>
                         </a:rPr>
-                        <a:t>3.38 · 15%</a:t>
+                        <a:t>3.76 · 23%</a:t>
                       </a:r>
                       <a:endParaRPr lang="en-US" sz="1050" dirty="0">
                         <a:latin typeface="Calibri" charset="0"/>
@@ -20794,7 +20794,7 @@
                           <a:ea typeface="Calibri" pitchFamily="34" charset="-122"/>
                           <a:cs typeface="Calibri" pitchFamily="34" charset="-120"/>
                         </a:rPr>
-                        <a:t>3.91 · 18%</a:t>
+                        <a:t>4.22 · 25%</a:t>
                       </a:r>
                       <a:endParaRPr lang="en-US" sz="1050" dirty="0">
                         <a:latin typeface="Calibri" charset="0"/>
@@ -20862,7 +20862,7 @@
                           <a:ea typeface="Calibri" pitchFamily="34" charset="-122"/>
                           <a:cs typeface="Calibri" pitchFamily="34" charset="-120"/>
                         </a:rPr>
-                        <a:t>4.50 · 22%</a:t>
+                        <a:t>4.74 · 28%</a:t>
                       </a:r>
                       <a:endParaRPr lang="en-US" sz="1050" dirty="0">
                         <a:latin typeface="Calibri" charset="0"/>
@@ -20930,7 +20930,7 @@
                           <a:ea typeface="Calibri" pitchFamily="34" charset="-122"/>
                           <a:cs typeface="Calibri" pitchFamily="34" charset="-120"/>
                         </a:rPr>
-                        <a:t>4.97 · 22%</a:t>
+                        <a:t>5.17 · 28%</a:t>
                       </a:r>
                       <a:endParaRPr lang="en-US" sz="1050" dirty="0">
                         <a:latin typeface="Calibri" charset="0"/>
@@ -20998,7 +20998,7 @@
                           <a:ea typeface="Calibri" pitchFamily="34" charset="-122"/>
                           <a:cs typeface="Calibri" pitchFamily="34" charset="-120"/>
                         </a:rPr>
-                        <a:t>5.58 · 24%</a:t>
+                        <a:t>5.75 · 30%</a:t>
                       </a:r>
                       <a:endParaRPr lang="en-US" sz="1050" dirty="0">
                         <a:latin typeface="Calibri" charset="0"/>
@@ -21532,7 +21532,7 @@
                 <a:ea typeface="Calibri" pitchFamily="34" charset="-122"/>
                 <a:cs typeface="Calibri" pitchFamily="34" charset="-120"/>
               </a:rPr>
-              <a:t>Year 2</a:t>
+              <a:t>Year 1</a:t>
             </a:r>
             <a:endParaRPr lang="en-US" sz="2000" dirty="0"/>
           </a:p>
@@ -21574,7 +21574,7 @@
                 <a:ea typeface="Calibri" pitchFamily="34" charset="-122"/>
                 <a:cs typeface="Calibri" pitchFamily="34" charset="-120"/>
               </a:rPr>
-              <a:t>After ₹0.21 Cr of cumulative operating deficit</a:t>
+              <a:t>After ₹0.00 Cr of cumulative operating deficit</a:t>
             </a:r>
             <a:endParaRPr lang="en-US" sz="950" dirty="0"/>
           </a:p>
@@ -21681,7 +21681,7 @@
                 <a:ea typeface="Calibri" pitchFamily="34" charset="-122"/>
                 <a:cs typeface="Calibri" pitchFamily="34" charset="-120"/>
               </a:rPr>
-              <a:t>24.3%</a:t>
+              <a:t>29.8%</a:t>
             </a:r>
             <a:endParaRPr lang="en-US" sz="2600" dirty="0"/>
           </a:p>
@@ -21830,7 +21830,7 @@
                 <a:ea typeface="Calibri" pitchFamily="34" charset="-122"/>
                 <a:cs typeface="Calibri" pitchFamily="34" charset="-120"/>
               </a:rPr>
-              <a:t>₹4.58 Cr</a:t>
+              <a:t>₹7.10 Cr</a:t>
             </a:r>
             <a:endParaRPr lang="en-US" sz="2600" dirty="0"/>
           </a:p>
@@ -22206,7 +22206,7 @@
                 <a:ea typeface="Calibri" pitchFamily="34" charset="-122"/>
                 <a:cs typeface="Calibri" pitchFamily="34" charset="-120"/>
               </a:rPr>
-              <a:t>18.7%</a:t>
+              <a:t>43.3%</a:t>
             </a:r>
             <a:endParaRPr lang="en-US" sz="2600" dirty="0"/>
           </a:p>
@@ -22355,7 +22355,7 @@
                 <a:ea typeface="Calibri" pitchFamily="34" charset="-122"/>
                 <a:cs typeface="Calibri" pitchFamily="34" charset="-120"/>
               </a:rPr>
-              <a:t>4.7 yrs</a:t>
+              <a:t>2.9 yrs</a:t>
             </a:r>
             <a:endParaRPr lang="en-US" sz="2600" dirty="0"/>
           </a:p>
@@ -22504,7 +22504,7 @@
                 <a:ea typeface="Calibri" pitchFamily="34" charset="-122"/>
                 <a:cs typeface="Calibri" pitchFamily="34" charset="-120"/>
               </a:rPr>
-              <a:t>12.50%</a:t>
+              <a:t>12.10%</a:t>
             </a:r>
             <a:endParaRPr lang="en-US" sz="2600" dirty="0"/>
           </a:p>
@@ -22653,7 +22653,7 @@
                 <a:ea typeface="Calibri" pitchFamily="34" charset="-122"/>
                 <a:cs typeface="Calibri" pitchFamily="34" charset="-120"/>
               </a:rPr>
-              <a:t>+6.2 pp</a:t>
+              <a:t>+31.2 pp</a:t>
             </a:r>
             <a:endParaRPr lang="en-US" sz="2600" dirty="0"/>
           </a:p>
@@ -23305,7 +23305,7 @@
                           <a:ea typeface="Calibri" pitchFamily="34" charset="-122"/>
                           <a:cs typeface="Calibri" pitchFamily="34" charset="-120"/>
                         </a:rPr>
-                        <a:t>₹-0.64 Cr</a:t>
+                        <a:t>₹-0.33 Cr</a:t>
                       </a:r>
                       <a:endParaRPr lang="en-US" sz="1100" dirty="0">
                         <a:latin typeface="Calibri" charset="0"/>
@@ -23373,7 +23373,7 @@
                           <a:ea typeface="Calibri" pitchFamily="34" charset="-122"/>
                           <a:cs typeface="Calibri" pitchFamily="34" charset="-120"/>
                         </a:rPr>
-                        <a:t>₹-0.21 Cr</a:t>
+                        <a:t>₹0.17 Cr</a:t>
                       </a:r>
                       <a:endParaRPr lang="en-US" sz="1100" dirty="0">
                         <a:latin typeface="Calibri" charset="0"/>
@@ -23441,7 +23441,7 @@
                           <a:ea typeface="Calibri" pitchFamily="34" charset="-122"/>
                           <a:cs typeface="Calibri" pitchFamily="34" charset="-120"/>
                         </a:rPr>
-                        <a:t>₹0.13 Cr</a:t>
+                        <a:t>₹0.57 Cr</a:t>
                       </a:r>
                       <a:endParaRPr lang="en-US" sz="1100" dirty="0">
                         <a:latin typeface="Calibri" charset="0"/>
@@ -23579,7 +23579,7 @@
                           <a:ea typeface="Calibri" pitchFamily="34" charset="-122"/>
                           <a:cs typeface="Calibri" pitchFamily="34" charset="-120"/>
                         </a:rPr>
-                        <a:t>₹3.66 Cr</a:t>
+                        <a:t>₹3.88 Cr</a:t>
                       </a:r>
                       <a:endParaRPr lang="en-US" sz="1100" dirty="0">
                         <a:latin typeface="Calibri" charset="0"/>
@@ -23647,7 +23647,7 @@
                           <a:ea typeface="Calibri" pitchFamily="34" charset="-122"/>
                           <a:cs typeface="Calibri" pitchFamily="34" charset="-120"/>
                         </a:rPr>
-                        <a:t>₹4.50 Cr</a:t>
+                        <a:t>₹4.74 Cr</a:t>
                       </a:r>
                       <a:endParaRPr lang="en-US" sz="1100" dirty="0">
                         <a:latin typeface="Calibri" charset="0"/>
@@ -23715,7 +23715,7 @@
                           <a:ea typeface="Calibri" pitchFamily="34" charset="-122"/>
                           <a:cs typeface="Calibri" pitchFamily="34" charset="-120"/>
                         </a:rPr>
-                        <a:t>₹5.49 Cr</a:t>
+                        <a:t>₹5.76 Cr</a:t>
                       </a:r>
                       <a:endParaRPr lang="en-US" sz="1100" dirty="0">
                         <a:latin typeface="Calibri" charset="0"/>
@@ -23853,7 +23853,7 @@
                           <a:ea typeface="Calibri" pitchFamily="34" charset="-122"/>
                           <a:cs typeface="Calibri" pitchFamily="34" charset="-120"/>
                         </a:rPr>
-                        <a:t>3.4%</a:t>
+                        <a:t>11.4%</a:t>
                       </a:r>
                       <a:endParaRPr lang="en-US" sz="1100" dirty="0">
                         <a:latin typeface="Calibri" charset="0"/>
@@ -23921,7 +23921,7 @@
                           <a:ea typeface="Calibri" pitchFamily="34" charset="-122"/>
                           <a:cs typeface="Calibri" pitchFamily="34" charset="-120"/>
                         </a:rPr>
-                        <a:t>21.6%</a:t>
+                        <a:t>28.0%</a:t>
                       </a:r>
                       <a:endParaRPr lang="en-US" sz="1100" dirty="0">
                         <a:latin typeface="Calibri" charset="0"/>
@@ -23989,7 +23989,7 @@
                           <a:ea typeface="Calibri" pitchFamily="34" charset="-122"/>
                           <a:cs typeface="Calibri" pitchFamily="34" charset="-120"/>
                         </a:rPr>
-                        <a:t>32.0%</a:t>
+                        <a:t>37.5%</a:t>
                       </a:r>
                       <a:endParaRPr lang="en-US" sz="1100" dirty="0">
                         <a:latin typeface="Calibri" charset="0"/>
@@ -24195,7 +24195,7 @@
                           <a:ea typeface="Calibri" pitchFamily="34" charset="-122"/>
                           <a:cs typeface="Calibri" pitchFamily="34" charset="-120"/>
                         </a:rPr>
-                        <a:t>4.7 yrs</a:t>
+                        <a:t>2.9 yrs</a:t>
                       </a:r>
                       <a:endParaRPr lang="en-US" sz="1100" dirty="0">
                         <a:latin typeface="Calibri" charset="0"/>
@@ -24263,7 +24263,7 @@
                           <a:ea typeface="Calibri" pitchFamily="34" charset="-122"/>
                           <a:cs typeface="Calibri" pitchFamily="34" charset="-120"/>
                         </a:rPr>
-                        <a:t>2.9 yrs</a:t>
+                        <a:t>1.8 yrs</a:t>
                       </a:r>
                       <a:endParaRPr lang="en-US" sz="1100" dirty="0">
                         <a:latin typeface="Calibri" charset="0"/>
@@ -24328,11 +24328,11 @@
         <p:spPr>
           <a:xfrm>
             <a:off x="566928" y="3605276"/>
-            <a:ext cx="11057839" cy="1062299"/>
+            <a:ext cx="11057839" cy="1287363"/>
           </a:xfrm>
           <a:prstGeom prst="roundRect">
             <a:avLst>
-              <a:gd name="adj" fmla="val 4304"/>
+              <a:gd name="adj" fmla="val 3551"/>
             </a:avLst>
           </a:prstGeom>
           <a:solidFill>
@@ -24436,7 +24436,7 @@
         <p:spPr>
           <a:xfrm>
             <a:off x="804672" y="4241343"/>
-            <a:ext cx="10582351" cy="353080"/>
+            <a:ext cx="10582351" cy="578145"/>
           </a:xfrm>
           <a:prstGeom prst="rect">
             <a:avLst/>
@@ -24463,7 +24463,7 @@
                 <a:ea typeface="Calibri" pitchFamily="34" charset="-122"/>
                 <a:cs typeface="Calibri" pitchFamily="34" charset="-120"/>
               </a:rPr>
-              <a:t>The model solves the break-even licence fee at ₹45.1 L a year — ₹3.76 L a month, about 50% above ADA's reserve. Hold that line in the auction room.</a:t>
+              <a:t>The model solves the break-even licence fee at ₹80.9 L a year — ₹6.74 L a month, about 170% above ADA's reserve. Hold that line in the auction room.</a:t>
             </a:r>
             <a:endParaRPr lang="en-US" sz="1200" dirty="0"/>
           </a:p>
@@ -24930,7 +24930,7 @@
                           <a:ea typeface="Calibri" pitchFamily="34" charset="-122"/>
                           <a:cs typeface="Calibri" pitchFamily="34" charset="-120"/>
                         </a:rPr>
-                        <a:t>₹1.39 Cr</a:t>
+                        <a:t>₹1.00 Cr</a:t>
                       </a:r>
                       <a:endParaRPr lang="en-US" sz="1100" dirty="0">
                         <a:latin typeface="Calibri" charset="0"/>
@@ -25068,7 +25068,7 @@
                           <a:ea typeface="Calibri" pitchFamily="34" charset="-122"/>
                           <a:cs typeface="Calibri" pitchFamily="34" charset="-120"/>
                         </a:rPr>
-                        <a:t>60%</a:t>
+                        <a:t>45%</a:t>
                       </a:r>
                       <a:endParaRPr lang="en-US" sz="1100" dirty="0">
                         <a:latin typeface="Calibri" charset="0"/>
@@ -25344,7 +25344,7 @@
                           <a:ea typeface="Calibri" pitchFamily="34" charset="-122"/>
                           <a:cs typeface="Calibri" pitchFamily="34" charset="-120"/>
                         </a:rPr>
-                        <a:t>₹1.52 Cr</a:t>
+                        <a:t>₹1.94 Cr</a:t>
                       </a:r>
                       <a:endParaRPr lang="en-US" sz="1100" dirty="0">
                         <a:latin typeface="Calibri" charset="0"/>
@@ -25482,7 +25482,7 @@
                           <a:ea typeface="Calibri" pitchFamily="34" charset="-122"/>
                           <a:cs typeface="Calibri" pitchFamily="34" charset="-120"/>
                         </a:rPr>
-                        <a:t>₹1.72 Cr</a:t>
+                        <a:t>₹2.10 Cr</a:t>
                       </a:r>
                       <a:endParaRPr lang="en-US" sz="1100" dirty="0">
                         <a:latin typeface="Calibri" charset="0"/>
@@ -25620,7 +25620,7 @@
                           <a:ea typeface="Calibri" pitchFamily="34" charset="-122"/>
                           <a:cs typeface="Calibri" pitchFamily="34" charset="-120"/>
                         </a:rPr>
-                        <a:t>4.7%</a:t>
+                        <a:t>19.6%</a:t>
                       </a:r>
                       <a:endParaRPr lang="en-US" sz="1100" dirty="0">
                         <a:latin typeface="Calibri" charset="0"/>
@@ -25758,7 +25758,7 @@
                           <a:ea typeface="Calibri" pitchFamily="34" charset="-122"/>
                           <a:cs typeface="Calibri" pitchFamily="34" charset="-120"/>
                         </a:rPr>
-                        <a:t>100%</a:t>
+                        <a:t>49%</a:t>
                       </a:r>
                       <a:endParaRPr lang="en-US" sz="1100" dirty="0">
                         <a:latin typeface="Calibri" charset="0"/>
@@ -25958,7 +25958,7 @@
                 <a:ea typeface="Calibri" pitchFamily="34" charset="-122"/>
                 <a:cs typeface="Calibri" pitchFamily="34" charset="-120"/>
               </a:rPr>
-              <a:t>At 60% the investor earns 4.7% — below a deposit rate. Clearing a conventional 22% hurdle would take 100% of the project. A seven-year concession generating ₹3.16 Cr of lifetime free cash flow cannot pay an equity return on ₹1.39 Cr and still leave E-O-D a reason to operate it. If equity is wanted, raise it at company level.</a:t>
+              <a:t>At 45% the investor earns 19.6% — below a deposit rate. Clearing a conventional 22% hurdle would take 49% of the project. A seven-year concession generating ₹5.04 Cr of lifetime free cash flow cannot pay an equity return on ₹1.00 Cr and still leave E-O-D a reason to operate it. If equity is wanted, raise it at company level.</a:t>
             </a:r>
             <a:endParaRPr lang="en-US" sz="1200" dirty="0"/>
           </a:p>

--- a/pptx/EOD-Geeta-Govind-Vatika-Project-Finance.pptx
+++ b/pptx/EOD-Geeta-Govind-Vatika-Project-Finance.pptx
@@ -539,25 +539,25 @@
                 <c:formatCode>General</c:formatCode>
                 <c:ptCount val="7"/>
                 <c:pt idx="0">
-                  <c:v>0.42</c:v>
+                  <c:v>0.08</c:v>
                 </c:pt>
                 <c:pt idx="1">
-                  <c:v>0.62</c:v>
+                  <c:v>0.12</c:v>
                 </c:pt>
                 <c:pt idx="2">
-                  <c:v>0.79</c:v>
+                  <c:v>0.16</c:v>
                 </c:pt>
                 <c:pt idx="3">
-                  <c:v>0.96</c:v>
+                  <c:v>0.19</c:v>
                 </c:pt>
                 <c:pt idx="4">
-                  <c:v>1.08</c:v>
+                  <c:v>0.22</c:v>
                 </c:pt>
                 <c:pt idx="5">
-                  <c:v>1.28</c:v>
+                  <c:v>0.26</c:v>
                 </c:pt>
                 <c:pt idx="6">
-                  <c:v>1.42</c:v>
+                  <c:v>0.28</c:v>
                 </c:pt>
               </c:numCache>
             </c:numRef>
@@ -647,25 +647,25 @@
                 <c:formatCode>General</c:formatCode>
                 <c:ptCount val="7"/>
                 <c:pt idx="0">
-                  <c:v>0.44</c:v>
+                  <c:v>0.64</c:v>
                 </c:pt>
                 <c:pt idx="1">
-                  <c:v>0.5</c:v>
+                  <c:v>0.74</c:v>
                 </c:pt>
                 <c:pt idx="2">
-                  <c:v>0.54</c:v>
+                  <c:v>0.82</c:v>
                 </c:pt>
                 <c:pt idx="3">
-                  <c:v>0.57</c:v>
+                  <c:v>0.89</c:v>
                 </c:pt>
                 <c:pt idx="4">
-                  <c:v>0.6</c:v>
+                  <c:v>0.95</c:v>
                 </c:pt>
                 <c:pt idx="5">
-                  <c:v>0.63</c:v>
+                  <c:v>1.01</c:v>
                 </c:pt>
                 <c:pt idx="6">
-                  <c:v>0.66</c:v>
+                  <c:v>1.07</c:v>
                 </c:pt>
               </c:numCache>
             </c:numRef>
@@ -965,25 +965,25 @@
                 <c:formatCode>General</c:formatCode>
                 <c:ptCount val="7"/>
                 <c:pt idx="0">
-                  <c:v>2.48</c:v>
+                  <c:v>2.35</c:v>
                 </c:pt>
                 <c:pt idx="1">
-                  <c:v>3.13</c:v>
+                  <c:v>2.87</c:v>
                 </c:pt>
                 <c:pt idx="2">
-                  <c:v>3.76</c:v>
+                  <c:v>3.41</c:v>
                 </c:pt>
                 <c:pt idx="3">
-                  <c:v>4.22</c:v>
+                  <c:v>3.77</c:v>
                 </c:pt>
                 <c:pt idx="4">
-                  <c:v>4.74</c:v>
+                  <c:v>4.23</c:v>
                 </c:pt>
                 <c:pt idx="5">
-                  <c:v>5.17</c:v>
+                  <c:v>4.53</c:v>
                 </c:pt>
                 <c:pt idx="6">
-                  <c:v>5.75</c:v>
+                  <c:v>5.02</c:v>
                 </c:pt>
               </c:numCache>
             </c:numRef>
@@ -1072,25 +1072,25 @@
                 <c:formatCode>General</c:formatCode>
                 <c:ptCount val="7"/>
                 <c:pt idx="0">
-                  <c:v>0.17</c:v>
+                  <c:v>0.14</c:v>
                 </c:pt>
                 <c:pt idx="1">
-                  <c:v>0.51</c:v>
+                  <c:v>0.42</c:v>
                 </c:pt>
                 <c:pt idx="2">
+                  <c:v>0.73</c:v>
+                </c:pt>
+                <c:pt idx="3">
                   <c:v>0.87</c:v>
                 </c:pt>
-                <c:pt idx="3">
-                  <c:v>1.06</c:v>
-                </c:pt>
                 <c:pt idx="4">
-                  <c:v>1.33</c:v>
+                  <c:v>1.1</c:v>
                 </c:pt>
                 <c:pt idx="5">
-                  <c:v>1.45</c:v>
+                  <c:v>1.15</c:v>
                 </c:pt>
                 <c:pt idx="6">
-                  <c:v>1.71</c:v>
+                  <c:v>1.37</c:v>
                 </c:pt>
               </c:numCache>
             </c:numRef>
@@ -3228,7 +3228,7 @@
         <p:spPr>
           <a:xfrm>
             <a:off x="566928" y="2706624"/>
-            <a:ext cx="10241280" cy="607568"/>
+            <a:ext cx="10241280" cy="911352"/>
           </a:xfrm>
           <a:prstGeom prst="rect">
             <a:avLst/>
@@ -3269,7 +3269,7 @@
         </p:nvSpPr>
         <p:spPr>
           <a:xfrm>
-            <a:off x="566928" y="3460496"/>
+            <a:off x="566928" y="3764280"/>
             <a:ext cx="10241280" cy="694944"/>
           </a:xfrm>
           <a:prstGeom prst="rect">
@@ -3535,7 +3535,7 @@
                 <a:ea typeface="Calibri" pitchFamily="34" charset="-122"/>
                 <a:cs typeface="Calibri" pitchFamily="34" charset="-120"/>
               </a:rPr>
-              <a:t>₹0.17 Cr</a:t>
+              <a:t>₹0.14 Cr</a:t>
             </a:r>
             <a:endParaRPr lang="en-US" sz="2900" dirty="0"/>
           </a:p>
@@ -3577,7 +3577,7 @@
                 <a:ea typeface="Calibri" pitchFamily="34" charset="-122"/>
                 <a:cs typeface="Calibri" pitchFamily="34" charset="-120"/>
               </a:rPr>
-              <a:t>On ₹2.48 Cr of revenue</a:t>
+              <a:t>On ₹2.35 Cr of revenue</a:t>
             </a:r>
             <a:endParaRPr lang="en-US" sz="1000" dirty="0"/>
           </a:p>
@@ -3655,7 +3655,7 @@
                 <a:ea typeface="Calibri" pitchFamily="34" charset="-122"/>
                 <a:cs typeface="Calibri" pitchFamily="34" charset="-120"/>
               </a:rPr>
-              <a:t>₹1.71 Cr</a:t>
+              <a:t>₹1.37 Cr</a:t>
             </a:r>
             <a:endParaRPr lang="en-US" sz="2900" dirty="0"/>
           </a:p>
@@ -3697,7 +3697,7 @@
                 <a:ea typeface="Calibri" pitchFamily="34" charset="-122"/>
                 <a:cs typeface="Calibri" pitchFamily="34" charset="-120"/>
               </a:rPr>
-              <a:t>29.8% margin</a:t>
+              <a:t>27.2% margin</a:t>
             </a:r>
             <a:endParaRPr lang="en-US" sz="1000" dirty="0"/>
           </a:p>
@@ -3775,7 +3775,7 @@
                 <a:ea typeface="Calibri" pitchFamily="34" charset="-122"/>
                 <a:cs typeface="Calibri" pitchFamily="34" charset="-120"/>
               </a:rPr>
-              <a:t>2.07×</a:t>
+              <a:t>2.11×</a:t>
             </a:r>
             <a:endParaRPr lang="en-US" sz="2900" dirty="0"/>
           </a:p>
@@ -4755,7 +4755,7 @@
                           <a:ea typeface="Calibri" pitchFamily="34" charset="-122"/>
                           <a:cs typeface="Calibri" pitchFamily="34" charset="-120"/>
                         </a:rPr>
-                        <a:t>0.80</a:t>
+                        <a:t>0.58</a:t>
                       </a:r>
                       <a:endParaRPr lang="en-US" sz="1000" dirty="0">
                         <a:latin typeface="Calibri" charset="0"/>
@@ -4823,7 +4823,7 @@
                           <a:ea typeface="Calibri" pitchFamily="34" charset="-122"/>
                           <a:cs typeface="Calibri" pitchFamily="34" charset="-120"/>
                         </a:rPr>
-                        <a:t>0.09</a:t>
+                        <a:t>0.07</a:t>
                       </a:r>
                       <a:endParaRPr lang="en-US" sz="1000" dirty="0">
                         <a:latin typeface="Calibri" charset="0"/>
@@ -4891,7 +4891,7 @@
                           <a:ea typeface="Calibri" pitchFamily="34" charset="-122"/>
                           <a:cs typeface="Calibri" pitchFamily="34" charset="-120"/>
                         </a:rPr>
-                        <a:t>0.18</a:t>
+                        <a:t>0.34</a:t>
                       </a:r>
                       <a:endParaRPr lang="en-US" sz="1000" dirty="0">
                         <a:latin typeface="Calibri" charset="0"/>
@@ -4959,7 +4959,7 @@
                           <a:ea typeface="Calibri" pitchFamily="34" charset="-122"/>
                           <a:cs typeface="Calibri" pitchFamily="34" charset="-120"/>
                         </a:rPr>
-                        <a:t>0.02</a:t>
+                        <a:t>0.04</a:t>
                       </a:r>
                       <a:endParaRPr lang="en-US" sz="1000" dirty="0">
                         <a:latin typeface="Calibri" charset="0"/>
@@ -5163,7 +5163,7 @@
                           <a:ea typeface="Calibri" pitchFamily="34" charset="-122"/>
                           <a:cs typeface="Calibri" pitchFamily="34" charset="-120"/>
                         </a:rPr>
-                        <a:t>0.12</a:t>
+                        <a:t>0.11</a:t>
                       </a:r>
                       <a:endParaRPr lang="en-US" sz="1000" dirty="0">
                         <a:latin typeface="Calibri" charset="0"/>
@@ -5231,7 +5231,7 @@
                           <a:ea typeface="Calibri" pitchFamily="34" charset="-122"/>
                           <a:cs typeface="Calibri" pitchFamily="34" charset="-120"/>
                         </a:rPr>
-                        <a:t>0.17</a:t>
+                        <a:t>0.14</a:t>
                       </a:r>
                       <a:endParaRPr lang="en-US" sz="1000" dirty="0">
                         <a:latin typeface="Calibri" charset="0"/>
@@ -5299,7 +5299,7 @@
                           <a:ea typeface="Calibri" pitchFamily="34" charset="-122"/>
                           <a:cs typeface="Calibri" pitchFamily="34" charset="-120"/>
                         </a:rPr>
-                        <a:t>1.39×</a:t>
+                        <a:t>1.24×</a:t>
                       </a:r>
                       <a:endParaRPr lang="en-US" sz="1000" dirty="0">
                         <a:latin typeface="Calibri" charset="0"/>
@@ -5437,7 +5437,7 @@
                           <a:ea typeface="Calibri" pitchFamily="34" charset="-122"/>
                           <a:cs typeface="Calibri" pitchFamily="34" charset="-120"/>
                         </a:rPr>
-                        <a:t>0.80</a:t>
+                        <a:t>0.58</a:t>
                       </a:r>
                       <a:endParaRPr lang="en-US" sz="1000" dirty="0">
                         <a:latin typeface="Calibri" charset="0"/>
@@ -5505,7 +5505,7 @@
                           <a:ea typeface="Calibri" pitchFamily="34" charset="-122"/>
                           <a:cs typeface="Calibri" pitchFamily="34" charset="-120"/>
                         </a:rPr>
-                        <a:t>0.09</a:t>
+                        <a:t>0.07</a:t>
                       </a:r>
                       <a:endParaRPr lang="en-US" sz="1000" dirty="0">
                         <a:latin typeface="Calibri" charset="0"/>
@@ -5573,7 +5573,7 @@
                           <a:ea typeface="Calibri" pitchFamily="34" charset="-122"/>
                           <a:cs typeface="Calibri" pitchFamily="34" charset="-120"/>
                         </a:rPr>
-                        <a:t>0.14</a:t>
+                        <a:t>0.26</a:t>
                       </a:r>
                       <a:endParaRPr lang="en-US" sz="1000" dirty="0">
                         <a:latin typeface="Calibri" charset="0"/>
@@ -5641,7 +5641,7 @@
                           <a:ea typeface="Calibri" pitchFamily="34" charset="-122"/>
                           <a:cs typeface="Calibri" pitchFamily="34" charset="-120"/>
                         </a:rPr>
-                        <a:t>0.02</a:t>
+                        <a:t>0.03</a:t>
                       </a:r>
                       <a:endParaRPr lang="en-US" sz="1000" dirty="0">
                         <a:latin typeface="Calibri" charset="0"/>
@@ -5777,7 +5777,7 @@
                           <a:ea typeface="Calibri" pitchFamily="34" charset="-122"/>
                           <a:cs typeface="Calibri" pitchFamily="34" charset="-120"/>
                         </a:rPr>
-                        <a:t>0.13</a:t>
+                        <a:t>0.10</a:t>
                       </a:r>
                       <a:endParaRPr lang="en-US" sz="1000" dirty="0">
                         <a:latin typeface="Calibri" charset="0"/>
@@ -5845,7 +5845,7 @@
                           <a:ea typeface="Calibri" pitchFamily="34" charset="-122"/>
                           <a:cs typeface="Calibri" pitchFamily="34" charset="-120"/>
                         </a:rPr>
-                        <a:t>0.25</a:t>
+                        <a:t>0.20</a:t>
                       </a:r>
                       <a:endParaRPr lang="en-US" sz="1000" dirty="0">
                         <a:latin typeface="Calibri" charset="0"/>
@@ -5913,7 +5913,7 @@
                           <a:ea typeface="Calibri" pitchFamily="34" charset="-122"/>
                           <a:cs typeface="Calibri" pitchFamily="34" charset="-120"/>
                         </a:rPr>
-                        <a:t>0.51</a:t>
+                        <a:t>0.42</a:t>
                       </a:r>
                       <a:endParaRPr lang="en-US" sz="1000" dirty="0">
                         <a:latin typeface="Calibri" charset="0"/>
@@ -5981,7 +5981,7 @@
                           <a:ea typeface="Calibri" pitchFamily="34" charset="-122"/>
                           <a:cs typeface="Calibri" pitchFamily="34" charset="-120"/>
                         </a:rPr>
-                        <a:t>2.07×</a:t>
+                        <a:t>2.11×</a:t>
                       </a:r>
                       <a:endParaRPr lang="en-US" sz="1000" dirty="0">
                         <a:latin typeface="Calibri" charset="0"/>
@@ -6119,7 +6119,7 @@
                           <a:ea typeface="Calibri" pitchFamily="34" charset="-122"/>
                           <a:cs typeface="Calibri" pitchFamily="34" charset="-120"/>
                         </a:rPr>
-                        <a:t>0.67</a:t>
+                        <a:t>0.48</a:t>
                       </a:r>
                       <a:endParaRPr lang="en-US" sz="1000" dirty="0">
                         <a:latin typeface="Calibri" charset="0"/>
@@ -6187,7 +6187,7 @@
                           <a:ea typeface="Calibri" pitchFamily="34" charset="-122"/>
                           <a:cs typeface="Calibri" pitchFamily="34" charset="-120"/>
                         </a:rPr>
-                        <a:t>0.08</a:t>
+                        <a:t>0.06</a:t>
                       </a:r>
                       <a:endParaRPr lang="en-US" sz="1000" dirty="0">
                         <a:latin typeface="Calibri" charset="0"/>
@@ -6255,6 +6255,210 @@
                           <a:ea typeface="Calibri" pitchFamily="34" charset="-122"/>
                           <a:cs typeface="Calibri" pitchFamily="34" charset="-120"/>
                         </a:rPr>
+                        <a:t>0.18</a:t>
+                      </a:r>
+                      <a:endParaRPr lang="en-US" sz="1000" dirty="0">
+                        <a:latin typeface="Calibri" charset="0"/>
+                        <a:ea typeface="Calibri" charset="0"/>
+                        <a:cs typeface="Calibri" charset="0"/>
+                      </a:endParaRPr>
+                    </a:p>
+                  </a:txBody>
+                  <a:tcPr marL="0" marR="76200" marT="63500" marB="63500" anchor="ctr">
+                    <a:lnL w="0" cap="flat" cmpd="sng" algn="ctr">
+                      <a:solidFill>
+                        <a:srgbClr val="666666"/>
+                      </a:solidFill>
+                      <a:prstDash val="solid"/>
+                      <a:round/>
+                      <a:headEnd type="none" w="med" len="med"/>
+                      <a:tailEnd type="none" w="med" len="med"/>
+                    </a:lnL>
+                    <a:lnR w="0" cap="flat" cmpd="sng" algn="ctr">
+                      <a:solidFill>
+                        <a:srgbClr val="666666"/>
+                      </a:solidFill>
+                      <a:prstDash val="solid"/>
+                      <a:round/>
+                      <a:headEnd type="none" w="med" len="med"/>
+                      <a:tailEnd type="none" w="med" len="med"/>
+                    </a:lnR>
+                    <a:lnT w="0" cap="flat" cmpd="sng" algn="ctr">
+                      <a:solidFill>
+                        <a:srgbClr val="666666"/>
+                      </a:solidFill>
+                      <a:prstDash val="solid"/>
+                      <a:round/>
+                      <a:headEnd type="none" w="med" len="med"/>
+                      <a:tailEnd type="none" w="med" len="med"/>
+                    </a:lnT>
+                    <a:lnB w="7620" cap="flat" cmpd="sng" algn="ctr">
+                      <a:solidFill>
+                        <a:srgbClr val="E2E4EA"/>
+                      </a:solidFill>
+                      <a:prstDash val="solid"/>
+                      <a:round/>
+                      <a:headEnd type="none" w="med" len="med"/>
+                      <a:tailEnd type="none" w="med" len="med"/>
+                    </a:lnB>
+                    <a:solidFill>
+                      <a:srgbClr val="FFFFFF"/>
+                    </a:solidFill>
+                  </a:tcPr>
+                </a:tc>
+                <a:tc>
+                  <a:txBody>
+                    <a:bodyPr/>
+                    <a:lstStyle/>
+                    <a:p>
+                      <a:pPr algn="r" indent="0" marL="0">
+                        <a:buNone/>
+                      </a:pPr>
+                      <a:r>
+                        <a:rPr lang="en-US" sz="1000" dirty="0">
+                          <a:solidFill>
+                            <a:srgbClr val="3B4660"/>
+                          </a:solidFill>
+                          <a:latin typeface="Calibri" pitchFamily="34" charset="0"/>
+                          <a:ea typeface="Calibri" pitchFamily="34" charset="-122"/>
+                          <a:cs typeface="Calibri" pitchFamily="34" charset="-120"/>
+                        </a:rPr>
+                        <a:t>0.02</a:t>
+                      </a:r>
+                      <a:endParaRPr lang="en-US" sz="1000" dirty="0">
+                        <a:latin typeface="Calibri" charset="0"/>
+                        <a:ea typeface="Calibri" charset="0"/>
+                        <a:cs typeface="Calibri" charset="0"/>
+                      </a:endParaRPr>
+                    </a:p>
+                  </a:txBody>
+                  <a:tcPr marL="0" marR="76200" marT="63500" marB="63500" anchor="ctr">
+                    <a:lnL w="0" cap="flat" cmpd="sng" algn="ctr">
+                      <a:solidFill>
+                        <a:srgbClr val="666666"/>
+                      </a:solidFill>
+                      <a:prstDash val="solid"/>
+                      <a:round/>
+                      <a:headEnd type="none" w="med" len="med"/>
+                      <a:tailEnd type="none" w="med" len="med"/>
+                    </a:lnL>
+                    <a:lnR w="0" cap="flat" cmpd="sng" algn="ctr">
+                      <a:solidFill>
+                        <a:srgbClr val="666666"/>
+                      </a:solidFill>
+                      <a:prstDash val="solid"/>
+                      <a:round/>
+                      <a:headEnd type="none" w="med" len="med"/>
+                      <a:tailEnd type="none" w="med" len="med"/>
+                    </a:lnR>
+                    <a:lnT w="0" cap="flat" cmpd="sng" algn="ctr">
+                      <a:solidFill>
+                        <a:srgbClr val="666666"/>
+                      </a:solidFill>
+                      <a:prstDash val="solid"/>
+                      <a:round/>
+                      <a:headEnd type="none" w="med" len="med"/>
+                      <a:tailEnd type="none" w="med" len="med"/>
+                    </a:lnT>
+                    <a:lnB w="7620" cap="flat" cmpd="sng" algn="ctr">
+                      <a:solidFill>
+                        <a:srgbClr val="E2E4EA"/>
+                      </a:solidFill>
+                      <a:prstDash val="solid"/>
+                      <a:round/>
+                      <a:headEnd type="none" w="med" len="med"/>
+                      <a:tailEnd type="none" w="med" len="med"/>
+                    </a:lnB>
+                    <a:solidFill>
+                      <a:srgbClr val="FFFFFF"/>
+                    </a:solidFill>
+                  </a:tcPr>
+                </a:tc>
+                <a:tc>
+                  <a:txBody>
+                    <a:bodyPr/>
+                    <a:lstStyle/>
+                    <a:p>
+                      <a:pPr algn="r" indent="0" marL="0">
+                        <a:buNone/>
+                      </a:pPr>
+                      <a:r>
+                        <a:rPr lang="en-US" sz="1000" dirty="0">
+                          <a:solidFill>
+                            <a:srgbClr val="3B4660"/>
+                          </a:solidFill>
+                          <a:latin typeface="Calibri" pitchFamily="34" charset="0"/>
+                          <a:ea typeface="Calibri" pitchFamily="34" charset="-122"/>
+                          <a:cs typeface="Calibri" pitchFamily="34" charset="-120"/>
+                        </a:rPr>
+                        <a:t>0.00</a:t>
+                      </a:r>
+                      <a:endParaRPr lang="en-US" sz="1000" dirty="0">
+                        <a:latin typeface="Calibri" charset="0"/>
+                        <a:ea typeface="Calibri" charset="0"/>
+                        <a:cs typeface="Calibri" charset="0"/>
+                      </a:endParaRPr>
+                    </a:p>
+                  </a:txBody>
+                  <a:tcPr marL="0" marR="76200" marT="63500" marB="63500" anchor="ctr">
+                    <a:lnL w="0" cap="flat" cmpd="sng" algn="ctr">
+                      <a:solidFill>
+                        <a:srgbClr val="666666"/>
+                      </a:solidFill>
+                      <a:prstDash val="solid"/>
+                      <a:round/>
+                      <a:headEnd type="none" w="med" len="med"/>
+                      <a:tailEnd type="none" w="med" len="med"/>
+                    </a:lnL>
+                    <a:lnR w="0" cap="flat" cmpd="sng" algn="ctr">
+                      <a:solidFill>
+                        <a:srgbClr val="666666"/>
+                      </a:solidFill>
+                      <a:prstDash val="solid"/>
+                      <a:round/>
+                      <a:headEnd type="none" w="med" len="med"/>
+                      <a:tailEnd type="none" w="med" len="med"/>
+                    </a:lnR>
+                    <a:lnT w="0" cap="flat" cmpd="sng" algn="ctr">
+                      <a:solidFill>
+                        <a:srgbClr val="666666"/>
+                      </a:solidFill>
+                      <a:prstDash val="solid"/>
+                      <a:round/>
+                      <a:headEnd type="none" w="med" len="med"/>
+                      <a:tailEnd type="none" w="med" len="med"/>
+                    </a:lnT>
+                    <a:lnB w="7620" cap="flat" cmpd="sng" algn="ctr">
+                      <a:solidFill>
+                        <a:srgbClr val="E2E4EA"/>
+                      </a:solidFill>
+                      <a:prstDash val="solid"/>
+                      <a:round/>
+                      <a:headEnd type="none" w="med" len="med"/>
+                      <a:tailEnd type="none" w="med" len="med"/>
+                    </a:lnB>
+                    <a:solidFill>
+                      <a:srgbClr val="FFFFFF"/>
+                    </a:solidFill>
+                  </a:tcPr>
+                </a:tc>
+                <a:tc>
+                  <a:txBody>
+                    <a:bodyPr/>
+                    <a:lstStyle/>
+                    <a:p>
+                      <a:pPr algn="r" indent="0" marL="0">
+                        <a:buNone/>
+                      </a:pPr>
+                      <a:r>
+                        <a:rPr lang="en-US" sz="1000" dirty="0">
+                          <a:solidFill>
+                            <a:srgbClr val="3B4660"/>
+                          </a:solidFill>
+                          <a:latin typeface="Calibri" pitchFamily="34" charset="0"/>
+                          <a:ea typeface="Calibri" pitchFamily="34" charset="-122"/>
+                          <a:cs typeface="Calibri" pitchFamily="34" charset="-120"/>
+                        </a:rPr>
                         <a:t>0.10</a:t>
                       </a:r>
                       <a:endParaRPr lang="en-US" sz="1000" dirty="0">
@@ -6323,7 +6527,7 @@
                           <a:ea typeface="Calibri" pitchFamily="34" charset="-122"/>
                           <a:cs typeface="Calibri" pitchFamily="34" charset="-120"/>
                         </a:rPr>
-                        <a:t>0.01</a:t>
+                        <a:t>0.18</a:t>
                       </a:r>
                       <a:endParaRPr lang="en-US" sz="1000" dirty="0">
                         <a:latin typeface="Calibri" charset="0"/>
@@ -6391,7 +6595,7 @@
                           <a:ea typeface="Calibri" pitchFamily="34" charset="-122"/>
                           <a:cs typeface="Calibri" pitchFamily="34" charset="-120"/>
                         </a:rPr>
-                        <a:t>0.00</a:t>
+                        <a:t>0.73</a:t>
                       </a:r>
                       <a:endParaRPr lang="en-US" sz="1000" dirty="0">
                         <a:latin typeface="Calibri" charset="0"/>
@@ -6459,211 +6663,7 @@
                           <a:ea typeface="Calibri" pitchFamily="34" charset="-122"/>
                           <a:cs typeface="Calibri" pitchFamily="34" charset="-120"/>
                         </a:rPr>
-                        <a:t>0.13</a:t>
-                      </a:r>
-                      <a:endParaRPr lang="en-US" sz="1000" dirty="0">
-                        <a:latin typeface="Calibri" charset="0"/>
-                        <a:ea typeface="Calibri" charset="0"/>
-                        <a:cs typeface="Calibri" charset="0"/>
-                      </a:endParaRPr>
-                    </a:p>
-                  </a:txBody>
-                  <a:tcPr marL="0" marR="76200" marT="63500" marB="63500" anchor="ctr">
-                    <a:lnL w="0" cap="flat" cmpd="sng" algn="ctr">
-                      <a:solidFill>
-                        <a:srgbClr val="666666"/>
-                      </a:solidFill>
-                      <a:prstDash val="solid"/>
-                      <a:round/>
-                      <a:headEnd type="none" w="med" len="med"/>
-                      <a:tailEnd type="none" w="med" len="med"/>
-                    </a:lnL>
-                    <a:lnR w="0" cap="flat" cmpd="sng" algn="ctr">
-                      <a:solidFill>
-                        <a:srgbClr val="666666"/>
-                      </a:solidFill>
-                      <a:prstDash val="solid"/>
-                      <a:round/>
-                      <a:headEnd type="none" w="med" len="med"/>
-                      <a:tailEnd type="none" w="med" len="med"/>
-                    </a:lnR>
-                    <a:lnT w="0" cap="flat" cmpd="sng" algn="ctr">
-                      <a:solidFill>
-                        <a:srgbClr val="666666"/>
-                      </a:solidFill>
-                      <a:prstDash val="solid"/>
-                      <a:round/>
-                      <a:headEnd type="none" w="med" len="med"/>
-                      <a:tailEnd type="none" w="med" len="med"/>
-                    </a:lnT>
-                    <a:lnB w="7620" cap="flat" cmpd="sng" algn="ctr">
-                      <a:solidFill>
-                        <a:srgbClr val="E2E4EA"/>
-                      </a:solidFill>
-                      <a:prstDash val="solid"/>
-                      <a:round/>
-                      <a:headEnd type="none" w="med" len="med"/>
-                      <a:tailEnd type="none" w="med" len="med"/>
-                    </a:lnB>
-                    <a:solidFill>
-                      <a:srgbClr val="FFFFFF"/>
-                    </a:solidFill>
-                  </a:tcPr>
-                </a:tc>
-                <a:tc>
-                  <a:txBody>
-                    <a:bodyPr/>
-                    <a:lstStyle/>
-                    <a:p>
-                      <a:pPr algn="r" indent="0" marL="0">
-                        <a:buNone/>
-                      </a:pPr>
-                      <a:r>
-                        <a:rPr lang="en-US" sz="1000" dirty="0">
-                          <a:solidFill>
-                            <a:srgbClr val="3B4660"/>
-                          </a:solidFill>
-                          <a:latin typeface="Calibri" pitchFamily="34" charset="0"/>
-                          <a:ea typeface="Calibri" pitchFamily="34" charset="-122"/>
-                          <a:cs typeface="Calibri" pitchFamily="34" charset="-120"/>
-                        </a:rPr>
-                        <a:t>0.23</a:t>
-                      </a:r>
-                      <a:endParaRPr lang="en-US" sz="1000" dirty="0">
-                        <a:latin typeface="Calibri" charset="0"/>
-                        <a:ea typeface="Calibri" charset="0"/>
-                        <a:cs typeface="Calibri" charset="0"/>
-                      </a:endParaRPr>
-                    </a:p>
-                  </a:txBody>
-                  <a:tcPr marL="0" marR="76200" marT="63500" marB="63500" anchor="ctr">
-                    <a:lnL w="0" cap="flat" cmpd="sng" algn="ctr">
-                      <a:solidFill>
-                        <a:srgbClr val="666666"/>
-                      </a:solidFill>
-                      <a:prstDash val="solid"/>
-                      <a:round/>
-                      <a:headEnd type="none" w="med" len="med"/>
-                      <a:tailEnd type="none" w="med" len="med"/>
-                    </a:lnL>
-                    <a:lnR w="0" cap="flat" cmpd="sng" algn="ctr">
-                      <a:solidFill>
-                        <a:srgbClr val="666666"/>
-                      </a:solidFill>
-                      <a:prstDash val="solid"/>
-                      <a:round/>
-                      <a:headEnd type="none" w="med" len="med"/>
-                      <a:tailEnd type="none" w="med" len="med"/>
-                    </a:lnR>
-                    <a:lnT w="0" cap="flat" cmpd="sng" algn="ctr">
-                      <a:solidFill>
-                        <a:srgbClr val="666666"/>
-                      </a:solidFill>
-                      <a:prstDash val="solid"/>
-                      <a:round/>
-                      <a:headEnd type="none" w="med" len="med"/>
-                      <a:tailEnd type="none" w="med" len="med"/>
-                    </a:lnT>
-                    <a:lnB w="7620" cap="flat" cmpd="sng" algn="ctr">
-                      <a:solidFill>
-                        <a:srgbClr val="E2E4EA"/>
-                      </a:solidFill>
-                      <a:prstDash val="solid"/>
-                      <a:round/>
-                      <a:headEnd type="none" w="med" len="med"/>
-                      <a:tailEnd type="none" w="med" len="med"/>
-                    </a:lnB>
-                    <a:solidFill>
-                      <a:srgbClr val="FFFFFF"/>
-                    </a:solidFill>
-                  </a:tcPr>
-                </a:tc>
-                <a:tc>
-                  <a:txBody>
-                    <a:bodyPr/>
-                    <a:lstStyle/>
-                    <a:p>
-                      <a:pPr algn="r" indent="0" marL="0">
-                        <a:buNone/>
-                      </a:pPr>
-                      <a:r>
-                        <a:rPr lang="en-US" sz="1000" dirty="0">
-                          <a:solidFill>
-                            <a:srgbClr val="3B4660"/>
-                          </a:solidFill>
-                          <a:latin typeface="Calibri" pitchFamily="34" charset="0"/>
-                          <a:ea typeface="Calibri" pitchFamily="34" charset="-122"/>
-                          <a:cs typeface="Calibri" pitchFamily="34" charset="-120"/>
-                        </a:rPr>
-                        <a:t>0.87</a:t>
-                      </a:r>
-                      <a:endParaRPr lang="en-US" sz="1000" dirty="0">
-                        <a:latin typeface="Calibri" charset="0"/>
-                        <a:ea typeface="Calibri" charset="0"/>
-                        <a:cs typeface="Calibri" charset="0"/>
-                      </a:endParaRPr>
-                    </a:p>
-                  </a:txBody>
-                  <a:tcPr marL="0" marR="76200" marT="63500" marB="63500" anchor="ctr">
-                    <a:lnL w="0" cap="flat" cmpd="sng" algn="ctr">
-                      <a:solidFill>
-                        <a:srgbClr val="666666"/>
-                      </a:solidFill>
-                      <a:prstDash val="solid"/>
-                      <a:round/>
-                      <a:headEnd type="none" w="med" len="med"/>
-                      <a:tailEnd type="none" w="med" len="med"/>
-                    </a:lnL>
-                    <a:lnR w="0" cap="flat" cmpd="sng" algn="ctr">
-                      <a:solidFill>
-                        <a:srgbClr val="666666"/>
-                      </a:solidFill>
-                      <a:prstDash val="solid"/>
-                      <a:round/>
-                      <a:headEnd type="none" w="med" len="med"/>
-                      <a:tailEnd type="none" w="med" len="med"/>
-                    </a:lnR>
-                    <a:lnT w="0" cap="flat" cmpd="sng" algn="ctr">
-                      <a:solidFill>
-                        <a:srgbClr val="666666"/>
-                      </a:solidFill>
-                      <a:prstDash val="solid"/>
-                      <a:round/>
-                      <a:headEnd type="none" w="med" len="med"/>
-                      <a:tailEnd type="none" w="med" len="med"/>
-                    </a:lnT>
-                    <a:lnB w="7620" cap="flat" cmpd="sng" algn="ctr">
-                      <a:solidFill>
-                        <a:srgbClr val="E2E4EA"/>
-                      </a:solidFill>
-                      <a:prstDash val="solid"/>
-                      <a:round/>
-                      <a:headEnd type="none" w="med" len="med"/>
-                      <a:tailEnd type="none" w="med" len="med"/>
-                    </a:lnB>
-                    <a:solidFill>
-                      <a:srgbClr val="FFFFFF"/>
-                    </a:solidFill>
-                  </a:tcPr>
-                </a:tc>
-                <a:tc>
-                  <a:txBody>
-                    <a:bodyPr/>
-                    <a:lstStyle/>
-                    <a:p>
-                      <a:pPr algn="r" indent="0" marL="0">
-                        <a:buNone/>
-                      </a:pPr>
-                      <a:r>
-                        <a:rPr lang="en-US" sz="1000" dirty="0">
-                          <a:solidFill>
-                            <a:srgbClr val="3B4660"/>
-                          </a:solidFill>
-                          <a:latin typeface="Calibri" pitchFamily="34" charset="0"/>
-                          <a:ea typeface="Calibri" pitchFamily="34" charset="-122"/>
-                          <a:cs typeface="Calibri" pitchFamily="34" charset="-120"/>
-                        </a:rPr>
-                        <a:t>3.86×</a:t>
+                        <a:t>4.14×</a:t>
                       </a:r>
                       <a:endParaRPr lang="en-US" sz="1000" dirty="0">
                         <a:latin typeface="Calibri" charset="0"/>
@@ -6801,7 +6801,7 @@
                           <a:ea typeface="Calibri" pitchFamily="34" charset="-122"/>
                           <a:cs typeface="Calibri" pitchFamily="34" charset="-120"/>
                         </a:rPr>
-                        <a:t>0.53</a:t>
+                        <a:t>0.39</a:t>
                       </a:r>
                       <a:endParaRPr lang="en-US" sz="1000" dirty="0">
                         <a:latin typeface="Calibri" charset="0"/>
@@ -6869,7 +6869,7 @@
                           <a:ea typeface="Calibri" pitchFamily="34" charset="-122"/>
                           <a:cs typeface="Calibri" pitchFamily="34" charset="-120"/>
                         </a:rPr>
-                        <a:t>0.06</a:t>
+                        <a:t>0.04</a:t>
                       </a:r>
                       <a:endParaRPr lang="en-US" sz="1000" dirty="0">
                         <a:latin typeface="Calibri" charset="0"/>
@@ -6937,7 +6937,7 @@
                           <a:ea typeface="Calibri" pitchFamily="34" charset="-122"/>
                           <a:cs typeface="Calibri" pitchFamily="34" charset="-120"/>
                         </a:rPr>
-                        <a:t>0.08</a:t>
+                        <a:t>0.13</a:t>
                       </a:r>
                       <a:endParaRPr lang="en-US" sz="1000" dirty="0">
                         <a:latin typeface="Calibri" charset="0"/>
@@ -7141,7 +7141,7 @@
                           <a:ea typeface="Calibri" pitchFamily="34" charset="-122"/>
                           <a:cs typeface="Calibri" pitchFamily="34" charset="-120"/>
                         </a:rPr>
-                        <a:t>0.13</a:t>
+                        <a:t>0.10</a:t>
                       </a:r>
                       <a:endParaRPr lang="en-US" sz="1000" dirty="0">
                         <a:latin typeface="Calibri" charset="0"/>
@@ -7209,7 +7209,7 @@
                           <a:ea typeface="Calibri" pitchFamily="34" charset="-122"/>
                           <a:cs typeface="Calibri" pitchFamily="34" charset="-120"/>
                         </a:rPr>
-                        <a:t>0.21</a:t>
+                        <a:t>0.16</a:t>
                       </a:r>
                       <a:endParaRPr lang="en-US" sz="1000" dirty="0">
                         <a:latin typeface="Calibri" charset="0"/>
@@ -7277,7 +7277,7 @@
                           <a:ea typeface="Calibri" pitchFamily="34" charset="-122"/>
                           <a:cs typeface="Calibri" pitchFamily="34" charset="-120"/>
                         </a:rPr>
-                        <a:t>1.06</a:t>
+                        <a:t>0.87</a:t>
                       </a:r>
                       <a:endParaRPr lang="en-US" sz="1000" dirty="0">
                         <a:latin typeface="Calibri" charset="0"/>
@@ -7345,7 +7345,7 @@
                           <a:ea typeface="Calibri" pitchFamily="34" charset="-122"/>
                           <a:cs typeface="Calibri" pitchFamily="34" charset="-120"/>
                         </a:rPr>
-                        <a:t>5.13×</a:t>
+                        <a:t>5.47×</a:t>
                       </a:r>
                       <a:endParaRPr lang="en-US" sz="1000" dirty="0">
                         <a:latin typeface="Calibri" charset="0"/>
@@ -7483,7 +7483,7 @@
                           <a:ea typeface="Calibri" pitchFamily="34" charset="-122"/>
                           <a:cs typeface="Calibri" pitchFamily="34" charset="-120"/>
                         </a:rPr>
-                        <a:t>0.40</a:t>
+                        <a:t>0.29</a:t>
                       </a:r>
                       <a:endParaRPr lang="en-US" sz="1000" dirty="0">
                         <a:latin typeface="Calibri" charset="0"/>
@@ -7551,7 +7551,7 @@
                           <a:ea typeface="Calibri" pitchFamily="34" charset="-122"/>
                           <a:cs typeface="Calibri" pitchFamily="34" charset="-120"/>
                         </a:rPr>
-                        <a:t>0.05</a:t>
+                        <a:t>0.03</a:t>
                       </a:r>
                       <a:endParaRPr lang="en-US" sz="1000" dirty="0">
                         <a:latin typeface="Calibri" charset="0"/>
@@ -7619,7 +7619,7 @@
                           <a:ea typeface="Calibri" pitchFamily="34" charset="-122"/>
                           <a:cs typeface="Calibri" pitchFamily="34" charset="-120"/>
                         </a:rPr>
-                        <a:t>0.06</a:t>
+                        <a:t>0.09</a:t>
                       </a:r>
                       <a:endParaRPr lang="en-US" sz="1000" dirty="0">
                         <a:latin typeface="Calibri" charset="0"/>
@@ -7823,7 +7823,7 @@
                           <a:ea typeface="Calibri" pitchFamily="34" charset="-122"/>
                           <a:cs typeface="Calibri" pitchFamily="34" charset="-120"/>
                         </a:rPr>
-                        <a:t>0.13</a:t>
+                        <a:t>0.10</a:t>
                       </a:r>
                       <a:endParaRPr lang="en-US" sz="1000" dirty="0">
                         <a:latin typeface="Calibri" charset="0"/>
@@ -7891,7 +7891,7 @@
                           <a:ea typeface="Calibri" pitchFamily="34" charset="-122"/>
                           <a:cs typeface="Calibri" pitchFamily="34" charset="-120"/>
                         </a:rPr>
-                        <a:t>0.19</a:t>
+                        <a:t>0.14</a:t>
                       </a:r>
                       <a:endParaRPr lang="en-US" sz="1000" dirty="0">
                         <a:latin typeface="Calibri" charset="0"/>
@@ -7959,7 +7959,7 @@
                           <a:ea typeface="Calibri" pitchFamily="34" charset="-122"/>
                           <a:cs typeface="Calibri" pitchFamily="34" charset="-120"/>
                         </a:rPr>
-                        <a:t>1.33</a:t>
+                        <a:t>1.10</a:t>
                       </a:r>
                       <a:endParaRPr lang="en-US" sz="1000" dirty="0">
                         <a:latin typeface="Calibri" charset="0"/>
@@ -8027,7 +8027,7 @@
                           <a:ea typeface="Calibri" pitchFamily="34" charset="-122"/>
                           <a:cs typeface="Calibri" pitchFamily="34" charset="-120"/>
                         </a:rPr>
-                        <a:t>7.02×</a:t>
+                        <a:t>7.71×</a:t>
                       </a:r>
                       <a:endParaRPr lang="en-US" sz="1000" dirty="0">
                         <a:latin typeface="Calibri" charset="0"/>
@@ -8165,7 +8165,7 @@
                           <a:ea typeface="Calibri" pitchFamily="34" charset="-122"/>
                           <a:cs typeface="Calibri" pitchFamily="34" charset="-120"/>
                         </a:rPr>
-                        <a:t>0.27</a:t>
+                        <a:t>0.19</a:t>
                       </a:r>
                       <a:endParaRPr lang="en-US" sz="1000" dirty="0">
                         <a:latin typeface="Calibri" charset="0"/>
@@ -8233,7 +8233,7 @@
                           <a:ea typeface="Calibri" pitchFamily="34" charset="-122"/>
                           <a:cs typeface="Calibri" pitchFamily="34" charset="-120"/>
                         </a:rPr>
-                        <a:t>0.03</a:t>
+                        <a:t>0.02</a:t>
                       </a:r>
                       <a:endParaRPr lang="en-US" sz="1000" dirty="0">
                         <a:latin typeface="Calibri" charset="0"/>
@@ -8301,7 +8301,7 @@
                           <a:ea typeface="Calibri" pitchFamily="34" charset="-122"/>
                           <a:cs typeface="Calibri" pitchFamily="34" charset="-120"/>
                         </a:rPr>
-                        <a:t>0.05</a:t>
+                        <a:t>0.07</a:t>
                       </a:r>
                       <a:endParaRPr lang="en-US" sz="1000" dirty="0">
                         <a:latin typeface="Calibri" charset="0"/>
@@ -8505,6 +8505,74 @@
                           <a:ea typeface="Calibri" pitchFamily="34" charset="-122"/>
                           <a:cs typeface="Calibri" pitchFamily="34" charset="-120"/>
                         </a:rPr>
+                        <a:t>0.10</a:t>
+                      </a:r>
+                      <a:endParaRPr lang="en-US" sz="1000" dirty="0">
+                        <a:latin typeface="Calibri" charset="0"/>
+                        <a:ea typeface="Calibri" charset="0"/>
+                        <a:cs typeface="Calibri" charset="0"/>
+                      </a:endParaRPr>
+                    </a:p>
+                  </a:txBody>
+                  <a:tcPr marL="0" marR="76200" marT="63500" marB="63500" anchor="ctr">
+                    <a:lnL w="0" cap="flat" cmpd="sng" algn="ctr">
+                      <a:solidFill>
+                        <a:srgbClr val="666666"/>
+                      </a:solidFill>
+                      <a:prstDash val="solid"/>
+                      <a:round/>
+                      <a:headEnd type="none" w="med" len="med"/>
+                      <a:tailEnd type="none" w="med" len="med"/>
+                    </a:lnL>
+                    <a:lnR w="0" cap="flat" cmpd="sng" algn="ctr">
+                      <a:solidFill>
+                        <a:srgbClr val="666666"/>
+                      </a:solidFill>
+                      <a:prstDash val="solid"/>
+                      <a:round/>
+                      <a:headEnd type="none" w="med" len="med"/>
+                      <a:tailEnd type="none" w="med" len="med"/>
+                    </a:lnR>
+                    <a:lnT w="0" cap="flat" cmpd="sng" algn="ctr">
+                      <a:solidFill>
+                        <a:srgbClr val="666666"/>
+                      </a:solidFill>
+                      <a:prstDash val="solid"/>
+                      <a:round/>
+                      <a:headEnd type="none" w="med" len="med"/>
+                      <a:tailEnd type="none" w="med" len="med"/>
+                    </a:lnT>
+                    <a:lnB w="7620" cap="flat" cmpd="sng" algn="ctr">
+                      <a:solidFill>
+                        <a:srgbClr val="E2E4EA"/>
+                      </a:solidFill>
+                      <a:prstDash val="solid"/>
+                      <a:round/>
+                      <a:headEnd type="none" w="med" len="med"/>
+                      <a:tailEnd type="none" w="med" len="med"/>
+                    </a:lnB>
+                    <a:solidFill>
+                      <a:srgbClr val="FFFFFF"/>
+                    </a:solidFill>
+                  </a:tcPr>
+                </a:tc>
+                <a:tc>
+                  <a:txBody>
+                    <a:bodyPr/>
+                    <a:lstStyle/>
+                    <a:p>
+                      <a:pPr algn="r" indent="0" marL="0">
+                        <a:buNone/>
+                      </a:pPr>
+                      <a:r>
+                        <a:rPr lang="en-US" sz="1000" dirty="0">
+                          <a:solidFill>
+                            <a:srgbClr val="3B4660"/>
+                          </a:solidFill>
+                          <a:latin typeface="Calibri" pitchFamily="34" charset="0"/>
+                          <a:ea typeface="Calibri" pitchFamily="34" charset="-122"/>
+                          <a:cs typeface="Calibri" pitchFamily="34" charset="-120"/>
+                        </a:rPr>
                         <a:t>0.13</a:t>
                       </a:r>
                       <a:endParaRPr lang="en-US" sz="1000" dirty="0">
@@ -8573,7 +8641,7 @@
                           <a:ea typeface="Calibri" pitchFamily="34" charset="-122"/>
                           <a:cs typeface="Calibri" pitchFamily="34" charset="-120"/>
                         </a:rPr>
-                        <a:t>0.17</a:t>
+                        <a:t>1.15</a:t>
                       </a:r>
                       <a:endParaRPr lang="en-US" sz="1000" dirty="0">
                         <a:latin typeface="Calibri" charset="0"/>
@@ -8641,75 +8709,7 @@
                           <a:ea typeface="Calibri" pitchFamily="34" charset="-122"/>
                           <a:cs typeface="Calibri" pitchFamily="34" charset="-120"/>
                         </a:rPr>
-                        <a:t>1.45</a:t>
-                      </a:r>
-                      <a:endParaRPr lang="en-US" sz="1000" dirty="0">
-                        <a:latin typeface="Calibri" charset="0"/>
-                        <a:ea typeface="Calibri" charset="0"/>
-                        <a:cs typeface="Calibri" charset="0"/>
-                      </a:endParaRPr>
-                    </a:p>
-                  </a:txBody>
-                  <a:tcPr marL="0" marR="76200" marT="63500" marB="63500" anchor="ctr">
-                    <a:lnL w="0" cap="flat" cmpd="sng" algn="ctr">
-                      <a:solidFill>
-                        <a:srgbClr val="666666"/>
-                      </a:solidFill>
-                      <a:prstDash val="solid"/>
-                      <a:round/>
-                      <a:headEnd type="none" w="med" len="med"/>
-                      <a:tailEnd type="none" w="med" len="med"/>
-                    </a:lnL>
-                    <a:lnR w="0" cap="flat" cmpd="sng" algn="ctr">
-                      <a:solidFill>
-                        <a:srgbClr val="666666"/>
-                      </a:solidFill>
-                      <a:prstDash val="solid"/>
-                      <a:round/>
-                      <a:headEnd type="none" w="med" len="med"/>
-                      <a:tailEnd type="none" w="med" len="med"/>
-                    </a:lnR>
-                    <a:lnT w="0" cap="flat" cmpd="sng" algn="ctr">
-                      <a:solidFill>
-                        <a:srgbClr val="666666"/>
-                      </a:solidFill>
-                      <a:prstDash val="solid"/>
-                      <a:round/>
-                      <a:headEnd type="none" w="med" len="med"/>
-                      <a:tailEnd type="none" w="med" len="med"/>
-                    </a:lnT>
-                    <a:lnB w="7620" cap="flat" cmpd="sng" algn="ctr">
-                      <a:solidFill>
-                        <a:srgbClr val="E2E4EA"/>
-                      </a:solidFill>
-                      <a:prstDash val="solid"/>
-                      <a:round/>
-                      <a:headEnd type="none" w="med" len="med"/>
-                      <a:tailEnd type="none" w="med" len="med"/>
-                    </a:lnB>
-                    <a:solidFill>
-                      <a:srgbClr val="FFFFFF"/>
-                    </a:solidFill>
-                  </a:tcPr>
-                </a:tc>
-                <a:tc>
-                  <a:txBody>
-                    <a:bodyPr/>
-                    <a:lstStyle/>
-                    <a:p>
-                      <a:pPr algn="r" indent="0" marL="0">
-                        <a:buNone/>
-                      </a:pPr>
-                      <a:r>
-                        <a:rPr lang="en-US" sz="1000" dirty="0">
-                          <a:solidFill>
-                            <a:srgbClr val="3B4660"/>
-                          </a:solidFill>
-                          <a:latin typeface="Calibri" pitchFamily="34" charset="0"/>
-                          <a:ea typeface="Calibri" pitchFamily="34" charset="-122"/>
-                          <a:cs typeface="Calibri" pitchFamily="34" charset="-120"/>
-                        </a:rPr>
-                        <a:t>8.46×</a:t>
+                        <a:t>8.95×</a:t>
                       </a:r>
                       <a:endParaRPr lang="en-US" sz="1000" dirty="0">
                         <a:latin typeface="Calibri" charset="0"/>
@@ -8847,7 +8847,7 @@
                           <a:ea typeface="Calibri" pitchFamily="34" charset="-122"/>
                           <a:cs typeface="Calibri" pitchFamily="34" charset="-120"/>
                         </a:rPr>
-                        <a:t>0.13</a:t>
+                        <a:t>0.10</a:t>
                       </a:r>
                       <a:endParaRPr lang="en-US" sz="1000" dirty="0">
                         <a:latin typeface="Calibri" charset="0"/>
@@ -8915,7 +8915,7 @@
                           <a:ea typeface="Calibri" pitchFamily="34" charset="-122"/>
                           <a:cs typeface="Calibri" pitchFamily="34" charset="-120"/>
                         </a:rPr>
-                        <a:t>0.02</a:t>
+                        <a:t>0.01</a:t>
                       </a:r>
                       <a:endParaRPr lang="en-US" sz="1000" dirty="0">
                         <a:latin typeface="Calibri" charset="0"/>
@@ -8983,7 +8983,7 @@
                           <a:ea typeface="Calibri" pitchFamily="34" charset="-122"/>
                           <a:cs typeface="Calibri" pitchFamily="34" charset="-120"/>
                         </a:rPr>
-                        <a:t>0.04</a:t>
+                        <a:t>0.05</a:t>
                       </a:r>
                       <a:endParaRPr lang="en-US" sz="1000" dirty="0">
                         <a:latin typeface="Calibri" charset="0"/>
@@ -9051,6 +9051,74 @@
                           <a:ea typeface="Calibri" pitchFamily="34" charset="-122"/>
                           <a:cs typeface="Calibri" pitchFamily="34" charset="-120"/>
                         </a:rPr>
+                        <a:t>0.01</a:t>
+                      </a:r>
+                      <a:endParaRPr lang="en-US" sz="1000" dirty="0">
+                        <a:latin typeface="Calibri" charset="0"/>
+                        <a:ea typeface="Calibri" charset="0"/>
+                        <a:cs typeface="Calibri" charset="0"/>
+                      </a:endParaRPr>
+                    </a:p>
+                  </a:txBody>
+                  <a:tcPr marL="0" marR="76200" marT="63500" marB="63500" anchor="ctr">
+                    <a:lnL w="0" cap="flat" cmpd="sng" algn="ctr">
+                      <a:solidFill>
+                        <a:srgbClr val="666666"/>
+                      </a:solidFill>
+                      <a:prstDash val="solid"/>
+                      <a:round/>
+                      <a:headEnd type="none" w="med" len="med"/>
+                      <a:tailEnd type="none" w="med" len="med"/>
+                    </a:lnL>
+                    <a:lnR w="0" cap="flat" cmpd="sng" algn="ctr">
+                      <a:solidFill>
+                        <a:srgbClr val="666666"/>
+                      </a:solidFill>
+                      <a:prstDash val="solid"/>
+                      <a:round/>
+                      <a:headEnd type="none" w="med" len="med"/>
+                      <a:tailEnd type="none" w="med" len="med"/>
+                    </a:lnR>
+                    <a:lnT w="0" cap="flat" cmpd="sng" algn="ctr">
+                      <a:solidFill>
+                        <a:srgbClr val="666666"/>
+                      </a:solidFill>
+                      <a:prstDash val="solid"/>
+                      <a:round/>
+                      <a:headEnd type="none" w="med" len="med"/>
+                      <a:tailEnd type="none" w="med" len="med"/>
+                    </a:lnT>
+                    <a:lnB w="7620" cap="flat" cmpd="sng" algn="ctr">
+                      <a:solidFill>
+                        <a:srgbClr val="E2E4EA"/>
+                      </a:solidFill>
+                      <a:prstDash val="solid"/>
+                      <a:round/>
+                      <a:headEnd type="none" w="med" len="med"/>
+                      <a:tailEnd type="none" w="med" len="med"/>
+                    </a:lnB>
+                    <a:solidFill>
+                      <a:srgbClr val="FFFFFF"/>
+                    </a:solidFill>
+                  </a:tcPr>
+                </a:tc>
+                <a:tc>
+                  <a:txBody>
+                    <a:bodyPr/>
+                    <a:lstStyle/>
+                    <a:p>
+                      <a:pPr algn="r" indent="0" marL="0">
+                        <a:buNone/>
+                      </a:pPr>
+                      <a:r>
+                        <a:rPr lang="en-US" sz="1000" dirty="0">
+                          <a:solidFill>
+                            <a:srgbClr val="3B4660"/>
+                          </a:solidFill>
+                          <a:latin typeface="Calibri" pitchFamily="34" charset="0"/>
+                          <a:ea typeface="Calibri" pitchFamily="34" charset="-122"/>
+                          <a:cs typeface="Calibri" pitchFamily="34" charset="-120"/>
+                        </a:rPr>
                         <a:t>0.00</a:t>
                       </a:r>
                       <a:endParaRPr lang="en-US" sz="1000" dirty="0">
@@ -9119,7 +9187,7 @@
                           <a:ea typeface="Calibri" pitchFamily="34" charset="-122"/>
                           <a:cs typeface="Calibri" pitchFamily="34" charset="-120"/>
                         </a:rPr>
-                        <a:t>0.00</a:t>
+                        <a:t>0.10</a:t>
                       </a:r>
                       <a:endParaRPr lang="en-US" sz="1000" dirty="0">
                         <a:latin typeface="Calibri" charset="0"/>
@@ -9187,7 +9255,7 @@
                           <a:ea typeface="Calibri" pitchFamily="34" charset="-122"/>
                           <a:cs typeface="Calibri" pitchFamily="34" charset="-120"/>
                         </a:rPr>
-                        <a:t>0.13</a:t>
+                        <a:t>0.11</a:t>
                       </a:r>
                       <a:endParaRPr lang="en-US" sz="1000" dirty="0">
                         <a:latin typeface="Calibri" charset="0"/>
@@ -9255,7 +9323,7 @@
                           <a:ea typeface="Calibri" pitchFamily="34" charset="-122"/>
                           <a:cs typeface="Calibri" pitchFamily="34" charset="-120"/>
                         </a:rPr>
-                        <a:t>0.15</a:t>
+                        <a:t>1.37</a:t>
                       </a:r>
                       <a:endParaRPr lang="en-US" sz="1000" dirty="0">
                         <a:latin typeface="Calibri" charset="0"/>
@@ -9323,75 +9391,7 @@
                           <a:ea typeface="Calibri" pitchFamily="34" charset="-122"/>
                           <a:cs typeface="Calibri" pitchFamily="34" charset="-120"/>
                         </a:rPr>
-                        <a:t>1.71</a:t>
-                      </a:r>
-                      <a:endParaRPr lang="en-US" sz="1000" dirty="0">
-                        <a:latin typeface="Calibri" charset="0"/>
-                        <a:ea typeface="Calibri" charset="0"/>
-                        <a:cs typeface="Calibri" charset="0"/>
-                      </a:endParaRPr>
-                    </a:p>
-                  </a:txBody>
-                  <a:tcPr marL="0" marR="76200" marT="63500" marB="63500" anchor="ctr">
-                    <a:lnL w="0" cap="flat" cmpd="sng" algn="ctr">
-                      <a:solidFill>
-                        <a:srgbClr val="666666"/>
-                      </a:solidFill>
-                      <a:prstDash val="solid"/>
-                      <a:round/>
-                      <a:headEnd type="none" w="med" len="med"/>
-                      <a:tailEnd type="none" w="med" len="med"/>
-                    </a:lnL>
-                    <a:lnR w="0" cap="flat" cmpd="sng" algn="ctr">
-                      <a:solidFill>
-                        <a:srgbClr val="666666"/>
-                      </a:solidFill>
-                      <a:prstDash val="solid"/>
-                      <a:round/>
-                      <a:headEnd type="none" w="med" len="med"/>
-                      <a:tailEnd type="none" w="med" len="med"/>
-                    </a:lnR>
-                    <a:lnT w="0" cap="flat" cmpd="sng" algn="ctr">
-                      <a:solidFill>
-                        <a:srgbClr val="666666"/>
-                      </a:solidFill>
-                      <a:prstDash val="solid"/>
-                      <a:round/>
-                      <a:headEnd type="none" w="med" len="med"/>
-                      <a:tailEnd type="none" w="med" len="med"/>
-                    </a:lnT>
-                    <a:lnB w="7620" cap="flat" cmpd="sng" algn="ctr">
-                      <a:solidFill>
-                        <a:srgbClr val="E2E4EA"/>
-                      </a:solidFill>
-                      <a:prstDash val="solid"/>
-                      <a:round/>
-                      <a:headEnd type="none" w="med" len="med"/>
-                      <a:tailEnd type="none" w="med" len="med"/>
-                    </a:lnB>
-                    <a:solidFill>
-                      <a:srgbClr val="FFFFFF"/>
-                    </a:solidFill>
-                  </a:tcPr>
-                </a:tc>
-                <a:tc>
-                  <a:txBody>
-                    <a:bodyPr/>
-                    <a:lstStyle/>
-                    <a:p>
-                      <a:pPr algn="r" indent="0" marL="0">
-                        <a:buNone/>
-                      </a:pPr>
-                      <a:r>
-                        <a:rPr lang="en-US" sz="1000" dirty="0">
-                          <a:solidFill>
-                            <a:srgbClr val="3B4660"/>
-                          </a:solidFill>
-                          <a:latin typeface="Calibri" pitchFamily="34" charset="0"/>
-                          <a:ea typeface="Calibri" pitchFamily="34" charset="-122"/>
-                          <a:cs typeface="Calibri" pitchFamily="34" charset="-120"/>
-                        </a:rPr>
-                        <a:t>11.08×</a:t>
+                        <a:t>11.95×</a:t>
                       </a:r>
                       <a:endParaRPr lang="en-US" sz="1000" dirty="0">
                         <a:latin typeface="Calibri" charset="0"/>
@@ -9548,7 +9548,7 @@
                 <a:ea typeface="Calibri" pitchFamily="34" charset="-122"/>
                 <a:cs typeface="Calibri" pitchFamily="34" charset="-120"/>
               </a:rPr>
-              <a:t>2.07×</a:t>
+              <a:t>2.11×</a:t>
             </a:r>
             <a:endParaRPr lang="en-US" sz="2600" dirty="0"/>
           </a:p>
@@ -9697,7 +9697,7 @@
                 <a:ea typeface="Calibri" pitchFamily="34" charset="-122"/>
                 <a:cs typeface="Calibri" pitchFamily="34" charset="-120"/>
               </a:rPr>
-              <a:t>6.27×</a:t>
+              <a:t>6.72×</a:t>
             </a:r>
             <a:endParaRPr lang="en-US" sz="2600" dirty="0"/>
           </a:p>
@@ -9846,7 +9846,7 @@
                 <a:ea typeface="Calibri" pitchFamily="34" charset="-122"/>
                 <a:cs typeface="Calibri" pitchFamily="34" charset="-120"/>
               </a:rPr>
-              <a:t>₹1.62 Cr</a:t>
+              <a:t>₹1.26 Cr</a:t>
             </a:r>
             <a:endParaRPr lang="en-US" sz="2600" dirty="0"/>
           </a:p>
@@ -9888,7 +9888,7 @@
                 <a:ea typeface="Calibri" pitchFamily="34" charset="-122"/>
                 <a:cs typeface="Calibri" pitchFamily="34" charset="-120"/>
               </a:rPr>
-              <a:t>Headroom of ₹0.62 Cr over the facility sought</a:t>
+              <a:t>Headroom of ₹0.26 Cr over the facility sought</a:t>
             </a:r>
             <a:endParaRPr lang="en-US" sz="950" dirty="0"/>
           </a:p>
@@ -9996,7 +9996,7 @@
                 <a:ea typeface="Calibri" pitchFamily="34" charset="-122"/>
                 <a:cs typeface="Calibri" pitchFamily="34" charset="-120"/>
               </a:rPr>
-              <a:t>Licence fee sensitivity</a:t>
+              <a:t>Licence fee assumption</a:t>
             </a:r>
             <a:endParaRPr lang="en-US" sz="1600" dirty="0"/>
           </a:p>
@@ -10038,7 +10038,7 @@
                 <a:ea typeface="Calibri" pitchFamily="34" charset="-122"/>
                 <a:cs typeface="Calibri" pitchFamily="34" charset="-120"/>
               </a:rPr>
-              <a:t>The model assumes a winning bid of ₹36 L a year, 20% above ADA's ₹30 L reserve. Solving for the licence fee at which the project IRR falls to the 12.10% all-in cost of this facility gives ₹80.9 L a year, or ₹6.74 L a month — about 2.7× the reserve. Above that level the project no longer covers the cost of the debt funding it.</a:t>
+              <a:t>Every figure in this deck is calculated on a licence fee of ₹36 L a year — ₹3.0 lakh a month against ADA's ₹2.5 L per month reserve — escalating at 5% a year as the RFP provides. The fee is settled by forward e-auction and is not known until it concludes; the model requires re-running against the actual award.</a:t>
             </a:r>
             <a:endParaRPr lang="en-US" sz="1000" dirty="0"/>
           </a:p>
@@ -11054,7 +11054,7 @@
                           <a:ea typeface="Calibri" pitchFamily="34" charset="-122"/>
                           <a:cs typeface="Calibri" pitchFamily="34" charset="-120"/>
                         </a:rPr>
-                        <a:t>+16% yr 2, +3% by yr 7</a:t>
+                        <a:t>+16% yr 2, +5% by yr 7</a:t>
                       </a:r>
                       <a:endParaRPr lang="en-US" sz="1000" dirty="0">
                         <a:latin typeface="Calibri" charset="0"/>
@@ -11810,7 +11810,7 @@
                           <a:ea typeface="Calibri" pitchFamily="34" charset="-122"/>
                           <a:cs typeface="Calibri" pitchFamily="34" charset="-120"/>
                         </a:rPr>
-                        <a:t>Share buying into the activity layer</a:t>
+                        <a:t>Share using a vendor-operated activity</a:t>
                       </a:r>
                       <a:endParaRPr lang="en-US" sz="1000" dirty="0">
                         <a:latin typeface="Calibri" charset="0"/>
@@ -11948,7 +11948,7 @@
                           <a:ea typeface="Calibri" pitchFamily="34" charset="-122"/>
                           <a:cs typeface="Calibri" pitchFamily="34" charset="-120"/>
                         </a:rPr>
-                        <a:t>Vehicle occupancy</a:t>
+                        <a:t>Activity revenue share</a:t>
                       </a:r>
                       <a:endParaRPr lang="en-US" sz="1000" dirty="0">
                         <a:latin typeface="Calibri" charset="0"/>
@@ -12016,7 +12016,7 @@
                           <a:ea typeface="Calibri" pitchFamily="34" charset="-122"/>
                           <a:cs typeface="Calibri" pitchFamily="34" charset="-120"/>
                         </a:rPr>
-                        <a:t>Visitors per vehicle, for the parking line</a:t>
+                        <a:t>E-O-D books its share of vendor takings, not gross spend</a:t>
                       </a:r>
                       <a:endParaRPr lang="en-US" sz="1000" dirty="0">
                         <a:latin typeface="Calibri" charset="0"/>
@@ -12084,7 +12084,7 @@
                           <a:ea typeface="Calibri" pitchFamily="34" charset="-122"/>
                           <a:cs typeface="Calibri" pitchFamily="34" charset="-120"/>
                         </a:rPr>
-                        <a:t>3.1</a:t>
+                        <a:t>20%</a:t>
                       </a:r>
                       <a:endParaRPr lang="en-US" sz="1000" dirty="0">
                         <a:latin typeface="Calibri" charset="0"/>
@@ -12154,7 +12154,7 @@
                           <a:ea typeface="Calibri" pitchFamily="34" charset="-122"/>
                           <a:cs typeface="Calibri" pitchFamily="34" charset="-120"/>
                         </a:rPr>
-                        <a:t>Gate entry</a:t>
+                        <a:t>Vehicle occupancy</a:t>
                       </a:r>
                       <a:endParaRPr lang="en-US" sz="1000" dirty="0">
                         <a:latin typeface="Calibri" charset="0"/>
@@ -12222,7 +12222,7 @@
                           <a:ea typeface="Calibri" pitchFamily="34" charset="-122"/>
                           <a:cs typeface="Calibri" pitchFamily="34" charset="-120"/>
                         </a:rPr>
-                        <a:t>Fixed by ADA. No escalation modelled across the term</a:t>
+                        <a:t>Visitors per vehicle, for the parking line</a:t>
                       </a:r>
                       <a:endParaRPr lang="en-US" sz="1000" dirty="0">
                         <a:latin typeface="Calibri" charset="0"/>
@@ -12290,7 +12290,7 @@
                           <a:ea typeface="Calibri" pitchFamily="34" charset="-122"/>
                           <a:cs typeface="Calibri" pitchFamily="34" charset="-120"/>
                         </a:rPr>
-                        <a:t>₹20</a:t>
+                        <a:t>3.1</a:t>
                       </a:r>
                       <a:endParaRPr lang="en-US" sz="1000" dirty="0">
                         <a:latin typeface="Calibri" charset="0"/>
@@ -12360,7 +12360,7 @@
                           <a:ea typeface="Calibri" pitchFamily="34" charset="-122"/>
                           <a:cs typeface="Calibri" pitchFamily="34" charset="-120"/>
                         </a:rPr>
-                        <a:t>Show tariff</a:t>
+                        <a:t>Gate entry</a:t>
                       </a:r>
                       <a:endParaRPr lang="en-US" sz="1000" dirty="0">
                         <a:latin typeface="Calibri" charset="0"/>
@@ -12428,7 +12428,7 @@
                           <a:ea typeface="Calibri" pitchFamily="34" charset="-122"/>
                           <a:cs typeface="Calibri" pitchFamily="34" charset="-120"/>
                         </a:rPr>
-                        <a:t>Subject to ADA approval; escalated every second year</a:t>
+                        <a:t>Fixed by ADA. No escalation modelled across the term</a:t>
                       </a:r>
                       <a:endParaRPr lang="en-US" sz="1000" dirty="0">
                         <a:latin typeface="Calibri" charset="0"/>
@@ -12496,7 +12496,7 @@
                           <a:ea typeface="Calibri" pitchFamily="34" charset="-122"/>
                           <a:cs typeface="Calibri" pitchFamily="34" charset="-120"/>
                         </a:rPr>
-                        <a:t>₹100 → ₹130</a:t>
+                        <a:t>₹20</a:t>
                       </a:r>
                       <a:endParaRPr lang="en-US" sz="1000" dirty="0">
                         <a:latin typeface="Calibri" charset="0"/>
@@ -12566,7 +12566,7 @@
                           <a:ea typeface="Calibri" pitchFamily="34" charset="-122"/>
                           <a:cs typeface="Calibri" pitchFamily="34" charset="-120"/>
                         </a:rPr>
-                        <a:t>F&amp;B spend per capture</a:t>
+                        <a:t>Show tariff</a:t>
                       </a:r>
                       <a:endParaRPr lang="en-US" sz="1000" dirty="0">
                         <a:latin typeface="Calibri" charset="0"/>
@@ -12634,7 +12634,7 @@
                           <a:ea typeface="Calibri" pitchFamily="34" charset="-122"/>
                           <a:cs typeface="Calibri" pitchFamily="34" charset="-120"/>
                         </a:rPr>
-                        <a:t>Ready-to-eat and pre-packaged only; no cooking on site</a:t>
+                        <a:t>Subject to ADA approval; escalated every second year</a:t>
                       </a:r>
                       <a:endParaRPr lang="en-US" sz="1000" dirty="0">
                         <a:latin typeface="Calibri" charset="0"/>
@@ -12702,7 +12702,7 @@
                           <a:ea typeface="Calibri" pitchFamily="34" charset="-122"/>
                           <a:cs typeface="Calibri" pitchFamily="34" charset="-120"/>
                         </a:rPr>
-                        <a:t>₹35 → ₹46</a:t>
+                        <a:t>₹100 → ₹130</a:t>
                       </a:r>
                       <a:endParaRPr lang="en-US" sz="1000" dirty="0">
                         <a:latin typeface="Calibri" charset="0"/>
@@ -12772,7 +12772,7 @@
                           <a:ea typeface="Calibri" pitchFamily="34" charset="-122"/>
                           <a:cs typeface="Calibri" pitchFamily="34" charset="-120"/>
                         </a:rPr>
-                        <a:t>Activity spend per capture</a:t>
+                        <a:t>F&amp;B spend per capture</a:t>
                       </a:r>
                       <a:endParaRPr lang="en-US" sz="1000" dirty="0">
                         <a:latin typeface="Calibri" charset="0"/>
@@ -12840,7 +12840,7 @@
                           <a:ea typeface="Calibri" pitchFamily="34" charset="-122"/>
                           <a:cs typeface="Calibri" pitchFamily="34" charset="-120"/>
                         </a:rPr>
-                        <a:t>Blended across the activity stack</a:t>
+                        <a:t>Ready-to-eat and pre-packaged only; no cooking on site</a:t>
                       </a:r>
                       <a:endParaRPr lang="en-US" sz="1000" dirty="0">
                         <a:latin typeface="Calibri" charset="0"/>
@@ -12908,7 +12908,7 @@
                           <a:ea typeface="Calibri" pitchFamily="34" charset="-122"/>
                           <a:cs typeface="Calibri" pitchFamily="34" charset="-120"/>
                         </a:rPr>
-                        <a:t>₹120 → ₹180</a:t>
+                        <a:t>₹35 → ₹46</a:t>
                       </a:r>
                       <a:endParaRPr lang="en-US" sz="1000" dirty="0">
                         <a:latin typeface="Calibri" charset="0"/>
@@ -12978,7 +12978,7 @@
                           <a:ea typeface="Calibri" pitchFamily="34" charset="-122"/>
                           <a:cs typeface="Calibri" pitchFamily="34" charset="-120"/>
                         </a:rPr>
-                        <a:t>Parking</a:t>
+                        <a:t>Activity spend per capture</a:t>
                       </a:r>
                       <a:endParaRPr lang="en-US" sz="1000" dirty="0">
                         <a:latin typeface="Calibri" charset="0"/>
@@ -13046,7 +13046,7 @@
                           <a:ea typeface="Calibri" pitchFamily="34" charset="-122"/>
                           <a:cs typeface="Calibri" pitchFamily="34" charset="-120"/>
                         </a:rPr>
-                        <a:t>62% two-wheeler at ₹10, 38% four-wheeler at ₹20</a:t>
+                        <a:t>Visitor spend at the vendor, before E-O-D's share</a:t>
                       </a:r>
                       <a:endParaRPr lang="en-US" sz="1000" dirty="0">
                         <a:latin typeface="Calibri" charset="0"/>
@@ -13114,7 +13114,7 @@
                           <a:ea typeface="Calibri" pitchFamily="34" charset="-122"/>
                           <a:cs typeface="Calibri" pitchFamily="34" charset="-120"/>
                         </a:rPr>
-                        <a:t>₹10 / ₹20</a:t>
+                        <a:t>₹120 → ₹180</a:t>
                       </a:r>
                       <a:endParaRPr lang="en-US" sz="1000" dirty="0">
                         <a:latin typeface="Calibri" charset="0"/>
@@ -13184,6 +13184,212 @@
                           <a:ea typeface="Calibri" pitchFamily="34" charset="-122"/>
                           <a:cs typeface="Calibri" pitchFamily="34" charset="-120"/>
                         </a:rPr>
+                        <a:t>Parking</a:t>
+                      </a:r>
+                      <a:endParaRPr lang="en-US" sz="1000" dirty="0">
+                        <a:latin typeface="Calibri" charset="0"/>
+                        <a:ea typeface="Calibri" charset="0"/>
+                        <a:cs typeface="Calibri" charset="0"/>
+                      </a:endParaRPr>
+                    </a:p>
+                  </a:txBody>
+                  <a:tcPr marL="0" marR="76200" marT="63500" marB="63500" anchor="ctr">
+                    <a:lnL w="0" cap="flat" cmpd="sng" algn="ctr">
+                      <a:solidFill>
+                        <a:srgbClr val="666666"/>
+                      </a:solidFill>
+                      <a:prstDash val="solid"/>
+                      <a:round/>
+                      <a:headEnd type="none" w="med" len="med"/>
+                      <a:tailEnd type="none" w="med" len="med"/>
+                    </a:lnL>
+                    <a:lnR w="0" cap="flat" cmpd="sng" algn="ctr">
+                      <a:solidFill>
+                        <a:srgbClr val="666666"/>
+                      </a:solidFill>
+                      <a:prstDash val="solid"/>
+                      <a:round/>
+                      <a:headEnd type="none" w="med" len="med"/>
+                      <a:tailEnd type="none" w="med" len="med"/>
+                    </a:lnR>
+                    <a:lnT w="0" cap="flat" cmpd="sng" algn="ctr">
+                      <a:solidFill>
+                        <a:srgbClr val="666666"/>
+                      </a:solidFill>
+                      <a:prstDash val="solid"/>
+                      <a:round/>
+                      <a:headEnd type="none" w="med" len="med"/>
+                      <a:tailEnd type="none" w="med" len="med"/>
+                    </a:lnT>
+                    <a:lnB w="7620" cap="flat" cmpd="sng" algn="ctr">
+                      <a:solidFill>
+                        <a:srgbClr val="E2E4EA"/>
+                      </a:solidFill>
+                      <a:prstDash val="solid"/>
+                      <a:round/>
+                      <a:headEnd type="none" w="med" len="med"/>
+                      <a:tailEnd type="none" w="med" len="med"/>
+                    </a:lnB>
+                    <a:solidFill>
+                      <a:srgbClr val="FFFFFF"/>
+                    </a:solidFill>
+                  </a:tcPr>
+                </a:tc>
+                <a:tc>
+                  <a:txBody>
+                    <a:bodyPr/>
+                    <a:lstStyle/>
+                    <a:p>
+                      <a:pPr algn="r" indent="0" marL="0">
+                        <a:buNone/>
+                      </a:pPr>
+                      <a:r>
+                        <a:rPr lang="en-US" sz="1000" dirty="0">
+                          <a:solidFill>
+                            <a:srgbClr val="3B4660"/>
+                          </a:solidFill>
+                          <a:latin typeface="Calibri" pitchFamily="34" charset="0"/>
+                          <a:ea typeface="Calibri" pitchFamily="34" charset="-122"/>
+                          <a:cs typeface="Calibri" pitchFamily="34" charset="-120"/>
+                        </a:rPr>
+                        <a:t>62% two-wheeler at ₹10, 38% four-wheeler at ₹20</a:t>
+                      </a:r>
+                      <a:endParaRPr lang="en-US" sz="1000" dirty="0">
+                        <a:latin typeface="Calibri" charset="0"/>
+                        <a:ea typeface="Calibri" charset="0"/>
+                        <a:cs typeface="Calibri" charset="0"/>
+                      </a:endParaRPr>
+                    </a:p>
+                  </a:txBody>
+                  <a:tcPr marL="0" marR="76200" marT="63500" marB="63500" anchor="ctr">
+                    <a:lnL w="0" cap="flat" cmpd="sng" algn="ctr">
+                      <a:solidFill>
+                        <a:srgbClr val="666666"/>
+                      </a:solidFill>
+                      <a:prstDash val="solid"/>
+                      <a:round/>
+                      <a:headEnd type="none" w="med" len="med"/>
+                      <a:tailEnd type="none" w="med" len="med"/>
+                    </a:lnL>
+                    <a:lnR w="0" cap="flat" cmpd="sng" algn="ctr">
+                      <a:solidFill>
+                        <a:srgbClr val="666666"/>
+                      </a:solidFill>
+                      <a:prstDash val="solid"/>
+                      <a:round/>
+                      <a:headEnd type="none" w="med" len="med"/>
+                      <a:tailEnd type="none" w="med" len="med"/>
+                    </a:lnR>
+                    <a:lnT w="0" cap="flat" cmpd="sng" algn="ctr">
+                      <a:solidFill>
+                        <a:srgbClr val="666666"/>
+                      </a:solidFill>
+                      <a:prstDash val="solid"/>
+                      <a:round/>
+                      <a:headEnd type="none" w="med" len="med"/>
+                      <a:tailEnd type="none" w="med" len="med"/>
+                    </a:lnT>
+                    <a:lnB w="7620" cap="flat" cmpd="sng" algn="ctr">
+                      <a:solidFill>
+                        <a:srgbClr val="E2E4EA"/>
+                      </a:solidFill>
+                      <a:prstDash val="solid"/>
+                      <a:round/>
+                      <a:headEnd type="none" w="med" len="med"/>
+                      <a:tailEnd type="none" w="med" len="med"/>
+                    </a:lnB>
+                    <a:solidFill>
+                      <a:srgbClr val="FFFFFF"/>
+                    </a:solidFill>
+                  </a:tcPr>
+                </a:tc>
+                <a:tc>
+                  <a:txBody>
+                    <a:bodyPr/>
+                    <a:lstStyle/>
+                    <a:p>
+                      <a:pPr algn="r" indent="0" marL="0">
+                        <a:buNone/>
+                      </a:pPr>
+                      <a:r>
+                        <a:rPr lang="en-US" sz="1000" dirty="0">
+                          <a:solidFill>
+                            <a:srgbClr val="3B4660"/>
+                          </a:solidFill>
+                          <a:latin typeface="Calibri" pitchFamily="34" charset="0"/>
+                          <a:ea typeface="Calibri" pitchFamily="34" charset="-122"/>
+                          <a:cs typeface="Calibri" pitchFamily="34" charset="-120"/>
+                        </a:rPr>
+                        <a:t>₹10 / ₹20</a:t>
+                      </a:r>
+                      <a:endParaRPr lang="en-US" sz="1000" dirty="0">
+                        <a:latin typeface="Calibri" charset="0"/>
+                        <a:ea typeface="Calibri" charset="0"/>
+                        <a:cs typeface="Calibri" charset="0"/>
+                      </a:endParaRPr>
+                    </a:p>
+                  </a:txBody>
+                  <a:tcPr marL="0" marR="76200" marT="63500" marB="63500" anchor="ctr">
+                    <a:lnL w="0" cap="flat" cmpd="sng" algn="ctr">
+                      <a:solidFill>
+                        <a:srgbClr val="666666"/>
+                      </a:solidFill>
+                      <a:prstDash val="solid"/>
+                      <a:round/>
+                      <a:headEnd type="none" w="med" len="med"/>
+                      <a:tailEnd type="none" w="med" len="med"/>
+                    </a:lnL>
+                    <a:lnR w="0" cap="flat" cmpd="sng" algn="ctr">
+                      <a:solidFill>
+                        <a:srgbClr val="666666"/>
+                      </a:solidFill>
+                      <a:prstDash val="solid"/>
+                      <a:round/>
+                      <a:headEnd type="none" w="med" len="med"/>
+                      <a:tailEnd type="none" w="med" len="med"/>
+                    </a:lnR>
+                    <a:lnT w="0" cap="flat" cmpd="sng" algn="ctr">
+                      <a:solidFill>
+                        <a:srgbClr val="666666"/>
+                      </a:solidFill>
+                      <a:prstDash val="solid"/>
+                      <a:round/>
+                      <a:headEnd type="none" w="med" len="med"/>
+                      <a:tailEnd type="none" w="med" len="med"/>
+                    </a:lnT>
+                    <a:lnB w="7620" cap="flat" cmpd="sng" algn="ctr">
+                      <a:solidFill>
+                        <a:srgbClr val="E2E4EA"/>
+                      </a:solidFill>
+                      <a:prstDash val="solid"/>
+                      <a:round/>
+                      <a:headEnd type="none" w="med" len="med"/>
+                      <a:tailEnd type="none" w="med" len="med"/>
+                    </a:lnB>
+                    <a:solidFill>
+                      <a:srgbClr val="FFFFFF"/>
+                    </a:solidFill>
+                  </a:tcPr>
+                </a:tc>
+              </a:tr>
+              <a:tr h="274320">
+                <a:tc>
+                  <a:txBody>
+                    <a:bodyPr/>
+                    <a:lstStyle/>
+                    <a:p>
+                      <a:pPr algn="l" indent="0" marL="0">
+                        <a:buNone/>
+                      </a:pPr>
+                      <a:r>
+                        <a:rPr lang="en-US" sz="1000" dirty="0">
+                          <a:solidFill>
+                            <a:srgbClr val="3B4660"/>
+                          </a:solidFill>
+                          <a:latin typeface="Calibri" pitchFamily="34" charset="0"/>
+                          <a:ea typeface="Calibri" pitchFamily="34" charset="-122"/>
+                          <a:cs typeface="Calibri" pitchFamily="34" charset="-120"/>
+                        </a:rPr>
                         <a:t>Events and IPs</a:t>
                       </a:r>
                       <a:endParaRPr lang="en-US" sz="1000" dirty="0">
@@ -13252,7 +13458,7 @@
                           <a:ea typeface="Calibri" pitchFamily="34" charset="-122"/>
                           <a:cs typeface="Calibri" pitchFamily="34" charset="-120"/>
                         </a:rPr>
-                        <a:t>Public programming, private events, photo and pre-wedding shoots</a:t>
+                        <a:t>Public programming and E-O-D-run IPs, private events, shoots</a:t>
                       </a:r>
                       <a:endParaRPr lang="en-US" sz="1000" dirty="0">
                         <a:latin typeface="Calibri" charset="0"/>
@@ -13320,7 +13526,7 @@
                           <a:ea typeface="Calibri" pitchFamily="34" charset="-122"/>
                           <a:cs typeface="Calibri" pitchFamily="34" charset="-120"/>
                         </a:rPr>
-                        <a:t>₹30 L → ₹44 L</a:t>
+                        <a:t>₹50 L → ₹85 L</a:t>
                       </a:r>
                       <a:endParaRPr lang="en-US" sz="1000" dirty="0">
                         <a:latin typeface="Calibri" charset="0"/>
@@ -13745,7 +13951,7 @@
                 <a:ea typeface="Calibri" pitchFamily="34" charset="-122"/>
                 <a:cs typeface="Calibri" pitchFamily="34" charset="-120"/>
               </a:rPr>
-              <a:t>Assumptions and method · cost, capital and facility</a:t>
+              <a:t>Assumptions and method · cost and facility</a:t>
             </a:r>
             <a:endParaRPr lang="en-US" sz="3000" dirty="0"/>
           </a:p>
@@ -14826,7 +15032,7 @@
                           <a:ea typeface="Calibri" pitchFamily="34" charset="-122"/>
                           <a:cs typeface="Calibri" pitchFamily="34" charset="-120"/>
                         </a:rPr>
-                        <a:t>Activity operating cost</a:t>
+                        <a:t>Marketing</a:t>
                       </a:r>
                       <a:endParaRPr lang="en-US" sz="1000" dirty="0">
                         <a:latin typeface="Calibri" charset="0"/>
@@ -14894,7 +15100,7 @@
                           <a:ea typeface="Calibri" pitchFamily="34" charset="-122"/>
                           <a:cs typeface="Calibri" pitchFamily="34" charset="-120"/>
                         </a:rPr>
-                        <a:t>Consumables and vendor share</a:t>
+                        <a:t>Front-loaded for the opening season, then normalised</a:t>
                       </a:r>
                       <a:endParaRPr lang="en-US" sz="1000" dirty="0">
                         <a:latin typeface="Calibri" charset="0"/>
@@ -14962,7 +15168,7 @@
                           <a:ea typeface="Calibri" pitchFamily="34" charset="-122"/>
                           <a:cs typeface="Calibri" pitchFamily="34" charset="-120"/>
                         </a:rPr>
-                        <a:t>22% of activity revenue</a:t>
+                        <a:t>7.5% → 4.5% of revenue</a:t>
                       </a:r>
                       <a:endParaRPr lang="en-US" sz="1000" dirty="0">
                         <a:latin typeface="Calibri" charset="0"/>
@@ -15032,7 +15238,7 @@
                           <a:ea typeface="Calibri" pitchFamily="34" charset="-122"/>
                           <a:cs typeface="Calibri" pitchFamily="34" charset="-120"/>
                         </a:rPr>
-                        <a:t>Marketing</a:t>
+                        <a:t>Corporate overhead</a:t>
                       </a:r>
                       <a:endParaRPr lang="en-US" sz="1000" dirty="0">
                         <a:latin typeface="Calibri" charset="0"/>
@@ -15100,7 +15306,7 @@
                           <a:ea typeface="Calibri" pitchFamily="34" charset="-122"/>
                           <a:cs typeface="Calibri" pitchFamily="34" charset="-120"/>
                         </a:rPr>
-                        <a:t>Front-loaded for the opening season, then normalised</a:t>
+                        <a:t>Agra cluster allocation, not a standalone rate</a:t>
                       </a:r>
                       <a:endParaRPr lang="en-US" sz="1000" dirty="0">
                         <a:latin typeface="Calibri" charset="0"/>
@@ -15168,7 +15374,7 @@
                           <a:ea typeface="Calibri" pitchFamily="34" charset="-122"/>
                           <a:cs typeface="Calibri" pitchFamily="34" charset="-120"/>
                         </a:rPr>
-                        <a:t>7.5% → 4.5% of revenue</a:t>
+                        <a:t>5% of revenue</a:t>
                       </a:r>
                       <a:endParaRPr lang="en-US" sz="1000" dirty="0">
                         <a:latin typeface="Calibri" charset="0"/>
@@ -15238,7 +15444,7 @@
                           <a:ea typeface="Calibri" pitchFamily="34" charset="-122"/>
                           <a:cs typeface="Calibri" pitchFamily="34" charset="-120"/>
                         </a:rPr>
-                        <a:t>Corporate overhead</a:t>
+                        <a:t>Depreciation</a:t>
                       </a:r>
                       <a:endParaRPr lang="en-US" sz="1000" dirty="0">
                         <a:latin typeface="Calibri" charset="0"/>
@@ -15306,7 +15512,7 @@
                           <a:ea typeface="Calibri" pitchFamily="34" charset="-122"/>
                           <a:cs typeface="Calibri" pitchFamily="34" charset="-120"/>
                         </a:rPr>
-                        <a:t>Agra cluster allocation, not a standalone rate</a:t>
+                        <a:t>Straight line over the lives shown in section 02</a:t>
                       </a:r>
                       <a:endParaRPr lang="en-US" sz="1000" dirty="0">
                         <a:latin typeface="Calibri" charset="0"/>
@@ -15374,213 +15580,7 @@
                           <a:ea typeface="Calibri" pitchFamily="34" charset="-122"/>
                           <a:cs typeface="Calibri" pitchFamily="34" charset="-120"/>
                         </a:rPr>
-                        <a:t>5% of revenue</a:t>
-                      </a:r>
-                      <a:endParaRPr lang="en-US" sz="1000" dirty="0">
-                        <a:latin typeface="Calibri" charset="0"/>
-                        <a:ea typeface="Calibri" charset="0"/>
-                        <a:cs typeface="Calibri" charset="0"/>
-                      </a:endParaRPr>
-                    </a:p>
-                  </a:txBody>
-                  <a:tcPr marL="0" marR="76200" marT="63500" marB="63500" anchor="ctr">
-                    <a:lnL w="0" cap="flat" cmpd="sng" algn="ctr">
-                      <a:solidFill>
-                        <a:srgbClr val="666666"/>
-                      </a:solidFill>
-                      <a:prstDash val="solid"/>
-                      <a:round/>
-                      <a:headEnd type="none" w="med" len="med"/>
-                      <a:tailEnd type="none" w="med" len="med"/>
-                    </a:lnL>
-                    <a:lnR w="0" cap="flat" cmpd="sng" algn="ctr">
-                      <a:solidFill>
-                        <a:srgbClr val="666666"/>
-                      </a:solidFill>
-                      <a:prstDash val="solid"/>
-                      <a:round/>
-                      <a:headEnd type="none" w="med" len="med"/>
-                      <a:tailEnd type="none" w="med" len="med"/>
-                    </a:lnR>
-                    <a:lnT w="0" cap="flat" cmpd="sng" algn="ctr">
-                      <a:solidFill>
-                        <a:srgbClr val="666666"/>
-                      </a:solidFill>
-                      <a:prstDash val="solid"/>
-                      <a:round/>
-                      <a:headEnd type="none" w="med" len="med"/>
-                      <a:tailEnd type="none" w="med" len="med"/>
-                    </a:lnT>
-                    <a:lnB w="7620" cap="flat" cmpd="sng" algn="ctr">
-                      <a:solidFill>
-                        <a:srgbClr val="E2E4EA"/>
-                      </a:solidFill>
-                      <a:prstDash val="solid"/>
-                      <a:round/>
-                      <a:headEnd type="none" w="med" len="med"/>
-                      <a:tailEnd type="none" w="med" len="med"/>
-                    </a:lnB>
-                    <a:solidFill>
-                      <a:srgbClr val="FFFFFF"/>
-                    </a:solidFill>
-                  </a:tcPr>
-                </a:tc>
-              </a:tr>
-              <a:tr h="265176">
-                <a:tc>
-                  <a:txBody>
-                    <a:bodyPr/>
-                    <a:lstStyle/>
-                    <a:p>
-                      <a:pPr algn="l" indent="0" marL="0">
-                        <a:buNone/>
-                      </a:pPr>
-                      <a:r>
-                        <a:rPr lang="en-US" sz="1000" dirty="0">
-                          <a:solidFill>
-                            <a:srgbClr val="3B4660"/>
-                          </a:solidFill>
-                          <a:latin typeface="Calibri" pitchFamily="34" charset="0"/>
-                          <a:ea typeface="Calibri" pitchFamily="34" charset="-122"/>
-                          <a:cs typeface="Calibri" pitchFamily="34" charset="-120"/>
-                        </a:rPr>
-                        <a:t>Depreciation</a:t>
-                      </a:r>
-                      <a:endParaRPr lang="en-US" sz="1000" dirty="0">
-                        <a:latin typeface="Calibri" charset="0"/>
-                        <a:ea typeface="Calibri" charset="0"/>
-                        <a:cs typeface="Calibri" charset="0"/>
-                      </a:endParaRPr>
-                    </a:p>
-                  </a:txBody>
-                  <a:tcPr marL="0" marR="76200" marT="63500" marB="63500" anchor="ctr">
-                    <a:lnL w="0" cap="flat" cmpd="sng" algn="ctr">
-                      <a:solidFill>
-                        <a:srgbClr val="666666"/>
-                      </a:solidFill>
-                      <a:prstDash val="solid"/>
-                      <a:round/>
-                      <a:headEnd type="none" w="med" len="med"/>
-                      <a:tailEnd type="none" w="med" len="med"/>
-                    </a:lnL>
-                    <a:lnR w="0" cap="flat" cmpd="sng" algn="ctr">
-                      <a:solidFill>
-                        <a:srgbClr val="666666"/>
-                      </a:solidFill>
-                      <a:prstDash val="solid"/>
-                      <a:round/>
-                      <a:headEnd type="none" w="med" len="med"/>
-                      <a:tailEnd type="none" w="med" len="med"/>
-                    </a:lnR>
-                    <a:lnT w="0" cap="flat" cmpd="sng" algn="ctr">
-                      <a:solidFill>
-                        <a:srgbClr val="666666"/>
-                      </a:solidFill>
-                      <a:prstDash val="solid"/>
-                      <a:round/>
-                      <a:headEnd type="none" w="med" len="med"/>
-                      <a:tailEnd type="none" w="med" len="med"/>
-                    </a:lnT>
-                    <a:lnB w="7620" cap="flat" cmpd="sng" algn="ctr">
-                      <a:solidFill>
-                        <a:srgbClr val="E2E4EA"/>
-                      </a:solidFill>
-                      <a:prstDash val="solid"/>
-                      <a:round/>
-                      <a:headEnd type="none" w="med" len="med"/>
-                      <a:tailEnd type="none" w="med" len="med"/>
-                    </a:lnB>
-                    <a:solidFill>
-                      <a:srgbClr val="FFFFFF"/>
-                    </a:solidFill>
-                  </a:tcPr>
-                </a:tc>
-                <a:tc>
-                  <a:txBody>
-                    <a:bodyPr/>
-                    <a:lstStyle/>
-                    <a:p>
-                      <a:pPr algn="r" indent="0" marL="0">
-                        <a:buNone/>
-                      </a:pPr>
-                      <a:r>
-                        <a:rPr lang="en-US" sz="1000" dirty="0">
-                          <a:solidFill>
-                            <a:srgbClr val="3B4660"/>
-                          </a:solidFill>
-                          <a:latin typeface="Calibri" pitchFamily="34" charset="0"/>
-                          <a:ea typeface="Calibri" pitchFamily="34" charset="-122"/>
-                          <a:cs typeface="Calibri" pitchFamily="34" charset="-120"/>
-                        </a:rPr>
-                        <a:t>Straight line over the lives shown in section 02</a:t>
-                      </a:r>
-                      <a:endParaRPr lang="en-US" sz="1000" dirty="0">
-                        <a:latin typeface="Calibri" charset="0"/>
-                        <a:ea typeface="Calibri" charset="0"/>
-                        <a:cs typeface="Calibri" charset="0"/>
-                      </a:endParaRPr>
-                    </a:p>
-                  </a:txBody>
-                  <a:tcPr marL="0" marR="76200" marT="63500" marB="63500" anchor="ctr">
-                    <a:lnL w="0" cap="flat" cmpd="sng" algn="ctr">
-                      <a:solidFill>
-                        <a:srgbClr val="666666"/>
-                      </a:solidFill>
-                      <a:prstDash val="solid"/>
-                      <a:round/>
-                      <a:headEnd type="none" w="med" len="med"/>
-                      <a:tailEnd type="none" w="med" len="med"/>
-                    </a:lnL>
-                    <a:lnR w="0" cap="flat" cmpd="sng" algn="ctr">
-                      <a:solidFill>
-                        <a:srgbClr val="666666"/>
-                      </a:solidFill>
-                      <a:prstDash val="solid"/>
-                      <a:round/>
-                      <a:headEnd type="none" w="med" len="med"/>
-                      <a:tailEnd type="none" w="med" len="med"/>
-                    </a:lnR>
-                    <a:lnT w="0" cap="flat" cmpd="sng" algn="ctr">
-                      <a:solidFill>
-                        <a:srgbClr val="666666"/>
-                      </a:solidFill>
-                      <a:prstDash val="solid"/>
-                      <a:round/>
-                      <a:headEnd type="none" w="med" len="med"/>
-                      <a:tailEnd type="none" w="med" len="med"/>
-                    </a:lnT>
-                    <a:lnB w="7620" cap="flat" cmpd="sng" algn="ctr">
-                      <a:solidFill>
-                        <a:srgbClr val="E2E4EA"/>
-                      </a:solidFill>
-                      <a:prstDash val="solid"/>
-                      <a:round/>
-                      <a:headEnd type="none" w="med" len="med"/>
-                      <a:tailEnd type="none" w="med" len="med"/>
-                    </a:lnB>
-                    <a:solidFill>
-                      <a:srgbClr val="FFFFFF"/>
-                    </a:solidFill>
-                  </a:tcPr>
-                </a:tc>
-                <a:tc>
-                  <a:txBody>
-                    <a:bodyPr/>
-                    <a:lstStyle/>
-                    <a:p>
-                      <a:pPr algn="r" indent="0" marL="0">
-                        <a:buNone/>
-                      </a:pPr>
-                      <a:r>
-                        <a:rPr lang="en-US" sz="1000" dirty="0">
-                          <a:solidFill>
-                            <a:srgbClr val="3B4660"/>
-                          </a:solidFill>
-                          <a:latin typeface="Calibri" pitchFamily="34" charset="0"/>
-                          <a:ea typeface="Calibri" pitchFamily="34" charset="-122"/>
-                          <a:cs typeface="Calibri" pitchFamily="34" charset="-120"/>
-                        </a:rPr>
-                        <a:t>₹11.5 L a year</a:t>
+                        <a:t>₹5.5 L a year</a:t>
                       </a:r>
                       <a:endParaRPr lang="en-US" sz="1000" dirty="0">
                         <a:latin typeface="Calibri" charset="0"/>
@@ -17754,7 +17754,7 @@
                 <a:ea typeface="Calibri" pitchFamily="34" charset="-122"/>
                 <a:cs typeface="Calibri" pitchFamily="34" charset="-120"/>
               </a:rPr>
-              <a:t>No cap on the forward e-auction, and the fee escalates 5% a year on whatever is bid. Every ₹1 lakh a year above the modelled ₹36 L costs about ₹8.1 lakh across the term. The project stops covering the cost of its debt above ₹80.9 L a year.</a:t>
+              <a:t>No cap on the forward e-auction, and the fee escalates 5% a year on whatever is bid. Every ₹1 lakh a year above the modelled ₹36 L costs about ₹8.1 lakh across the term. The project stops covering the cost of its debt above ₹76.8 L a year.</a:t>
             </a:r>
             <a:endParaRPr lang="en-US" sz="1050" dirty="0"/>
           </a:p>
@@ -17813,7 +17813,7 @@
                 <a:ea typeface="Calibri" pitchFamily="34" charset="-122"/>
                 <a:cs typeface="Calibri" pitchFamily="34" charset="-120"/>
               </a:rPr>
-              <a:t>Show and activity tariffs</a:t>
+              <a:t>Laser and fountain asset condition</a:t>
             </a:r>
             <a:endParaRPr lang="en-US" sz="1250" dirty="0"/>
           </a:p>
@@ -17855,7 +17855,7 @@
                 <a:ea typeface="Calibri" pitchFamily="34" charset="-122"/>
                 <a:cs typeface="Calibri" pitchFamily="34" charset="-120"/>
               </a:rPr>
-              <a:t>ADA fixes the gate at ₹20 and approves every other rate, with ten days' notice for any revision. The show and activity lines together are 46% of year-3 revenue.</a:t>
+              <a:t>The agency inherits equipment of unknown age and must replace end-of-life assets at its own cost, with the onus of proving irreparability also on the agency. Not provided for in the cost model.</a:t>
             </a:r>
             <a:endParaRPr lang="en-US" sz="1050" dirty="0"/>
           </a:p>
@@ -17914,7 +17914,7 @@
                 <a:ea typeface="Calibri" pitchFamily="34" charset="-122"/>
                 <a:cs typeface="Calibri" pitchFamily="34" charset="-120"/>
               </a:rPr>
-              <a:t>Laser and fountain asset condition</a:t>
+              <a:t>Activity vendor availability</a:t>
             </a:r>
             <a:endParaRPr lang="en-US" sz="1250" dirty="0"/>
           </a:p>
@@ -17956,7 +17956,7 @@
                 <a:ea typeface="Calibri" pitchFamily="34" charset="-122"/>
                 <a:cs typeface="Calibri" pitchFamily="34" charset="-120"/>
               </a:rPr>
-              <a:t>The agency inherits equipment of unknown age and must replace end-of-life assets at its own cost, with the onus of proving irreparability also on the agency. Not provided for in the cost model.</a:t>
+              <a:t>The activity line is E-O-D's 20% share of vendor takings, not own-operated revenue. It depends on vendors taking space and on ADA approving the concept. At ₹0.16 Cr in year 3 it carries no capital at risk and its loss does not threaten debt service.</a:t>
             </a:r>
             <a:endParaRPr lang="en-US" sz="1050" dirty="0"/>
           </a:p>
@@ -17977,7 +17977,7 @@
             <a:avLst/>
           </a:prstGeom>
           <a:solidFill>
-            <a:srgbClr val="D97706"/>
+            <a:srgbClr val="2B66EA"/>
           </a:solidFill>
           <a:ln/>
         </p:spPr>
@@ -18015,7 +18015,7 @@
                 <a:ea typeface="Calibri" pitchFamily="34" charset="-122"/>
                 <a:cs typeface="Calibri" pitchFamily="34" charset="-120"/>
               </a:rPr>
-              <a:t>Footfall in the opening season</a:t>
+              <a:t>Show tariff not set in the RFP</a:t>
             </a:r>
             <a:endParaRPr lang="en-US" sz="1250" dirty="0"/>
           </a:p>
@@ -18057,7 +18057,7 @@
                 <a:ea typeface="Calibri" pitchFamily="34" charset="-122"/>
                 <a:cs typeface="Calibri" pitchFamily="34" charset="-120"/>
               </a:rPr>
-              <a:t>Year 1 assumes 3.75 lakh visits at a site with no operating history. Year-1 EBITDA is ₹0.17 Cr; a shortfall of roughly 7% in revenue removes it.</a:t>
+              <a:t>To be agreed with ADA at least ten days before implementation. The model assumes ₹100 in year 1 rising to ₹130 by year 7. The show and activity lines together are 41% of year-3 revenue.</a:t>
             </a:r>
             <a:endParaRPr lang="en-US" sz="1050" dirty="0"/>
           </a:p>
@@ -18116,7 +18116,7 @@
                 <a:ea typeface="Calibri" pitchFamily="34" charset="-122"/>
                 <a:cs typeface="Calibri" pitchFamily="34" charset="-120"/>
               </a:rPr>
-              <a:t>Show tariff not set in the RFP</a:t>
+              <a:t>Winning licence fee unknown</a:t>
             </a:r>
             <a:endParaRPr lang="en-US" sz="1250" dirty="0"/>
           </a:p>
@@ -18158,107 +18158,6 @@
                 <a:ea typeface="Calibri" pitchFamily="34" charset="-122"/>
                 <a:cs typeface="Calibri" pitchFamily="34" charset="-120"/>
               </a:rPr>
-              <a:t>To be agreed with ADA at least ten days before implementation. The model assumes ₹100 in year 1 rising to ₹130 by year 7.</a:t>
-            </a:r>
-            <a:endParaRPr lang="en-US" sz="1050" dirty="0"/>
-          </a:p>
-        </p:txBody>
-      </p:sp>
-      <p:sp>
-        <p:nvSpPr>
-          <p:cNvPr id="20" name="Shape 18"/>
-          <p:cNvSpPr/>
-          <p:nvPr/>
-        </p:nvSpPr>
-        <p:spPr>
-          <a:xfrm>
-            <a:off x="6278728" y="3438144"/>
-            <a:ext cx="182880" cy="182880"/>
-          </a:xfrm>
-          <a:prstGeom prst="ellipse">
-            <a:avLst/>
-          </a:prstGeom>
-          <a:solidFill>
-            <a:srgbClr val="2B66EA"/>
-          </a:solidFill>
-          <a:ln/>
-        </p:spPr>
-      </p:sp>
-      <p:sp>
-        <p:nvSpPr>
-          <p:cNvPr id="21" name="Text 19"/>
-          <p:cNvSpPr/>
-          <p:nvPr/>
-        </p:nvSpPr>
-        <p:spPr>
-          <a:xfrm>
-            <a:off x="6571336" y="3401568"/>
-            <a:ext cx="5053432" cy="237744"/>
-          </a:xfrm>
-          <a:prstGeom prst="rect">
-            <a:avLst/>
-          </a:prstGeom>
-          <a:noFill/>
-          <a:ln/>
-        </p:spPr>
-        <p:txBody>
-          <a:bodyPr wrap="square" lIns="0" tIns="0" rIns="0" bIns="0" rtlCol="0" anchor="ctr"/>
-          <a:lstStyle/>
-          <a:p>
-            <a:pPr indent="0" marL="0">
-              <a:buNone/>
-            </a:pPr>
-            <a:r>
-              <a:rPr lang="en-US" sz="1250" b="1" dirty="0">
-                <a:solidFill>
-                  <a:srgbClr val="0A1426"/>
-                </a:solidFill>
-                <a:latin typeface="Calibri" pitchFamily="34" charset="0"/>
-                <a:ea typeface="Calibri" pitchFamily="34" charset="-122"/>
-                <a:cs typeface="Calibri" pitchFamily="34" charset="-120"/>
-              </a:rPr>
-              <a:t>Winning licence fee unknown</a:t>
-            </a:r>
-            <a:endParaRPr lang="en-US" sz="1250" dirty="0"/>
-          </a:p>
-        </p:txBody>
-      </p:sp>
-      <p:sp>
-        <p:nvSpPr>
-          <p:cNvPr id="22" name="Text 20"/>
-          <p:cNvSpPr/>
-          <p:nvPr/>
-        </p:nvSpPr>
-        <p:spPr>
-          <a:xfrm>
-            <a:off x="6571336" y="3648456"/>
-            <a:ext cx="5053432" cy="841248"/>
-          </a:xfrm>
-          <a:prstGeom prst="rect">
-            <a:avLst/>
-          </a:prstGeom>
-          <a:noFill/>
-          <a:ln/>
-        </p:spPr>
-        <p:txBody>
-          <a:bodyPr wrap="square" lIns="0" tIns="0" rIns="0" bIns="0" rtlCol="0" anchor="t"/>
-          <a:lstStyle/>
-          <a:p>
-            <a:pPr indent="0" marL="0">
-              <a:lnSpc>
-                <a:spcPts val="1400"/>
-              </a:lnSpc>
-              <a:buNone/>
-            </a:pPr>
-            <a:r>
-              <a:rPr lang="en-US" sz="1050" dirty="0">
-                <a:solidFill>
-                  <a:srgbClr val="3B4660"/>
-                </a:solidFill>
-                <a:latin typeface="Calibri" pitchFamily="34" charset="0"/>
-                <a:ea typeface="Calibri" pitchFamily="34" charset="-122"/>
-                <a:cs typeface="Calibri" pitchFamily="34" charset="-120"/>
-              </a:rPr>
               <a:t>Every figure is built on a ₹36 L annual bid and requires re-running against the actual award.</a:t>
             </a:r>
             <a:endParaRPr lang="en-US" sz="1050" dirty="0"/>
@@ -18267,7 +18166,7 @@
       </p:sp>
       <p:sp>
         <p:nvSpPr>
-          <p:cNvPr id="23" name="Text 21"/>
+          <p:cNvPr id="20" name="Text 18"/>
           <p:cNvSpPr/>
           <p:nvPr/>
         </p:nvSpPr>
@@ -18443,7 +18342,7 @@
         <p:spPr>
           <a:xfrm>
             <a:off x="566928" y="950976"/>
-            <a:ext cx="11057839" cy="462280"/>
+            <a:ext cx="11057839" cy="693420"/>
           </a:xfrm>
           <a:prstGeom prst="rect">
             <a:avLst/>
@@ -18484,7 +18383,7 @@
         </p:nvSpPr>
         <p:spPr>
           <a:xfrm>
-            <a:off x="566928" y="1541272"/>
+            <a:off x="566928" y="1772412"/>
             <a:ext cx="3539642" cy="1133856"/>
           </a:xfrm>
           <a:prstGeom prst="roundRect">
@@ -18511,7 +18410,7 @@
         </p:nvSpPr>
         <p:spPr>
           <a:xfrm>
-            <a:off x="749808" y="1660144"/>
+            <a:off x="749808" y="1891284"/>
             <a:ext cx="3173882" cy="237744"/>
           </a:xfrm>
           <a:prstGeom prst="rect">
@@ -18550,7 +18449,7 @@
         </p:nvSpPr>
         <p:spPr>
           <a:xfrm>
-            <a:off x="749808" y="1907032"/>
+            <a:off x="749808" y="2138172"/>
             <a:ext cx="3173882" cy="457200"/>
           </a:xfrm>
           <a:prstGeom prst="rect">
@@ -18591,7 +18490,7 @@
         </p:nvSpPr>
         <p:spPr>
           <a:xfrm>
-            <a:off x="749808" y="2382520"/>
+            <a:off x="749808" y="2613660"/>
             <a:ext cx="3173882" cy="219456"/>
           </a:xfrm>
           <a:prstGeom prst="rect">
@@ -18633,7 +18532,7 @@
         </p:nvSpPr>
         <p:spPr>
           <a:xfrm>
-            <a:off x="4326026" y="1541272"/>
+            <a:off x="4326026" y="1772412"/>
             <a:ext cx="3539642" cy="1133856"/>
           </a:xfrm>
           <a:prstGeom prst="roundRect">
@@ -18660,7 +18559,7 @@
         </p:nvSpPr>
         <p:spPr>
           <a:xfrm>
-            <a:off x="4508906" y="1660144"/>
+            <a:off x="4508906" y="1891284"/>
             <a:ext cx="3173882" cy="237744"/>
           </a:xfrm>
           <a:prstGeom prst="rect">
@@ -18699,7 +18598,7 @@
         </p:nvSpPr>
         <p:spPr>
           <a:xfrm>
-            <a:off x="4508906" y="1907032"/>
+            <a:off x="4508906" y="2138172"/>
             <a:ext cx="3173882" cy="457200"/>
           </a:xfrm>
           <a:prstGeom prst="rect">
@@ -18740,7 +18639,7 @@
         </p:nvSpPr>
         <p:spPr>
           <a:xfrm>
-            <a:off x="4508906" y="2382520"/>
+            <a:off x="4508906" y="2613660"/>
             <a:ext cx="3173882" cy="219456"/>
           </a:xfrm>
           <a:prstGeom prst="rect">
@@ -18782,7 +18681,7 @@
         </p:nvSpPr>
         <p:spPr>
           <a:xfrm>
-            <a:off x="8085125" y="1541272"/>
+            <a:off x="8085125" y="1772412"/>
             <a:ext cx="3539642" cy="1133856"/>
           </a:xfrm>
           <a:prstGeom prst="roundRect">
@@ -18809,7 +18708,7 @@
         </p:nvSpPr>
         <p:spPr>
           <a:xfrm>
-            <a:off x="8268005" y="1660144"/>
+            <a:off x="8268005" y="1891284"/>
             <a:ext cx="3173882" cy="237744"/>
           </a:xfrm>
           <a:prstGeom prst="rect">
@@ -18848,7 +18747,7 @@
         </p:nvSpPr>
         <p:spPr>
           <a:xfrm>
-            <a:off x="8268005" y="1907032"/>
+            <a:off x="8268005" y="2138172"/>
             <a:ext cx="3173882" cy="457200"/>
           </a:xfrm>
           <a:prstGeom prst="rect">
@@ -18889,7 +18788,7 @@
         </p:nvSpPr>
         <p:spPr>
           <a:xfrm>
-            <a:off x="8268005" y="2382520"/>
+            <a:off x="8268005" y="2613660"/>
             <a:ext cx="3173882" cy="219456"/>
           </a:xfrm>
           <a:prstGeom prst="rect">
@@ -18938,7 +18837,7 @@
           </p:nvPr>
         </p:nvGraphicFramePr>
         <p:xfrm>
-          <a:off x="566928" y="2912872"/>
+          <a:off x="566928" y="3144012"/>
           <a:ext cx="11057839" cy="914400"/>
         </p:xfrm>
         <a:graphic>
@@ -20140,144 +20039,6 @@
                           <a:cs typeface="Calibri" pitchFamily="34" charset="-120"/>
                         </a:rPr>
                         <a:t>₹20 entry. Fountain and laser show at rates approved by ADA</a:t>
-                      </a:r>
-                      <a:endParaRPr lang="en-US" sz="1050" dirty="0">
-                        <a:latin typeface="Calibri" charset="0"/>
-                        <a:ea typeface="Calibri" charset="0"/>
-                        <a:cs typeface="Calibri" charset="0"/>
-                      </a:endParaRPr>
-                    </a:p>
-                  </a:txBody>
-                  <a:tcPr marL="0" marR="76200" marT="63500" marB="63500" anchor="ctr">
-                    <a:lnL w="0" cap="flat" cmpd="sng" algn="ctr">
-                      <a:solidFill>
-                        <a:srgbClr val="666666"/>
-                      </a:solidFill>
-                      <a:prstDash val="solid"/>
-                      <a:round/>
-                      <a:headEnd type="none" w="med" len="med"/>
-                      <a:tailEnd type="none" w="med" len="med"/>
-                    </a:lnL>
-                    <a:lnR w="0" cap="flat" cmpd="sng" algn="ctr">
-                      <a:solidFill>
-                        <a:srgbClr val="666666"/>
-                      </a:solidFill>
-                      <a:prstDash val="solid"/>
-                      <a:round/>
-                      <a:headEnd type="none" w="med" len="med"/>
-                      <a:tailEnd type="none" w="med" len="med"/>
-                    </a:lnR>
-                    <a:lnT w="0" cap="flat" cmpd="sng" algn="ctr">
-                      <a:solidFill>
-                        <a:srgbClr val="666666"/>
-                      </a:solidFill>
-                      <a:prstDash val="solid"/>
-                      <a:round/>
-                      <a:headEnd type="none" w="med" len="med"/>
-                      <a:tailEnd type="none" w="med" len="med"/>
-                    </a:lnT>
-                    <a:lnB w="7620" cap="flat" cmpd="sng" algn="ctr">
-                      <a:solidFill>
-                        <a:srgbClr val="E2E4EA"/>
-                      </a:solidFill>
-                      <a:prstDash val="solid"/>
-                      <a:round/>
-                      <a:headEnd type="none" w="med" len="med"/>
-                      <a:tailEnd type="none" w="med" len="med"/>
-                    </a:lnB>
-                    <a:solidFill>
-                      <a:srgbClr val="FFFFFF"/>
-                    </a:solidFill>
-                  </a:tcPr>
-                </a:tc>
-              </a:tr>
-              <a:tr h="310896">
-                <a:tc>
-                  <a:txBody>
-                    <a:bodyPr/>
-                    <a:lstStyle/>
-                    <a:p>
-                      <a:pPr algn="l" indent="0" marL="0">
-                        <a:buNone/>
-                      </a:pPr>
-                      <a:r>
-                        <a:rPr lang="en-US" sz="1050" dirty="0">
-                          <a:solidFill>
-                            <a:srgbClr val="3B4660"/>
-                          </a:solidFill>
-                          <a:latin typeface="Calibri" pitchFamily="34" charset="0"/>
-                          <a:ea typeface="Calibri" pitchFamily="34" charset="-122"/>
-                          <a:cs typeface="Calibri" pitchFamily="34" charset="-120"/>
-                        </a:rPr>
-                        <a:t>Penalties</a:t>
-                      </a:r>
-                      <a:endParaRPr lang="en-US" sz="1050" dirty="0">
-                        <a:latin typeface="Calibri" charset="0"/>
-                        <a:ea typeface="Calibri" charset="0"/>
-                        <a:cs typeface="Calibri" charset="0"/>
-                      </a:endParaRPr>
-                    </a:p>
-                  </a:txBody>
-                  <a:tcPr marL="0" marR="76200" marT="63500" marB="63500" anchor="ctr">
-                    <a:lnL w="0" cap="flat" cmpd="sng" algn="ctr">
-                      <a:solidFill>
-                        <a:srgbClr val="666666"/>
-                      </a:solidFill>
-                      <a:prstDash val="solid"/>
-                      <a:round/>
-                      <a:headEnd type="none" w="med" len="med"/>
-                      <a:tailEnd type="none" w="med" len="med"/>
-                    </a:lnL>
-                    <a:lnR w="0" cap="flat" cmpd="sng" algn="ctr">
-                      <a:solidFill>
-                        <a:srgbClr val="666666"/>
-                      </a:solidFill>
-                      <a:prstDash val="solid"/>
-                      <a:round/>
-                      <a:headEnd type="none" w="med" len="med"/>
-                      <a:tailEnd type="none" w="med" len="med"/>
-                    </a:lnR>
-                    <a:lnT w="0" cap="flat" cmpd="sng" algn="ctr">
-                      <a:solidFill>
-                        <a:srgbClr val="666666"/>
-                      </a:solidFill>
-                      <a:prstDash val="solid"/>
-                      <a:round/>
-                      <a:headEnd type="none" w="med" len="med"/>
-                      <a:tailEnd type="none" w="med" len="med"/>
-                    </a:lnT>
-                    <a:lnB w="7620" cap="flat" cmpd="sng" algn="ctr">
-                      <a:solidFill>
-                        <a:srgbClr val="E2E4EA"/>
-                      </a:solidFill>
-                      <a:prstDash val="solid"/>
-                      <a:round/>
-                      <a:headEnd type="none" w="med" len="med"/>
-                      <a:tailEnd type="none" w="med" len="med"/>
-                    </a:lnB>
-                    <a:solidFill>
-                      <a:srgbClr val="FFFFFF"/>
-                    </a:solidFill>
-                  </a:tcPr>
-                </a:tc>
-                <a:tc>
-                  <a:txBody>
-                    <a:bodyPr/>
-                    <a:lstStyle/>
-                    <a:p>
-                      <a:pPr algn="r" indent="0" marL="0">
-                        <a:buNone/>
-                      </a:pPr>
-                      <a:r>
-                        <a:rPr lang="en-US" sz="1050" dirty="0">
-                          <a:solidFill>
-                            <a:srgbClr val="3B4660"/>
-                          </a:solidFill>
-                          <a:latin typeface="Calibri" pitchFamily="34" charset="0"/>
-                          <a:ea typeface="Calibri" pitchFamily="34" charset="-122"/>
-                          <a:cs typeface="Calibri" pitchFamily="34" charset="-120"/>
-                        </a:rPr>
-                        <a:t>₹5,000 to ₹50,000 per violation; liquidated damages capped at 10% of total remittance</a:t>
                       </a:r>
                       <a:endParaRPr lang="en-US" sz="1050" dirty="0">
                         <a:latin typeface="Calibri" charset="0"/>
@@ -20864,7 +20625,7 @@
                           <a:ea typeface="Calibri" pitchFamily="34" charset="-122"/>
                           <a:cs typeface="Calibri" pitchFamily="34" charset="-120"/>
                         </a:rPr>
-                        <a:t>Activity equipment (demountable — no permanent structures permitted)  ·  8-year life</a:t>
+                        <a:t>Kiosk counters, common seating, shade structures  ·  7-year life</a:t>
                       </a:r>
                       <a:endParaRPr lang="en-US" sz="1100" dirty="0">
                         <a:latin typeface="Calibri" charset="0"/>
@@ -20932,7 +20693,7 @@
                           <a:ea typeface="Calibri" pitchFamily="34" charset="-122"/>
                           <a:cs typeface="Calibri" pitchFamily="34" charset="-120"/>
                         </a:rPr>
-                        <a:t>₹40.0 L</a:t>
+                        <a:t>₹8.0 L</a:t>
                       </a:r>
                       <a:endParaRPr lang="en-US" sz="1100" dirty="0">
                         <a:latin typeface="Calibri" charset="0"/>
@@ -21002,7 +20763,7 @@
                           <a:ea typeface="Calibri" pitchFamily="34" charset="-122"/>
                           <a:cs typeface="Calibri" pitchFamily="34" charset="-120"/>
                         </a:rPr>
-                        <a:t>Kiosk counters, common seating, shade structures  ·  7-year life</a:t>
+                        <a:t>Ticketing, POS and CCTV  ·  5-year life</a:t>
                       </a:r>
                       <a:endParaRPr lang="en-US" sz="1100" dirty="0">
                         <a:latin typeface="Calibri" charset="0"/>
@@ -21070,7 +20831,7 @@
                           <a:ea typeface="Calibri" pitchFamily="34" charset="-122"/>
                           <a:cs typeface="Calibri" pitchFamily="34" charset="-120"/>
                         </a:rPr>
-                        <a:t>₹8.0 L</a:t>
+                        <a:t>₹6.0 L</a:t>
                       </a:r>
                       <a:endParaRPr lang="en-US" sz="1100" dirty="0">
                         <a:latin typeface="Calibri" charset="0"/>
@@ -21140,7 +20901,7 @@
                           <a:ea typeface="Calibri" pitchFamily="34" charset="-122"/>
                           <a:cs typeface="Calibri" pitchFamily="34" charset="-120"/>
                         </a:rPr>
-                        <a:t>Ticketing, POS, CCTV and ICCC integration  ·  5-year life</a:t>
+                        <a:t>Horticulture equipment, tools, uniforms, safety kit  ·  5-year life</a:t>
                       </a:r>
                       <a:endParaRPr lang="en-US" sz="1100" dirty="0">
                         <a:latin typeface="Calibri" charset="0"/>
@@ -21208,7 +20969,7 @@
                           <a:ea typeface="Calibri" pitchFamily="34" charset="-122"/>
                           <a:cs typeface="Calibri" pitchFamily="34" charset="-120"/>
                         </a:rPr>
-                        <a:t>₹12.0 L</a:t>
+                        <a:t>₹8.0 L</a:t>
                       </a:r>
                       <a:endParaRPr lang="en-US" sz="1100" dirty="0">
                         <a:latin typeface="Calibri" charset="0"/>
@@ -21416,7 +21177,7 @@
                           <a:ea typeface="Calibri" pitchFamily="34" charset="-122"/>
                           <a:cs typeface="Calibri" pitchFamily="34" charset="-120"/>
                         </a:rPr>
-                        <a:t>Uniforms, tools, horticulture kit, safety equipment  ·  3-year life</a:t>
+                        <a:t>Pre-operative and contingency  ·  5-year life</a:t>
                       </a:r>
                       <a:endParaRPr lang="en-US" sz="1100" dirty="0">
                         <a:latin typeface="Calibri" charset="0"/>
@@ -21484,7 +21245,7 @@
                           <a:ea typeface="Calibri" pitchFamily="34" charset="-122"/>
                           <a:cs typeface="Calibri" pitchFamily="34" charset="-120"/>
                         </a:rPr>
-                        <a:t>₹4.0 L</a:t>
+                        <a:t>₹3.0 L</a:t>
                       </a:r>
                       <a:endParaRPr lang="en-US" sz="1100" dirty="0">
                         <a:latin typeface="Calibri" charset="0"/>
@@ -21546,6 +21307,74 @@
                         <a:buNone/>
                       </a:pPr>
                       <a:r>
+                        <a:rPr lang="en-US" sz="1100" b="1" dirty="0">
+                          <a:solidFill>
+                            <a:srgbClr val="3B4660"/>
+                          </a:solidFill>
+                          <a:latin typeface="Calibri" pitchFamily="34" charset="0"/>
+                          <a:ea typeface="Calibri" pitchFamily="34" charset="-122"/>
+                          <a:cs typeface="Calibri" pitchFamily="34" charset="-120"/>
+                        </a:rPr>
+                        <a:t>Sub-total — capital equipment</a:t>
+                      </a:r>
+                      <a:endParaRPr lang="en-US" sz="1100" dirty="0">
+                        <a:latin typeface="Calibri" charset="0"/>
+                        <a:ea typeface="Calibri" charset="0"/>
+                        <a:cs typeface="Calibri" charset="0"/>
+                      </a:endParaRPr>
+                    </a:p>
+                  </a:txBody>
+                  <a:tcPr marL="0" marR="76200" marT="63500" marB="63500" anchor="ctr">
+                    <a:lnL w="0" cap="flat" cmpd="sng" algn="ctr">
+                      <a:solidFill>
+                        <a:srgbClr val="666666"/>
+                      </a:solidFill>
+                      <a:prstDash val="solid"/>
+                      <a:round/>
+                      <a:headEnd type="none" w="med" len="med"/>
+                      <a:tailEnd type="none" w="med" len="med"/>
+                    </a:lnL>
+                    <a:lnR w="0" cap="flat" cmpd="sng" algn="ctr">
+                      <a:solidFill>
+                        <a:srgbClr val="666666"/>
+                      </a:solidFill>
+                      <a:prstDash val="solid"/>
+                      <a:round/>
+                      <a:headEnd type="none" w="med" len="med"/>
+                      <a:tailEnd type="none" w="med" len="med"/>
+                    </a:lnR>
+                    <a:lnT w="0" cap="flat" cmpd="sng" algn="ctr">
+                      <a:solidFill>
+                        <a:srgbClr val="666666"/>
+                      </a:solidFill>
+                      <a:prstDash val="solid"/>
+                      <a:round/>
+                      <a:headEnd type="none" w="med" len="med"/>
+                      <a:tailEnd type="none" w="med" len="med"/>
+                    </a:lnT>
+                    <a:lnB w="7620" cap="flat" cmpd="sng" algn="ctr">
+                      <a:solidFill>
+                        <a:srgbClr val="E2E4EA"/>
+                      </a:solidFill>
+                      <a:prstDash val="solid"/>
+                      <a:round/>
+                      <a:headEnd type="none" w="med" len="med"/>
+                      <a:tailEnd type="none" w="med" len="med"/>
+                    </a:lnB>
+                    <a:solidFill>
+                      <a:srgbClr val="F2F6FE"/>
+                    </a:solidFill>
+                  </a:tcPr>
+                </a:tc>
+                <a:tc>
+                  <a:txBody>
+                    <a:bodyPr/>
+                    <a:lstStyle/>
+                    <a:p>
+                      <a:pPr algn="r" indent="0" marL="0">
+                        <a:buNone/>
+                      </a:pPr>
+                      <a:r>
                         <a:rPr lang="en-US" sz="1100" dirty="0">
                           <a:solidFill>
                             <a:srgbClr val="3B4660"/>
@@ -21554,7 +21383,7 @@
                           <a:ea typeface="Calibri" pitchFamily="34" charset="-122"/>
                           <a:cs typeface="Calibri" pitchFamily="34" charset="-120"/>
                         </a:rPr>
-                        <a:t>Pre-operative and contingency  ·  5-year life</a:t>
+                        <a:t>₹30.0 L</a:t>
                       </a:r>
                       <a:endParaRPr lang="en-US" sz="1100" dirty="0">
                         <a:latin typeface="Calibri" charset="0"/>
@@ -21601,75 +21430,7 @@
                       <a:tailEnd type="none" w="med" len="med"/>
                     </a:lnB>
                     <a:solidFill>
-                      <a:srgbClr val="FFFFFF"/>
-                    </a:solidFill>
-                  </a:tcPr>
-                </a:tc>
-                <a:tc>
-                  <a:txBody>
-                    <a:bodyPr/>
-                    <a:lstStyle/>
-                    <a:p>
-                      <a:pPr algn="r" indent="0" marL="0">
-                        <a:buNone/>
-                      </a:pPr>
-                      <a:r>
-                        <a:rPr lang="en-US" sz="1100" dirty="0">
-                          <a:solidFill>
-                            <a:srgbClr val="3B4660"/>
-                          </a:solidFill>
-                          <a:latin typeface="Calibri" pitchFamily="34" charset="0"/>
-                          <a:ea typeface="Calibri" pitchFamily="34" charset="-122"/>
-                          <a:cs typeface="Calibri" pitchFamily="34" charset="-120"/>
-                        </a:rPr>
-                        <a:t>₹3.0 L</a:t>
-                      </a:r>
-                      <a:endParaRPr lang="en-US" sz="1100" dirty="0">
-                        <a:latin typeface="Calibri" charset="0"/>
-                        <a:ea typeface="Calibri" charset="0"/>
-                        <a:cs typeface="Calibri" charset="0"/>
-                      </a:endParaRPr>
-                    </a:p>
-                  </a:txBody>
-                  <a:tcPr marL="0" marR="76200" marT="63500" marB="63500" anchor="ctr">
-                    <a:lnL w="0" cap="flat" cmpd="sng" algn="ctr">
-                      <a:solidFill>
-                        <a:srgbClr val="666666"/>
-                      </a:solidFill>
-                      <a:prstDash val="solid"/>
-                      <a:round/>
-                      <a:headEnd type="none" w="med" len="med"/>
-                      <a:tailEnd type="none" w="med" len="med"/>
-                    </a:lnL>
-                    <a:lnR w="0" cap="flat" cmpd="sng" algn="ctr">
-                      <a:solidFill>
-                        <a:srgbClr val="666666"/>
-                      </a:solidFill>
-                      <a:prstDash val="solid"/>
-                      <a:round/>
-                      <a:headEnd type="none" w="med" len="med"/>
-                      <a:tailEnd type="none" w="med" len="med"/>
-                    </a:lnR>
-                    <a:lnT w="0" cap="flat" cmpd="sng" algn="ctr">
-                      <a:solidFill>
-                        <a:srgbClr val="666666"/>
-                      </a:solidFill>
-                      <a:prstDash val="solid"/>
-                      <a:round/>
-                      <a:headEnd type="none" w="med" len="med"/>
-                      <a:tailEnd type="none" w="med" len="med"/>
-                    </a:lnT>
-                    <a:lnB w="7620" cap="flat" cmpd="sng" algn="ctr">
-                      <a:solidFill>
-                        <a:srgbClr val="E2E4EA"/>
-                      </a:solidFill>
-                      <a:prstDash val="solid"/>
-                      <a:round/>
-                      <a:headEnd type="none" w="med" len="med"/>
-                      <a:tailEnd type="none" w="med" len="med"/>
-                    </a:lnB>
-                    <a:solidFill>
-                      <a:srgbClr val="FFFFFF"/>
+                      <a:srgbClr val="F2F6FE"/>
                     </a:solidFill>
                   </a:tcPr>
                 </a:tc>
@@ -21684,7 +21445,7 @@
                         <a:buNone/>
                       </a:pPr>
                       <a:r>
-                        <a:rPr lang="en-US" sz="1100" b="1" dirty="0">
+                        <a:rPr lang="en-US" sz="1100" dirty="0">
                           <a:solidFill>
                             <a:srgbClr val="3B4660"/>
                           </a:solidFill>
@@ -21692,7 +21453,7 @@
                           <a:ea typeface="Calibri" pitchFamily="34" charset="-122"/>
                           <a:cs typeface="Calibri" pitchFamily="34" charset="-120"/>
                         </a:rPr>
-                        <a:t>Sub-total — mobilisation capex</a:t>
+                        <a:t>Security deposit — three months of licence fee, refundable at expiry</a:t>
                       </a:r>
                       <a:endParaRPr lang="en-US" sz="1100" dirty="0">
                         <a:latin typeface="Calibri" charset="0"/>
@@ -21739,7 +21500,7 @@
                       <a:tailEnd type="none" w="med" len="med"/>
                     </a:lnB>
                     <a:solidFill>
-                      <a:srgbClr val="F2F6FE"/>
+                      <a:srgbClr val="FFFFFF"/>
                     </a:solidFill>
                   </a:tcPr>
                 </a:tc>
@@ -21760,7 +21521,7 @@
                           <a:ea typeface="Calibri" pitchFamily="34" charset="-122"/>
                           <a:cs typeface="Calibri" pitchFamily="34" charset="-120"/>
                         </a:rPr>
-                        <a:t>₹72.0 L</a:t>
+                        <a:t>₹9.0 L</a:t>
                       </a:r>
                       <a:endParaRPr lang="en-US" sz="1100" dirty="0">
                         <a:latin typeface="Calibri" charset="0"/>
@@ -21807,7 +21568,7 @@
                       <a:tailEnd type="none" w="med" len="med"/>
                     </a:lnB>
                     <a:solidFill>
-                      <a:srgbClr val="F2F6FE"/>
+                      <a:srgbClr val="FFFFFF"/>
                     </a:solidFill>
                   </a:tcPr>
                 </a:tc>
@@ -21830,7 +21591,7 @@
                           <a:ea typeface="Calibri" pitchFamily="34" charset="-122"/>
                           <a:cs typeface="Calibri" pitchFamily="34" charset="-120"/>
                         </a:rPr>
-                        <a:t>Security deposit — three months of licence fee, refundable at expiry</a:t>
+                        <a:t>Advance licence fee — first six months</a:t>
                       </a:r>
                       <a:endParaRPr lang="en-US" sz="1100" dirty="0">
                         <a:latin typeface="Calibri" charset="0"/>
@@ -21898,7 +21659,7 @@
                           <a:ea typeface="Calibri" pitchFamily="34" charset="-122"/>
                           <a:cs typeface="Calibri" pitchFamily="34" charset="-120"/>
                         </a:rPr>
-                        <a:t>₹9.0 L</a:t>
+                        <a:t>₹18.0 L</a:t>
                       </a:r>
                       <a:endParaRPr lang="en-US" sz="1100" dirty="0">
                         <a:latin typeface="Calibri" charset="0"/>
@@ -21968,7 +21729,7 @@
                           <a:ea typeface="Calibri" pitchFamily="34" charset="-122"/>
                           <a:cs typeface="Calibri" pitchFamily="34" charset="-120"/>
                         </a:rPr>
-                        <a:t>Advance licence fee — first six months</a:t>
+                        <a:t>EMD and tender fee</a:t>
                       </a:r>
                       <a:endParaRPr lang="en-US" sz="1100" dirty="0">
                         <a:latin typeface="Calibri" charset="0"/>
@@ -22036,7 +21797,7 @@
                           <a:ea typeface="Calibri" pitchFamily="34" charset="-122"/>
                           <a:cs typeface="Calibri" pitchFamily="34" charset="-120"/>
                         </a:rPr>
-                        <a:t>₹18.0 L</a:t>
+                        <a:t>₹1.1 L</a:t>
                       </a:r>
                       <a:endParaRPr lang="en-US" sz="1100" dirty="0">
                         <a:latin typeface="Calibri" charset="0"/>
@@ -22098,6 +21859,74 @@
                         <a:buNone/>
                       </a:pPr>
                       <a:r>
+                        <a:rPr lang="en-US" sz="1100" b="1" dirty="0">
+                          <a:solidFill>
+                            <a:srgbClr val="3B4660"/>
+                          </a:solidFill>
+                          <a:latin typeface="Calibri" pitchFamily="34" charset="0"/>
+                          <a:ea typeface="Calibri" pitchFamily="34" charset="-122"/>
+                          <a:cs typeface="Calibri" pitchFamily="34" charset="-120"/>
+                        </a:rPr>
+                        <a:t>Sub-total — mobilisation</a:t>
+                      </a:r>
+                      <a:endParaRPr lang="en-US" sz="1100" dirty="0">
+                        <a:latin typeface="Calibri" charset="0"/>
+                        <a:ea typeface="Calibri" charset="0"/>
+                        <a:cs typeface="Calibri" charset="0"/>
+                      </a:endParaRPr>
+                    </a:p>
+                  </a:txBody>
+                  <a:tcPr marL="0" marR="76200" marT="63500" marB="63500" anchor="ctr">
+                    <a:lnL w="0" cap="flat" cmpd="sng" algn="ctr">
+                      <a:solidFill>
+                        <a:srgbClr val="666666"/>
+                      </a:solidFill>
+                      <a:prstDash val="solid"/>
+                      <a:round/>
+                      <a:headEnd type="none" w="med" len="med"/>
+                      <a:tailEnd type="none" w="med" len="med"/>
+                    </a:lnL>
+                    <a:lnR w="0" cap="flat" cmpd="sng" algn="ctr">
+                      <a:solidFill>
+                        <a:srgbClr val="666666"/>
+                      </a:solidFill>
+                      <a:prstDash val="solid"/>
+                      <a:round/>
+                      <a:headEnd type="none" w="med" len="med"/>
+                      <a:tailEnd type="none" w="med" len="med"/>
+                    </a:lnR>
+                    <a:lnT w="0" cap="flat" cmpd="sng" algn="ctr">
+                      <a:solidFill>
+                        <a:srgbClr val="666666"/>
+                      </a:solidFill>
+                      <a:prstDash val="solid"/>
+                      <a:round/>
+                      <a:headEnd type="none" w="med" len="med"/>
+                      <a:tailEnd type="none" w="med" len="med"/>
+                    </a:lnT>
+                    <a:lnB w="7620" cap="flat" cmpd="sng" algn="ctr">
+                      <a:solidFill>
+                        <a:srgbClr val="E2E4EA"/>
+                      </a:solidFill>
+                      <a:prstDash val="solid"/>
+                      <a:round/>
+                      <a:headEnd type="none" w="med" len="med"/>
+                      <a:tailEnd type="none" w="med" len="med"/>
+                    </a:lnB>
+                    <a:solidFill>
+                      <a:srgbClr val="F2F6FE"/>
+                    </a:solidFill>
+                  </a:tcPr>
+                </a:tc>
+                <a:tc>
+                  <a:txBody>
+                    <a:bodyPr/>
+                    <a:lstStyle/>
+                    <a:p>
+                      <a:pPr algn="r" indent="0" marL="0">
+                        <a:buNone/>
+                      </a:pPr>
+                      <a:r>
                         <a:rPr lang="en-US" sz="1100" dirty="0">
                           <a:solidFill>
                             <a:srgbClr val="3B4660"/>
@@ -22106,7 +21935,7 @@
                           <a:ea typeface="Calibri" pitchFamily="34" charset="-122"/>
                           <a:cs typeface="Calibri" pitchFamily="34" charset="-120"/>
                         </a:rPr>
-                        <a:t>EMD and tender fee</a:t>
+                        <a:t>₹58.1 L</a:t>
                       </a:r>
                       <a:endParaRPr lang="en-US" sz="1100" dirty="0">
                         <a:latin typeface="Calibri" charset="0"/>
@@ -22153,75 +21982,7 @@
                       <a:tailEnd type="none" w="med" len="med"/>
                     </a:lnB>
                     <a:solidFill>
-                      <a:srgbClr val="FFFFFF"/>
-                    </a:solidFill>
-                  </a:tcPr>
-                </a:tc>
-                <a:tc>
-                  <a:txBody>
-                    <a:bodyPr/>
-                    <a:lstStyle/>
-                    <a:p>
-                      <a:pPr algn="r" indent="0" marL="0">
-                        <a:buNone/>
-                      </a:pPr>
-                      <a:r>
-                        <a:rPr lang="en-US" sz="1100" dirty="0">
-                          <a:solidFill>
-                            <a:srgbClr val="3B4660"/>
-                          </a:solidFill>
-                          <a:latin typeface="Calibri" pitchFamily="34" charset="0"/>
-                          <a:ea typeface="Calibri" pitchFamily="34" charset="-122"/>
-                          <a:cs typeface="Calibri" pitchFamily="34" charset="-120"/>
-                        </a:rPr>
-                        <a:t>₹1.1 L</a:t>
-                      </a:r>
-                      <a:endParaRPr lang="en-US" sz="1100" dirty="0">
-                        <a:latin typeface="Calibri" charset="0"/>
-                        <a:ea typeface="Calibri" charset="0"/>
-                        <a:cs typeface="Calibri" charset="0"/>
-                      </a:endParaRPr>
-                    </a:p>
-                  </a:txBody>
-                  <a:tcPr marL="0" marR="76200" marT="63500" marB="63500" anchor="ctr">
-                    <a:lnL w="0" cap="flat" cmpd="sng" algn="ctr">
-                      <a:solidFill>
-                        <a:srgbClr val="666666"/>
-                      </a:solidFill>
-                      <a:prstDash val="solid"/>
-                      <a:round/>
-                      <a:headEnd type="none" w="med" len="med"/>
-                      <a:tailEnd type="none" w="med" len="med"/>
-                    </a:lnL>
-                    <a:lnR w="0" cap="flat" cmpd="sng" algn="ctr">
-                      <a:solidFill>
-                        <a:srgbClr val="666666"/>
-                      </a:solidFill>
-                      <a:prstDash val="solid"/>
-                      <a:round/>
-                      <a:headEnd type="none" w="med" len="med"/>
-                      <a:tailEnd type="none" w="med" len="med"/>
-                    </a:lnR>
-                    <a:lnT w="0" cap="flat" cmpd="sng" algn="ctr">
-                      <a:solidFill>
-                        <a:srgbClr val="666666"/>
-                      </a:solidFill>
-                      <a:prstDash val="solid"/>
-                      <a:round/>
-                      <a:headEnd type="none" w="med" len="med"/>
-                      <a:tailEnd type="none" w="med" len="med"/>
-                    </a:lnT>
-                    <a:lnB w="7620" cap="flat" cmpd="sng" algn="ctr">
-                      <a:solidFill>
-                        <a:srgbClr val="E2E4EA"/>
-                      </a:solidFill>
-                      <a:prstDash val="solid"/>
-                      <a:round/>
-                      <a:headEnd type="none" w="med" len="med"/>
-                      <a:tailEnd type="none" w="med" len="med"/>
-                    </a:lnB>
-                    <a:solidFill>
-                      <a:srgbClr val="FFFFFF"/>
+                      <a:srgbClr val="F2F6FE"/>
                     </a:solidFill>
                   </a:tcPr>
                 </a:tc>
@@ -22236,6 +21997,144 @@
                         <a:buNone/>
                       </a:pPr>
                       <a:r>
+                        <a:rPr lang="en-US" sz="1100" dirty="0">
+                          <a:solidFill>
+                            <a:srgbClr val="3B4660"/>
+                          </a:solidFill>
+                          <a:latin typeface="Calibri" pitchFamily="34" charset="0"/>
+                          <a:ea typeface="Calibri" pitchFamily="34" charset="-122"/>
+                          <a:cs typeface="Calibri" pitchFamily="34" charset="-120"/>
+                        </a:rPr>
+                        <a:t>Opening-season working capital — timing float on the advance licence fee, payroll and electricity</a:t>
+                      </a:r>
+                      <a:endParaRPr lang="en-US" sz="1100" dirty="0">
+                        <a:latin typeface="Calibri" charset="0"/>
+                        <a:ea typeface="Calibri" charset="0"/>
+                        <a:cs typeface="Calibri" charset="0"/>
+                      </a:endParaRPr>
+                    </a:p>
+                  </a:txBody>
+                  <a:tcPr marL="0" marR="76200" marT="63500" marB="63500" anchor="ctr">
+                    <a:lnL w="0" cap="flat" cmpd="sng" algn="ctr">
+                      <a:solidFill>
+                        <a:srgbClr val="666666"/>
+                      </a:solidFill>
+                      <a:prstDash val="solid"/>
+                      <a:round/>
+                      <a:headEnd type="none" w="med" len="med"/>
+                      <a:tailEnd type="none" w="med" len="med"/>
+                    </a:lnL>
+                    <a:lnR w="0" cap="flat" cmpd="sng" algn="ctr">
+                      <a:solidFill>
+                        <a:srgbClr val="666666"/>
+                      </a:solidFill>
+                      <a:prstDash val="solid"/>
+                      <a:round/>
+                      <a:headEnd type="none" w="med" len="med"/>
+                      <a:tailEnd type="none" w="med" len="med"/>
+                    </a:lnR>
+                    <a:lnT w="0" cap="flat" cmpd="sng" algn="ctr">
+                      <a:solidFill>
+                        <a:srgbClr val="666666"/>
+                      </a:solidFill>
+                      <a:prstDash val="solid"/>
+                      <a:round/>
+                      <a:headEnd type="none" w="med" len="med"/>
+                      <a:tailEnd type="none" w="med" len="med"/>
+                    </a:lnT>
+                    <a:lnB w="7620" cap="flat" cmpd="sng" algn="ctr">
+                      <a:solidFill>
+                        <a:srgbClr val="E2E4EA"/>
+                      </a:solidFill>
+                      <a:prstDash val="solid"/>
+                      <a:round/>
+                      <a:headEnd type="none" w="med" len="med"/>
+                      <a:tailEnd type="none" w="med" len="med"/>
+                    </a:lnB>
+                    <a:solidFill>
+                      <a:srgbClr val="FFFFFF"/>
+                    </a:solidFill>
+                  </a:tcPr>
+                </a:tc>
+                <a:tc>
+                  <a:txBody>
+                    <a:bodyPr/>
+                    <a:lstStyle/>
+                    <a:p>
+                      <a:pPr algn="r" indent="0" marL="0">
+                        <a:buNone/>
+                      </a:pPr>
+                      <a:r>
+                        <a:rPr lang="en-US" sz="1100" dirty="0">
+                          <a:solidFill>
+                            <a:srgbClr val="3B4660"/>
+                          </a:solidFill>
+                          <a:latin typeface="Calibri" pitchFamily="34" charset="0"/>
+                          <a:ea typeface="Calibri" pitchFamily="34" charset="-122"/>
+                          <a:cs typeface="Calibri" pitchFamily="34" charset="-120"/>
+                        </a:rPr>
+                        <a:t>₹41.9 L</a:t>
+                      </a:r>
+                      <a:endParaRPr lang="en-US" sz="1100" dirty="0">
+                        <a:latin typeface="Calibri" charset="0"/>
+                        <a:ea typeface="Calibri" charset="0"/>
+                        <a:cs typeface="Calibri" charset="0"/>
+                      </a:endParaRPr>
+                    </a:p>
+                  </a:txBody>
+                  <a:tcPr marL="0" marR="76200" marT="63500" marB="63500" anchor="ctr">
+                    <a:lnL w="0" cap="flat" cmpd="sng" algn="ctr">
+                      <a:solidFill>
+                        <a:srgbClr val="666666"/>
+                      </a:solidFill>
+                      <a:prstDash val="solid"/>
+                      <a:round/>
+                      <a:headEnd type="none" w="med" len="med"/>
+                      <a:tailEnd type="none" w="med" len="med"/>
+                    </a:lnL>
+                    <a:lnR w="0" cap="flat" cmpd="sng" algn="ctr">
+                      <a:solidFill>
+                        <a:srgbClr val="666666"/>
+                      </a:solidFill>
+                      <a:prstDash val="solid"/>
+                      <a:round/>
+                      <a:headEnd type="none" w="med" len="med"/>
+                      <a:tailEnd type="none" w="med" len="med"/>
+                    </a:lnR>
+                    <a:lnT w="0" cap="flat" cmpd="sng" algn="ctr">
+                      <a:solidFill>
+                        <a:srgbClr val="666666"/>
+                      </a:solidFill>
+                      <a:prstDash val="solid"/>
+                      <a:round/>
+                      <a:headEnd type="none" w="med" len="med"/>
+                      <a:tailEnd type="none" w="med" len="med"/>
+                    </a:lnT>
+                    <a:lnB w="7620" cap="flat" cmpd="sng" algn="ctr">
+                      <a:solidFill>
+                        <a:srgbClr val="E2E4EA"/>
+                      </a:solidFill>
+                      <a:prstDash val="solid"/>
+                      <a:round/>
+                      <a:headEnd type="none" w="med" len="med"/>
+                      <a:tailEnd type="none" w="med" len="med"/>
+                    </a:lnB>
+                    <a:solidFill>
+                      <a:srgbClr val="FFFFFF"/>
+                    </a:solidFill>
+                  </a:tcPr>
+                </a:tc>
+              </a:tr>
+              <a:tr h="283464">
+                <a:tc>
+                  <a:txBody>
+                    <a:bodyPr/>
+                    <a:lstStyle/>
+                    <a:p>
+                      <a:pPr algn="l" indent="0" marL="0">
+                        <a:buNone/>
+                      </a:pPr>
+                      <a:r>
                         <a:rPr lang="en-US" sz="1100" b="1" dirty="0">
                           <a:solidFill>
                             <a:srgbClr val="0A1426"/>
@@ -22312,7 +22211,7 @@
                           <a:ea typeface="Calibri" pitchFamily="34" charset="-122"/>
                           <a:cs typeface="Calibri" pitchFamily="34" charset="-120"/>
                         </a:rPr>
-                        <a:t>₹100.1 L</a:t>
+                        <a:t>₹100.0 L</a:t>
                       </a:r>
                       <a:endParaRPr lang="en-US" sz="1100" dirty="0">
                         <a:latin typeface="Calibri" charset="0"/>
@@ -22370,7 +22269,108 @@
       </p:graphicFrame>
       <p:sp>
         <p:nvSpPr>
-          <p:cNvPr id="7" name="Text 4"/>
+          <p:cNvPr id="7" name="Shape 4"/>
+          <p:cNvSpPr/>
+          <p:nvPr/>
+        </p:nvSpPr>
+        <p:spPr>
+          <a:xfrm>
+            <a:off x="566928" y="5741416"/>
+            <a:ext cx="11057839" cy="10973"/>
+          </a:xfrm>
+          <a:prstGeom prst="rect">
+            <a:avLst/>
+          </a:prstGeom>
+          <a:solidFill>
+            <a:srgbClr val="E2E4EA"/>
+          </a:solidFill>
+          <a:ln/>
+        </p:spPr>
+      </p:sp>
+      <p:sp>
+        <p:nvSpPr>
+          <p:cNvPr id="8" name="Text 5"/>
+          <p:cNvSpPr/>
+          <p:nvPr/>
+        </p:nvSpPr>
+        <p:spPr>
+          <a:xfrm>
+            <a:off x="566928" y="5796280"/>
+            <a:ext cx="11057839" cy="173736"/>
+          </a:xfrm>
+          <a:prstGeom prst="rect">
+            <a:avLst/>
+          </a:prstGeom>
+          <a:noFill/>
+          <a:ln/>
+        </p:spPr>
+        <p:txBody>
+          <a:bodyPr wrap="square" lIns="0" tIns="0" rIns="0" bIns="0" rtlCol="0" anchor="t"/>
+          <a:lstStyle/>
+          <a:p>
+            <a:pPr indent="0" marL="0">
+              <a:buNone/>
+            </a:pPr>
+            <a:r>
+              <a:rPr lang="en-US" sz="800" b="1" spc="140" kern="0" dirty="0">
+                <a:solidFill>
+                  <a:srgbClr val="6E7689"/>
+                </a:solidFill>
+                <a:latin typeface="Calibri" pitchFamily="34" charset="0"/>
+                <a:ea typeface="Calibri" pitchFamily="34" charset="-122"/>
+                <a:cs typeface="Calibri" pitchFamily="34" charset="-120"/>
+              </a:rPr>
+              <a:t>NO ACTIVITY IS BOUGHT</a:t>
+            </a:r>
+            <a:endParaRPr lang="en-US" sz="800" dirty="0"/>
+          </a:p>
+        </p:txBody>
+      </p:sp>
+      <p:sp>
+        <p:nvSpPr>
+          <p:cNvPr id="9" name="Text 6"/>
+          <p:cNvSpPr/>
+          <p:nvPr/>
+        </p:nvSpPr>
+        <p:spPr>
+          <a:xfrm>
+            <a:off x="566928" y="5970016"/>
+            <a:ext cx="11057839" cy="343408"/>
+          </a:xfrm>
+          <a:prstGeom prst="rect">
+            <a:avLst/>
+          </a:prstGeom>
+          <a:noFill/>
+          <a:ln/>
+        </p:spPr>
+        <p:txBody>
+          <a:bodyPr wrap="square" lIns="0" tIns="0" rIns="0" bIns="0" rtlCol="0" anchor="t"/>
+          <a:lstStyle/>
+          <a:p>
+            <a:pPr indent="0" marL="0">
+              <a:lnSpc>
+                <a:spcPts val="1300"/>
+              </a:lnSpc>
+              <a:buNone/>
+            </a:pPr>
+            <a:r>
+              <a:rPr lang="en-US" sz="950" dirty="0">
+                <a:solidFill>
+                  <a:srgbClr val="6E7689"/>
+                </a:solidFill>
+                <a:latin typeface="Calibri" pitchFamily="34" charset="0"/>
+                <a:ea typeface="Calibri" pitchFamily="34" charset="-122"/>
+                <a:cs typeface="Calibri" pitchFamily="34" charset="-120"/>
+              </a:rPr>
+              <a:t>Every activity on site is brought in by a vendor on rent or revenue share — none of it is funded from this facility, none of it appears as capital expenditure, and the vendor carries its own operating cost. E-O-D books its 20% share of the vendor's takings, not the gross spend.</a:t>
+            </a:r>
+            <a:endParaRPr lang="en-US" sz="950" dirty="0"/>
+          </a:p>
+        </p:txBody>
+      </p:sp>
+      <p:sp>
+        <p:nvSpPr>
+          <p:cNvPr id="10" name="Text 7"/>
           <p:cNvSpPr/>
           <p:nvPr/>
         </p:nvSpPr>
@@ -22680,7 +22680,7 @@
                 <a:ea typeface="Calibri" pitchFamily="34" charset="-122"/>
                 <a:cs typeface="Calibri" pitchFamily="34" charset="-120"/>
               </a:rPr>
-              <a:t>₹2.48 Cr</a:t>
+              <a:t>₹2.35 Cr</a:t>
             </a:r>
             <a:endParaRPr lang="en-US" sz="2600" dirty="0"/>
           </a:p>
@@ -22829,7 +22829,7 @@
                 <a:ea typeface="Calibri" pitchFamily="34" charset="-122"/>
                 <a:cs typeface="Calibri" pitchFamily="34" charset="-120"/>
               </a:rPr>
-              <a:t>₹2.32 Cr</a:t>
+              <a:t>₹2.21 Cr</a:t>
             </a:r>
             <a:endParaRPr lang="en-US" sz="2600" dirty="0"/>
           </a:p>
@@ -22978,7 +22978,7 @@
                 <a:ea typeface="Calibri" pitchFamily="34" charset="-122"/>
                 <a:cs typeface="Calibri" pitchFamily="34" charset="-120"/>
               </a:rPr>
-              <a:t>₹0.17 Cr</a:t>
+              <a:t>₹0.14 Cr</a:t>
             </a:r>
             <a:endParaRPr lang="en-US" sz="2600" dirty="0"/>
           </a:p>
@@ -23413,7 +23413,7 @@
                           <a:ea typeface="Calibri" pitchFamily="34" charset="-122"/>
                           <a:cs typeface="Calibri" pitchFamily="34" charset="-120"/>
                         </a:rPr>
-                        <a:t>19%</a:t>
+                        <a:t>21%</a:t>
                       </a:r>
                       <a:endParaRPr lang="en-US" sz="1100" dirty="0">
                         <a:latin typeface="Calibri" charset="0"/>
@@ -23619,7 +23619,7 @@
                           <a:ea typeface="Calibri" pitchFamily="34" charset="-122"/>
                           <a:cs typeface="Calibri" pitchFamily="34" charset="-120"/>
                         </a:rPr>
-                        <a:t>31%</a:t>
+                        <a:t>33%</a:t>
                       </a:r>
                       <a:endParaRPr lang="en-US" sz="1100" dirty="0">
                         <a:latin typeface="Calibri" charset="0"/>
@@ -23825,7 +23825,7 @@
                           <a:ea typeface="Calibri" pitchFamily="34" charset="-122"/>
                           <a:cs typeface="Calibri" pitchFamily="34" charset="-120"/>
                         </a:rPr>
-                        <a:t>15%</a:t>
+                        <a:t>16%</a:t>
                       </a:r>
                       <a:endParaRPr lang="en-US" sz="1100" dirty="0">
                         <a:latin typeface="Calibri" charset="0"/>
@@ -23963,7 +23963,7 @@
                           <a:ea typeface="Calibri" pitchFamily="34" charset="-122"/>
                           <a:cs typeface="Calibri" pitchFamily="34" charset="-120"/>
                         </a:rPr>
-                        <a:t>0.42</a:t>
+                        <a:t>0.08</a:t>
                       </a:r>
                       <a:endParaRPr lang="en-US" sz="1100" dirty="0">
                         <a:latin typeface="Calibri" charset="0"/>
@@ -24031,7 +24031,7 @@
                           <a:ea typeface="Calibri" pitchFamily="34" charset="-122"/>
                           <a:cs typeface="Calibri" pitchFamily="34" charset="-120"/>
                         </a:rPr>
-                        <a:t>17%</a:t>
+                        <a:t>4%</a:t>
                       </a:r>
                       <a:endParaRPr lang="en-US" sz="1100" dirty="0">
                         <a:latin typeface="Calibri" charset="0"/>
@@ -24375,7 +24375,7 @@
                           <a:ea typeface="Calibri" pitchFamily="34" charset="-122"/>
                           <a:cs typeface="Calibri" pitchFamily="34" charset="-120"/>
                         </a:rPr>
-                        <a:t>0.30</a:t>
+                        <a:t>0.50</a:t>
                       </a:r>
                       <a:endParaRPr lang="en-US" sz="1100" dirty="0">
                         <a:latin typeface="Calibri" charset="0"/>
@@ -24443,7 +24443,7 @@
                           <a:ea typeface="Calibri" pitchFamily="34" charset="-122"/>
                           <a:cs typeface="Calibri" pitchFamily="34" charset="-120"/>
                         </a:rPr>
-                        <a:t>12%</a:t>
+                        <a:t>21%</a:t>
                       </a:r>
                       <a:endParaRPr lang="en-US" sz="1100" dirty="0">
                         <a:latin typeface="Calibri" charset="0"/>
@@ -24581,7 +24581,7 @@
                           <a:ea typeface="Calibri" pitchFamily="34" charset="-122"/>
                           <a:cs typeface="Calibri" pitchFamily="34" charset="-120"/>
                         </a:rPr>
-                        <a:t>2.48</a:t>
+                        <a:t>2.35</a:t>
                       </a:r>
                       <a:endParaRPr lang="en-US" sz="1100" dirty="0">
                         <a:latin typeface="Calibri" charset="0"/>
@@ -25331,7 +25331,7 @@
                 <a:ea typeface="Calibri" pitchFamily="34" charset="-122"/>
                 <a:cs typeface="Calibri" pitchFamily="34" charset="-120"/>
               </a:rPr>
-              <a:t>₹66</a:t>
+              <a:t>₹63</a:t>
             </a:r>
             <a:endParaRPr lang="en-US" sz="2600" dirty="0"/>
           </a:p>
@@ -25373,7 +25373,7 @@
                 <a:ea typeface="Calibri" pitchFamily="34" charset="-122"/>
                 <a:cs typeface="Calibri" pitchFamily="34" charset="-120"/>
               </a:rPr>
-              <a:t>Year 1, net of GST. Year 7: ₹99</a:t>
+              <a:t>Year 1, net of GST. Year 7: ₹87</a:t>
             </a:r>
             <a:endParaRPr lang="en-US" sz="950" dirty="0"/>
           </a:p>
@@ -25706,7 +25706,7 @@
         <p:spPr>
           <a:xfrm>
             <a:off x="566928" y="950976"/>
-            <a:ext cx="11057839" cy="231140"/>
+            <a:ext cx="11057839" cy="462280"/>
           </a:xfrm>
           <a:prstGeom prst="rect">
             <a:avLst/>
@@ -25754,7 +25754,7 @@
           </p:nvPr>
         </p:nvGraphicFramePr>
         <p:xfrm>
-          <a:off x="566928" y="1310132"/>
+          <a:off x="566928" y="1541272"/>
           <a:ext cx="11057839" cy="914400"/>
         </p:xfrm>
         <a:graphic>
@@ -25771,7 +25771,7 @@
                 <a:gridCol w="1122491"/>
                 <a:gridCol w="1122491"/>
               </a:tblGrid>
-              <a:tr h="283464">
+              <a:tr h="256032">
                 <a:tc>
                   <a:txBody>
                     <a:bodyPr/>
@@ -26317,7 +26317,7 @@
                   </a:tcPr>
                 </a:tc>
               </a:tr>
-              <a:tr h="283464">
+              <a:tr h="256032">
                 <a:tc>
                   <a:txBody>
                     <a:bodyPr/>
@@ -26327,7 +26327,7 @@
                         <a:buNone/>
                       </a:pPr>
                       <a:r>
-                        <a:rPr lang="en-US" sz="1050" dirty="0">
+                        <a:rPr lang="en-US" sz="1000" dirty="0">
                           <a:solidFill>
                             <a:srgbClr val="3B4660"/>
                           </a:solidFill>
@@ -26337,7 +26337,7 @@
                         </a:rPr>
                         <a:t>Licence fee to ADA</a:t>
                       </a:r>
-                      <a:endParaRPr lang="en-US" sz="1050" dirty="0">
+                      <a:endParaRPr lang="en-US" sz="1000" dirty="0">
                         <a:latin typeface="Calibri" charset="0"/>
                         <a:ea typeface="Calibri" charset="0"/>
                         <a:cs typeface="Calibri" charset="0"/>
@@ -26395,7 +26395,7 @@
                         <a:buNone/>
                       </a:pPr>
                       <a:r>
-                        <a:rPr lang="en-US" sz="1050" dirty="0">
+                        <a:rPr lang="en-US" sz="1000" dirty="0">
                           <a:solidFill>
                             <a:srgbClr val="3B4660"/>
                           </a:solidFill>
@@ -26405,7 +26405,7 @@
                         </a:rPr>
                         <a:t>0.36</a:t>
                       </a:r>
-                      <a:endParaRPr lang="en-US" sz="1050" dirty="0">
+                      <a:endParaRPr lang="en-US" sz="1000" dirty="0">
                         <a:latin typeface="Calibri" charset="0"/>
                         <a:ea typeface="Calibri" charset="0"/>
                         <a:cs typeface="Calibri" charset="0"/>
@@ -26463,7 +26463,7 @@
                         <a:buNone/>
                       </a:pPr>
                       <a:r>
-                        <a:rPr lang="en-US" sz="1050" dirty="0">
+                        <a:rPr lang="en-US" sz="1000" dirty="0">
                           <a:solidFill>
                             <a:srgbClr val="3B4660"/>
                           </a:solidFill>
@@ -26473,7 +26473,7 @@
                         </a:rPr>
                         <a:t>0.38</a:t>
                       </a:r>
-                      <a:endParaRPr lang="en-US" sz="1050" dirty="0">
+                      <a:endParaRPr lang="en-US" sz="1000" dirty="0">
                         <a:latin typeface="Calibri" charset="0"/>
                         <a:ea typeface="Calibri" charset="0"/>
                         <a:cs typeface="Calibri" charset="0"/>
@@ -26531,7 +26531,7 @@
                         <a:buNone/>
                       </a:pPr>
                       <a:r>
-                        <a:rPr lang="en-US" sz="1050" dirty="0">
+                        <a:rPr lang="en-US" sz="1000" dirty="0">
                           <a:solidFill>
                             <a:srgbClr val="3B4660"/>
                           </a:solidFill>
@@ -26541,7 +26541,7 @@
                         </a:rPr>
                         <a:t>0.40</a:t>
                       </a:r>
-                      <a:endParaRPr lang="en-US" sz="1050" dirty="0">
+                      <a:endParaRPr lang="en-US" sz="1000" dirty="0">
                         <a:latin typeface="Calibri" charset="0"/>
                         <a:ea typeface="Calibri" charset="0"/>
                         <a:cs typeface="Calibri" charset="0"/>
@@ -26599,7 +26599,7 @@
                         <a:buNone/>
                       </a:pPr>
                       <a:r>
-                        <a:rPr lang="en-US" sz="1050" dirty="0">
+                        <a:rPr lang="en-US" sz="1000" dirty="0">
                           <a:solidFill>
                             <a:srgbClr val="3B4660"/>
                           </a:solidFill>
@@ -26609,7 +26609,7 @@
                         </a:rPr>
                         <a:t>0.42</a:t>
                       </a:r>
-                      <a:endParaRPr lang="en-US" sz="1050" dirty="0">
+                      <a:endParaRPr lang="en-US" sz="1000" dirty="0">
                         <a:latin typeface="Calibri" charset="0"/>
                         <a:ea typeface="Calibri" charset="0"/>
                         <a:cs typeface="Calibri" charset="0"/>
@@ -26667,7 +26667,7 @@
                         <a:buNone/>
                       </a:pPr>
                       <a:r>
-                        <a:rPr lang="en-US" sz="1050" dirty="0">
+                        <a:rPr lang="en-US" sz="1000" dirty="0">
                           <a:solidFill>
                             <a:srgbClr val="3B4660"/>
                           </a:solidFill>
@@ -26677,7 +26677,7 @@
                         </a:rPr>
                         <a:t>0.44</a:t>
                       </a:r>
-                      <a:endParaRPr lang="en-US" sz="1050" dirty="0">
+                      <a:endParaRPr lang="en-US" sz="1000" dirty="0">
                         <a:latin typeface="Calibri" charset="0"/>
                         <a:ea typeface="Calibri" charset="0"/>
                         <a:cs typeface="Calibri" charset="0"/>
@@ -26735,7 +26735,7 @@
                         <a:buNone/>
                       </a:pPr>
                       <a:r>
-                        <a:rPr lang="en-US" sz="1050" dirty="0">
+                        <a:rPr lang="en-US" sz="1000" dirty="0">
                           <a:solidFill>
                             <a:srgbClr val="3B4660"/>
                           </a:solidFill>
@@ -26745,7 +26745,7 @@
                         </a:rPr>
                         <a:t>0.46</a:t>
                       </a:r>
-                      <a:endParaRPr lang="en-US" sz="1050" dirty="0">
+                      <a:endParaRPr lang="en-US" sz="1000" dirty="0">
                         <a:latin typeface="Calibri" charset="0"/>
                         <a:ea typeface="Calibri" charset="0"/>
                         <a:cs typeface="Calibri" charset="0"/>
@@ -26803,7 +26803,7 @@
                         <a:buNone/>
                       </a:pPr>
                       <a:r>
-                        <a:rPr lang="en-US" sz="1050" dirty="0">
+                        <a:rPr lang="en-US" sz="1000" dirty="0">
                           <a:solidFill>
                             <a:srgbClr val="3B4660"/>
                           </a:solidFill>
@@ -26813,7 +26813,7 @@
                         </a:rPr>
                         <a:t>0.48</a:t>
                       </a:r>
-                      <a:endParaRPr lang="en-US" sz="1050" dirty="0">
+                      <a:endParaRPr lang="en-US" sz="1000" dirty="0">
                         <a:latin typeface="Calibri" charset="0"/>
                         <a:ea typeface="Calibri" charset="0"/>
                         <a:cs typeface="Calibri" charset="0"/>
@@ -26863,7 +26863,7 @@
                   </a:tcPr>
                 </a:tc>
               </a:tr>
-              <a:tr h="283464">
+              <a:tr h="256032">
                 <a:tc>
                   <a:txBody>
                     <a:bodyPr/>
@@ -26873,7 +26873,7 @@
                         <a:buNone/>
                       </a:pPr>
                       <a:r>
-                        <a:rPr lang="en-US" sz="1050" dirty="0">
+                        <a:rPr lang="en-US" sz="1000" dirty="0">
                           <a:solidFill>
                             <a:srgbClr val="3B4660"/>
                           </a:solidFill>
@@ -26883,7 +26883,7 @@
                         </a:rPr>
                         <a:t>Payroll</a:t>
                       </a:r>
-                      <a:endParaRPr lang="en-US" sz="1050" dirty="0">
+                      <a:endParaRPr lang="en-US" sz="1000" dirty="0">
                         <a:latin typeface="Calibri" charset="0"/>
                         <a:ea typeface="Calibri" charset="0"/>
                         <a:cs typeface="Calibri" charset="0"/>
@@ -26941,7 +26941,7 @@
                         <a:buNone/>
                       </a:pPr>
                       <a:r>
-                        <a:rPr lang="en-US" sz="1050" dirty="0">
+                        <a:rPr lang="en-US" sz="1000" dirty="0">
                           <a:solidFill>
                             <a:srgbClr val="3B4660"/>
                           </a:solidFill>
@@ -26951,7 +26951,7 @@
                         </a:rPr>
                         <a:t>0.70</a:t>
                       </a:r>
-                      <a:endParaRPr lang="en-US" sz="1050" dirty="0">
+                      <a:endParaRPr lang="en-US" sz="1000" dirty="0">
                         <a:latin typeface="Calibri" charset="0"/>
                         <a:ea typeface="Calibri" charset="0"/>
                         <a:cs typeface="Calibri" charset="0"/>
@@ -27009,7 +27009,7 @@
                         <a:buNone/>
                       </a:pPr>
                       <a:r>
-                        <a:rPr lang="en-US" sz="1050" dirty="0">
+                        <a:rPr lang="en-US" sz="1000" dirty="0">
                           <a:solidFill>
                             <a:srgbClr val="3B4660"/>
                           </a:solidFill>
@@ -27019,7 +27019,7 @@
                         </a:rPr>
                         <a:t>0.80</a:t>
                       </a:r>
-                      <a:endParaRPr lang="en-US" sz="1050" dirty="0">
+                      <a:endParaRPr lang="en-US" sz="1000" dirty="0">
                         <a:latin typeface="Calibri" charset="0"/>
                         <a:ea typeface="Calibri" charset="0"/>
                         <a:cs typeface="Calibri" charset="0"/>
@@ -27077,7 +27077,7 @@
                         <a:buNone/>
                       </a:pPr>
                       <a:r>
-                        <a:rPr lang="en-US" sz="1050" dirty="0">
+                        <a:rPr lang="en-US" sz="1000" dirty="0">
                           <a:solidFill>
                             <a:srgbClr val="3B4660"/>
                           </a:solidFill>
@@ -27087,7 +27087,7 @@
                         </a:rPr>
                         <a:t>0.88</a:t>
                       </a:r>
-                      <a:endParaRPr lang="en-US" sz="1050" dirty="0">
+                      <a:endParaRPr lang="en-US" sz="1000" dirty="0">
                         <a:latin typeface="Calibri" charset="0"/>
                         <a:ea typeface="Calibri" charset="0"/>
                         <a:cs typeface="Calibri" charset="0"/>
@@ -27145,7 +27145,7 @@
                         <a:buNone/>
                       </a:pPr>
                       <a:r>
-                        <a:rPr lang="en-US" sz="1050" dirty="0">
+                        <a:rPr lang="en-US" sz="1000" dirty="0">
                           <a:solidFill>
                             <a:srgbClr val="3B4660"/>
                           </a:solidFill>
@@ -27155,7 +27155,7 @@
                         </a:rPr>
                         <a:t>0.97</a:t>
                       </a:r>
-                      <a:endParaRPr lang="en-US" sz="1050" dirty="0">
+                      <a:endParaRPr lang="en-US" sz="1000" dirty="0">
                         <a:latin typeface="Calibri" charset="0"/>
                         <a:ea typeface="Calibri" charset="0"/>
                         <a:cs typeface="Calibri" charset="0"/>
@@ -27213,7 +27213,7 @@
                         <a:buNone/>
                       </a:pPr>
                       <a:r>
-                        <a:rPr lang="en-US" sz="1050" dirty="0">
+                        <a:rPr lang="en-US" sz="1000" dirty="0">
                           <a:solidFill>
                             <a:srgbClr val="3B4660"/>
                           </a:solidFill>
@@ -27223,7 +27223,7 @@
                         </a:rPr>
                         <a:t>1.06</a:t>
                       </a:r>
-                      <a:endParaRPr lang="en-US" sz="1050" dirty="0">
+                      <a:endParaRPr lang="en-US" sz="1000" dirty="0">
                         <a:latin typeface="Calibri" charset="0"/>
                         <a:ea typeface="Calibri" charset="0"/>
                         <a:cs typeface="Calibri" charset="0"/>
@@ -27281,7 +27281,7 @@
                         <a:buNone/>
                       </a:pPr>
                       <a:r>
-                        <a:rPr lang="en-US" sz="1050" dirty="0">
+                        <a:rPr lang="en-US" sz="1000" dirty="0">
                           <a:solidFill>
                             <a:srgbClr val="3B4660"/>
                           </a:solidFill>
@@ -27291,7 +27291,7 @@
                         </a:rPr>
                         <a:t>1.15</a:t>
                       </a:r>
-                      <a:endParaRPr lang="en-US" sz="1050" dirty="0">
+                      <a:endParaRPr lang="en-US" sz="1000" dirty="0">
                         <a:latin typeface="Calibri" charset="0"/>
                         <a:ea typeface="Calibri" charset="0"/>
                         <a:cs typeface="Calibri" charset="0"/>
@@ -27349,7 +27349,7 @@
                         <a:buNone/>
                       </a:pPr>
                       <a:r>
-                        <a:rPr lang="en-US" sz="1050" dirty="0">
+                        <a:rPr lang="en-US" sz="1000" dirty="0">
                           <a:solidFill>
                             <a:srgbClr val="3B4660"/>
                           </a:solidFill>
@@ -27359,7 +27359,7 @@
                         </a:rPr>
                         <a:t>1.26</a:t>
                       </a:r>
-                      <a:endParaRPr lang="en-US" sz="1050" dirty="0">
+                      <a:endParaRPr lang="en-US" sz="1000" dirty="0">
                         <a:latin typeface="Calibri" charset="0"/>
                         <a:ea typeface="Calibri" charset="0"/>
                         <a:cs typeface="Calibri" charset="0"/>
@@ -27409,7 +27409,7 @@
                   </a:tcPr>
                 </a:tc>
               </a:tr>
-              <a:tr h="283464">
+              <a:tr h="256032">
                 <a:tc>
                   <a:txBody>
                     <a:bodyPr/>
@@ -27419,7 +27419,7 @@
                         <a:buNone/>
                       </a:pPr>
                       <a:r>
-                        <a:rPr lang="en-US" sz="1050" dirty="0">
+                        <a:rPr lang="en-US" sz="1000" dirty="0">
                           <a:solidFill>
                             <a:srgbClr val="3B4660"/>
                           </a:solidFill>
@@ -27429,7 +27429,7 @@
                         </a:rPr>
                         <a:t>Electricity</a:t>
                       </a:r>
-                      <a:endParaRPr lang="en-US" sz="1050" dirty="0">
+                      <a:endParaRPr lang="en-US" sz="1000" dirty="0">
                         <a:latin typeface="Calibri" charset="0"/>
                         <a:ea typeface="Calibri" charset="0"/>
                         <a:cs typeface="Calibri" charset="0"/>
@@ -27487,7 +27487,7 @@
                         <a:buNone/>
                       </a:pPr>
                       <a:r>
-                        <a:rPr lang="en-US" sz="1050" dirty="0">
+                        <a:rPr lang="en-US" sz="1000" dirty="0">
                           <a:solidFill>
                             <a:srgbClr val="3B4660"/>
                           </a:solidFill>
@@ -27497,7 +27497,7 @@
                         </a:rPr>
                         <a:t>0.26</a:t>
                       </a:r>
-                      <a:endParaRPr lang="en-US" sz="1050" dirty="0">
+                      <a:endParaRPr lang="en-US" sz="1000" dirty="0">
                         <a:latin typeface="Calibri" charset="0"/>
                         <a:ea typeface="Calibri" charset="0"/>
                         <a:cs typeface="Calibri" charset="0"/>
@@ -27555,7 +27555,7 @@
                         <a:buNone/>
                       </a:pPr>
                       <a:r>
-                        <a:rPr lang="en-US" sz="1050" dirty="0">
+                        <a:rPr lang="en-US" sz="1000" dirty="0">
                           <a:solidFill>
                             <a:srgbClr val="3B4660"/>
                           </a:solidFill>
@@ -27565,7 +27565,7 @@
                         </a:rPr>
                         <a:t>0.28</a:t>
                       </a:r>
-                      <a:endParaRPr lang="en-US" sz="1050" dirty="0">
+                      <a:endParaRPr lang="en-US" sz="1000" dirty="0">
                         <a:latin typeface="Calibri" charset="0"/>
                         <a:ea typeface="Calibri" charset="0"/>
                         <a:cs typeface="Calibri" charset="0"/>
@@ -27623,7 +27623,7 @@
                         <a:buNone/>
                       </a:pPr>
                       <a:r>
-                        <a:rPr lang="en-US" sz="1050" dirty="0">
+                        <a:rPr lang="en-US" sz="1000" dirty="0">
                           <a:solidFill>
                             <a:srgbClr val="3B4660"/>
                           </a:solidFill>
@@ -27633,7 +27633,7 @@
                         </a:rPr>
                         <a:t>0.30</a:t>
                       </a:r>
-                      <a:endParaRPr lang="en-US" sz="1050" dirty="0">
+                      <a:endParaRPr lang="en-US" sz="1000" dirty="0">
                         <a:latin typeface="Calibri" charset="0"/>
                         <a:ea typeface="Calibri" charset="0"/>
                         <a:cs typeface="Calibri" charset="0"/>
@@ -27691,7 +27691,7 @@
                         <a:buNone/>
                       </a:pPr>
                       <a:r>
-                        <a:rPr lang="en-US" sz="1050" dirty="0">
+                        <a:rPr lang="en-US" sz="1000" dirty="0">
                           <a:solidFill>
                             <a:srgbClr val="3B4660"/>
                           </a:solidFill>
@@ -27701,7 +27701,7 @@
                         </a:rPr>
                         <a:t>0.32</a:t>
                       </a:r>
-                      <a:endParaRPr lang="en-US" sz="1050" dirty="0">
+                      <a:endParaRPr lang="en-US" sz="1000" dirty="0">
                         <a:latin typeface="Calibri" charset="0"/>
                         <a:ea typeface="Calibri" charset="0"/>
                         <a:cs typeface="Calibri" charset="0"/>
@@ -27759,7 +27759,7 @@
                         <a:buNone/>
                       </a:pPr>
                       <a:r>
-                        <a:rPr lang="en-US" sz="1050" dirty="0">
+                        <a:rPr lang="en-US" sz="1000" dirty="0">
                           <a:solidFill>
                             <a:srgbClr val="3B4660"/>
                           </a:solidFill>
@@ -27769,7 +27769,7 @@
                         </a:rPr>
                         <a:t>0.35</a:t>
                       </a:r>
-                      <a:endParaRPr lang="en-US" sz="1050" dirty="0">
+                      <a:endParaRPr lang="en-US" sz="1000" dirty="0">
                         <a:latin typeface="Calibri" charset="0"/>
                         <a:ea typeface="Calibri" charset="0"/>
                         <a:cs typeface="Calibri" charset="0"/>
@@ -27827,7 +27827,7 @@
                         <a:buNone/>
                       </a:pPr>
                       <a:r>
-                        <a:rPr lang="en-US" sz="1050" dirty="0">
+                        <a:rPr lang="en-US" sz="1000" dirty="0">
                           <a:solidFill>
                             <a:srgbClr val="3B4660"/>
                           </a:solidFill>
@@ -27837,7 +27837,7 @@
                         </a:rPr>
                         <a:t>0.37</a:t>
                       </a:r>
-                      <a:endParaRPr lang="en-US" sz="1050" dirty="0">
+                      <a:endParaRPr lang="en-US" sz="1000" dirty="0">
                         <a:latin typeface="Calibri" charset="0"/>
                         <a:ea typeface="Calibri" charset="0"/>
                         <a:cs typeface="Calibri" charset="0"/>
@@ -27895,7 +27895,7 @@
                         <a:buNone/>
                       </a:pPr>
                       <a:r>
-                        <a:rPr lang="en-US" sz="1050" dirty="0">
+                        <a:rPr lang="en-US" sz="1000" dirty="0">
                           <a:solidFill>
                             <a:srgbClr val="3B4660"/>
                           </a:solidFill>
@@ -27905,7 +27905,7 @@
                         </a:rPr>
                         <a:t>0.40</a:t>
                       </a:r>
-                      <a:endParaRPr lang="en-US" sz="1050" dirty="0">
+                      <a:endParaRPr lang="en-US" sz="1000" dirty="0">
                         <a:latin typeface="Calibri" charset="0"/>
                         <a:ea typeface="Calibri" charset="0"/>
                         <a:cs typeface="Calibri" charset="0"/>
@@ -27955,7 +27955,7 @@
                   </a:tcPr>
                 </a:tc>
               </a:tr>
-              <a:tr h="283464">
+              <a:tr h="256032">
                 <a:tc>
                   <a:txBody>
                     <a:bodyPr/>
@@ -27965,7 +27965,7 @@
                         <a:buNone/>
                       </a:pPr>
                       <a:r>
-                        <a:rPr lang="en-US" sz="1050" dirty="0">
+                        <a:rPr lang="en-US" sz="1000" dirty="0">
                           <a:solidFill>
                             <a:srgbClr val="3B4660"/>
                           </a:solidFill>
@@ -27975,7 +27975,7 @@
                         </a:rPr>
                         <a:t>Show AMC and spares</a:t>
                       </a:r>
-                      <a:endParaRPr lang="en-US" sz="1050" dirty="0">
+                      <a:endParaRPr lang="en-US" sz="1000" dirty="0">
                         <a:latin typeface="Calibri" charset="0"/>
                         <a:ea typeface="Calibri" charset="0"/>
                         <a:cs typeface="Calibri" charset="0"/>
@@ -28033,7 +28033,7 @@
                         <a:buNone/>
                       </a:pPr>
                       <a:r>
-                        <a:rPr lang="en-US" sz="1050" dirty="0">
+                        <a:rPr lang="en-US" sz="1000" dirty="0">
                           <a:solidFill>
                             <a:srgbClr val="3B4660"/>
                           </a:solidFill>
@@ -28043,7 +28043,7 @@
                         </a:rPr>
                         <a:t>0.14</a:t>
                       </a:r>
-                      <a:endParaRPr lang="en-US" sz="1050" dirty="0">
+                      <a:endParaRPr lang="en-US" sz="1000" dirty="0">
                         <a:latin typeface="Calibri" charset="0"/>
                         <a:ea typeface="Calibri" charset="0"/>
                         <a:cs typeface="Calibri" charset="0"/>
@@ -28101,7 +28101,7 @@
                         <a:buNone/>
                       </a:pPr>
                       <a:r>
-                        <a:rPr lang="en-US" sz="1050" dirty="0">
+                        <a:rPr lang="en-US" sz="1000" dirty="0">
                           <a:solidFill>
                             <a:srgbClr val="3B4660"/>
                           </a:solidFill>
@@ -28111,7 +28111,7 @@
                         </a:rPr>
                         <a:t>0.15</a:t>
                       </a:r>
-                      <a:endParaRPr lang="en-US" sz="1050" dirty="0">
+                      <a:endParaRPr lang="en-US" sz="1000" dirty="0">
                         <a:latin typeface="Calibri" charset="0"/>
                         <a:ea typeface="Calibri" charset="0"/>
                         <a:cs typeface="Calibri" charset="0"/>
@@ -28169,7 +28169,7 @@
                         <a:buNone/>
                       </a:pPr>
                       <a:r>
-                        <a:rPr lang="en-US" sz="1050" dirty="0">
+                        <a:rPr lang="en-US" sz="1000" dirty="0">
                           <a:solidFill>
                             <a:srgbClr val="3B4660"/>
                           </a:solidFill>
@@ -28179,7 +28179,7 @@
                         </a:rPr>
                         <a:t>0.16</a:t>
                       </a:r>
-                      <a:endParaRPr lang="en-US" sz="1050" dirty="0">
+                      <a:endParaRPr lang="en-US" sz="1000" dirty="0">
                         <a:latin typeface="Calibri" charset="0"/>
                         <a:ea typeface="Calibri" charset="0"/>
                         <a:cs typeface="Calibri" charset="0"/>
@@ -28237,7 +28237,7 @@
                         <a:buNone/>
                       </a:pPr>
                       <a:r>
-                        <a:rPr lang="en-US" sz="1050" dirty="0">
+                        <a:rPr lang="en-US" sz="1000" dirty="0">
                           <a:solidFill>
                             <a:srgbClr val="3B4660"/>
                           </a:solidFill>
@@ -28247,7 +28247,7 @@
                         </a:rPr>
                         <a:t>0.17</a:t>
                       </a:r>
-                      <a:endParaRPr lang="en-US" sz="1050" dirty="0">
+                      <a:endParaRPr lang="en-US" sz="1000" dirty="0">
                         <a:latin typeface="Calibri" charset="0"/>
                         <a:ea typeface="Calibri" charset="0"/>
                         <a:cs typeface="Calibri" charset="0"/>
@@ -28305,7 +28305,7 @@
                         <a:buNone/>
                       </a:pPr>
                       <a:r>
-                        <a:rPr lang="en-US" sz="1050" dirty="0">
+                        <a:rPr lang="en-US" sz="1000" dirty="0">
                           <a:solidFill>
                             <a:srgbClr val="3B4660"/>
                           </a:solidFill>
@@ -28315,7 +28315,7 @@
                         </a:rPr>
                         <a:t>0.18</a:t>
                       </a:r>
-                      <a:endParaRPr lang="en-US" sz="1050" dirty="0">
+                      <a:endParaRPr lang="en-US" sz="1000" dirty="0">
                         <a:latin typeface="Calibri" charset="0"/>
                         <a:ea typeface="Calibri" charset="0"/>
                         <a:cs typeface="Calibri" charset="0"/>
@@ -28373,7 +28373,7 @@
                         <a:buNone/>
                       </a:pPr>
                       <a:r>
-                        <a:rPr lang="en-US" sz="1050" dirty="0">
+                        <a:rPr lang="en-US" sz="1000" dirty="0">
                           <a:solidFill>
                             <a:srgbClr val="3B4660"/>
                           </a:solidFill>
@@ -28383,7 +28383,7 @@
                         </a:rPr>
                         <a:t>0.19</a:t>
                       </a:r>
-                      <a:endParaRPr lang="en-US" sz="1050" dirty="0">
+                      <a:endParaRPr lang="en-US" sz="1000" dirty="0">
                         <a:latin typeface="Calibri" charset="0"/>
                         <a:ea typeface="Calibri" charset="0"/>
                         <a:cs typeface="Calibri" charset="0"/>
@@ -28441,7 +28441,7 @@
                         <a:buNone/>
                       </a:pPr>
                       <a:r>
-                        <a:rPr lang="en-US" sz="1050" dirty="0">
+                        <a:rPr lang="en-US" sz="1000" dirty="0">
                           <a:solidFill>
                             <a:srgbClr val="3B4660"/>
                           </a:solidFill>
@@ -28451,7 +28451,7 @@
                         </a:rPr>
                         <a:t>0.20</a:t>
                       </a:r>
-                      <a:endParaRPr lang="en-US" sz="1050" dirty="0">
+                      <a:endParaRPr lang="en-US" sz="1000" dirty="0">
                         <a:latin typeface="Calibri" charset="0"/>
                         <a:ea typeface="Calibri" charset="0"/>
                         <a:cs typeface="Calibri" charset="0"/>
@@ -28501,7 +28501,7 @@
                   </a:tcPr>
                 </a:tc>
               </a:tr>
-              <a:tr h="283464">
+              <a:tr h="256032">
                 <a:tc>
                   <a:txBody>
                     <a:bodyPr/>
@@ -28511,7 +28511,7 @@
                         <a:buNone/>
                       </a:pPr>
                       <a:r>
-                        <a:rPr lang="en-US" sz="1050" dirty="0">
+                        <a:rPr lang="en-US" sz="1000" dirty="0">
                           <a:solidFill>
                             <a:srgbClr val="3B4660"/>
                           </a:solidFill>
@@ -28521,7 +28521,7 @@
                         </a:rPr>
                         <a:t>Water and horticulture</a:t>
                       </a:r>
-                      <a:endParaRPr lang="en-US" sz="1050" dirty="0">
+                      <a:endParaRPr lang="en-US" sz="1000" dirty="0">
                         <a:latin typeface="Calibri" charset="0"/>
                         <a:ea typeface="Calibri" charset="0"/>
                         <a:cs typeface="Calibri" charset="0"/>
@@ -28579,7 +28579,7 @@
                         <a:buNone/>
                       </a:pPr>
                       <a:r>
-                        <a:rPr lang="en-US" sz="1050" dirty="0">
+                        <a:rPr lang="en-US" sz="1000" dirty="0">
                           <a:solidFill>
                             <a:srgbClr val="3B4660"/>
                           </a:solidFill>
@@ -28589,7 +28589,7 @@
                         </a:rPr>
                         <a:t>0.09</a:t>
                       </a:r>
-                      <a:endParaRPr lang="en-US" sz="1050" dirty="0">
+                      <a:endParaRPr lang="en-US" sz="1000" dirty="0">
                         <a:latin typeface="Calibri" charset="0"/>
                         <a:ea typeface="Calibri" charset="0"/>
                         <a:cs typeface="Calibri" charset="0"/>
@@ -28647,7 +28647,7 @@
                         <a:buNone/>
                       </a:pPr>
                       <a:r>
-                        <a:rPr lang="en-US" sz="1050" dirty="0">
+                        <a:rPr lang="en-US" sz="1000" dirty="0">
                           <a:solidFill>
                             <a:srgbClr val="3B4660"/>
                           </a:solidFill>
@@ -28657,7 +28657,7 @@
                         </a:rPr>
                         <a:t>0.10</a:t>
                       </a:r>
-                      <a:endParaRPr lang="en-US" sz="1050" dirty="0">
+                      <a:endParaRPr lang="en-US" sz="1000" dirty="0">
                         <a:latin typeface="Calibri" charset="0"/>
                         <a:ea typeface="Calibri" charset="0"/>
                         <a:cs typeface="Calibri" charset="0"/>
@@ -28715,7 +28715,7 @@
                         <a:buNone/>
                       </a:pPr>
                       <a:r>
-                        <a:rPr lang="en-US" sz="1050" dirty="0">
+                        <a:rPr lang="en-US" sz="1000" dirty="0">
                           <a:solidFill>
                             <a:srgbClr val="3B4660"/>
                           </a:solidFill>
@@ -28725,7 +28725,7 @@
                         </a:rPr>
                         <a:t>0.10</a:t>
                       </a:r>
-                      <a:endParaRPr lang="en-US" sz="1050" dirty="0">
+                      <a:endParaRPr lang="en-US" sz="1000" dirty="0">
                         <a:latin typeface="Calibri" charset="0"/>
                         <a:ea typeface="Calibri" charset="0"/>
                         <a:cs typeface="Calibri" charset="0"/>
@@ -28783,7 +28783,7 @@
                         <a:buNone/>
                       </a:pPr>
                       <a:r>
-                        <a:rPr lang="en-US" sz="1050" dirty="0">
+                        <a:rPr lang="en-US" sz="1000" dirty="0">
                           <a:solidFill>
                             <a:srgbClr val="3B4660"/>
                           </a:solidFill>
@@ -28793,7 +28793,7 @@
                         </a:rPr>
                         <a:t>0.11</a:t>
                       </a:r>
-                      <a:endParaRPr lang="en-US" sz="1050" dirty="0">
+                      <a:endParaRPr lang="en-US" sz="1000" dirty="0">
                         <a:latin typeface="Calibri" charset="0"/>
                         <a:ea typeface="Calibri" charset="0"/>
                         <a:cs typeface="Calibri" charset="0"/>
@@ -28851,7 +28851,7 @@
                         <a:buNone/>
                       </a:pPr>
                       <a:r>
-                        <a:rPr lang="en-US" sz="1050" dirty="0">
+                        <a:rPr lang="en-US" sz="1000" dirty="0">
                           <a:solidFill>
                             <a:srgbClr val="3B4660"/>
                           </a:solidFill>
@@ -28861,7 +28861,7 @@
                         </a:rPr>
                         <a:t>0.12</a:t>
                       </a:r>
-                      <a:endParaRPr lang="en-US" sz="1050" dirty="0">
+                      <a:endParaRPr lang="en-US" sz="1000" dirty="0">
                         <a:latin typeface="Calibri" charset="0"/>
                         <a:ea typeface="Calibri" charset="0"/>
                         <a:cs typeface="Calibri" charset="0"/>
@@ -28919,7 +28919,7 @@
                         <a:buNone/>
                       </a:pPr>
                       <a:r>
-                        <a:rPr lang="en-US" sz="1050" dirty="0">
+                        <a:rPr lang="en-US" sz="1000" dirty="0">
                           <a:solidFill>
                             <a:srgbClr val="3B4660"/>
                           </a:solidFill>
@@ -28929,7 +28929,7 @@
                         </a:rPr>
                         <a:t>0.12</a:t>
                       </a:r>
-                      <a:endParaRPr lang="en-US" sz="1050" dirty="0">
+                      <a:endParaRPr lang="en-US" sz="1000" dirty="0">
                         <a:latin typeface="Calibri" charset="0"/>
                         <a:ea typeface="Calibri" charset="0"/>
                         <a:cs typeface="Calibri" charset="0"/>
@@ -28987,7 +28987,7 @@
                         <a:buNone/>
                       </a:pPr>
                       <a:r>
-                        <a:rPr lang="en-US" sz="1050" dirty="0">
+                        <a:rPr lang="en-US" sz="1000" dirty="0">
                           <a:solidFill>
                             <a:srgbClr val="3B4660"/>
                           </a:solidFill>
@@ -28997,7 +28997,7 @@
                         </a:rPr>
                         <a:t>0.13</a:t>
                       </a:r>
-                      <a:endParaRPr lang="en-US" sz="1050" dirty="0">
+                      <a:endParaRPr lang="en-US" sz="1000" dirty="0">
                         <a:latin typeface="Calibri" charset="0"/>
                         <a:ea typeface="Calibri" charset="0"/>
                         <a:cs typeface="Calibri" charset="0"/>
@@ -29047,7 +29047,7 @@
                   </a:tcPr>
                 </a:tc>
               </a:tr>
-              <a:tr h="283464">
+              <a:tr h="256032">
                 <a:tc>
                   <a:txBody>
                     <a:bodyPr/>
@@ -29057,7 +29057,7 @@
                         <a:buNone/>
                       </a:pPr>
                       <a:r>
-                        <a:rPr lang="en-US" sz="1050" dirty="0">
+                        <a:rPr lang="en-US" sz="1000" dirty="0">
                           <a:solidFill>
                             <a:srgbClr val="3B4660"/>
                           </a:solidFill>
@@ -29067,7 +29067,7 @@
                         </a:rPr>
                         <a:t>F&amp;B cost of goods</a:t>
                       </a:r>
-                      <a:endParaRPr lang="en-US" sz="1050" dirty="0">
+                      <a:endParaRPr lang="en-US" sz="1000" dirty="0">
                         <a:latin typeface="Calibri" charset="0"/>
                         <a:ea typeface="Calibri" charset="0"/>
                         <a:cs typeface="Calibri" charset="0"/>
@@ -29125,7 +29125,7 @@
                         <a:buNone/>
                       </a:pPr>
                       <a:r>
-                        <a:rPr lang="en-US" sz="1050" dirty="0">
+                        <a:rPr lang="en-US" sz="1000" dirty="0">
                           <a:solidFill>
                             <a:srgbClr val="3B4660"/>
                           </a:solidFill>
@@ -29135,7 +29135,7 @@
                         </a:rPr>
                         <a:t>0.16</a:t>
                       </a:r>
-                      <a:endParaRPr lang="en-US" sz="1050" dirty="0">
+                      <a:endParaRPr lang="en-US" sz="1000" dirty="0">
                         <a:latin typeface="Calibri" charset="0"/>
                         <a:ea typeface="Calibri" charset="0"/>
                         <a:cs typeface="Calibri" charset="0"/>
@@ -29193,7 +29193,7 @@
                         <a:buNone/>
                       </a:pPr>
                       <a:r>
-                        <a:rPr lang="en-US" sz="1050" dirty="0">
+                        <a:rPr lang="en-US" sz="1000" dirty="0">
                           <a:solidFill>
                             <a:srgbClr val="3B4660"/>
                           </a:solidFill>
@@ -29203,7 +29203,7 @@
                         </a:rPr>
                         <a:t>0.21</a:t>
                       </a:r>
-                      <a:endParaRPr lang="en-US" sz="1050" dirty="0">
+                      <a:endParaRPr lang="en-US" sz="1000" dirty="0">
                         <a:latin typeface="Calibri" charset="0"/>
                         <a:ea typeface="Calibri" charset="0"/>
                         <a:cs typeface="Calibri" charset="0"/>
@@ -29261,7 +29261,7 @@
                         <a:buNone/>
                       </a:pPr>
                       <a:r>
-                        <a:rPr lang="en-US" sz="1050" dirty="0">
+                        <a:rPr lang="en-US" sz="1000" dirty="0">
                           <a:solidFill>
                             <a:srgbClr val="3B4660"/>
                           </a:solidFill>
@@ -29271,7 +29271,7 @@
                         </a:rPr>
                         <a:t>0.25</a:t>
                       </a:r>
-                      <a:endParaRPr lang="en-US" sz="1050" dirty="0">
+                      <a:endParaRPr lang="en-US" sz="1000" dirty="0">
                         <a:latin typeface="Calibri" charset="0"/>
                         <a:ea typeface="Calibri" charset="0"/>
                         <a:cs typeface="Calibri" charset="0"/>
@@ -29329,7 +29329,7 @@
                         <a:buNone/>
                       </a:pPr>
                       <a:r>
-                        <a:rPr lang="en-US" sz="1050" dirty="0">
+                        <a:rPr lang="en-US" sz="1000" dirty="0">
                           <a:solidFill>
                             <a:srgbClr val="3B4660"/>
                           </a:solidFill>
@@ -29339,7 +29339,7 @@
                         </a:rPr>
                         <a:t>0.29</a:t>
                       </a:r>
-                      <a:endParaRPr lang="en-US" sz="1050" dirty="0">
+                      <a:endParaRPr lang="en-US" sz="1000" dirty="0">
                         <a:latin typeface="Calibri" charset="0"/>
                         <a:ea typeface="Calibri" charset="0"/>
                         <a:cs typeface="Calibri" charset="0"/>
@@ -29397,7 +29397,7 @@
                         <a:buNone/>
                       </a:pPr>
                       <a:r>
-                        <a:rPr lang="en-US" sz="1050" dirty="0">
+                        <a:rPr lang="en-US" sz="1000" dirty="0">
                           <a:solidFill>
                             <a:srgbClr val="3B4660"/>
                           </a:solidFill>
@@ -29407,7 +29407,7 @@
                         </a:rPr>
                         <a:t>0.32</a:t>
                       </a:r>
-                      <a:endParaRPr lang="en-US" sz="1050" dirty="0">
+                      <a:endParaRPr lang="en-US" sz="1000" dirty="0">
                         <a:latin typeface="Calibri" charset="0"/>
                         <a:ea typeface="Calibri" charset="0"/>
                         <a:cs typeface="Calibri" charset="0"/>
@@ -29465,7 +29465,7 @@
                         <a:buNone/>
                       </a:pPr>
                       <a:r>
-                        <a:rPr lang="en-US" sz="1050" dirty="0">
+                        <a:rPr lang="en-US" sz="1000" dirty="0">
                           <a:solidFill>
                             <a:srgbClr val="3B4660"/>
                           </a:solidFill>
@@ -29475,7 +29475,7 @@
                         </a:rPr>
                         <a:t>0.36</a:t>
                       </a:r>
-                      <a:endParaRPr lang="en-US" sz="1050" dirty="0">
+                      <a:endParaRPr lang="en-US" sz="1000" dirty="0">
                         <a:latin typeface="Calibri" charset="0"/>
                         <a:ea typeface="Calibri" charset="0"/>
                         <a:cs typeface="Calibri" charset="0"/>
@@ -29533,7 +29533,7 @@
                         <a:buNone/>
                       </a:pPr>
                       <a:r>
-                        <a:rPr lang="en-US" sz="1050" dirty="0">
+                        <a:rPr lang="en-US" sz="1000" dirty="0">
                           <a:solidFill>
                             <a:srgbClr val="3B4660"/>
                           </a:solidFill>
@@ -29543,7 +29543,7 @@
                         </a:rPr>
                         <a:t>0.40</a:t>
                       </a:r>
-                      <a:endParaRPr lang="en-US" sz="1050" dirty="0">
+                      <a:endParaRPr lang="en-US" sz="1000" dirty="0">
                         <a:latin typeface="Calibri" charset="0"/>
                         <a:ea typeface="Calibri" charset="0"/>
                         <a:cs typeface="Calibri" charset="0"/>
@@ -29593,7 +29593,7 @@
                   </a:tcPr>
                 </a:tc>
               </a:tr>
-              <a:tr h="283464">
+              <a:tr h="256032">
                 <a:tc>
                   <a:txBody>
                     <a:bodyPr/>
@@ -29603,7 +29603,7 @@
                         <a:buNone/>
                       </a:pPr>
                       <a:r>
-                        <a:rPr lang="en-US" sz="1050" dirty="0">
+                        <a:rPr lang="en-US" sz="1000" dirty="0">
                           <a:solidFill>
                             <a:srgbClr val="3B4660"/>
                           </a:solidFill>
@@ -29613,7 +29613,7 @@
                         </a:rPr>
                         <a:t>Marketing</a:t>
                       </a:r>
-                      <a:endParaRPr lang="en-US" sz="1050" dirty="0">
+                      <a:endParaRPr lang="en-US" sz="1000" dirty="0">
                         <a:latin typeface="Calibri" charset="0"/>
                         <a:ea typeface="Calibri" charset="0"/>
                         <a:cs typeface="Calibri" charset="0"/>
@@ -29671,7 +29671,7 @@
                         <a:buNone/>
                       </a:pPr>
                       <a:r>
-                        <a:rPr lang="en-US" sz="1050" dirty="0">
+                        <a:rPr lang="en-US" sz="1000" dirty="0">
                           <a:solidFill>
                             <a:srgbClr val="3B4660"/>
                           </a:solidFill>
@@ -29679,9 +29679,77 @@
                           <a:ea typeface="Calibri" pitchFamily="34" charset="-122"/>
                           <a:cs typeface="Calibri" pitchFamily="34" charset="-120"/>
                         </a:rPr>
+                        <a:t>0.18</a:t>
+                      </a:r>
+                      <a:endParaRPr lang="en-US" sz="1000" dirty="0">
+                        <a:latin typeface="Calibri" charset="0"/>
+                        <a:ea typeface="Calibri" charset="0"/>
+                        <a:cs typeface="Calibri" charset="0"/>
+                      </a:endParaRPr>
+                    </a:p>
+                  </a:txBody>
+                  <a:tcPr marL="0" marR="76200" marT="63500" marB="63500" anchor="ctr">
+                    <a:lnL w="0" cap="flat" cmpd="sng" algn="ctr">
+                      <a:solidFill>
+                        <a:srgbClr val="666666"/>
+                      </a:solidFill>
+                      <a:prstDash val="solid"/>
+                      <a:round/>
+                      <a:headEnd type="none" w="med" len="med"/>
+                      <a:tailEnd type="none" w="med" len="med"/>
+                    </a:lnL>
+                    <a:lnR w="0" cap="flat" cmpd="sng" algn="ctr">
+                      <a:solidFill>
+                        <a:srgbClr val="666666"/>
+                      </a:solidFill>
+                      <a:prstDash val="solid"/>
+                      <a:round/>
+                      <a:headEnd type="none" w="med" len="med"/>
+                      <a:tailEnd type="none" w="med" len="med"/>
+                    </a:lnR>
+                    <a:lnT w="0" cap="flat" cmpd="sng" algn="ctr">
+                      <a:solidFill>
+                        <a:srgbClr val="666666"/>
+                      </a:solidFill>
+                      <a:prstDash val="solid"/>
+                      <a:round/>
+                      <a:headEnd type="none" w="med" len="med"/>
+                      <a:tailEnd type="none" w="med" len="med"/>
+                    </a:lnT>
+                    <a:lnB w="7620" cap="flat" cmpd="sng" algn="ctr">
+                      <a:solidFill>
+                        <a:srgbClr val="E2E4EA"/>
+                      </a:solidFill>
+                      <a:prstDash val="solid"/>
+                      <a:round/>
+                      <a:headEnd type="none" w="med" len="med"/>
+                      <a:tailEnd type="none" w="med" len="med"/>
+                    </a:lnB>
+                    <a:solidFill>
+                      <a:srgbClr val="FFFFFF"/>
+                    </a:solidFill>
+                  </a:tcPr>
+                </a:tc>
+                <a:tc>
+                  <a:txBody>
+                    <a:bodyPr/>
+                    <a:lstStyle/>
+                    <a:p>
+                      <a:pPr algn="r" indent="0" marL="0">
+                        <a:buNone/>
+                      </a:pPr>
+                      <a:r>
+                        <a:rPr lang="en-US" sz="1000" dirty="0">
+                          <a:solidFill>
+                            <a:srgbClr val="3B4660"/>
+                          </a:solidFill>
+                          <a:latin typeface="Calibri" pitchFamily="34" charset="0"/>
+                          <a:ea typeface="Calibri" pitchFamily="34" charset="-122"/>
+                          <a:cs typeface="Calibri" pitchFamily="34" charset="-120"/>
+                        </a:rPr>
                         <a:t>0.19</a:t>
                       </a:r>
-                      <a:endParaRPr lang="en-US" sz="1050" dirty="0">
+                      <a:endParaRPr lang="en-US" sz="1000" dirty="0">
                         <a:latin typeface="Calibri" charset="0"/>
                         <a:ea typeface="Calibri" charset="0"/>
                         <a:cs typeface="Calibri" charset="0"/>
@@ -29739,7 +29807,7 @@
                         <a:buNone/>
                       </a:pPr>
                       <a:r>
-                        <a:rPr lang="en-US" sz="1050" dirty="0">
+                        <a:rPr lang="en-US" sz="1000" dirty="0">
                           <a:solidFill>
                             <a:srgbClr val="3B4660"/>
                           </a:solidFill>
@@ -29747,9 +29815,213 @@
                           <a:ea typeface="Calibri" pitchFamily="34" charset="-122"/>
                           <a:cs typeface="Calibri" pitchFamily="34" charset="-120"/>
                         </a:rPr>
+                        <a:t>0.19</a:t>
+                      </a:r>
+                      <a:endParaRPr lang="en-US" sz="1000" dirty="0">
+                        <a:latin typeface="Calibri" charset="0"/>
+                        <a:ea typeface="Calibri" charset="0"/>
+                        <a:cs typeface="Calibri" charset="0"/>
+                      </a:endParaRPr>
+                    </a:p>
+                  </a:txBody>
+                  <a:tcPr marL="0" marR="76200" marT="63500" marB="63500" anchor="ctr">
+                    <a:lnL w="0" cap="flat" cmpd="sng" algn="ctr">
+                      <a:solidFill>
+                        <a:srgbClr val="666666"/>
+                      </a:solidFill>
+                      <a:prstDash val="solid"/>
+                      <a:round/>
+                      <a:headEnd type="none" w="med" len="med"/>
+                      <a:tailEnd type="none" w="med" len="med"/>
+                    </a:lnL>
+                    <a:lnR w="0" cap="flat" cmpd="sng" algn="ctr">
+                      <a:solidFill>
+                        <a:srgbClr val="666666"/>
+                      </a:solidFill>
+                      <a:prstDash val="solid"/>
+                      <a:round/>
+                      <a:headEnd type="none" w="med" len="med"/>
+                      <a:tailEnd type="none" w="med" len="med"/>
+                    </a:lnR>
+                    <a:lnT w="0" cap="flat" cmpd="sng" algn="ctr">
+                      <a:solidFill>
+                        <a:srgbClr val="666666"/>
+                      </a:solidFill>
+                      <a:prstDash val="solid"/>
+                      <a:round/>
+                      <a:headEnd type="none" w="med" len="med"/>
+                      <a:tailEnd type="none" w="med" len="med"/>
+                    </a:lnT>
+                    <a:lnB w="7620" cap="flat" cmpd="sng" algn="ctr">
+                      <a:solidFill>
+                        <a:srgbClr val="E2E4EA"/>
+                      </a:solidFill>
+                      <a:prstDash val="solid"/>
+                      <a:round/>
+                      <a:headEnd type="none" w="med" len="med"/>
+                      <a:tailEnd type="none" w="med" len="med"/>
+                    </a:lnB>
+                    <a:solidFill>
+                      <a:srgbClr val="FFFFFF"/>
+                    </a:solidFill>
+                  </a:tcPr>
+                </a:tc>
+                <a:tc>
+                  <a:txBody>
+                    <a:bodyPr/>
+                    <a:lstStyle/>
+                    <a:p>
+                      <a:pPr algn="r" indent="0" marL="0">
+                        <a:buNone/>
+                      </a:pPr>
+                      <a:r>
+                        <a:rPr lang="en-US" sz="1000" dirty="0">
+                          <a:solidFill>
+                            <a:srgbClr val="3B4660"/>
+                          </a:solidFill>
+                          <a:latin typeface="Calibri" pitchFamily="34" charset="0"/>
+                          <a:ea typeface="Calibri" pitchFamily="34" charset="-122"/>
+                          <a:cs typeface="Calibri" pitchFamily="34" charset="-120"/>
+                        </a:rPr>
+                        <a:t>0.19</a:t>
+                      </a:r>
+                      <a:endParaRPr lang="en-US" sz="1000" dirty="0">
+                        <a:latin typeface="Calibri" charset="0"/>
+                        <a:ea typeface="Calibri" charset="0"/>
+                        <a:cs typeface="Calibri" charset="0"/>
+                      </a:endParaRPr>
+                    </a:p>
+                  </a:txBody>
+                  <a:tcPr marL="0" marR="76200" marT="63500" marB="63500" anchor="ctr">
+                    <a:lnL w="0" cap="flat" cmpd="sng" algn="ctr">
+                      <a:solidFill>
+                        <a:srgbClr val="666666"/>
+                      </a:solidFill>
+                      <a:prstDash val="solid"/>
+                      <a:round/>
+                      <a:headEnd type="none" w="med" len="med"/>
+                      <a:tailEnd type="none" w="med" len="med"/>
+                    </a:lnL>
+                    <a:lnR w="0" cap="flat" cmpd="sng" algn="ctr">
+                      <a:solidFill>
+                        <a:srgbClr val="666666"/>
+                      </a:solidFill>
+                      <a:prstDash val="solid"/>
+                      <a:round/>
+                      <a:headEnd type="none" w="med" len="med"/>
+                      <a:tailEnd type="none" w="med" len="med"/>
+                    </a:lnR>
+                    <a:lnT w="0" cap="flat" cmpd="sng" algn="ctr">
+                      <a:solidFill>
+                        <a:srgbClr val="666666"/>
+                      </a:solidFill>
+                      <a:prstDash val="solid"/>
+                      <a:round/>
+                      <a:headEnd type="none" w="med" len="med"/>
+                      <a:tailEnd type="none" w="med" len="med"/>
+                    </a:lnT>
+                    <a:lnB w="7620" cap="flat" cmpd="sng" algn="ctr">
+                      <a:solidFill>
+                        <a:srgbClr val="E2E4EA"/>
+                      </a:solidFill>
+                      <a:prstDash val="solid"/>
+                      <a:round/>
+                      <a:headEnd type="none" w="med" len="med"/>
+                      <a:tailEnd type="none" w="med" len="med"/>
+                    </a:lnB>
+                    <a:solidFill>
+                      <a:srgbClr val="FFFFFF"/>
+                    </a:solidFill>
+                  </a:tcPr>
+                </a:tc>
+                <a:tc>
+                  <a:txBody>
+                    <a:bodyPr/>
+                    <a:lstStyle/>
+                    <a:p>
+                      <a:pPr algn="r" indent="0" marL="0">
+                        <a:buNone/>
+                      </a:pPr>
+                      <a:r>
+                        <a:rPr lang="en-US" sz="1000" dirty="0">
+                          <a:solidFill>
+                            <a:srgbClr val="3B4660"/>
+                          </a:solidFill>
+                          <a:latin typeface="Calibri" pitchFamily="34" charset="0"/>
+                          <a:ea typeface="Calibri" pitchFamily="34" charset="-122"/>
+                          <a:cs typeface="Calibri" pitchFamily="34" charset="-120"/>
+                        </a:rPr>
+                        <a:t>0.19</a:t>
+                      </a:r>
+                      <a:endParaRPr lang="en-US" sz="1000" dirty="0">
+                        <a:latin typeface="Calibri" charset="0"/>
+                        <a:ea typeface="Calibri" charset="0"/>
+                        <a:cs typeface="Calibri" charset="0"/>
+                      </a:endParaRPr>
+                    </a:p>
+                  </a:txBody>
+                  <a:tcPr marL="0" marR="76200" marT="63500" marB="63500" anchor="ctr">
+                    <a:lnL w="0" cap="flat" cmpd="sng" algn="ctr">
+                      <a:solidFill>
+                        <a:srgbClr val="666666"/>
+                      </a:solidFill>
+                      <a:prstDash val="solid"/>
+                      <a:round/>
+                      <a:headEnd type="none" w="med" len="med"/>
+                      <a:tailEnd type="none" w="med" len="med"/>
+                    </a:lnL>
+                    <a:lnR w="0" cap="flat" cmpd="sng" algn="ctr">
+                      <a:solidFill>
+                        <a:srgbClr val="666666"/>
+                      </a:solidFill>
+                      <a:prstDash val="solid"/>
+                      <a:round/>
+                      <a:headEnd type="none" w="med" len="med"/>
+                      <a:tailEnd type="none" w="med" len="med"/>
+                    </a:lnR>
+                    <a:lnT w="0" cap="flat" cmpd="sng" algn="ctr">
+                      <a:solidFill>
+                        <a:srgbClr val="666666"/>
+                      </a:solidFill>
+                      <a:prstDash val="solid"/>
+                      <a:round/>
+                      <a:headEnd type="none" w="med" len="med"/>
+                      <a:tailEnd type="none" w="med" len="med"/>
+                    </a:lnT>
+                    <a:lnB w="7620" cap="flat" cmpd="sng" algn="ctr">
+                      <a:solidFill>
+                        <a:srgbClr val="E2E4EA"/>
+                      </a:solidFill>
+                      <a:prstDash val="solid"/>
+                      <a:round/>
+                      <a:headEnd type="none" w="med" len="med"/>
+                      <a:tailEnd type="none" w="med" len="med"/>
+                    </a:lnB>
+                    <a:solidFill>
+                      <a:srgbClr val="FFFFFF"/>
+                    </a:solidFill>
+                  </a:tcPr>
+                </a:tc>
+                <a:tc>
+                  <a:txBody>
+                    <a:bodyPr/>
+                    <a:lstStyle/>
+                    <a:p>
+                      <a:pPr algn="r" indent="0" marL="0">
+                        <a:buNone/>
+                      </a:pPr>
+                      <a:r>
+                        <a:rPr lang="en-US" sz="1000" dirty="0">
+                          <a:solidFill>
+                            <a:srgbClr val="3B4660"/>
+                          </a:solidFill>
+                          <a:latin typeface="Calibri" pitchFamily="34" charset="0"/>
+                          <a:ea typeface="Calibri" pitchFamily="34" charset="-122"/>
+                          <a:cs typeface="Calibri" pitchFamily="34" charset="-120"/>
+                        </a:rPr>
                         <a:t>0.20</a:t>
                       </a:r>
-                      <a:endParaRPr lang="en-US" sz="1050" dirty="0">
+                      <a:endParaRPr lang="en-US" sz="1000" dirty="0">
                         <a:latin typeface="Calibri" charset="0"/>
                         <a:ea typeface="Calibri" charset="0"/>
                         <a:cs typeface="Calibri" charset="0"/>
@@ -29807,7 +30079,7 @@
                         <a:buNone/>
                       </a:pPr>
                       <a:r>
-                        <a:rPr lang="en-US" sz="1050" dirty="0">
+                        <a:rPr lang="en-US" sz="1000" dirty="0">
                           <a:solidFill>
                             <a:srgbClr val="3B4660"/>
                           </a:solidFill>
@@ -29815,9 +30087,419 @@
                           <a:ea typeface="Calibri" pitchFamily="34" charset="-122"/>
                           <a:cs typeface="Calibri" pitchFamily="34" charset="-120"/>
                         </a:rPr>
+                        <a:t>0.23</a:t>
+                      </a:r>
+                      <a:endParaRPr lang="en-US" sz="1000" dirty="0">
+                        <a:latin typeface="Calibri" charset="0"/>
+                        <a:ea typeface="Calibri" charset="0"/>
+                        <a:cs typeface="Calibri" charset="0"/>
+                      </a:endParaRPr>
+                    </a:p>
+                  </a:txBody>
+                  <a:tcPr marL="0" marR="76200" marT="63500" marB="63500" anchor="ctr">
+                    <a:lnL w="0" cap="flat" cmpd="sng" algn="ctr">
+                      <a:solidFill>
+                        <a:srgbClr val="666666"/>
+                      </a:solidFill>
+                      <a:prstDash val="solid"/>
+                      <a:round/>
+                      <a:headEnd type="none" w="med" len="med"/>
+                      <a:tailEnd type="none" w="med" len="med"/>
+                    </a:lnL>
+                    <a:lnR w="0" cap="flat" cmpd="sng" algn="ctr">
+                      <a:solidFill>
+                        <a:srgbClr val="666666"/>
+                      </a:solidFill>
+                      <a:prstDash val="solid"/>
+                      <a:round/>
+                      <a:headEnd type="none" w="med" len="med"/>
+                      <a:tailEnd type="none" w="med" len="med"/>
+                    </a:lnR>
+                    <a:lnT w="0" cap="flat" cmpd="sng" algn="ctr">
+                      <a:solidFill>
+                        <a:srgbClr val="666666"/>
+                      </a:solidFill>
+                      <a:prstDash val="solid"/>
+                      <a:round/>
+                      <a:headEnd type="none" w="med" len="med"/>
+                      <a:tailEnd type="none" w="med" len="med"/>
+                    </a:lnT>
+                    <a:lnB w="7620" cap="flat" cmpd="sng" algn="ctr">
+                      <a:solidFill>
+                        <a:srgbClr val="E2E4EA"/>
+                      </a:solidFill>
+                      <a:prstDash val="solid"/>
+                      <a:round/>
+                      <a:headEnd type="none" w="med" len="med"/>
+                      <a:tailEnd type="none" w="med" len="med"/>
+                    </a:lnB>
+                    <a:solidFill>
+                      <a:srgbClr val="FFFFFF"/>
+                    </a:solidFill>
+                  </a:tcPr>
+                </a:tc>
+              </a:tr>
+              <a:tr h="256032">
+                <a:tc>
+                  <a:txBody>
+                    <a:bodyPr/>
+                    <a:lstStyle/>
+                    <a:p>
+                      <a:pPr algn="l" indent="0" marL="0">
+                        <a:buNone/>
+                      </a:pPr>
+                      <a:r>
+                        <a:rPr lang="en-US" sz="1000" dirty="0">
+                          <a:solidFill>
+                            <a:srgbClr val="3B4660"/>
+                          </a:solidFill>
+                          <a:latin typeface="Calibri" pitchFamily="34" charset="0"/>
+                          <a:ea typeface="Calibri" pitchFamily="34" charset="-122"/>
+                          <a:cs typeface="Calibri" pitchFamily="34" charset="-120"/>
+                        </a:rPr>
+                        <a:t>Corporate overhead</a:t>
+                      </a:r>
+                      <a:endParaRPr lang="en-US" sz="1000" dirty="0">
+                        <a:latin typeface="Calibri" charset="0"/>
+                        <a:ea typeface="Calibri" charset="0"/>
+                        <a:cs typeface="Calibri" charset="0"/>
+                      </a:endParaRPr>
+                    </a:p>
+                  </a:txBody>
+                  <a:tcPr marL="0" marR="76200" marT="63500" marB="63500" anchor="ctr">
+                    <a:lnL w="0" cap="flat" cmpd="sng" algn="ctr">
+                      <a:solidFill>
+                        <a:srgbClr val="666666"/>
+                      </a:solidFill>
+                      <a:prstDash val="solid"/>
+                      <a:round/>
+                      <a:headEnd type="none" w="med" len="med"/>
+                      <a:tailEnd type="none" w="med" len="med"/>
+                    </a:lnL>
+                    <a:lnR w="0" cap="flat" cmpd="sng" algn="ctr">
+                      <a:solidFill>
+                        <a:srgbClr val="666666"/>
+                      </a:solidFill>
+                      <a:prstDash val="solid"/>
+                      <a:round/>
+                      <a:headEnd type="none" w="med" len="med"/>
+                      <a:tailEnd type="none" w="med" len="med"/>
+                    </a:lnR>
+                    <a:lnT w="0" cap="flat" cmpd="sng" algn="ctr">
+                      <a:solidFill>
+                        <a:srgbClr val="666666"/>
+                      </a:solidFill>
+                      <a:prstDash val="solid"/>
+                      <a:round/>
+                      <a:headEnd type="none" w="med" len="med"/>
+                      <a:tailEnd type="none" w="med" len="med"/>
+                    </a:lnT>
+                    <a:lnB w="7620" cap="flat" cmpd="sng" algn="ctr">
+                      <a:solidFill>
+                        <a:srgbClr val="E2E4EA"/>
+                      </a:solidFill>
+                      <a:prstDash val="solid"/>
+                      <a:round/>
+                      <a:headEnd type="none" w="med" len="med"/>
+                      <a:tailEnd type="none" w="med" len="med"/>
+                    </a:lnB>
+                    <a:solidFill>
+                      <a:srgbClr val="FFFFFF"/>
+                    </a:solidFill>
+                  </a:tcPr>
+                </a:tc>
+                <a:tc>
+                  <a:txBody>
+                    <a:bodyPr/>
+                    <a:lstStyle/>
+                    <a:p>
+                      <a:pPr algn="r" indent="0" marL="0">
+                        <a:buNone/>
+                      </a:pPr>
+                      <a:r>
+                        <a:rPr lang="en-US" sz="1000" dirty="0">
+                          <a:solidFill>
+                            <a:srgbClr val="3B4660"/>
+                          </a:solidFill>
+                          <a:latin typeface="Calibri" pitchFamily="34" charset="0"/>
+                          <a:ea typeface="Calibri" pitchFamily="34" charset="-122"/>
+                          <a:cs typeface="Calibri" pitchFamily="34" charset="-120"/>
+                        </a:rPr>
+                        <a:t>0.12</a:t>
+                      </a:r>
+                      <a:endParaRPr lang="en-US" sz="1000" dirty="0">
+                        <a:latin typeface="Calibri" charset="0"/>
+                        <a:ea typeface="Calibri" charset="0"/>
+                        <a:cs typeface="Calibri" charset="0"/>
+                      </a:endParaRPr>
+                    </a:p>
+                  </a:txBody>
+                  <a:tcPr marL="0" marR="76200" marT="63500" marB="63500" anchor="ctr">
+                    <a:lnL w="0" cap="flat" cmpd="sng" algn="ctr">
+                      <a:solidFill>
+                        <a:srgbClr val="666666"/>
+                      </a:solidFill>
+                      <a:prstDash val="solid"/>
+                      <a:round/>
+                      <a:headEnd type="none" w="med" len="med"/>
+                      <a:tailEnd type="none" w="med" len="med"/>
+                    </a:lnL>
+                    <a:lnR w="0" cap="flat" cmpd="sng" algn="ctr">
+                      <a:solidFill>
+                        <a:srgbClr val="666666"/>
+                      </a:solidFill>
+                      <a:prstDash val="solid"/>
+                      <a:round/>
+                      <a:headEnd type="none" w="med" len="med"/>
+                      <a:tailEnd type="none" w="med" len="med"/>
+                    </a:lnR>
+                    <a:lnT w="0" cap="flat" cmpd="sng" algn="ctr">
+                      <a:solidFill>
+                        <a:srgbClr val="666666"/>
+                      </a:solidFill>
+                      <a:prstDash val="solid"/>
+                      <a:round/>
+                      <a:headEnd type="none" w="med" len="med"/>
+                      <a:tailEnd type="none" w="med" len="med"/>
+                    </a:lnT>
+                    <a:lnB w="7620" cap="flat" cmpd="sng" algn="ctr">
+                      <a:solidFill>
+                        <a:srgbClr val="E2E4EA"/>
+                      </a:solidFill>
+                      <a:prstDash val="solid"/>
+                      <a:round/>
+                      <a:headEnd type="none" w="med" len="med"/>
+                      <a:tailEnd type="none" w="med" len="med"/>
+                    </a:lnB>
+                    <a:solidFill>
+                      <a:srgbClr val="FFFFFF"/>
+                    </a:solidFill>
+                  </a:tcPr>
+                </a:tc>
+                <a:tc>
+                  <a:txBody>
+                    <a:bodyPr/>
+                    <a:lstStyle/>
+                    <a:p>
+                      <a:pPr algn="r" indent="0" marL="0">
+                        <a:buNone/>
+                      </a:pPr>
+                      <a:r>
+                        <a:rPr lang="en-US" sz="1000" dirty="0">
+                          <a:solidFill>
+                            <a:srgbClr val="3B4660"/>
+                          </a:solidFill>
+                          <a:latin typeface="Calibri" pitchFamily="34" charset="0"/>
+                          <a:ea typeface="Calibri" pitchFamily="34" charset="-122"/>
+                          <a:cs typeface="Calibri" pitchFamily="34" charset="-120"/>
+                        </a:rPr>
+                        <a:t>0.14</a:t>
+                      </a:r>
+                      <a:endParaRPr lang="en-US" sz="1000" dirty="0">
+                        <a:latin typeface="Calibri" charset="0"/>
+                        <a:ea typeface="Calibri" charset="0"/>
+                        <a:cs typeface="Calibri" charset="0"/>
+                      </a:endParaRPr>
+                    </a:p>
+                  </a:txBody>
+                  <a:tcPr marL="0" marR="76200" marT="63500" marB="63500" anchor="ctr">
+                    <a:lnL w="0" cap="flat" cmpd="sng" algn="ctr">
+                      <a:solidFill>
+                        <a:srgbClr val="666666"/>
+                      </a:solidFill>
+                      <a:prstDash val="solid"/>
+                      <a:round/>
+                      <a:headEnd type="none" w="med" len="med"/>
+                      <a:tailEnd type="none" w="med" len="med"/>
+                    </a:lnL>
+                    <a:lnR w="0" cap="flat" cmpd="sng" algn="ctr">
+                      <a:solidFill>
+                        <a:srgbClr val="666666"/>
+                      </a:solidFill>
+                      <a:prstDash val="solid"/>
+                      <a:round/>
+                      <a:headEnd type="none" w="med" len="med"/>
+                      <a:tailEnd type="none" w="med" len="med"/>
+                    </a:lnR>
+                    <a:lnT w="0" cap="flat" cmpd="sng" algn="ctr">
+                      <a:solidFill>
+                        <a:srgbClr val="666666"/>
+                      </a:solidFill>
+                      <a:prstDash val="solid"/>
+                      <a:round/>
+                      <a:headEnd type="none" w="med" len="med"/>
+                      <a:tailEnd type="none" w="med" len="med"/>
+                    </a:lnT>
+                    <a:lnB w="7620" cap="flat" cmpd="sng" algn="ctr">
+                      <a:solidFill>
+                        <a:srgbClr val="E2E4EA"/>
+                      </a:solidFill>
+                      <a:prstDash val="solid"/>
+                      <a:round/>
+                      <a:headEnd type="none" w="med" len="med"/>
+                      <a:tailEnd type="none" w="med" len="med"/>
+                    </a:lnB>
+                    <a:solidFill>
+                      <a:srgbClr val="FFFFFF"/>
+                    </a:solidFill>
+                  </a:tcPr>
+                </a:tc>
+                <a:tc>
+                  <a:txBody>
+                    <a:bodyPr/>
+                    <a:lstStyle/>
+                    <a:p>
+                      <a:pPr algn="r" indent="0" marL="0">
+                        <a:buNone/>
+                      </a:pPr>
+                      <a:r>
+                        <a:rPr lang="en-US" sz="1000" dirty="0">
+                          <a:solidFill>
+                            <a:srgbClr val="3B4660"/>
+                          </a:solidFill>
+                          <a:latin typeface="Calibri" pitchFamily="34" charset="0"/>
+                          <a:ea typeface="Calibri" pitchFamily="34" charset="-122"/>
+                          <a:cs typeface="Calibri" pitchFamily="34" charset="-120"/>
+                        </a:rPr>
+                        <a:t>0.17</a:t>
+                      </a:r>
+                      <a:endParaRPr lang="en-US" sz="1000" dirty="0">
+                        <a:latin typeface="Calibri" charset="0"/>
+                        <a:ea typeface="Calibri" charset="0"/>
+                        <a:cs typeface="Calibri" charset="0"/>
+                      </a:endParaRPr>
+                    </a:p>
+                  </a:txBody>
+                  <a:tcPr marL="0" marR="76200" marT="63500" marB="63500" anchor="ctr">
+                    <a:lnL w="0" cap="flat" cmpd="sng" algn="ctr">
+                      <a:solidFill>
+                        <a:srgbClr val="666666"/>
+                      </a:solidFill>
+                      <a:prstDash val="solid"/>
+                      <a:round/>
+                      <a:headEnd type="none" w="med" len="med"/>
+                      <a:tailEnd type="none" w="med" len="med"/>
+                    </a:lnL>
+                    <a:lnR w="0" cap="flat" cmpd="sng" algn="ctr">
+                      <a:solidFill>
+                        <a:srgbClr val="666666"/>
+                      </a:solidFill>
+                      <a:prstDash val="solid"/>
+                      <a:round/>
+                      <a:headEnd type="none" w="med" len="med"/>
+                      <a:tailEnd type="none" w="med" len="med"/>
+                    </a:lnR>
+                    <a:lnT w="0" cap="flat" cmpd="sng" algn="ctr">
+                      <a:solidFill>
+                        <a:srgbClr val="666666"/>
+                      </a:solidFill>
+                      <a:prstDash val="solid"/>
+                      <a:round/>
+                      <a:headEnd type="none" w="med" len="med"/>
+                      <a:tailEnd type="none" w="med" len="med"/>
+                    </a:lnT>
+                    <a:lnB w="7620" cap="flat" cmpd="sng" algn="ctr">
+                      <a:solidFill>
+                        <a:srgbClr val="E2E4EA"/>
+                      </a:solidFill>
+                      <a:prstDash val="solid"/>
+                      <a:round/>
+                      <a:headEnd type="none" w="med" len="med"/>
+                      <a:tailEnd type="none" w="med" len="med"/>
+                    </a:lnB>
+                    <a:solidFill>
+                      <a:srgbClr val="FFFFFF"/>
+                    </a:solidFill>
+                  </a:tcPr>
+                </a:tc>
+                <a:tc>
+                  <a:txBody>
+                    <a:bodyPr/>
+                    <a:lstStyle/>
+                    <a:p>
+                      <a:pPr algn="r" indent="0" marL="0">
+                        <a:buNone/>
+                      </a:pPr>
+                      <a:r>
+                        <a:rPr lang="en-US" sz="1000" dirty="0">
+                          <a:solidFill>
+                            <a:srgbClr val="3B4660"/>
+                          </a:solidFill>
+                          <a:latin typeface="Calibri" pitchFamily="34" charset="0"/>
+                          <a:ea typeface="Calibri" pitchFamily="34" charset="-122"/>
+                          <a:cs typeface="Calibri" pitchFamily="34" charset="-120"/>
+                        </a:rPr>
+                        <a:t>0.19</a:t>
+                      </a:r>
+                      <a:endParaRPr lang="en-US" sz="1000" dirty="0">
+                        <a:latin typeface="Calibri" charset="0"/>
+                        <a:ea typeface="Calibri" charset="0"/>
+                        <a:cs typeface="Calibri" charset="0"/>
+                      </a:endParaRPr>
+                    </a:p>
+                  </a:txBody>
+                  <a:tcPr marL="0" marR="76200" marT="63500" marB="63500" anchor="ctr">
+                    <a:lnL w="0" cap="flat" cmpd="sng" algn="ctr">
+                      <a:solidFill>
+                        <a:srgbClr val="666666"/>
+                      </a:solidFill>
+                      <a:prstDash val="solid"/>
+                      <a:round/>
+                      <a:headEnd type="none" w="med" len="med"/>
+                      <a:tailEnd type="none" w="med" len="med"/>
+                    </a:lnL>
+                    <a:lnR w="0" cap="flat" cmpd="sng" algn="ctr">
+                      <a:solidFill>
+                        <a:srgbClr val="666666"/>
+                      </a:solidFill>
+                      <a:prstDash val="solid"/>
+                      <a:round/>
+                      <a:headEnd type="none" w="med" len="med"/>
+                      <a:tailEnd type="none" w="med" len="med"/>
+                    </a:lnR>
+                    <a:lnT w="0" cap="flat" cmpd="sng" algn="ctr">
+                      <a:solidFill>
+                        <a:srgbClr val="666666"/>
+                      </a:solidFill>
+                      <a:prstDash val="solid"/>
+                      <a:round/>
+                      <a:headEnd type="none" w="med" len="med"/>
+                      <a:tailEnd type="none" w="med" len="med"/>
+                    </a:lnT>
+                    <a:lnB w="7620" cap="flat" cmpd="sng" algn="ctr">
+                      <a:solidFill>
+                        <a:srgbClr val="E2E4EA"/>
+                      </a:solidFill>
+                      <a:prstDash val="solid"/>
+                      <a:round/>
+                      <a:headEnd type="none" w="med" len="med"/>
+                      <a:tailEnd type="none" w="med" len="med"/>
+                    </a:lnB>
+                    <a:solidFill>
+                      <a:srgbClr val="FFFFFF"/>
+                    </a:solidFill>
+                  </a:tcPr>
+                </a:tc>
+                <a:tc>
+                  <a:txBody>
+                    <a:bodyPr/>
+                    <a:lstStyle/>
+                    <a:p>
+                      <a:pPr algn="r" indent="0" marL="0">
+                        <a:buNone/>
+                      </a:pPr>
+                      <a:r>
+                        <a:rPr lang="en-US" sz="1000" dirty="0">
+                          <a:solidFill>
+                            <a:srgbClr val="3B4660"/>
+                          </a:solidFill>
+                          <a:latin typeface="Calibri" pitchFamily="34" charset="0"/>
+                          <a:ea typeface="Calibri" pitchFamily="34" charset="-122"/>
+                          <a:cs typeface="Calibri" pitchFamily="34" charset="-120"/>
+                        </a:rPr>
                         <a:t>0.21</a:t>
                       </a:r>
-                      <a:endParaRPr lang="en-US" sz="1050" dirty="0">
+                      <a:endParaRPr lang="en-US" sz="1000" dirty="0">
                         <a:latin typeface="Calibri" charset="0"/>
                         <a:ea typeface="Calibri" charset="0"/>
                         <a:cs typeface="Calibri" charset="0"/>
@@ -29875,7 +30557,7 @@
                         <a:buNone/>
                       </a:pPr>
                       <a:r>
-                        <a:rPr lang="en-US" sz="1050" dirty="0">
+                        <a:rPr lang="en-US" sz="1000" dirty="0">
                           <a:solidFill>
                             <a:srgbClr val="3B4660"/>
                           </a:solidFill>
@@ -29883,9 +30565,283 @@
                           <a:ea typeface="Calibri" pitchFamily="34" charset="-122"/>
                           <a:cs typeface="Calibri" pitchFamily="34" charset="-120"/>
                         </a:rPr>
+                        <a:t>0.23</a:t>
+                      </a:r>
+                      <a:endParaRPr lang="en-US" sz="1000" dirty="0">
+                        <a:latin typeface="Calibri" charset="0"/>
+                        <a:ea typeface="Calibri" charset="0"/>
+                        <a:cs typeface="Calibri" charset="0"/>
+                      </a:endParaRPr>
+                    </a:p>
+                  </a:txBody>
+                  <a:tcPr marL="0" marR="76200" marT="63500" marB="63500" anchor="ctr">
+                    <a:lnL w="0" cap="flat" cmpd="sng" algn="ctr">
+                      <a:solidFill>
+                        <a:srgbClr val="666666"/>
+                      </a:solidFill>
+                      <a:prstDash val="solid"/>
+                      <a:round/>
+                      <a:headEnd type="none" w="med" len="med"/>
+                      <a:tailEnd type="none" w="med" len="med"/>
+                    </a:lnL>
+                    <a:lnR w="0" cap="flat" cmpd="sng" algn="ctr">
+                      <a:solidFill>
+                        <a:srgbClr val="666666"/>
+                      </a:solidFill>
+                      <a:prstDash val="solid"/>
+                      <a:round/>
+                      <a:headEnd type="none" w="med" len="med"/>
+                      <a:tailEnd type="none" w="med" len="med"/>
+                    </a:lnR>
+                    <a:lnT w="0" cap="flat" cmpd="sng" algn="ctr">
+                      <a:solidFill>
+                        <a:srgbClr val="666666"/>
+                      </a:solidFill>
+                      <a:prstDash val="solid"/>
+                      <a:round/>
+                      <a:headEnd type="none" w="med" len="med"/>
+                      <a:tailEnd type="none" w="med" len="med"/>
+                    </a:lnT>
+                    <a:lnB w="7620" cap="flat" cmpd="sng" algn="ctr">
+                      <a:solidFill>
+                        <a:srgbClr val="E2E4EA"/>
+                      </a:solidFill>
+                      <a:prstDash val="solid"/>
+                      <a:round/>
+                      <a:headEnd type="none" w="med" len="med"/>
+                      <a:tailEnd type="none" w="med" len="med"/>
+                    </a:lnB>
+                    <a:solidFill>
+                      <a:srgbClr val="FFFFFF"/>
+                    </a:solidFill>
+                  </a:tcPr>
+                </a:tc>
+                <a:tc>
+                  <a:txBody>
+                    <a:bodyPr/>
+                    <a:lstStyle/>
+                    <a:p>
+                      <a:pPr algn="r" indent="0" marL="0">
+                        <a:buNone/>
+                      </a:pPr>
+                      <a:r>
+                        <a:rPr lang="en-US" sz="1000" dirty="0">
+                          <a:solidFill>
+                            <a:srgbClr val="3B4660"/>
+                          </a:solidFill>
+                          <a:latin typeface="Calibri" pitchFamily="34" charset="0"/>
+                          <a:ea typeface="Calibri" pitchFamily="34" charset="-122"/>
+                          <a:cs typeface="Calibri" pitchFamily="34" charset="-120"/>
+                        </a:rPr>
+                        <a:t>0.25</a:t>
+                      </a:r>
+                      <a:endParaRPr lang="en-US" sz="1000" dirty="0">
+                        <a:latin typeface="Calibri" charset="0"/>
+                        <a:ea typeface="Calibri" charset="0"/>
+                        <a:cs typeface="Calibri" charset="0"/>
+                      </a:endParaRPr>
+                    </a:p>
+                  </a:txBody>
+                  <a:tcPr marL="0" marR="76200" marT="63500" marB="63500" anchor="ctr">
+                    <a:lnL w="0" cap="flat" cmpd="sng" algn="ctr">
+                      <a:solidFill>
+                        <a:srgbClr val="666666"/>
+                      </a:solidFill>
+                      <a:prstDash val="solid"/>
+                      <a:round/>
+                      <a:headEnd type="none" w="med" len="med"/>
+                      <a:tailEnd type="none" w="med" len="med"/>
+                    </a:lnL>
+                    <a:lnR w="0" cap="flat" cmpd="sng" algn="ctr">
+                      <a:solidFill>
+                        <a:srgbClr val="666666"/>
+                      </a:solidFill>
+                      <a:prstDash val="solid"/>
+                      <a:round/>
+                      <a:headEnd type="none" w="med" len="med"/>
+                      <a:tailEnd type="none" w="med" len="med"/>
+                    </a:lnR>
+                    <a:lnT w="0" cap="flat" cmpd="sng" algn="ctr">
+                      <a:solidFill>
+                        <a:srgbClr val="666666"/>
+                      </a:solidFill>
+                      <a:prstDash val="solid"/>
+                      <a:round/>
+                      <a:headEnd type="none" w="med" len="med"/>
+                      <a:tailEnd type="none" w="med" len="med"/>
+                    </a:lnT>
+                    <a:lnB w="7620" cap="flat" cmpd="sng" algn="ctr">
+                      <a:solidFill>
+                        <a:srgbClr val="E2E4EA"/>
+                      </a:solidFill>
+                      <a:prstDash val="solid"/>
+                      <a:round/>
+                      <a:headEnd type="none" w="med" len="med"/>
+                      <a:tailEnd type="none" w="med" len="med"/>
+                    </a:lnB>
+                    <a:solidFill>
+                      <a:srgbClr val="FFFFFF"/>
+                    </a:solidFill>
+                  </a:tcPr>
+                </a:tc>
+              </a:tr>
+              <a:tr h="256032">
+                <a:tc>
+                  <a:txBody>
+                    <a:bodyPr/>
+                    <a:lstStyle/>
+                    <a:p>
+                      <a:pPr algn="l" indent="0" marL="0">
+                        <a:buNone/>
+                      </a:pPr>
+                      <a:r>
+                        <a:rPr lang="en-US" sz="1000" dirty="0">
+                          <a:solidFill>
+                            <a:srgbClr val="3B4660"/>
+                          </a:solidFill>
+                          <a:latin typeface="Calibri" pitchFamily="34" charset="0"/>
+                          <a:ea typeface="Calibri" pitchFamily="34" charset="-122"/>
+                          <a:cs typeface="Calibri" pitchFamily="34" charset="-120"/>
+                        </a:rPr>
+                        <a:t>Other operating cost</a:t>
+                      </a:r>
+                      <a:endParaRPr lang="en-US" sz="1000" dirty="0">
+                        <a:latin typeface="Calibri" charset="0"/>
+                        <a:ea typeface="Calibri" charset="0"/>
+                        <a:cs typeface="Calibri" charset="0"/>
+                      </a:endParaRPr>
+                    </a:p>
+                  </a:txBody>
+                  <a:tcPr marL="0" marR="76200" marT="63500" marB="63500" anchor="ctr">
+                    <a:lnL w="0" cap="flat" cmpd="sng" algn="ctr">
+                      <a:solidFill>
+                        <a:srgbClr val="666666"/>
+                      </a:solidFill>
+                      <a:prstDash val="solid"/>
+                      <a:round/>
+                      <a:headEnd type="none" w="med" len="med"/>
+                      <a:tailEnd type="none" w="med" len="med"/>
+                    </a:lnL>
+                    <a:lnR w="0" cap="flat" cmpd="sng" algn="ctr">
+                      <a:solidFill>
+                        <a:srgbClr val="666666"/>
+                      </a:solidFill>
+                      <a:prstDash val="solid"/>
+                      <a:round/>
+                      <a:headEnd type="none" w="med" len="med"/>
+                      <a:tailEnd type="none" w="med" len="med"/>
+                    </a:lnR>
+                    <a:lnT w="0" cap="flat" cmpd="sng" algn="ctr">
+                      <a:solidFill>
+                        <a:srgbClr val="666666"/>
+                      </a:solidFill>
+                      <a:prstDash val="solid"/>
+                      <a:round/>
+                      <a:headEnd type="none" w="med" len="med"/>
+                      <a:tailEnd type="none" w="med" len="med"/>
+                    </a:lnT>
+                    <a:lnB w="7620" cap="flat" cmpd="sng" algn="ctr">
+                      <a:solidFill>
+                        <a:srgbClr val="E2E4EA"/>
+                      </a:solidFill>
+                      <a:prstDash val="solid"/>
+                      <a:round/>
+                      <a:headEnd type="none" w="med" len="med"/>
+                      <a:tailEnd type="none" w="med" len="med"/>
+                    </a:lnB>
+                    <a:solidFill>
+                      <a:srgbClr val="FFFFFF"/>
+                    </a:solidFill>
+                  </a:tcPr>
+                </a:tc>
+                <a:tc>
+                  <a:txBody>
+                    <a:bodyPr/>
+                    <a:lstStyle/>
+                    <a:p>
+                      <a:pPr algn="r" indent="0" marL="0">
+                        <a:buNone/>
+                      </a:pPr>
+                      <a:r>
+                        <a:rPr lang="en-US" sz="1000" dirty="0">
+                          <a:solidFill>
+                            <a:srgbClr val="3B4660"/>
+                          </a:solidFill>
+                          <a:latin typeface="Calibri" pitchFamily="34" charset="0"/>
+                          <a:ea typeface="Calibri" pitchFamily="34" charset="-122"/>
+                          <a:cs typeface="Calibri" pitchFamily="34" charset="-120"/>
+                        </a:rPr>
+                        <a:t>0.20</a:t>
+                      </a:r>
+                      <a:endParaRPr lang="en-US" sz="1000" dirty="0">
+                        <a:latin typeface="Calibri" charset="0"/>
+                        <a:ea typeface="Calibri" charset="0"/>
+                        <a:cs typeface="Calibri" charset="0"/>
+                      </a:endParaRPr>
+                    </a:p>
+                  </a:txBody>
+                  <a:tcPr marL="0" marR="76200" marT="63500" marB="63500" anchor="ctr">
+                    <a:lnL w="0" cap="flat" cmpd="sng" algn="ctr">
+                      <a:solidFill>
+                        <a:srgbClr val="666666"/>
+                      </a:solidFill>
+                      <a:prstDash val="solid"/>
+                      <a:round/>
+                      <a:headEnd type="none" w="med" len="med"/>
+                      <a:tailEnd type="none" w="med" len="med"/>
+                    </a:lnL>
+                    <a:lnR w="0" cap="flat" cmpd="sng" algn="ctr">
+                      <a:solidFill>
+                        <a:srgbClr val="666666"/>
+                      </a:solidFill>
+                      <a:prstDash val="solid"/>
+                      <a:round/>
+                      <a:headEnd type="none" w="med" len="med"/>
+                      <a:tailEnd type="none" w="med" len="med"/>
+                    </a:lnR>
+                    <a:lnT w="0" cap="flat" cmpd="sng" algn="ctr">
+                      <a:solidFill>
+                        <a:srgbClr val="666666"/>
+                      </a:solidFill>
+                      <a:prstDash val="solid"/>
+                      <a:round/>
+                      <a:headEnd type="none" w="med" len="med"/>
+                      <a:tailEnd type="none" w="med" len="med"/>
+                    </a:lnT>
+                    <a:lnB w="7620" cap="flat" cmpd="sng" algn="ctr">
+                      <a:solidFill>
+                        <a:srgbClr val="E2E4EA"/>
+                      </a:solidFill>
+                      <a:prstDash val="solid"/>
+                      <a:round/>
+                      <a:headEnd type="none" w="med" len="med"/>
+                      <a:tailEnd type="none" w="med" len="med"/>
+                    </a:lnB>
+                    <a:solidFill>
+                      <a:srgbClr val="FFFFFF"/>
+                    </a:solidFill>
+                  </a:tcPr>
+                </a:tc>
+                <a:tc>
+                  <a:txBody>
+                    <a:bodyPr/>
+                    <a:lstStyle/>
+                    <a:p>
+                      <a:pPr algn="r" indent="0" marL="0">
+                        <a:buNone/>
+                      </a:pPr>
+                      <a:r>
+                        <a:rPr lang="en-US" sz="1000" dirty="0">
+                          <a:solidFill>
+                            <a:srgbClr val="3B4660"/>
+                          </a:solidFill>
+                          <a:latin typeface="Calibri" pitchFamily="34" charset="0"/>
+                          <a:ea typeface="Calibri" pitchFamily="34" charset="-122"/>
+                          <a:cs typeface="Calibri" pitchFamily="34" charset="-120"/>
+                        </a:rPr>
                         <a:t>0.21</a:t>
                       </a:r>
-                      <a:endParaRPr lang="en-US" sz="1050" dirty="0">
+                      <a:endParaRPr lang="en-US" sz="1000" dirty="0">
                         <a:latin typeface="Calibri" charset="0"/>
                         <a:ea typeface="Calibri" charset="0"/>
                         <a:cs typeface="Calibri" charset="0"/>
@@ -29943,7 +30899,7 @@
                         <a:buNone/>
                       </a:pPr>
                       <a:r>
-                        <a:rPr lang="en-US" sz="1050" dirty="0">
+                        <a:rPr lang="en-US" sz="1000" dirty="0">
                           <a:solidFill>
                             <a:srgbClr val="3B4660"/>
                           </a:solidFill>
@@ -29951,9 +30907,9 @@
                           <a:ea typeface="Calibri" pitchFamily="34" charset="-122"/>
                           <a:cs typeface="Calibri" pitchFamily="34" charset="-120"/>
                         </a:rPr>
-                        <a:t>0.21</a:t>
-                      </a:r>
-                      <a:endParaRPr lang="en-US" sz="1050" dirty="0">
+                        <a:t>0.23</a:t>
+                      </a:r>
+                      <a:endParaRPr lang="en-US" sz="1000" dirty="0">
                         <a:latin typeface="Calibri" charset="0"/>
                         <a:ea typeface="Calibri" charset="0"/>
                         <a:cs typeface="Calibri" charset="0"/>
@@ -30011,7 +30967,7 @@
                         <a:buNone/>
                       </a:pPr>
                       <a:r>
-                        <a:rPr lang="en-US" sz="1050" dirty="0">
+                        <a:rPr lang="en-US" sz="1000" dirty="0">
                           <a:solidFill>
                             <a:srgbClr val="3B4660"/>
                           </a:solidFill>
@@ -30019,9 +30975,9 @@
                           <a:ea typeface="Calibri" pitchFamily="34" charset="-122"/>
                           <a:cs typeface="Calibri" pitchFamily="34" charset="-120"/>
                         </a:rPr>
-                        <a:t>0.23</a:t>
-                      </a:r>
-                      <a:endParaRPr lang="en-US" sz="1050" dirty="0">
+                        <a:t>0.25</a:t>
+                      </a:r>
+                      <a:endParaRPr lang="en-US" sz="1000" dirty="0">
                         <a:latin typeface="Calibri" charset="0"/>
                         <a:ea typeface="Calibri" charset="0"/>
                         <a:cs typeface="Calibri" charset="0"/>
@@ -30079,7 +31035,7 @@
                         <a:buNone/>
                       </a:pPr>
                       <a:r>
-                        <a:rPr lang="en-US" sz="1050" dirty="0">
+                        <a:rPr lang="en-US" sz="1000" dirty="0">
                           <a:solidFill>
                             <a:srgbClr val="3B4660"/>
                           </a:solidFill>
@@ -30087,9 +31043,9 @@
                           <a:ea typeface="Calibri" pitchFamily="34" charset="-122"/>
                           <a:cs typeface="Calibri" pitchFamily="34" charset="-120"/>
                         </a:rPr>
-                        <a:t>0.26</a:t>
-                      </a:r>
-                      <a:endParaRPr lang="en-US" sz="1050" dirty="0">
+                        <a:t>0.27</a:t>
+                      </a:r>
+                      <a:endParaRPr lang="en-US" sz="1000" dirty="0">
                         <a:latin typeface="Calibri" charset="0"/>
                         <a:ea typeface="Calibri" charset="0"/>
                         <a:cs typeface="Calibri" charset="0"/>
@@ -30138,8 +31094,144 @@
                     </a:solidFill>
                   </a:tcPr>
                 </a:tc>
+                <a:tc>
+                  <a:txBody>
+                    <a:bodyPr/>
+                    <a:lstStyle/>
+                    <a:p>
+                      <a:pPr algn="r" indent="0" marL="0">
+                        <a:buNone/>
+                      </a:pPr>
+                      <a:r>
+                        <a:rPr lang="en-US" sz="1000" dirty="0">
+                          <a:solidFill>
+                            <a:srgbClr val="3B4660"/>
+                          </a:solidFill>
+                          <a:latin typeface="Calibri" pitchFamily="34" charset="0"/>
+                          <a:ea typeface="Calibri" pitchFamily="34" charset="-122"/>
+                          <a:cs typeface="Calibri" pitchFamily="34" charset="-120"/>
+                        </a:rPr>
+                        <a:t>0.29</a:t>
+                      </a:r>
+                      <a:endParaRPr lang="en-US" sz="1000" dirty="0">
+                        <a:latin typeface="Calibri" charset="0"/>
+                        <a:ea typeface="Calibri" charset="0"/>
+                        <a:cs typeface="Calibri" charset="0"/>
+                      </a:endParaRPr>
+                    </a:p>
+                  </a:txBody>
+                  <a:tcPr marL="0" marR="76200" marT="63500" marB="63500" anchor="ctr">
+                    <a:lnL w="0" cap="flat" cmpd="sng" algn="ctr">
+                      <a:solidFill>
+                        <a:srgbClr val="666666"/>
+                      </a:solidFill>
+                      <a:prstDash val="solid"/>
+                      <a:round/>
+                      <a:headEnd type="none" w="med" len="med"/>
+                      <a:tailEnd type="none" w="med" len="med"/>
+                    </a:lnL>
+                    <a:lnR w="0" cap="flat" cmpd="sng" algn="ctr">
+                      <a:solidFill>
+                        <a:srgbClr val="666666"/>
+                      </a:solidFill>
+                      <a:prstDash val="solid"/>
+                      <a:round/>
+                      <a:headEnd type="none" w="med" len="med"/>
+                      <a:tailEnd type="none" w="med" len="med"/>
+                    </a:lnR>
+                    <a:lnT w="0" cap="flat" cmpd="sng" algn="ctr">
+                      <a:solidFill>
+                        <a:srgbClr val="666666"/>
+                      </a:solidFill>
+                      <a:prstDash val="solid"/>
+                      <a:round/>
+                      <a:headEnd type="none" w="med" len="med"/>
+                      <a:tailEnd type="none" w="med" len="med"/>
+                    </a:lnT>
+                    <a:lnB w="7620" cap="flat" cmpd="sng" algn="ctr">
+                      <a:solidFill>
+                        <a:srgbClr val="E2E4EA"/>
+                      </a:solidFill>
+                      <a:prstDash val="solid"/>
+                      <a:round/>
+                      <a:headEnd type="none" w="med" len="med"/>
+                      <a:tailEnd type="none" w="med" len="med"/>
+                    </a:lnB>
+                    <a:solidFill>
+                      <a:srgbClr val="FFFFFF"/>
+                    </a:solidFill>
+                  </a:tcPr>
+                </a:tc>
+                <a:tc>
+                  <a:txBody>
+                    <a:bodyPr/>
+                    <a:lstStyle/>
+                    <a:p>
+                      <a:pPr algn="r" indent="0" marL="0">
+                        <a:buNone/>
+                      </a:pPr>
+                      <a:r>
+                        <a:rPr lang="en-US" sz="1000" dirty="0">
+                          <a:solidFill>
+                            <a:srgbClr val="3B4660"/>
+                          </a:solidFill>
+                          <a:latin typeface="Calibri" pitchFamily="34" charset="0"/>
+                          <a:ea typeface="Calibri" pitchFamily="34" charset="-122"/>
+                          <a:cs typeface="Calibri" pitchFamily="34" charset="-120"/>
+                        </a:rPr>
+                        <a:t>0.31</a:t>
+                      </a:r>
+                      <a:endParaRPr lang="en-US" sz="1000" dirty="0">
+                        <a:latin typeface="Calibri" charset="0"/>
+                        <a:ea typeface="Calibri" charset="0"/>
+                        <a:cs typeface="Calibri" charset="0"/>
+                      </a:endParaRPr>
+                    </a:p>
+                  </a:txBody>
+                  <a:tcPr marL="0" marR="76200" marT="63500" marB="63500" anchor="ctr">
+                    <a:lnL w="0" cap="flat" cmpd="sng" algn="ctr">
+                      <a:solidFill>
+                        <a:srgbClr val="666666"/>
+                      </a:solidFill>
+                      <a:prstDash val="solid"/>
+                      <a:round/>
+                      <a:headEnd type="none" w="med" len="med"/>
+                      <a:tailEnd type="none" w="med" len="med"/>
+                    </a:lnL>
+                    <a:lnR w="0" cap="flat" cmpd="sng" algn="ctr">
+                      <a:solidFill>
+                        <a:srgbClr val="666666"/>
+                      </a:solidFill>
+                      <a:prstDash val="solid"/>
+                      <a:round/>
+                      <a:headEnd type="none" w="med" len="med"/>
+                      <a:tailEnd type="none" w="med" len="med"/>
+                    </a:lnR>
+                    <a:lnT w="0" cap="flat" cmpd="sng" algn="ctr">
+                      <a:solidFill>
+                        <a:srgbClr val="666666"/>
+                      </a:solidFill>
+                      <a:prstDash val="solid"/>
+                      <a:round/>
+                      <a:headEnd type="none" w="med" len="med"/>
+                      <a:tailEnd type="none" w="med" len="med"/>
+                    </a:lnT>
+                    <a:lnB w="7620" cap="flat" cmpd="sng" algn="ctr">
+                      <a:solidFill>
+                        <a:srgbClr val="E2E4EA"/>
+                      </a:solidFill>
+                      <a:prstDash val="solid"/>
+                      <a:round/>
+                      <a:headEnd type="none" w="med" len="med"/>
+                      <a:tailEnd type="none" w="med" len="med"/>
+                    </a:lnB>
+                    <a:solidFill>
+                      <a:srgbClr val="FFFFFF"/>
+                    </a:solidFill>
+                  </a:tcPr>
+                </a:tc>
               </a:tr>
-              <a:tr h="283464">
+              <a:tr h="256032">
                 <a:tc>
                   <a:txBody>
                     <a:bodyPr/>
@@ -30149,7 +31241,553 @@
                         <a:buNone/>
                       </a:pPr>
                       <a:r>
-                        <a:rPr lang="en-US" sz="1050" dirty="0">
+                        <a:rPr lang="en-US" sz="1000" b="1" dirty="0">
+                          <a:solidFill>
+                            <a:srgbClr val="0A1426"/>
+                          </a:solidFill>
+                          <a:latin typeface="Calibri" pitchFamily="34" charset="0"/>
+                          <a:ea typeface="Calibri" pitchFamily="34" charset="-122"/>
+                          <a:cs typeface="Calibri" pitchFamily="34" charset="-120"/>
+                        </a:rPr>
+                        <a:t>Total operating cost</a:t>
+                      </a:r>
+                      <a:endParaRPr lang="en-US" sz="1000" dirty="0">
+                        <a:latin typeface="Calibri" charset="0"/>
+                        <a:ea typeface="Calibri" charset="0"/>
+                        <a:cs typeface="Calibri" charset="0"/>
+                      </a:endParaRPr>
+                    </a:p>
+                  </a:txBody>
+                  <a:tcPr marL="0" marR="76200" marT="63500" marB="63500" anchor="ctr">
+                    <a:lnL w="0" cap="flat" cmpd="sng" algn="ctr">
+                      <a:solidFill>
+                        <a:srgbClr val="666666"/>
+                      </a:solidFill>
+                      <a:prstDash val="solid"/>
+                      <a:round/>
+                      <a:headEnd type="none" w="med" len="med"/>
+                      <a:tailEnd type="none" w="med" len="med"/>
+                    </a:lnL>
+                    <a:lnR w="0" cap="flat" cmpd="sng" algn="ctr">
+                      <a:solidFill>
+                        <a:srgbClr val="666666"/>
+                      </a:solidFill>
+                      <a:prstDash val="solid"/>
+                      <a:round/>
+                      <a:headEnd type="none" w="med" len="med"/>
+                      <a:tailEnd type="none" w="med" len="med"/>
+                    </a:lnR>
+                    <a:lnT w="0" cap="flat" cmpd="sng" algn="ctr">
+                      <a:solidFill>
+                        <a:srgbClr val="666666"/>
+                      </a:solidFill>
+                      <a:prstDash val="solid"/>
+                      <a:round/>
+                      <a:headEnd type="none" w="med" len="med"/>
+                      <a:tailEnd type="none" w="med" len="med"/>
+                    </a:lnT>
+                    <a:lnB w="7620" cap="flat" cmpd="sng" algn="ctr">
+                      <a:solidFill>
+                        <a:srgbClr val="E2E4EA"/>
+                      </a:solidFill>
+                      <a:prstDash val="solid"/>
+                      <a:round/>
+                      <a:headEnd type="none" w="med" len="med"/>
+                      <a:tailEnd type="none" w="med" len="med"/>
+                    </a:lnB>
+                    <a:solidFill>
+                      <a:srgbClr val="FBF1EE"/>
+                    </a:solidFill>
+                  </a:tcPr>
+                </a:tc>
+                <a:tc>
+                  <a:txBody>
+                    <a:bodyPr/>
+                    <a:lstStyle/>
+                    <a:p>
+                      <a:pPr algn="r" indent="0" marL="0">
+                        <a:buNone/>
+                      </a:pPr>
+                      <a:r>
+                        <a:rPr lang="en-US" sz="1000" b="1" dirty="0">
+                          <a:solidFill>
+                            <a:srgbClr val="0A1426"/>
+                          </a:solidFill>
+                          <a:latin typeface="Calibri" pitchFamily="34" charset="0"/>
+                          <a:ea typeface="Calibri" pitchFamily="34" charset="-122"/>
+                          <a:cs typeface="Calibri" pitchFamily="34" charset="-120"/>
+                        </a:rPr>
+                        <a:t>2.21</a:t>
+                      </a:r>
+                      <a:endParaRPr lang="en-US" sz="1000" dirty="0">
+                        <a:latin typeface="Calibri" charset="0"/>
+                        <a:ea typeface="Calibri" charset="0"/>
+                        <a:cs typeface="Calibri" charset="0"/>
+                      </a:endParaRPr>
+                    </a:p>
+                  </a:txBody>
+                  <a:tcPr marL="0" marR="76200" marT="63500" marB="63500" anchor="ctr">
+                    <a:lnL w="0" cap="flat" cmpd="sng" algn="ctr">
+                      <a:solidFill>
+                        <a:srgbClr val="666666"/>
+                      </a:solidFill>
+                      <a:prstDash val="solid"/>
+                      <a:round/>
+                      <a:headEnd type="none" w="med" len="med"/>
+                      <a:tailEnd type="none" w="med" len="med"/>
+                    </a:lnL>
+                    <a:lnR w="0" cap="flat" cmpd="sng" algn="ctr">
+                      <a:solidFill>
+                        <a:srgbClr val="666666"/>
+                      </a:solidFill>
+                      <a:prstDash val="solid"/>
+                      <a:round/>
+                      <a:headEnd type="none" w="med" len="med"/>
+                      <a:tailEnd type="none" w="med" len="med"/>
+                    </a:lnR>
+                    <a:lnT w="0" cap="flat" cmpd="sng" algn="ctr">
+                      <a:solidFill>
+                        <a:srgbClr val="666666"/>
+                      </a:solidFill>
+                      <a:prstDash val="solid"/>
+                      <a:round/>
+                      <a:headEnd type="none" w="med" len="med"/>
+                      <a:tailEnd type="none" w="med" len="med"/>
+                    </a:lnT>
+                    <a:lnB w="7620" cap="flat" cmpd="sng" algn="ctr">
+                      <a:solidFill>
+                        <a:srgbClr val="E2E4EA"/>
+                      </a:solidFill>
+                      <a:prstDash val="solid"/>
+                      <a:round/>
+                      <a:headEnd type="none" w="med" len="med"/>
+                      <a:tailEnd type="none" w="med" len="med"/>
+                    </a:lnB>
+                    <a:solidFill>
+                      <a:srgbClr val="FBF1EE"/>
+                    </a:solidFill>
+                  </a:tcPr>
+                </a:tc>
+                <a:tc>
+                  <a:txBody>
+                    <a:bodyPr/>
+                    <a:lstStyle/>
+                    <a:p>
+                      <a:pPr algn="r" indent="0" marL="0">
+                        <a:buNone/>
+                      </a:pPr>
+                      <a:r>
+                        <a:rPr lang="en-US" sz="1000" b="1" dirty="0">
+                          <a:solidFill>
+                            <a:srgbClr val="0A1426"/>
+                          </a:solidFill>
+                          <a:latin typeface="Calibri" pitchFamily="34" charset="0"/>
+                          <a:ea typeface="Calibri" pitchFamily="34" charset="-122"/>
+                          <a:cs typeface="Calibri" pitchFamily="34" charset="-120"/>
+                        </a:rPr>
+                        <a:t>2.45</a:t>
+                      </a:r>
+                      <a:endParaRPr lang="en-US" sz="1000" dirty="0">
+                        <a:latin typeface="Calibri" charset="0"/>
+                        <a:ea typeface="Calibri" charset="0"/>
+                        <a:cs typeface="Calibri" charset="0"/>
+                      </a:endParaRPr>
+                    </a:p>
+                  </a:txBody>
+                  <a:tcPr marL="0" marR="76200" marT="63500" marB="63500" anchor="ctr">
+                    <a:lnL w="0" cap="flat" cmpd="sng" algn="ctr">
+                      <a:solidFill>
+                        <a:srgbClr val="666666"/>
+                      </a:solidFill>
+                      <a:prstDash val="solid"/>
+                      <a:round/>
+                      <a:headEnd type="none" w="med" len="med"/>
+                      <a:tailEnd type="none" w="med" len="med"/>
+                    </a:lnL>
+                    <a:lnR w="0" cap="flat" cmpd="sng" algn="ctr">
+                      <a:solidFill>
+                        <a:srgbClr val="666666"/>
+                      </a:solidFill>
+                      <a:prstDash val="solid"/>
+                      <a:round/>
+                      <a:headEnd type="none" w="med" len="med"/>
+                      <a:tailEnd type="none" w="med" len="med"/>
+                    </a:lnR>
+                    <a:lnT w="0" cap="flat" cmpd="sng" algn="ctr">
+                      <a:solidFill>
+                        <a:srgbClr val="666666"/>
+                      </a:solidFill>
+                      <a:prstDash val="solid"/>
+                      <a:round/>
+                      <a:headEnd type="none" w="med" len="med"/>
+                      <a:tailEnd type="none" w="med" len="med"/>
+                    </a:lnT>
+                    <a:lnB w="7620" cap="flat" cmpd="sng" algn="ctr">
+                      <a:solidFill>
+                        <a:srgbClr val="E2E4EA"/>
+                      </a:solidFill>
+                      <a:prstDash val="solid"/>
+                      <a:round/>
+                      <a:headEnd type="none" w="med" len="med"/>
+                      <a:tailEnd type="none" w="med" len="med"/>
+                    </a:lnB>
+                    <a:solidFill>
+                      <a:srgbClr val="FBF1EE"/>
+                    </a:solidFill>
+                  </a:tcPr>
+                </a:tc>
+                <a:tc>
+                  <a:txBody>
+                    <a:bodyPr/>
+                    <a:lstStyle/>
+                    <a:p>
+                      <a:pPr algn="r" indent="0" marL="0">
+                        <a:buNone/>
+                      </a:pPr>
+                      <a:r>
+                        <a:rPr lang="en-US" sz="1000" b="1" dirty="0">
+                          <a:solidFill>
+                            <a:srgbClr val="0A1426"/>
+                          </a:solidFill>
+                          <a:latin typeface="Calibri" pitchFamily="34" charset="0"/>
+                          <a:ea typeface="Calibri" pitchFamily="34" charset="-122"/>
+                          <a:cs typeface="Calibri" pitchFamily="34" charset="-120"/>
+                        </a:rPr>
+                        <a:t>2.68</a:t>
+                      </a:r>
+                      <a:endParaRPr lang="en-US" sz="1000" dirty="0">
+                        <a:latin typeface="Calibri" charset="0"/>
+                        <a:ea typeface="Calibri" charset="0"/>
+                        <a:cs typeface="Calibri" charset="0"/>
+                      </a:endParaRPr>
+                    </a:p>
+                  </a:txBody>
+                  <a:tcPr marL="0" marR="76200" marT="63500" marB="63500" anchor="ctr">
+                    <a:lnL w="0" cap="flat" cmpd="sng" algn="ctr">
+                      <a:solidFill>
+                        <a:srgbClr val="666666"/>
+                      </a:solidFill>
+                      <a:prstDash val="solid"/>
+                      <a:round/>
+                      <a:headEnd type="none" w="med" len="med"/>
+                      <a:tailEnd type="none" w="med" len="med"/>
+                    </a:lnL>
+                    <a:lnR w="0" cap="flat" cmpd="sng" algn="ctr">
+                      <a:solidFill>
+                        <a:srgbClr val="666666"/>
+                      </a:solidFill>
+                      <a:prstDash val="solid"/>
+                      <a:round/>
+                      <a:headEnd type="none" w="med" len="med"/>
+                      <a:tailEnd type="none" w="med" len="med"/>
+                    </a:lnR>
+                    <a:lnT w="0" cap="flat" cmpd="sng" algn="ctr">
+                      <a:solidFill>
+                        <a:srgbClr val="666666"/>
+                      </a:solidFill>
+                      <a:prstDash val="solid"/>
+                      <a:round/>
+                      <a:headEnd type="none" w="med" len="med"/>
+                      <a:tailEnd type="none" w="med" len="med"/>
+                    </a:lnT>
+                    <a:lnB w="7620" cap="flat" cmpd="sng" algn="ctr">
+                      <a:solidFill>
+                        <a:srgbClr val="E2E4EA"/>
+                      </a:solidFill>
+                      <a:prstDash val="solid"/>
+                      <a:round/>
+                      <a:headEnd type="none" w="med" len="med"/>
+                      <a:tailEnd type="none" w="med" len="med"/>
+                    </a:lnB>
+                    <a:solidFill>
+                      <a:srgbClr val="FBF1EE"/>
+                    </a:solidFill>
+                  </a:tcPr>
+                </a:tc>
+                <a:tc>
+                  <a:txBody>
+                    <a:bodyPr/>
+                    <a:lstStyle/>
+                    <a:p>
+                      <a:pPr algn="r" indent="0" marL="0">
+                        <a:buNone/>
+                      </a:pPr>
+                      <a:r>
+                        <a:rPr lang="en-US" sz="1000" b="1" dirty="0">
+                          <a:solidFill>
+                            <a:srgbClr val="0A1426"/>
+                          </a:solidFill>
+                          <a:latin typeface="Calibri" pitchFamily="34" charset="0"/>
+                          <a:ea typeface="Calibri" pitchFamily="34" charset="-122"/>
+                          <a:cs typeface="Calibri" pitchFamily="34" charset="-120"/>
+                        </a:rPr>
+                        <a:t>2.89</a:t>
+                      </a:r>
+                      <a:endParaRPr lang="en-US" sz="1000" dirty="0">
+                        <a:latin typeface="Calibri" charset="0"/>
+                        <a:ea typeface="Calibri" charset="0"/>
+                        <a:cs typeface="Calibri" charset="0"/>
+                      </a:endParaRPr>
+                    </a:p>
+                  </a:txBody>
+                  <a:tcPr marL="0" marR="76200" marT="63500" marB="63500" anchor="ctr">
+                    <a:lnL w="0" cap="flat" cmpd="sng" algn="ctr">
+                      <a:solidFill>
+                        <a:srgbClr val="666666"/>
+                      </a:solidFill>
+                      <a:prstDash val="solid"/>
+                      <a:round/>
+                      <a:headEnd type="none" w="med" len="med"/>
+                      <a:tailEnd type="none" w="med" len="med"/>
+                    </a:lnL>
+                    <a:lnR w="0" cap="flat" cmpd="sng" algn="ctr">
+                      <a:solidFill>
+                        <a:srgbClr val="666666"/>
+                      </a:solidFill>
+                      <a:prstDash val="solid"/>
+                      <a:round/>
+                      <a:headEnd type="none" w="med" len="med"/>
+                      <a:tailEnd type="none" w="med" len="med"/>
+                    </a:lnR>
+                    <a:lnT w="0" cap="flat" cmpd="sng" algn="ctr">
+                      <a:solidFill>
+                        <a:srgbClr val="666666"/>
+                      </a:solidFill>
+                      <a:prstDash val="solid"/>
+                      <a:round/>
+                      <a:headEnd type="none" w="med" len="med"/>
+                      <a:tailEnd type="none" w="med" len="med"/>
+                    </a:lnT>
+                    <a:lnB w="7620" cap="flat" cmpd="sng" algn="ctr">
+                      <a:solidFill>
+                        <a:srgbClr val="E2E4EA"/>
+                      </a:solidFill>
+                      <a:prstDash val="solid"/>
+                      <a:round/>
+                      <a:headEnd type="none" w="med" len="med"/>
+                      <a:tailEnd type="none" w="med" len="med"/>
+                    </a:lnB>
+                    <a:solidFill>
+                      <a:srgbClr val="FBF1EE"/>
+                    </a:solidFill>
+                  </a:tcPr>
+                </a:tc>
+                <a:tc>
+                  <a:txBody>
+                    <a:bodyPr/>
+                    <a:lstStyle/>
+                    <a:p>
+                      <a:pPr algn="r" indent="0" marL="0">
+                        <a:buNone/>
+                      </a:pPr>
+                      <a:r>
+                        <a:rPr lang="en-US" sz="1000" b="1" dirty="0">
+                          <a:solidFill>
+                            <a:srgbClr val="0A1426"/>
+                          </a:solidFill>
+                          <a:latin typeface="Calibri" pitchFamily="34" charset="0"/>
+                          <a:ea typeface="Calibri" pitchFamily="34" charset="-122"/>
+                          <a:cs typeface="Calibri" pitchFamily="34" charset="-120"/>
+                        </a:rPr>
+                        <a:t>3.13</a:t>
+                      </a:r>
+                      <a:endParaRPr lang="en-US" sz="1000" dirty="0">
+                        <a:latin typeface="Calibri" charset="0"/>
+                        <a:ea typeface="Calibri" charset="0"/>
+                        <a:cs typeface="Calibri" charset="0"/>
+                      </a:endParaRPr>
+                    </a:p>
+                  </a:txBody>
+                  <a:tcPr marL="0" marR="76200" marT="63500" marB="63500" anchor="ctr">
+                    <a:lnL w="0" cap="flat" cmpd="sng" algn="ctr">
+                      <a:solidFill>
+                        <a:srgbClr val="666666"/>
+                      </a:solidFill>
+                      <a:prstDash val="solid"/>
+                      <a:round/>
+                      <a:headEnd type="none" w="med" len="med"/>
+                      <a:tailEnd type="none" w="med" len="med"/>
+                    </a:lnL>
+                    <a:lnR w="0" cap="flat" cmpd="sng" algn="ctr">
+                      <a:solidFill>
+                        <a:srgbClr val="666666"/>
+                      </a:solidFill>
+                      <a:prstDash val="solid"/>
+                      <a:round/>
+                      <a:headEnd type="none" w="med" len="med"/>
+                      <a:tailEnd type="none" w="med" len="med"/>
+                    </a:lnR>
+                    <a:lnT w="0" cap="flat" cmpd="sng" algn="ctr">
+                      <a:solidFill>
+                        <a:srgbClr val="666666"/>
+                      </a:solidFill>
+                      <a:prstDash val="solid"/>
+                      <a:round/>
+                      <a:headEnd type="none" w="med" len="med"/>
+                      <a:tailEnd type="none" w="med" len="med"/>
+                    </a:lnT>
+                    <a:lnB w="7620" cap="flat" cmpd="sng" algn="ctr">
+                      <a:solidFill>
+                        <a:srgbClr val="E2E4EA"/>
+                      </a:solidFill>
+                      <a:prstDash val="solid"/>
+                      <a:round/>
+                      <a:headEnd type="none" w="med" len="med"/>
+                      <a:tailEnd type="none" w="med" len="med"/>
+                    </a:lnB>
+                    <a:solidFill>
+                      <a:srgbClr val="FBF1EE"/>
+                    </a:solidFill>
+                  </a:tcPr>
+                </a:tc>
+                <a:tc>
+                  <a:txBody>
+                    <a:bodyPr/>
+                    <a:lstStyle/>
+                    <a:p>
+                      <a:pPr algn="r" indent="0" marL="0">
+                        <a:buNone/>
+                      </a:pPr>
+                      <a:r>
+                        <a:rPr lang="en-US" sz="1000" b="1" dirty="0">
+                          <a:solidFill>
+                            <a:srgbClr val="0A1426"/>
+                          </a:solidFill>
+                          <a:latin typeface="Calibri" pitchFamily="34" charset="0"/>
+                          <a:ea typeface="Calibri" pitchFamily="34" charset="-122"/>
+                          <a:cs typeface="Calibri" pitchFamily="34" charset="-120"/>
+                        </a:rPr>
+                        <a:t>3.38</a:t>
+                      </a:r>
+                      <a:endParaRPr lang="en-US" sz="1000" dirty="0">
+                        <a:latin typeface="Calibri" charset="0"/>
+                        <a:ea typeface="Calibri" charset="0"/>
+                        <a:cs typeface="Calibri" charset="0"/>
+                      </a:endParaRPr>
+                    </a:p>
+                  </a:txBody>
+                  <a:tcPr marL="0" marR="76200" marT="63500" marB="63500" anchor="ctr">
+                    <a:lnL w="0" cap="flat" cmpd="sng" algn="ctr">
+                      <a:solidFill>
+                        <a:srgbClr val="666666"/>
+                      </a:solidFill>
+                      <a:prstDash val="solid"/>
+                      <a:round/>
+                      <a:headEnd type="none" w="med" len="med"/>
+                      <a:tailEnd type="none" w="med" len="med"/>
+                    </a:lnL>
+                    <a:lnR w="0" cap="flat" cmpd="sng" algn="ctr">
+                      <a:solidFill>
+                        <a:srgbClr val="666666"/>
+                      </a:solidFill>
+                      <a:prstDash val="solid"/>
+                      <a:round/>
+                      <a:headEnd type="none" w="med" len="med"/>
+                      <a:tailEnd type="none" w="med" len="med"/>
+                    </a:lnR>
+                    <a:lnT w="0" cap="flat" cmpd="sng" algn="ctr">
+                      <a:solidFill>
+                        <a:srgbClr val="666666"/>
+                      </a:solidFill>
+                      <a:prstDash val="solid"/>
+                      <a:round/>
+                      <a:headEnd type="none" w="med" len="med"/>
+                      <a:tailEnd type="none" w="med" len="med"/>
+                    </a:lnT>
+                    <a:lnB w="7620" cap="flat" cmpd="sng" algn="ctr">
+                      <a:solidFill>
+                        <a:srgbClr val="E2E4EA"/>
+                      </a:solidFill>
+                      <a:prstDash val="solid"/>
+                      <a:round/>
+                      <a:headEnd type="none" w="med" len="med"/>
+                      <a:tailEnd type="none" w="med" len="med"/>
+                    </a:lnB>
+                    <a:solidFill>
+                      <a:srgbClr val="FBF1EE"/>
+                    </a:solidFill>
+                  </a:tcPr>
+                </a:tc>
+                <a:tc>
+                  <a:txBody>
+                    <a:bodyPr/>
+                    <a:lstStyle/>
+                    <a:p>
+                      <a:pPr algn="r" indent="0" marL="0">
+                        <a:buNone/>
+                      </a:pPr>
+                      <a:r>
+                        <a:rPr lang="en-US" sz="1000" b="1" dirty="0">
+                          <a:solidFill>
+                            <a:srgbClr val="0A1426"/>
+                          </a:solidFill>
+                          <a:latin typeface="Calibri" pitchFamily="34" charset="0"/>
+                          <a:ea typeface="Calibri" pitchFamily="34" charset="-122"/>
+                          <a:cs typeface="Calibri" pitchFamily="34" charset="-120"/>
+                        </a:rPr>
+                        <a:t>3.66</a:t>
+                      </a:r>
+                      <a:endParaRPr lang="en-US" sz="1000" dirty="0">
+                        <a:latin typeface="Calibri" charset="0"/>
+                        <a:ea typeface="Calibri" charset="0"/>
+                        <a:cs typeface="Calibri" charset="0"/>
+                      </a:endParaRPr>
+                    </a:p>
+                  </a:txBody>
+                  <a:tcPr marL="0" marR="76200" marT="63500" marB="63500" anchor="ctr">
+                    <a:lnL w="0" cap="flat" cmpd="sng" algn="ctr">
+                      <a:solidFill>
+                        <a:srgbClr val="666666"/>
+                      </a:solidFill>
+                      <a:prstDash val="solid"/>
+                      <a:round/>
+                      <a:headEnd type="none" w="med" len="med"/>
+                      <a:tailEnd type="none" w="med" len="med"/>
+                    </a:lnL>
+                    <a:lnR w="0" cap="flat" cmpd="sng" algn="ctr">
+                      <a:solidFill>
+                        <a:srgbClr val="666666"/>
+                      </a:solidFill>
+                      <a:prstDash val="solid"/>
+                      <a:round/>
+                      <a:headEnd type="none" w="med" len="med"/>
+                      <a:tailEnd type="none" w="med" len="med"/>
+                    </a:lnR>
+                    <a:lnT w="0" cap="flat" cmpd="sng" algn="ctr">
+                      <a:solidFill>
+                        <a:srgbClr val="666666"/>
+                      </a:solidFill>
+                      <a:prstDash val="solid"/>
+                      <a:round/>
+                      <a:headEnd type="none" w="med" len="med"/>
+                      <a:tailEnd type="none" w="med" len="med"/>
+                    </a:lnT>
+                    <a:lnB w="7620" cap="flat" cmpd="sng" algn="ctr">
+                      <a:solidFill>
+                        <a:srgbClr val="E2E4EA"/>
+                      </a:solidFill>
+                      <a:prstDash val="solid"/>
+                      <a:round/>
+                      <a:headEnd type="none" w="med" len="med"/>
+                      <a:tailEnd type="none" w="med" len="med"/>
+                    </a:lnB>
+                    <a:solidFill>
+                      <a:srgbClr val="FBF1EE"/>
+                    </a:solidFill>
+                  </a:tcPr>
+                </a:tc>
+              </a:tr>
+              <a:tr h="256032">
+                <a:tc>
+                  <a:txBody>
+                    <a:bodyPr/>
+                    <a:lstStyle/>
+                    <a:p>
+                      <a:pPr algn="l" indent="0" marL="0">
+                        <a:buNone/>
+                      </a:pPr>
+                      <a:r>
+                        <a:rPr lang="en-US" sz="1000" b="1" dirty="0">
                           <a:solidFill>
                             <a:srgbClr val="3B4660"/>
                           </a:solidFill>
@@ -30157,9 +31795,9 @@
                           <a:ea typeface="Calibri" pitchFamily="34" charset="-122"/>
                           <a:cs typeface="Calibri" pitchFamily="34" charset="-120"/>
                         </a:rPr>
-                        <a:t>Corporate overhead</a:t>
-                      </a:r>
-                      <a:endParaRPr lang="en-US" sz="1050" dirty="0">
+                        <a:t>Revenue</a:t>
+                      </a:r>
+                      <a:endParaRPr lang="en-US" sz="1000" dirty="0">
                         <a:latin typeface="Calibri" charset="0"/>
                         <a:ea typeface="Calibri" charset="0"/>
                         <a:cs typeface="Calibri" charset="0"/>
@@ -30204,7 +31842,7 @@
                       <a:tailEnd type="none" w="med" len="med"/>
                     </a:lnB>
                     <a:solidFill>
-                      <a:srgbClr val="FFFFFF"/>
+                      <a:srgbClr val="F2F6FE"/>
                     </a:solidFill>
                   </a:tcPr>
                 </a:tc>
@@ -30217,7 +31855,7 @@
                         <a:buNone/>
                       </a:pPr>
                       <a:r>
-                        <a:rPr lang="en-US" sz="1050" dirty="0">
+                        <a:rPr lang="en-US" sz="1000" dirty="0">
                           <a:solidFill>
                             <a:srgbClr val="3B4660"/>
                           </a:solidFill>
@@ -30225,9 +31863,9 @@
                           <a:ea typeface="Calibri" pitchFamily="34" charset="-122"/>
                           <a:cs typeface="Calibri" pitchFamily="34" charset="-120"/>
                         </a:rPr>
-                        <a:t>0.12</a:t>
-                      </a:r>
-                      <a:endParaRPr lang="en-US" sz="1050" dirty="0">
+                        <a:t>2.35</a:t>
+                      </a:r>
+                      <a:endParaRPr lang="en-US" sz="1000" dirty="0">
                         <a:latin typeface="Calibri" charset="0"/>
                         <a:ea typeface="Calibri" charset="0"/>
                         <a:cs typeface="Calibri" charset="0"/>
@@ -30272,7 +31910,7 @@
                       <a:tailEnd type="none" w="med" len="med"/>
                     </a:lnB>
                     <a:solidFill>
-                      <a:srgbClr val="FFFFFF"/>
+                      <a:srgbClr val="F2F6FE"/>
                     </a:solidFill>
                   </a:tcPr>
                 </a:tc>
@@ -30285,7 +31923,7 @@
                         <a:buNone/>
                       </a:pPr>
                       <a:r>
-                        <a:rPr lang="en-US" sz="1050" dirty="0">
+                        <a:rPr lang="en-US" sz="1000" dirty="0">
                           <a:solidFill>
                             <a:srgbClr val="3B4660"/>
                           </a:solidFill>
@@ -30293,9 +31931,9 @@
                           <a:ea typeface="Calibri" pitchFamily="34" charset="-122"/>
                           <a:cs typeface="Calibri" pitchFamily="34" charset="-120"/>
                         </a:rPr>
-                        <a:t>0.16</a:t>
-                      </a:r>
-                      <a:endParaRPr lang="en-US" sz="1050" dirty="0">
+                        <a:t>2.87</a:t>
+                      </a:r>
+                      <a:endParaRPr lang="en-US" sz="1000" dirty="0">
                         <a:latin typeface="Calibri" charset="0"/>
                         <a:ea typeface="Calibri" charset="0"/>
                         <a:cs typeface="Calibri" charset="0"/>
@@ -30340,7 +31978,7 @@
                       <a:tailEnd type="none" w="med" len="med"/>
                     </a:lnB>
                     <a:solidFill>
-                      <a:srgbClr val="FFFFFF"/>
+                      <a:srgbClr val="F2F6FE"/>
                     </a:solidFill>
                   </a:tcPr>
                 </a:tc>
@@ -30353,7 +31991,7 @@
                         <a:buNone/>
                       </a:pPr>
                       <a:r>
-                        <a:rPr lang="en-US" sz="1050" dirty="0">
+                        <a:rPr lang="en-US" sz="1000" dirty="0">
                           <a:solidFill>
                             <a:srgbClr val="3B4660"/>
                           </a:solidFill>
@@ -30361,9 +31999,9 @@
                           <a:ea typeface="Calibri" pitchFamily="34" charset="-122"/>
                           <a:cs typeface="Calibri" pitchFamily="34" charset="-120"/>
                         </a:rPr>
-                        <a:t>0.19</a:t>
-                      </a:r>
-                      <a:endParaRPr lang="en-US" sz="1050" dirty="0">
+                        <a:t>3.41</a:t>
+                      </a:r>
+                      <a:endParaRPr lang="en-US" sz="1000" dirty="0">
                         <a:latin typeface="Calibri" charset="0"/>
                         <a:ea typeface="Calibri" charset="0"/>
                         <a:cs typeface="Calibri" charset="0"/>
@@ -30408,7 +32046,7 @@
                       <a:tailEnd type="none" w="med" len="med"/>
                     </a:lnB>
                     <a:solidFill>
-                      <a:srgbClr val="FFFFFF"/>
+                      <a:srgbClr val="F2F6FE"/>
                     </a:solidFill>
                   </a:tcPr>
                 </a:tc>
@@ -30421,7 +32059,7 @@
                         <a:buNone/>
                       </a:pPr>
                       <a:r>
-                        <a:rPr lang="en-US" sz="1050" dirty="0">
+                        <a:rPr lang="en-US" sz="1000" dirty="0">
                           <a:solidFill>
                             <a:srgbClr val="3B4660"/>
                           </a:solidFill>
@@ -30429,9 +32067,9 @@
                           <a:ea typeface="Calibri" pitchFamily="34" charset="-122"/>
                           <a:cs typeface="Calibri" pitchFamily="34" charset="-120"/>
                         </a:rPr>
-                        <a:t>0.21</a:t>
-                      </a:r>
-                      <a:endParaRPr lang="en-US" sz="1050" dirty="0">
+                        <a:t>3.77</a:t>
+                      </a:r>
+                      <a:endParaRPr lang="en-US" sz="1000" dirty="0">
                         <a:latin typeface="Calibri" charset="0"/>
                         <a:ea typeface="Calibri" charset="0"/>
                         <a:cs typeface="Calibri" charset="0"/>
@@ -30476,7 +32114,7 @@
                       <a:tailEnd type="none" w="med" len="med"/>
                     </a:lnB>
                     <a:solidFill>
-                      <a:srgbClr val="FFFFFF"/>
+                      <a:srgbClr val="F2F6FE"/>
                     </a:solidFill>
                   </a:tcPr>
                 </a:tc>
@@ -30489,7 +32127,7 @@
                         <a:buNone/>
                       </a:pPr>
                       <a:r>
-                        <a:rPr lang="en-US" sz="1050" dirty="0">
+                        <a:rPr lang="en-US" sz="1000" dirty="0">
                           <a:solidFill>
                             <a:srgbClr val="3B4660"/>
                           </a:solidFill>
@@ -30497,9 +32135,9 @@
                           <a:ea typeface="Calibri" pitchFamily="34" charset="-122"/>
                           <a:cs typeface="Calibri" pitchFamily="34" charset="-120"/>
                         </a:rPr>
-                        <a:t>0.24</a:t>
-                      </a:r>
-                      <a:endParaRPr lang="en-US" sz="1050" dirty="0">
+                        <a:t>4.23</a:t>
+                      </a:r>
+                      <a:endParaRPr lang="en-US" sz="1000" dirty="0">
                         <a:latin typeface="Calibri" charset="0"/>
                         <a:ea typeface="Calibri" charset="0"/>
                         <a:cs typeface="Calibri" charset="0"/>
@@ -30544,7 +32182,7 @@
                       <a:tailEnd type="none" w="med" len="med"/>
                     </a:lnB>
                     <a:solidFill>
-                      <a:srgbClr val="FFFFFF"/>
+                      <a:srgbClr val="F2F6FE"/>
                     </a:solidFill>
                   </a:tcPr>
                 </a:tc>
@@ -30557,7 +32195,7 @@
                         <a:buNone/>
                       </a:pPr>
                       <a:r>
-                        <a:rPr lang="en-US" sz="1050" dirty="0">
+                        <a:rPr lang="en-US" sz="1000" dirty="0">
                           <a:solidFill>
                             <a:srgbClr val="3B4660"/>
                           </a:solidFill>
@@ -30565,9 +32203,9 @@
                           <a:ea typeface="Calibri" pitchFamily="34" charset="-122"/>
                           <a:cs typeface="Calibri" pitchFamily="34" charset="-120"/>
                         </a:rPr>
-                        <a:t>0.26</a:t>
-                      </a:r>
-                      <a:endParaRPr lang="en-US" sz="1050" dirty="0">
+                        <a:t>4.53</a:t>
+                      </a:r>
+                      <a:endParaRPr lang="en-US" sz="1000" dirty="0">
                         <a:latin typeface="Calibri" charset="0"/>
                         <a:ea typeface="Calibri" charset="0"/>
                         <a:cs typeface="Calibri" charset="0"/>
@@ -30612,7 +32250,7 @@
                       <a:tailEnd type="none" w="med" len="med"/>
                     </a:lnB>
                     <a:solidFill>
-                      <a:srgbClr val="FFFFFF"/>
+                      <a:srgbClr val="F2F6FE"/>
                     </a:solidFill>
                   </a:tcPr>
                 </a:tc>
@@ -30625,7 +32263,7 @@
                         <a:buNone/>
                       </a:pPr>
                       <a:r>
-                        <a:rPr lang="en-US" sz="1050" dirty="0">
+                        <a:rPr lang="en-US" sz="1000" dirty="0">
                           <a:solidFill>
                             <a:srgbClr val="3B4660"/>
                           </a:solidFill>
@@ -30633,9 +32271,9 @@
                           <a:ea typeface="Calibri" pitchFamily="34" charset="-122"/>
                           <a:cs typeface="Calibri" pitchFamily="34" charset="-120"/>
                         </a:rPr>
-                        <a:t>0.29</a:t>
-                      </a:r>
-                      <a:endParaRPr lang="en-US" sz="1050" dirty="0">
+                        <a:t>5.02</a:t>
+                      </a:r>
+                      <a:endParaRPr lang="en-US" sz="1000" dirty="0">
                         <a:latin typeface="Calibri" charset="0"/>
                         <a:ea typeface="Calibri" charset="0"/>
                         <a:cs typeface="Calibri" charset="0"/>
@@ -30680,12 +32318,12 @@
                       <a:tailEnd type="none" w="med" len="med"/>
                     </a:lnB>
                     <a:solidFill>
-                      <a:srgbClr val="FFFFFF"/>
+                      <a:srgbClr val="F2F6FE"/>
                     </a:solidFill>
                   </a:tcPr>
                 </a:tc>
               </a:tr>
-              <a:tr h="283464">
+              <a:tr h="256032">
                 <a:tc>
                   <a:txBody>
                     <a:bodyPr/>
@@ -30695,7 +32333,7 @@
                         <a:buNone/>
                       </a:pPr>
                       <a:r>
-                        <a:rPr lang="en-US" sz="1050" dirty="0">
+                        <a:rPr lang="en-US" sz="1000" b="1" dirty="0">
                           <a:solidFill>
                             <a:srgbClr val="3B4660"/>
                           </a:solidFill>
@@ -30703,9 +32341,9 @@
                           <a:ea typeface="Calibri" pitchFamily="34" charset="-122"/>
                           <a:cs typeface="Calibri" pitchFamily="34" charset="-120"/>
                         </a:rPr>
-                        <a:t>Other operating cost</a:t>
-                      </a:r>
-                      <a:endParaRPr lang="en-US" sz="1050" dirty="0">
+                        <a:t>EBITDA</a:t>
+                      </a:r>
+                      <a:endParaRPr lang="en-US" sz="1000" dirty="0">
                         <a:latin typeface="Calibri" charset="0"/>
                         <a:ea typeface="Calibri" charset="0"/>
                         <a:cs typeface="Calibri" charset="0"/>
@@ -30750,7 +32388,7 @@
                       <a:tailEnd type="none" w="med" len="med"/>
                     </a:lnB>
                     <a:solidFill>
-                      <a:srgbClr val="FFFFFF"/>
+                      <a:srgbClr val="F2F6FE"/>
                     </a:solidFill>
                   </a:tcPr>
                 </a:tc>
@@ -30763,7 +32401,7 @@
                         <a:buNone/>
                       </a:pPr>
                       <a:r>
-                        <a:rPr lang="en-US" sz="1050" dirty="0">
+                        <a:rPr lang="en-US" sz="1000" dirty="0">
                           <a:solidFill>
                             <a:srgbClr val="3B4660"/>
                           </a:solidFill>
@@ -30771,9 +32409,9 @@
                           <a:ea typeface="Calibri" pitchFamily="34" charset="-122"/>
                           <a:cs typeface="Calibri" pitchFamily="34" charset="-120"/>
                         </a:rPr>
-                        <a:t>0.29</a:t>
-                      </a:r>
-                      <a:endParaRPr lang="en-US" sz="1050" dirty="0">
+                        <a:t>0.14</a:t>
+                      </a:r>
+                      <a:endParaRPr lang="en-US" sz="1000" dirty="0">
                         <a:latin typeface="Calibri" charset="0"/>
                         <a:ea typeface="Calibri" charset="0"/>
                         <a:cs typeface="Calibri" charset="0"/>
@@ -30818,7 +32456,7 @@
                       <a:tailEnd type="none" w="med" len="med"/>
                     </a:lnB>
                     <a:solidFill>
-                      <a:srgbClr val="FFFFFF"/>
+                      <a:srgbClr val="F2F6FE"/>
                     </a:solidFill>
                   </a:tcPr>
                 </a:tc>
@@ -30831,7 +32469,7 @@
                         <a:buNone/>
                       </a:pPr>
                       <a:r>
-                        <a:rPr lang="en-US" sz="1050" dirty="0">
+                        <a:rPr lang="en-US" sz="1000" dirty="0">
                           <a:solidFill>
                             <a:srgbClr val="3B4660"/>
                           </a:solidFill>
@@ -30839,9 +32477,9 @@
                           <a:ea typeface="Calibri" pitchFamily="34" charset="-122"/>
                           <a:cs typeface="Calibri" pitchFamily="34" charset="-120"/>
                         </a:rPr>
-                        <a:t>0.35</a:t>
-                      </a:r>
-                      <a:endParaRPr lang="en-US" sz="1050" dirty="0">
+                        <a:t>0.42</a:t>
+                      </a:r>
+                      <a:endParaRPr lang="en-US" sz="1000" dirty="0">
                         <a:latin typeface="Calibri" charset="0"/>
                         <a:ea typeface="Calibri" charset="0"/>
                         <a:cs typeface="Calibri" charset="0"/>
@@ -30886,7 +32524,7 @@
                       <a:tailEnd type="none" w="med" len="med"/>
                     </a:lnB>
                     <a:solidFill>
-                      <a:srgbClr val="FFFFFF"/>
+                      <a:srgbClr val="F2F6FE"/>
                     </a:solidFill>
                   </a:tcPr>
                 </a:tc>
@@ -30899,7 +32537,7 @@
                         <a:buNone/>
                       </a:pPr>
                       <a:r>
-                        <a:rPr lang="en-US" sz="1050" dirty="0">
+                        <a:rPr lang="en-US" sz="1000" dirty="0">
                           <a:solidFill>
                             <a:srgbClr val="3B4660"/>
                           </a:solidFill>
@@ -30907,9 +32545,9 @@
                           <a:ea typeface="Calibri" pitchFamily="34" charset="-122"/>
                           <a:cs typeface="Calibri" pitchFamily="34" charset="-120"/>
                         </a:rPr>
-                        <a:t>0.40</a:t>
-                      </a:r>
-                      <a:endParaRPr lang="en-US" sz="1050" dirty="0">
+                        <a:t>0.73</a:t>
+                      </a:r>
+                      <a:endParaRPr lang="en-US" sz="1000" dirty="0">
                         <a:latin typeface="Calibri" charset="0"/>
                         <a:ea typeface="Calibri" charset="0"/>
                         <a:cs typeface="Calibri" charset="0"/>
@@ -30954,7 +32592,7 @@
                       <a:tailEnd type="none" w="med" len="med"/>
                     </a:lnB>
                     <a:solidFill>
-                      <a:srgbClr val="FFFFFF"/>
+                      <a:srgbClr val="F2F6FE"/>
                     </a:solidFill>
                   </a:tcPr>
                 </a:tc>
@@ -30967,7 +32605,7 @@
                         <a:buNone/>
                       </a:pPr>
                       <a:r>
-                        <a:rPr lang="en-US" sz="1050" dirty="0">
+                        <a:rPr lang="en-US" sz="1000" dirty="0">
                           <a:solidFill>
                             <a:srgbClr val="3B4660"/>
                           </a:solidFill>
@@ -30975,9 +32613,9 @@
                           <a:ea typeface="Calibri" pitchFamily="34" charset="-122"/>
                           <a:cs typeface="Calibri" pitchFamily="34" charset="-120"/>
                         </a:rPr>
-                        <a:t>0.46</a:t>
-                      </a:r>
-                      <a:endParaRPr lang="en-US" sz="1050" dirty="0">
+                        <a:t>0.87</a:t>
+                      </a:r>
+                      <a:endParaRPr lang="en-US" sz="1000" dirty="0">
                         <a:latin typeface="Calibri" charset="0"/>
                         <a:ea typeface="Calibri" charset="0"/>
                         <a:cs typeface="Calibri" charset="0"/>
@@ -31022,7 +32660,7 @@
                       <a:tailEnd type="none" w="med" len="med"/>
                     </a:lnB>
                     <a:solidFill>
-                      <a:srgbClr val="FFFFFF"/>
+                      <a:srgbClr val="F2F6FE"/>
                     </a:solidFill>
                   </a:tcPr>
                 </a:tc>
@@ -31035,7 +32673,7 @@
                         <a:buNone/>
                       </a:pPr>
                       <a:r>
-                        <a:rPr lang="en-US" sz="1050" dirty="0">
+                        <a:rPr lang="en-US" sz="1000" dirty="0">
                           <a:solidFill>
                             <a:srgbClr val="3B4660"/>
                           </a:solidFill>
@@ -31043,9 +32681,9 @@
                           <a:ea typeface="Calibri" pitchFamily="34" charset="-122"/>
                           <a:cs typeface="Calibri" pitchFamily="34" charset="-120"/>
                         </a:rPr>
-                        <a:t>0.50</a:t>
-                      </a:r>
-                      <a:endParaRPr lang="en-US" sz="1050" dirty="0">
+                        <a:t>1.10</a:t>
+                      </a:r>
+                      <a:endParaRPr lang="en-US" sz="1000" dirty="0">
                         <a:latin typeface="Calibri" charset="0"/>
                         <a:ea typeface="Calibri" charset="0"/>
                         <a:cs typeface="Calibri" charset="0"/>
@@ -31090,7 +32728,7 @@
                       <a:tailEnd type="none" w="med" len="med"/>
                     </a:lnB>
                     <a:solidFill>
-                      <a:srgbClr val="FFFFFF"/>
+                      <a:srgbClr val="F2F6FE"/>
                     </a:solidFill>
                   </a:tcPr>
                 </a:tc>
@@ -31103,7 +32741,7 @@
                         <a:buNone/>
                       </a:pPr>
                       <a:r>
-                        <a:rPr lang="en-US" sz="1050" dirty="0">
+                        <a:rPr lang="en-US" sz="1000" dirty="0">
                           <a:solidFill>
                             <a:srgbClr val="3B4660"/>
                           </a:solidFill>
@@ -31111,9 +32749,9 @@
                           <a:ea typeface="Calibri" pitchFamily="34" charset="-122"/>
                           <a:cs typeface="Calibri" pitchFamily="34" charset="-120"/>
                         </a:rPr>
-                        <a:t>0.57</a:t>
-                      </a:r>
-                      <a:endParaRPr lang="en-US" sz="1050" dirty="0">
+                        <a:t>1.15</a:t>
+                      </a:r>
+                      <a:endParaRPr lang="en-US" sz="1000" dirty="0">
                         <a:latin typeface="Calibri" charset="0"/>
                         <a:ea typeface="Calibri" charset="0"/>
                         <a:cs typeface="Calibri" charset="0"/>
@@ -31158,7 +32796,7 @@
                       <a:tailEnd type="none" w="med" len="med"/>
                     </a:lnB>
                     <a:solidFill>
-                      <a:srgbClr val="FFFFFF"/>
+                      <a:srgbClr val="F2F6FE"/>
                     </a:solidFill>
                   </a:tcPr>
                 </a:tc>
@@ -31171,7 +32809,7 @@
                         <a:buNone/>
                       </a:pPr>
                       <a:r>
-                        <a:rPr lang="en-US" sz="1050" dirty="0">
+                        <a:rPr lang="en-US" sz="1000" dirty="0">
                           <a:solidFill>
                             <a:srgbClr val="3B4660"/>
                           </a:solidFill>
@@ -31179,9 +32817,9 @@
                           <a:ea typeface="Calibri" pitchFamily="34" charset="-122"/>
                           <a:cs typeface="Calibri" pitchFamily="34" charset="-120"/>
                         </a:rPr>
-                        <a:t>0.62</a:t>
-                      </a:r>
-                      <a:endParaRPr lang="en-US" sz="1050" dirty="0">
+                        <a:t>1.37</a:t>
+                      </a:r>
+                      <a:endParaRPr lang="en-US" sz="1000" dirty="0">
                         <a:latin typeface="Calibri" charset="0"/>
                         <a:ea typeface="Calibri" charset="0"/>
                         <a:cs typeface="Calibri" charset="0"/>
@@ -31226,12 +32864,12 @@
                       <a:tailEnd type="none" w="med" len="med"/>
                     </a:lnB>
                     <a:solidFill>
-                      <a:srgbClr val="FFFFFF"/>
+                      <a:srgbClr val="F2F6FE"/>
                     </a:solidFill>
                   </a:tcPr>
                 </a:tc>
               </a:tr>
-              <a:tr h="283464">
+              <a:tr h="256032">
                 <a:tc>
                   <a:txBody>
                     <a:bodyPr/>
@@ -31241,7 +32879,7 @@
                         <a:buNone/>
                       </a:pPr>
                       <a:r>
-                        <a:rPr lang="en-US" sz="1050" b="1" dirty="0">
+                        <a:rPr lang="en-US" sz="1000" b="1" dirty="0">
                           <a:solidFill>
                             <a:srgbClr val="0A1426"/>
                           </a:solidFill>
@@ -31249,9 +32887,9 @@
                           <a:ea typeface="Calibri" pitchFamily="34" charset="-122"/>
                           <a:cs typeface="Calibri" pitchFamily="34" charset="-120"/>
                         </a:rPr>
-                        <a:t>Total operating cost</a:t>
-                      </a:r>
-                      <a:endParaRPr lang="en-US" sz="1050" dirty="0">
+                        <a:t>EBITDA margin</a:t>
+                      </a:r>
+                      <a:endParaRPr lang="en-US" sz="1000" dirty="0">
                         <a:latin typeface="Calibri" charset="0"/>
                         <a:ea typeface="Calibri" charset="0"/>
                         <a:cs typeface="Calibri" charset="0"/>
@@ -31309,7 +32947,7 @@
                         <a:buNone/>
                       </a:pPr>
                       <a:r>
-                        <a:rPr lang="en-US" sz="1050" b="1" dirty="0">
+                        <a:rPr lang="en-US" sz="1000" b="1" dirty="0">
                           <a:solidFill>
                             <a:srgbClr val="0A1426"/>
                           </a:solidFill>
@@ -31317,9 +32955,9 @@
                           <a:ea typeface="Calibri" pitchFamily="34" charset="-122"/>
                           <a:cs typeface="Calibri" pitchFamily="34" charset="-120"/>
                         </a:rPr>
-                        <a:t>2.32</a:t>
-                      </a:r>
-                      <a:endParaRPr lang="en-US" sz="1050" dirty="0">
+                        <a:t>6%</a:t>
+                      </a:r>
+                      <a:endParaRPr lang="en-US" sz="1000" dirty="0">
                         <a:latin typeface="Calibri" charset="0"/>
                         <a:ea typeface="Calibri" charset="0"/>
                         <a:cs typeface="Calibri" charset="0"/>
@@ -31377,7 +33015,7 @@
                         <a:buNone/>
                       </a:pPr>
                       <a:r>
-                        <a:rPr lang="en-US" sz="1050" b="1" dirty="0">
+                        <a:rPr lang="en-US" sz="1000" b="1" dirty="0">
                           <a:solidFill>
                             <a:srgbClr val="0A1426"/>
                           </a:solidFill>
@@ -31385,9 +33023,9 @@
                           <a:ea typeface="Calibri" pitchFamily="34" charset="-122"/>
                           <a:cs typeface="Calibri" pitchFamily="34" charset="-120"/>
                         </a:rPr>
-                        <a:t>2.62</a:t>
-                      </a:r>
-                      <a:endParaRPr lang="en-US" sz="1050" dirty="0">
+                        <a:t>15%</a:t>
+                      </a:r>
+                      <a:endParaRPr lang="en-US" sz="1000" dirty="0">
                         <a:latin typeface="Calibri" charset="0"/>
                         <a:ea typeface="Calibri" charset="0"/>
                         <a:cs typeface="Calibri" charset="0"/>
@@ -31445,7 +33083,7 @@
                         <a:buNone/>
                       </a:pPr>
                       <a:r>
-                        <a:rPr lang="en-US" sz="1050" b="1" dirty="0">
+                        <a:rPr lang="en-US" sz="1000" b="1" dirty="0">
                           <a:solidFill>
                             <a:srgbClr val="0A1426"/>
                           </a:solidFill>
@@ -31453,9 +33091,9 @@
                           <a:ea typeface="Calibri" pitchFamily="34" charset="-122"/>
                           <a:cs typeface="Calibri" pitchFamily="34" charset="-120"/>
                         </a:rPr>
-                        <a:t>2.89</a:t>
-                      </a:r>
-                      <a:endParaRPr lang="en-US" sz="1050" dirty="0">
+                        <a:t>21%</a:t>
+                      </a:r>
+                      <a:endParaRPr lang="en-US" sz="1000" dirty="0">
                         <a:latin typeface="Calibri" charset="0"/>
                         <a:ea typeface="Calibri" charset="0"/>
                         <a:cs typeface="Calibri" charset="0"/>
@@ -31513,7 +33151,7 @@
                         <a:buNone/>
                       </a:pPr>
                       <a:r>
-                        <a:rPr lang="en-US" sz="1050" b="1" dirty="0">
+                        <a:rPr lang="en-US" sz="1000" b="1" dirty="0">
                           <a:solidFill>
                             <a:srgbClr val="0A1426"/>
                           </a:solidFill>
@@ -31521,9 +33159,9 @@
                           <a:ea typeface="Calibri" pitchFamily="34" charset="-122"/>
                           <a:cs typeface="Calibri" pitchFamily="34" charset="-120"/>
                         </a:rPr>
-                        <a:t>3.15</a:t>
-                      </a:r>
-                      <a:endParaRPr lang="en-US" sz="1050" dirty="0">
+                        <a:t>23%</a:t>
+                      </a:r>
+                      <a:endParaRPr lang="en-US" sz="1000" dirty="0">
                         <a:latin typeface="Calibri" charset="0"/>
                         <a:ea typeface="Calibri" charset="0"/>
                         <a:cs typeface="Calibri" charset="0"/>
@@ -31581,7 +33219,7 @@
                         <a:buNone/>
                       </a:pPr>
                       <a:r>
-                        <a:rPr lang="en-US" sz="1050" b="1" dirty="0">
+                        <a:rPr lang="en-US" sz="1000" b="1" dirty="0">
                           <a:solidFill>
                             <a:srgbClr val="0A1426"/>
                           </a:solidFill>
@@ -31589,9 +33227,9 @@
                           <a:ea typeface="Calibri" pitchFamily="34" charset="-122"/>
                           <a:cs typeface="Calibri" pitchFamily="34" charset="-120"/>
                         </a:rPr>
-                        <a:t>3.41</a:t>
-                      </a:r>
-                      <a:endParaRPr lang="en-US" sz="1050" dirty="0">
+                        <a:t>26%</a:t>
+                      </a:r>
+                      <a:endParaRPr lang="en-US" sz="1000" dirty="0">
                         <a:latin typeface="Calibri" charset="0"/>
                         <a:ea typeface="Calibri" charset="0"/>
                         <a:cs typeface="Calibri" charset="0"/>
@@ -31649,7 +33287,7 @@
                         <a:buNone/>
                       </a:pPr>
                       <a:r>
-                        <a:rPr lang="en-US" sz="1050" b="1" dirty="0">
+                        <a:rPr lang="en-US" sz="1000" b="1" dirty="0">
                           <a:solidFill>
                             <a:srgbClr val="0A1426"/>
                           </a:solidFill>
@@ -31657,9 +33295,9 @@
                           <a:ea typeface="Calibri" pitchFamily="34" charset="-122"/>
                           <a:cs typeface="Calibri" pitchFamily="34" charset="-120"/>
                         </a:rPr>
-                        <a:t>3.72</a:t>
-                      </a:r>
-                      <a:endParaRPr lang="en-US" sz="1050" dirty="0">
+                        <a:t>25%</a:t>
+                      </a:r>
+                      <a:endParaRPr lang="en-US" sz="1000" dirty="0">
                         <a:latin typeface="Calibri" charset="0"/>
                         <a:ea typeface="Calibri" charset="0"/>
                         <a:cs typeface="Calibri" charset="0"/>
@@ -31717,7 +33355,7 @@
                         <a:buNone/>
                       </a:pPr>
                       <a:r>
-                        <a:rPr lang="en-US" sz="1050" b="1" dirty="0">
+                        <a:rPr lang="en-US" sz="1000" b="1" dirty="0">
                           <a:solidFill>
                             <a:srgbClr val="0A1426"/>
                           </a:solidFill>
@@ -31725,1647 +33363,9 @@
                           <a:ea typeface="Calibri" pitchFamily="34" charset="-122"/>
                           <a:cs typeface="Calibri" pitchFamily="34" charset="-120"/>
                         </a:rPr>
-                        <a:t>4.04</a:t>
-                      </a:r>
-                      <a:endParaRPr lang="en-US" sz="1050" dirty="0">
-                        <a:latin typeface="Calibri" charset="0"/>
-                        <a:ea typeface="Calibri" charset="0"/>
-                        <a:cs typeface="Calibri" charset="0"/>
-                      </a:endParaRPr>
-                    </a:p>
-                  </a:txBody>
-                  <a:tcPr marL="0" marR="76200" marT="63500" marB="63500" anchor="ctr">
-                    <a:lnL w="0" cap="flat" cmpd="sng" algn="ctr">
-                      <a:solidFill>
-                        <a:srgbClr val="666666"/>
-                      </a:solidFill>
-                      <a:prstDash val="solid"/>
-                      <a:round/>
-                      <a:headEnd type="none" w="med" len="med"/>
-                      <a:tailEnd type="none" w="med" len="med"/>
-                    </a:lnL>
-                    <a:lnR w="0" cap="flat" cmpd="sng" algn="ctr">
-                      <a:solidFill>
-                        <a:srgbClr val="666666"/>
-                      </a:solidFill>
-                      <a:prstDash val="solid"/>
-                      <a:round/>
-                      <a:headEnd type="none" w="med" len="med"/>
-                      <a:tailEnd type="none" w="med" len="med"/>
-                    </a:lnR>
-                    <a:lnT w="0" cap="flat" cmpd="sng" algn="ctr">
-                      <a:solidFill>
-                        <a:srgbClr val="666666"/>
-                      </a:solidFill>
-                      <a:prstDash val="solid"/>
-                      <a:round/>
-                      <a:headEnd type="none" w="med" len="med"/>
-                      <a:tailEnd type="none" w="med" len="med"/>
-                    </a:lnT>
-                    <a:lnB w="7620" cap="flat" cmpd="sng" algn="ctr">
-                      <a:solidFill>
-                        <a:srgbClr val="E2E4EA"/>
-                      </a:solidFill>
-                      <a:prstDash val="solid"/>
-                      <a:round/>
-                      <a:headEnd type="none" w="med" len="med"/>
-                      <a:tailEnd type="none" w="med" len="med"/>
-                    </a:lnB>
-                    <a:solidFill>
-                      <a:srgbClr val="FBF1EE"/>
-                    </a:solidFill>
-                  </a:tcPr>
-                </a:tc>
-              </a:tr>
-              <a:tr h="283464">
-                <a:tc>
-                  <a:txBody>
-                    <a:bodyPr/>
-                    <a:lstStyle/>
-                    <a:p>
-                      <a:pPr algn="l" indent="0" marL="0">
-                        <a:buNone/>
-                      </a:pPr>
-                      <a:r>
-                        <a:rPr lang="en-US" sz="1050" b="1" dirty="0">
-                          <a:solidFill>
-                            <a:srgbClr val="3B4660"/>
-                          </a:solidFill>
-                          <a:latin typeface="Calibri" pitchFamily="34" charset="0"/>
-                          <a:ea typeface="Calibri" pitchFamily="34" charset="-122"/>
-                          <a:cs typeface="Calibri" pitchFamily="34" charset="-120"/>
-                        </a:rPr>
-                        <a:t>Revenue</a:t>
-                      </a:r>
-                      <a:endParaRPr lang="en-US" sz="1050" dirty="0">
-                        <a:latin typeface="Calibri" charset="0"/>
-                        <a:ea typeface="Calibri" charset="0"/>
-                        <a:cs typeface="Calibri" charset="0"/>
-                      </a:endParaRPr>
-                    </a:p>
-                  </a:txBody>
-                  <a:tcPr marL="0" marR="76200" marT="63500" marB="63500" anchor="ctr">
-                    <a:lnL w="0" cap="flat" cmpd="sng" algn="ctr">
-                      <a:solidFill>
-                        <a:srgbClr val="666666"/>
-                      </a:solidFill>
-                      <a:prstDash val="solid"/>
-                      <a:round/>
-                      <a:headEnd type="none" w="med" len="med"/>
-                      <a:tailEnd type="none" w="med" len="med"/>
-                    </a:lnL>
-                    <a:lnR w="0" cap="flat" cmpd="sng" algn="ctr">
-                      <a:solidFill>
-                        <a:srgbClr val="666666"/>
-                      </a:solidFill>
-                      <a:prstDash val="solid"/>
-                      <a:round/>
-                      <a:headEnd type="none" w="med" len="med"/>
-                      <a:tailEnd type="none" w="med" len="med"/>
-                    </a:lnR>
-                    <a:lnT w="0" cap="flat" cmpd="sng" algn="ctr">
-                      <a:solidFill>
-                        <a:srgbClr val="666666"/>
-                      </a:solidFill>
-                      <a:prstDash val="solid"/>
-                      <a:round/>
-                      <a:headEnd type="none" w="med" len="med"/>
-                      <a:tailEnd type="none" w="med" len="med"/>
-                    </a:lnT>
-                    <a:lnB w="7620" cap="flat" cmpd="sng" algn="ctr">
-                      <a:solidFill>
-                        <a:srgbClr val="E2E4EA"/>
-                      </a:solidFill>
-                      <a:prstDash val="solid"/>
-                      <a:round/>
-                      <a:headEnd type="none" w="med" len="med"/>
-                      <a:tailEnd type="none" w="med" len="med"/>
-                    </a:lnB>
-                    <a:solidFill>
-                      <a:srgbClr val="F2F6FE"/>
-                    </a:solidFill>
-                  </a:tcPr>
-                </a:tc>
-                <a:tc>
-                  <a:txBody>
-                    <a:bodyPr/>
-                    <a:lstStyle/>
-                    <a:p>
-                      <a:pPr algn="r" indent="0" marL="0">
-                        <a:buNone/>
-                      </a:pPr>
-                      <a:r>
-                        <a:rPr lang="en-US" sz="1050" dirty="0">
-                          <a:solidFill>
-                            <a:srgbClr val="3B4660"/>
-                          </a:solidFill>
-                          <a:latin typeface="Calibri" pitchFamily="34" charset="0"/>
-                          <a:ea typeface="Calibri" pitchFamily="34" charset="-122"/>
-                          <a:cs typeface="Calibri" pitchFamily="34" charset="-120"/>
-                        </a:rPr>
-                        <a:t>2.48</a:t>
-                      </a:r>
-                      <a:endParaRPr lang="en-US" sz="1050" dirty="0">
-                        <a:latin typeface="Calibri" charset="0"/>
-                        <a:ea typeface="Calibri" charset="0"/>
-                        <a:cs typeface="Calibri" charset="0"/>
-                      </a:endParaRPr>
-                    </a:p>
-                  </a:txBody>
-                  <a:tcPr marL="0" marR="76200" marT="63500" marB="63500" anchor="ctr">
-                    <a:lnL w="0" cap="flat" cmpd="sng" algn="ctr">
-                      <a:solidFill>
-                        <a:srgbClr val="666666"/>
-                      </a:solidFill>
-                      <a:prstDash val="solid"/>
-                      <a:round/>
-                      <a:headEnd type="none" w="med" len="med"/>
-                      <a:tailEnd type="none" w="med" len="med"/>
-                    </a:lnL>
-                    <a:lnR w="0" cap="flat" cmpd="sng" algn="ctr">
-                      <a:solidFill>
-                        <a:srgbClr val="666666"/>
-                      </a:solidFill>
-                      <a:prstDash val="solid"/>
-                      <a:round/>
-                      <a:headEnd type="none" w="med" len="med"/>
-                      <a:tailEnd type="none" w="med" len="med"/>
-                    </a:lnR>
-                    <a:lnT w="0" cap="flat" cmpd="sng" algn="ctr">
-                      <a:solidFill>
-                        <a:srgbClr val="666666"/>
-                      </a:solidFill>
-                      <a:prstDash val="solid"/>
-                      <a:round/>
-                      <a:headEnd type="none" w="med" len="med"/>
-                      <a:tailEnd type="none" w="med" len="med"/>
-                    </a:lnT>
-                    <a:lnB w="7620" cap="flat" cmpd="sng" algn="ctr">
-                      <a:solidFill>
-                        <a:srgbClr val="E2E4EA"/>
-                      </a:solidFill>
-                      <a:prstDash val="solid"/>
-                      <a:round/>
-                      <a:headEnd type="none" w="med" len="med"/>
-                      <a:tailEnd type="none" w="med" len="med"/>
-                    </a:lnB>
-                    <a:solidFill>
-                      <a:srgbClr val="F2F6FE"/>
-                    </a:solidFill>
-                  </a:tcPr>
-                </a:tc>
-                <a:tc>
-                  <a:txBody>
-                    <a:bodyPr/>
-                    <a:lstStyle/>
-                    <a:p>
-                      <a:pPr algn="r" indent="0" marL="0">
-                        <a:buNone/>
-                      </a:pPr>
-                      <a:r>
-                        <a:rPr lang="en-US" sz="1050" dirty="0">
-                          <a:solidFill>
-                            <a:srgbClr val="3B4660"/>
-                          </a:solidFill>
-                          <a:latin typeface="Calibri" pitchFamily="34" charset="0"/>
-                          <a:ea typeface="Calibri" pitchFamily="34" charset="-122"/>
-                          <a:cs typeface="Calibri" pitchFamily="34" charset="-120"/>
-                        </a:rPr>
-                        <a:t>3.13</a:t>
-                      </a:r>
-                      <a:endParaRPr lang="en-US" sz="1050" dirty="0">
-                        <a:latin typeface="Calibri" charset="0"/>
-                        <a:ea typeface="Calibri" charset="0"/>
-                        <a:cs typeface="Calibri" charset="0"/>
-                      </a:endParaRPr>
-                    </a:p>
-                  </a:txBody>
-                  <a:tcPr marL="0" marR="76200" marT="63500" marB="63500" anchor="ctr">
-                    <a:lnL w="0" cap="flat" cmpd="sng" algn="ctr">
-                      <a:solidFill>
-                        <a:srgbClr val="666666"/>
-                      </a:solidFill>
-                      <a:prstDash val="solid"/>
-                      <a:round/>
-                      <a:headEnd type="none" w="med" len="med"/>
-                      <a:tailEnd type="none" w="med" len="med"/>
-                    </a:lnL>
-                    <a:lnR w="0" cap="flat" cmpd="sng" algn="ctr">
-                      <a:solidFill>
-                        <a:srgbClr val="666666"/>
-                      </a:solidFill>
-                      <a:prstDash val="solid"/>
-                      <a:round/>
-                      <a:headEnd type="none" w="med" len="med"/>
-                      <a:tailEnd type="none" w="med" len="med"/>
-                    </a:lnR>
-                    <a:lnT w="0" cap="flat" cmpd="sng" algn="ctr">
-                      <a:solidFill>
-                        <a:srgbClr val="666666"/>
-                      </a:solidFill>
-                      <a:prstDash val="solid"/>
-                      <a:round/>
-                      <a:headEnd type="none" w="med" len="med"/>
-                      <a:tailEnd type="none" w="med" len="med"/>
-                    </a:lnT>
-                    <a:lnB w="7620" cap="flat" cmpd="sng" algn="ctr">
-                      <a:solidFill>
-                        <a:srgbClr val="E2E4EA"/>
-                      </a:solidFill>
-                      <a:prstDash val="solid"/>
-                      <a:round/>
-                      <a:headEnd type="none" w="med" len="med"/>
-                      <a:tailEnd type="none" w="med" len="med"/>
-                    </a:lnB>
-                    <a:solidFill>
-                      <a:srgbClr val="F2F6FE"/>
-                    </a:solidFill>
-                  </a:tcPr>
-                </a:tc>
-                <a:tc>
-                  <a:txBody>
-                    <a:bodyPr/>
-                    <a:lstStyle/>
-                    <a:p>
-                      <a:pPr algn="r" indent="0" marL="0">
-                        <a:buNone/>
-                      </a:pPr>
-                      <a:r>
-                        <a:rPr lang="en-US" sz="1050" dirty="0">
-                          <a:solidFill>
-                            <a:srgbClr val="3B4660"/>
-                          </a:solidFill>
-                          <a:latin typeface="Calibri" pitchFamily="34" charset="0"/>
-                          <a:ea typeface="Calibri" pitchFamily="34" charset="-122"/>
-                          <a:cs typeface="Calibri" pitchFamily="34" charset="-120"/>
-                        </a:rPr>
-                        <a:t>3.76</a:t>
-                      </a:r>
-                      <a:endParaRPr lang="en-US" sz="1050" dirty="0">
-                        <a:latin typeface="Calibri" charset="0"/>
-                        <a:ea typeface="Calibri" charset="0"/>
-                        <a:cs typeface="Calibri" charset="0"/>
-                      </a:endParaRPr>
-                    </a:p>
-                  </a:txBody>
-                  <a:tcPr marL="0" marR="76200" marT="63500" marB="63500" anchor="ctr">
-                    <a:lnL w="0" cap="flat" cmpd="sng" algn="ctr">
-                      <a:solidFill>
-                        <a:srgbClr val="666666"/>
-                      </a:solidFill>
-                      <a:prstDash val="solid"/>
-                      <a:round/>
-                      <a:headEnd type="none" w="med" len="med"/>
-                      <a:tailEnd type="none" w="med" len="med"/>
-                    </a:lnL>
-                    <a:lnR w="0" cap="flat" cmpd="sng" algn="ctr">
-                      <a:solidFill>
-                        <a:srgbClr val="666666"/>
-                      </a:solidFill>
-                      <a:prstDash val="solid"/>
-                      <a:round/>
-                      <a:headEnd type="none" w="med" len="med"/>
-                      <a:tailEnd type="none" w="med" len="med"/>
-                    </a:lnR>
-                    <a:lnT w="0" cap="flat" cmpd="sng" algn="ctr">
-                      <a:solidFill>
-                        <a:srgbClr val="666666"/>
-                      </a:solidFill>
-                      <a:prstDash val="solid"/>
-                      <a:round/>
-                      <a:headEnd type="none" w="med" len="med"/>
-                      <a:tailEnd type="none" w="med" len="med"/>
-                    </a:lnT>
-                    <a:lnB w="7620" cap="flat" cmpd="sng" algn="ctr">
-                      <a:solidFill>
-                        <a:srgbClr val="E2E4EA"/>
-                      </a:solidFill>
-                      <a:prstDash val="solid"/>
-                      <a:round/>
-                      <a:headEnd type="none" w="med" len="med"/>
-                      <a:tailEnd type="none" w="med" len="med"/>
-                    </a:lnB>
-                    <a:solidFill>
-                      <a:srgbClr val="F2F6FE"/>
-                    </a:solidFill>
-                  </a:tcPr>
-                </a:tc>
-                <a:tc>
-                  <a:txBody>
-                    <a:bodyPr/>
-                    <a:lstStyle/>
-                    <a:p>
-                      <a:pPr algn="r" indent="0" marL="0">
-                        <a:buNone/>
-                      </a:pPr>
-                      <a:r>
-                        <a:rPr lang="en-US" sz="1050" dirty="0">
-                          <a:solidFill>
-                            <a:srgbClr val="3B4660"/>
-                          </a:solidFill>
-                          <a:latin typeface="Calibri" pitchFamily="34" charset="0"/>
-                          <a:ea typeface="Calibri" pitchFamily="34" charset="-122"/>
-                          <a:cs typeface="Calibri" pitchFamily="34" charset="-120"/>
-                        </a:rPr>
-                        <a:t>4.22</a:t>
-                      </a:r>
-                      <a:endParaRPr lang="en-US" sz="1050" dirty="0">
-                        <a:latin typeface="Calibri" charset="0"/>
-                        <a:ea typeface="Calibri" charset="0"/>
-                        <a:cs typeface="Calibri" charset="0"/>
-                      </a:endParaRPr>
-                    </a:p>
-                  </a:txBody>
-                  <a:tcPr marL="0" marR="76200" marT="63500" marB="63500" anchor="ctr">
-                    <a:lnL w="0" cap="flat" cmpd="sng" algn="ctr">
-                      <a:solidFill>
-                        <a:srgbClr val="666666"/>
-                      </a:solidFill>
-                      <a:prstDash val="solid"/>
-                      <a:round/>
-                      <a:headEnd type="none" w="med" len="med"/>
-                      <a:tailEnd type="none" w="med" len="med"/>
-                    </a:lnL>
-                    <a:lnR w="0" cap="flat" cmpd="sng" algn="ctr">
-                      <a:solidFill>
-                        <a:srgbClr val="666666"/>
-                      </a:solidFill>
-                      <a:prstDash val="solid"/>
-                      <a:round/>
-                      <a:headEnd type="none" w="med" len="med"/>
-                      <a:tailEnd type="none" w="med" len="med"/>
-                    </a:lnR>
-                    <a:lnT w="0" cap="flat" cmpd="sng" algn="ctr">
-                      <a:solidFill>
-                        <a:srgbClr val="666666"/>
-                      </a:solidFill>
-                      <a:prstDash val="solid"/>
-                      <a:round/>
-                      <a:headEnd type="none" w="med" len="med"/>
-                      <a:tailEnd type="none" w="med" len="med"/>
-                    </a:lnT>
-                    <a:lnB w="7620" cap="flat" cmpd="sng" algn="ctr">
-                      <a:solidFill>
-                        <a:srgbClr val="E2E4EA"/>
-                      </a:solidFill>
-                      <a:prstDash val="solid"/>
-                      <a:round/>
-                      <a:headEnd type="none" w="med" len="med"/>
-                      <a:tailEnd type="none" w="med" len="med"/>
-                    </a:lnB>
-                    <a:solidFill>
-                      <a:srgbClr val="F2F6FE"/>
-                    </a:solidFill>
-                  </a:tcPr>
-                </a:tc>
-                <a:tc>
-                  <a:txBody>
-                    <a:bodyPr/>
-                    <a:lstStyle/>
-                    <a:p>
-                      <a:pPr algn="r" indent="0" marL="0">
-                        <a:buNone/>
-                      </a:pPr>
-                      <a:r>
-                        <a:rPr lang="en-US" sz="1050" dirty="0">
-                          <a:solidFill>
-                            <a:srgbClr val="3B4660"/>
-                          </a:solidFill>
-                          <a:latin typeface="Calibri" pitchFamily="34" charset="0"/>
-                          <a:ea typeface="Calibri" pitchFamily="34" charset="-122"/>
-                          <a:cs typeface="Calibri" pitchFamily="34" charset="-120"/>
-                        </a:rPr>
-                        <a:t>4.74</a:t>
-                      </a:r>
-                      <a:endParaRPr lang="en-US" sz="1050" dirty="0">
-                        <a:latin typeface="Calibri" charset="0"/>
-                        <a:ea typeface="Calibri" charset="0"/>
-                        <a:cs typeface="Calibri" charset="0"/>
-                      </a:endParaRPr>
-                    </a:p>
-                  </a:txBody>
-                  <a:tcPr marL="0" marR="76200" marT="63500" marB="63500" anchor="ctr">
-                    <a:lnL w="0" cap="flat" cmpd="sng" algn="ctr">
-                      <a:solidFill>
-                        <a:srgbClr val="666666"/>
-                      </a:solidFill>
-                      <a:prstDash val="solid"/>
-                      <a:round/>
-                      <a:headEnd type="none" w="med" len="med"/>
-                      <a:tailEnd type="none" w="med" len="med"/>
-                    </a:lnL>
-                    <a:lnR w="0" cap="flat" cmpd="sng" algn="ctr">
-                      <a:solidFill>
-                        <a:srgbClr val="666666"/>
-                      </a:solidFill>
-                      <a:prstDash val="solid"/>
-                      <a:round/>
-                      <a:headEnd type="none" w="med" len="med"/>
-                      <a:tailEnd type="none" w="med" len="med"/>
-                    </a:lnR>
-                    <a:lnT w="0" cap="flat" cmpd="sng" algn="ctr">
-                      <a:solidFill>
-                        <a:srgbClr val="666666"/>
-                      </a:solidFill>
-                      <a:prstDash val="solid"/>
-                      <a:round/>
-                      <a:headEnd type="none" w="med" len="med"/>
-                      <a:tailEnd type="none" w="med" len="med"/>
-                    </a:lnT>
-                    <a:lnB w="7620" cap="flat" cmpd="sng" algn="ctr">
-                      <a:solidFill>
-                        <a:srgbClr val="E2E4EA"/>
-                      </a:solidFill>
-                      <a:prstDash val="solid"/>
-                      <a:round/>
-                      <a:headEnd type="none" w="med" len="med"/>
-                      <a:tailEnd type="none" w="med" len="med"/>
-                    </a:lnB>
-                    <a:solidFill>
-                      <a:srgbClr val="F2F6FE"/>
-                    </a:solidFill>
-                  </a:tcPr>
-                </a:tc>
-                <a:tc>
-                  <a:txBody>
-                    <a:bodyPr/>
-                    <a:lstStyle/>
-                    <a:p>
-                      <a:pPr algn="r" indent="0" marL="0">
-                        <a:buNone/>
-                      </a:pPr>
-                      <a:r>
-                        <a:rPr lang="en-US" sz="1050" dirty="0">
-                          <a:solidFill>
-                            <a:srgbClr val="3B4660"/>
-                          </a:solidFill>
-                          <a:latin typeface="Calibri" pitchFamily="34" charset="0"/>
-                          <a:ea typeface="Calibri" pitchFamily="34" charset="-122"/>
-                          <a:cs typeface="Calibri" pitchFamily="34" charset="-120"/>
-                        </a:rPr>
-                        <a:t>5.17</a:t>
-                      </a:r>
-                      <a:endParaRPr lang="en-US" sz="1050" dirty="0">
-                        <a:latin typeface="Calibri" charset="0"/>
-                        <a:ea typeface="Calibri" charset="0"/>
-                        <a:cs typeface="Calibri" charset="0"/>
-                      </a:endParaRPr>
-                    </a:p>
-                  </a:txBody>
-                  <a:tcPr marL="0" marR="76200" marT="63500" marB="63500" anchor="ctr">
-                    <a:lnL w="0" cap="flat" cmpd="sng" algn="ctr">
-                      <a:solidFill>
-                        <a:srgbClr val="666666"/>
-                      </a:solidFill>
-                      <a:prstDash val="solid"/>
-                      <a:round/>
-                      <a:headEnd type="none" w="med" len="med"/>
-                      <a:tailEnd type="none" w="med" len="med"/>
-                    </a:lnL>
-                    <a:lnR w="0" cap="flat" cmpd="sng" algn="ctr">
-                      <a:solidFill>
-                        <a:srgbClr val="666666"/>
-                      </a:solidFill>
-                      <a:prstDash val="solid"/>
-                      <a:round/>
-                      <a:headEnd type="none" w="med" len="med"/>
-                      <a:tailEnd type="none" w="med" len="med"/>
-                    </a:lnR>
-                    <a:lnT w="0" cap="flat" cmpd="sng" algn="ctr">
-                      <a:solidFill>
-                        <a:srgbClr val="666666"/>
-                      </a:solidFill>
-                      <a:prstDash val="solid"/>
-                      <a:round/>
-                      <a:headEnd type="none" w="med" len="med"/>
-                      <a:tailEnd type="none" w="med" len="med"/>
-                    </a:lnT>
-                    <a:lnB w="7620" cap="flat" cmpd="sng" algn="ctr">
-                      <a:solidFill>
-                        <a:srgbClr val="E2E4EA"/>
-                      </a:solidFill>
-                      <a:prstDash val="solid"/>
-                      <a:round/>
-                      <a:headEnd type="none" w="med" len="med"/>
-                      <a:tailEnd type="none" w="med" len="med"/>
-                    </a:lnB>
-                    <a:solidFill>
-                      <a:srgbClr val="F2F6FE"/>
-                    </a:solidFill>
-                  </a:tcPr>
-                </a:tc>
-                <a:tc>
-                  <a:txBody>
-                    <a:bodyPr/>
-                    <a:lstStyle/>
-                    <a:p>
-                      <a:pPr algn="r" indent="0" marL="0">
-                        <a:buNone/>
-                      </a:pPr>
-                      <a:r>
-                        <a:rPr lang="en-US" sz="1050" dirty="0">
-                          <a:solidFill>
-                            <a:srgbClr val="3B4660"/>
-                          </a:solidFill>
-                          <a:latin typeface="Calibri" pitchFamily="34" charset="0"/>
-                          <a:ea typeface="Calibri" pitchFamily="34" charset="-122"/>
-                          <a:cs typeface="Calibri" pitchFamily="34" charset="-120"/>
-                        </a:rPr>
-                        <a:t>5.75</a:t>
-                      </a:r>
-                      <a:endParaRPr lang="en-US" sz="1050" dirty="0">
-                        <a:latin typeface="Calibri" charset="0"/>
-                        <a:ea typeface="Calibri" charset="0"/>
-                        <a:cs typeface="Calibri" charset="0"/>
-                      </a:endParaRPr>
-                    </a:p>
-                  </a:txBody>
-                  <a:tcPr marL="0" marR="76200" marT="63500" marB="63500" anchor="ctr">
-                    <a:lnL w="0" cap="flat" cmpd="sng" algn="ctr">
-                      <a:solidFill>
-                        <a:srgbClr val="666666"/>
-                      </a:solidFill>
-                      <a:prstDash val="solid"/>
-                      <a:round/>
-                      <a:headEnd type="none" w="med" len="med"/>
-                      <a:tailEnd type="none" w="med" len="med"/>
-                    </a:lnL>
-                    <a:lnR w="0" cap="flat" cmpd="sng" algn="ctr">
-                      <a:solidFill>
-                        <a:srgbClr val="666666"/>
-                      </a:solidFill>
-                      <a:prstDash val="solid"/>
-                      <a:round/>
-                      <a:headEnd type="none" w="med" len="med"/>
-                      <a:tailEnd type="none" w="med" len="med"/>
-                    </a:lnR>
-                    <a:lnT w="0" cap="flat" cmpd="sng" algn="ctr">
-                      <a:solidFill>
-                        <a:srgbClr val="666666"/>
-                      </a:solidFill>
-                      <a:prstDash val="solid"/>
-                      <a:round/>
-                      <a:headEnd type="none" w="med" len="med"/>
-                      <a:tailEnd type="none" w="med" len="med"/>
-                    </a:lnT>
-                    <a:lnB w="7620" cap="flat" cmpd="sng" algn="ctr">
-                      <a:solidFill>
-                        <a:srgbClr val="E2E4EA"/>
-                      </a:solidFill>
-                      <a:prstDash val="solid"/>
-                      <a:round/>
-                      <a:headEnd type="none" w="med" len="med"/>
-                      <a:tailEnd type="none" w="med" len="med"/>
-                    </a:lnB>
-                    <a:solidFill>
-                      <a:srgbClr val="F2F6FE"/>
-                    </a:solidFill>
-                  </a:tcPr>
-                </a:tc>
-              </a:tr>
-              <a:tr h="283464">
-                <a:tc>
-                  <a:txBody>
-                    <a:bodyPr/>
-                    <a:lstStyle/>
-                    <a:p>
-                      <a:pPr algn="l" indent="0" marL="0">
-                        <a:buNone/>
-                      </a:pPr>
-                      <a:r>
-                        <a:rPr lang="en-US" sz="1050" b="1" dirty="0">
-                          <a:solidFill>
-                            <a:srgbClr val="3B4660"/>
-                          </a:solidFill>
-                          <a:latin typeface="Calibri" pitchFamily="34" charset="0"/>
-                          <a:ea typeface="Calibri" pitchFamily="34" charset="-122"/>
-                          <a:cs typeface="Calibri" pitchFamily="34" charset="-120"/>
-                        </a:rPr>
-                        <a:t>EBITDA</a:t>
-                      </a:r>
-                      <a:endParaRPr lang="en-US" sz="1050" dirty="0">
-                        <a:latin typeface="Calibri" charset="0"/>
-                        <a:ea typeface="Calibri" charset="0"/>
-                        <a:cs typeface="Calibri" charset="0"/>
-                      </a:endParaRPr>
-                    </a:p>
-                  </a:txBody>
-                  <a:tcPr marL="0" marR="76200" marT="63500" marB="63500" anchor="ctr">
-                    <a:lnL w="0" cap="flat" cmpd="sng" algn="ctr">
-                      <a:solidFill>
-                        <a:srgbClr val="666666"/>
-                      </a:solidFill>
-                      <a:prstDash val="solid"/>
-                      <a:round/>
-                      <a:headEnd type="none" w="med" len="med"/>
-                      <a:tailEnd type="none" w="med" len="med"/>
-                    </a:lnL>
-                    <a:lnR w="0" cap="flat" cmpd="sng" algn="ctr">
-                      <a:solidFill>
-                        <a:srgbClr val="666666"/>
-                      </a:solidFill>
-                      <a:prstDash val="solid"/>
-                      <a:round/>
-                      <a:headEnd type="none" w="med" len="med"/>
-                      <a:tailEnd type="none" w="med" len="med"/>
-                    </a:lnR>
-                    <a:lnT w="0" cap="flat" cmpd="sng" algn="ctr">
-                      <a:solidFill>
-                        <a:srgbClr val="666666"/>
-                      </a:solidFill>
-                      <a:prstDash val="solid"/>
-                      <a:round/>
-                      <a:headEnd type="none" w="med" len="med"/>
-                      <a:tailEnd type="none" w="med" len="med"/>
-                    </a:lnT>
-                    <a:lnB w="7620" cap="flat" cmpd="sng" algn="ctr">
-                      <a:solidFill>
-                        <a:srgbClr val="E2E4EA"/>
-                      </a:solidFill>
-                      <a:prstDash val="solid"/>
-                      <a:round/>
-                      <a:headEnd type="none" w="med" len="med"/>
-                      <a:tailEnd type="none" w="med" len="med"/>
-                    </a:lnB>
-                    <a:solidFill>
-                      <a:srgbClr val="F2F6FE"/>
-                    </a:solidFill>
-                  </a:tcPr>
-                </a:tc>
-                <a:tc>
-                  <a:txBody>
-                    <a:bodyPr/>
-                    <a:lstStyle/>
-                    <a:p>
-                      <a:pPr algn="r" indent="0" marL="0">
-                        <a:buNone/>
-                      </a:pPr>
-                      <a:r>
-                        <a:rPr lang="en-US" sz="1050" dirty="0">
-                          <a:solidFill>
-                            <a:srgbClr val="3B4660"/>
-                          </a:solidFill>
-                          <a:latin typeface="Calibri" pitchFamily="34" charset="0"/>
-                          <a:ea typeface="Calibri" pitchFamily="34" charset="-122"/>
-                          <a:cs typeface="Calibri" pitchFamily="34" charset="-120"/>
-                        </a:rPr>
-                        <a:t>0.17</a:t>
-                      </a:r>
-                      <a:endParaRPr lang="en-US" sz="1050" dirty="0">
-                        <a:latin typeface="Calibri" charset="0"/>
-                        <a:ea typeface="Calibri" charset="0"/>
-                        <a:cs typeface="Calibri" charset="0"/>
-                      </a:endParaRPr>
-                    </a:p>
-                  </a:txBody>
-                  <a:tcPr marL="0" marR="76200" marT="63500" marB="63500" anchor="ctr">
-                    <a:lnL w="0" cap="flat" cmpd="sng" algn="ctr">
-                      <a:solidFill>
-                        <a:srgbClr val="666666"/>
-                      </a:solidFill>
-                      <a:prstDash val="solid"/>
-                      <a:round/>
-                      <a:headEnd type="none" w="med" len="med"/>
-                      <a:tailEnd type="none" w="med" len="med"/>
-                    </a:lnL>
-                    <a:lnR w="0" cap="flat" cmpd="sng" algn="ctr">
-                      <a:solidFill>
-                        <a:srgbClr val="666666"/>
-                      </a:solidFill>
-                      <a:prstDash val="solid"/>
-                      <a:round/>
-                      <a:headEnd type="none" w="med" len="med"/>
-                      <a:tailEnd type="none" w="med" len="med"/>
-                    </a:lnR>
-                    <a:lnT w="0" cap="flat" cmpd="sng" algn="ctr">
-                      <a:solidFill>
-                        <a:srgbClr val="666666"/>
-                      </a:solidFill>
-                      <a:prstDash val="solid"/>
-                      <a:round/>
-                      <a:headEnd type="none" w="med" len="med"/>
-                      <a:tailEnd type="none" w="med" len="med"/>
-                    </a:lnT>
-                    <a:lnB w="7620" cap="flat" cmpd="sng" algn="ctr">
-                      <a:solidFill>
-                        <a:srgbClr val="E2E4EA"/>
-                      </a:solidFill>
-                      <a:prstDash val="solid"/>
-                      <a:round/>
-                      <a:headEnd type="none" w="med" len="med"/>
-                      <a:tailEnd type="none" w="med" len="med"/>
-                    </a:lnB>
-                    <a:solidFill>
-                      <a:srgbClr val="F2F6FE"/>
-                    </a:solidFill>
-                  </a:tcPr>
-                </a:tc>
-                <a:tc>
-                  <a:txBody>
-                    <a:bodyPr/>
-                    <a:lstStyle/>
-                    <a:p>
-                      <a:pPr algn="r" indent="0" marL="0">
-                        <a:buNone/>
-                      </a:pPr>
-                      <a:r>
-                        <a:rPr lang="en-US" sz="1050" dirty="0">
-                          <a:solidFill>
-                            <a:srgbClr val="3B4660"/>
-                          </a:solidFill>
-                          <a:latin typeface="Calibri" pitchFamily="34" charset="0"/>
-                          <a:ea typeface="Calibri" pitchFamily="34" charset="-122"/>
-                          <a:cs typeface="Calibri" pitchFamily="34" charset="-120"/>
-                        </a:rPr>
-                        <a:t>0.51</a:t>
-                      </a:r>
-                      <a:endParaRPr lang="en-US" sz="1050" dirty="0">
-                        <a:latin typeface="Calibri" charset="0"/>
-                        <a:ea typeface="Calibri" charset="0"/>
-                        <a:cs typeface="Calibri" charset="0"/>
-                      </a:endParaRPr>
-                    </a:p>
-                  </a:txBody>
-                  <a:tcPr marL="0" marR="76200" marT="63500" marB="63500" anchor="ctr">
-                    <a:lnL w="0" cap="flat" cmpd="sng" algn="ctr">
-                      <a:solidFill>
-                        <a:srgbClr val="666666"/>
-                      </a:solidFill>
-                      <a:prstDash val="solid"/>
-                      <a:round/>
-                      <a:headEnd type="none" w="med" len="med"/>
-                      <a:tailEnd type="none" w="med" len="med"/>
-                    </a:lnL>
-                    <a:lnR w="0" cap="flat" cmpd="sng" algn="ctr">
-                      <a:solidFill>
-                        <a:srgbClr val="666666"/>
-                      </a:solidFill>
-                      <a:prstDash val="solid"/>
-                      <a:round/>
-                      <a:headEnd type="none" w="med" len="med"/>
-                      <a:tailEnd type="none" w="med" len="med"/>
-                    </a:lnR>
-                    <a:lnT w="0" cap="flat" cmpd="sng" algn="ctr">
-                      <a:solidFill>
-                        <a:srgbClr val="666666"/>
-                      </a:solidFill>
-                      <a:prstDash val="solid"/>
-                      <a:round/>
-                      <a:headEnd type="none" w="med" len="med"/>
-                      <a:tailEnd type="none" w="med" len="med"/>
-                    </a:lnT>
-                    <a:lnB w="7620" cap="flat" cmpd="sng" algn="ctr">
-                      <a:solidFill>
-                        <a:srgbClr val="E2E4EA"/>
-                      </a:solidFill>
-                      <a:prstDash val="solid"/>
-                      <a:round/>
-                      <a:headEnd type="none" w="med" len="med"/>
-                      <a:tailEnd type="none" w="med" len="med"/>
-                    </a:lnB>
-                    <a:solidFill>
-                      <a:srgbClr val="F2F6FE"/>
-                    </a:solidFill>
-                  </a:tcPr>
-                </a:tc>
-                <a:tc>
-                  <a:txBody>
-                    <a:bodyPr/>
-                    <a:lstStyle/>
-                    <a:p>
-                      <a:pPr algn="r" indent="0" marL="0">
-                        <a:buNone/>
-                      </a:pPr>
-                      <a:r>
-                        <a:rPr lang="en-US" sz="1050" dirty="0">
-                          <a:solidFill>
-                            <a:srgbClr val="3B4660"/>
-                          </a:solidFill>
-                          <a:latin typeface="Calibri" pitchFamily="34" charset="0"/>
-                          <a:ea typeface="Calibri" pitchFamily="34" charset="-122"/>
-                          <a:cs typeface="Calibri" pitchFamily="34" charset="-120"/>
-                        </a:rPr>
-                        <a:t>0.87</a:t>
-                      </a:r>
-                      <a:endParaRPr lang="en-US" sz="1050" dirty="0">
-                        <a:latin typeface="Calibri" charset="0"/>
-                        <a:ea typeface="Calibri" charset="0"/>
-                        <a:cs typeface="Calibri" charset="0"/>
-                      </a:endParaRPr>
-                    </a:p>
-                  </a:txBody>
-                  <a:tcPr marL="0" marR="76200" marT="63500" marB="63500" anchor="ctr">
-                    <a:lnL w="0" cap="flat" cmpd="sng" algn="ctr">
-                      <a:solidFill>
-                        <a:srgbClr val="666666"/>
-                      </a:solidFill>
-                      <a:prstDash val="solid"/>
-                      <a:round/>
-                      <a:headEnd type="none" w="med" len="med"/>
-                      <a:tailEnd type="none" w="med" len="med"/>
-                    </a:lnL>
-                    <a:lnR w="0" cap="flat" cmpd="sng" algn="ctr">
-                      <a:solidFill>
-                        <a:srgbClr val="666666"/>
-                      </a:solidFill>
-                      <a:prstDash val="solid"/>
-                      <a:round/>
-                      <a:headEnd type="none" w="med" len="med"/>
-                      <a:tailEnd type="none" w="med" len="med"/>
-                    </a:lnR>
-                    <a:lnT w="0" cap="flat" cmpd="sng" algn="ctr">
-                      <a:solidFill>
-                        <a:srgbClr val="666666"/>
-                      </a:solidFill>
-                      <a:prstDash val="solid"/>
-                      <a:round/>
-                      <a:headEnd type="none" w="med" len="med"/>
-                      <a:tailEnd type="none" w="med" len="med"/>
-                    </a:lnT>
-                    <a:lnB w="7620" cap="flat" cmpd="sng" algn="ctr">
-                      <a:solidFill>
-                        <a:srgbClr val="E2E4EA"/>
-                      </a:solidFill>
-                      <a:prstDash val="solid"/>
-                      <a:round/>
-                      <a:headEnd type="none" w="med" len="med"/>
-                      <a:tailEnd type="none" w="med" len="med"/>
-                    </a:lnB>
-                    <a:solidFill>
-                      <a:srgbClr val="F2F6FE"/>
-                    </a:solidFill>
-                  </a:tcPr>
-                </a:tc>
-                <a:tc>
-                  <a:txBody>
-                    <a:bodyPr/>
-                    <a:lstStyle/>
-                    <a:p>
-                      <a:pPr algn="r" indent="0" marL="0">
-                        <a:buNone/>
-                      </a:pPr>
-                      <a:r>
-                        <a:rPr lang="en-US" sz="1050" dirty="0">
-                          <a:solidFill>
-                            <a:srgbClr val="3B4660"/>
-                          </a:solidFill>
-                          <a:latin typeface="Calibri" pitchFamily="34" charset="0"/>
-                          <a:ea typeface="Calibri" pitchFamily="34" charset="-122"/>
-                          <a:cs typeface="Calibri" pitchFamily="34" charset="-120"/>
-                        </a:rPr>
-                        <a:t>1.06</a:t>
-                      </a:r>
-                      <a:endParaRPr lang="en-US" sz="1050" dirty="0">
-                        <a:latin typeface="Calibri" charset="0"/>
-                        <a:ea typeface="Calibri" charset="0"/>
-                        <a:cs typeface="Calibri" charset="0"/>
-                      </a:endParaRPr>
-                    </a:p>
-                  </a:txBody>
-                  <a:tcPr marL="0" marR="76200" marT="63500" marB="63500" anchor="ctr">
-                    <a:lnL w="0" cap="flat" cmpd="sng" algn="ctr">
-                      <a:solidFill>
-                        <a:srgbClr val="666666"/>
-                      </a:solidFill>
-                      <a:prstDash val="solid"/>
-                      <a:round/>
-                      <a:headEnd type="none" w="med" len="med"/>
-                      <a:tailEnd type="none" w="med" len="med"/>
-                    </a:lnL>
-                    <a:lnR w="0" cap="flat" cmpd="sng" algn="ctr">
-                      <a:solidFill>
-                        <a:srgbClr val="666666"/>
-                      </a:solidFill>
-                      <a:prstDash val="solid"/>
-                      <a:round/>
-                      <a:headEnd type="none" w="med" len="med"/>
-                      <a:tailEnd type="none" w="med" len="med"/>
-                    </a:lnR>
-                    <a:lnT w="0" cap="flat" cmpd="sng" algn="ctr">
-                      <a:solidFill>
-                        <a:srgbClr val="666666"/>
-                      </a:solidFill>
-                      <a:prstDash val="solid"/>
-                      <a:round/>
-                      <a:headEnd type="none" w="med" len="med"/>
-                      <a:tailEnd type="none" w="med" len="med"/>
-                    </a:lnT>
-                    <a:lnB w="7620" cap="flat" cmpd="sng" algn="ctr">
-                      <a:solidFill>
-                        <a:srgbClr val="E2E4EA"/>
-                      </a:solidFill>
-                      <a:prstDash val="solid"/>
-                      <a:round/>
-                      <a:headEnd type="none" w="med" len="med"/>
-                      <a:tailEnd type="none" w="med" len="med"/>
-                    </a:lnB>
-                    <a:solidFill>
-                      <a:srgbClr val="F2F6FE"/>
-                    </a:solidFill>
-                  </a:tcPr>
-                </a:tc>
-                <a:tc>
-                  <a:txBody>
-                    <a:bodyPr/>
-                    <a:lstStyle/>
-                    <a:p>
-                      <a:pPr algn="r" indent="0" marL="0">
-                        <a:buNone/>
-                      </a:pPr>
-                      <a:r>
-                        <a:rPr lang="en-US" sz="1050" dirty="0">
-                          <a:solidFill>
-                            <a:srgbClr val="3B4660"/>
-                          </a:solidFill>
-                          <a:latin typeface="Calibri" pitchFamily="34" charset="0"/>
-                          <a:ea typeface="Calibri" pitchFamily="34" charset="-122"/>
-                          <a:cs typeface="Calibri" pitchFamily="34" charset="-120"/>
-                        </a:rPr>
-                        <a:t>1.33</a:t>
-                      </a:r>
-                      <a:endParaRPr lang="en-US" sz="1050" dirty="0">
-                        <a:latin typeface="Calibri" charset="0"/>
-                        <a:ea typeface="Calibri" charset="0"/>
-                        <a:cs typeface="Calibri" charset="0"/>
-                      </a:endParaRPr>
-                    </a:p>
-                  </a:txBody>
-                  <a:tcPr marL="0" marR="76200" marT="63500" marB="63500" anchor="ctr">
-                    <a:lnL w="0" cap="flat" cmpd="sng" algn="ctr">
-                      <a:solidFill>
-                        <a:srgbClr val="666666"/>
-                      </a:solidFill>
-                      <a:prstDash val="solid"/>
-                      <a:round/>
-                      <a:headEnd type="none" w="med" len="med"/>
-                      <a:tailEnd type="none" w="med" len="med"/>
-                    </a:lnL>
-                    <a:lnR w="0" cap="flat" cmpd="sng" algn="ctr">
-                      <a:solidFill>
-                        <a:srgbClr val="666666"/>
-                      </a:solidFill>
-                      <a:prstDash val="solid"/>
-                      <a:round/>
-                      <a:headEnd type="none" w="med" len="med"/>
-                      <a:tailEnd type="none" w="med" len="med"/>
-                    </a:lnR>
-                    <a:lnT w="0" cap="flat" cmpd="sng" algn="ctr">
-                      <a:solidFill>
-                        <a:srgbClr val="666666"/>
-                      </a:solidFill>
-                      <a:prstDash val="solid"/>
-                      <a:round/>
-                      <a:headEnd type="none" w="med" len="med"/>
-                      <a:tailEnd type="none" w="med" len="med"/>
-                    </a:lnT>
-                    <a:lnB w="7620" cap="flat" cmpd="sng" algn="ctr">
-                      <a:solidFill>
-                        <a:srgbClr val="E2E4EA"/>
-                      </a:solidFill>
-                      <a:prstDash val="solid"/>
-                      <a:round/>
-                      <a:headEnd type="none" w="med" len="med"/>
-                      <a:tailEnd type="none" w="med" len="med"/>
-                    </a:lnB>
-                    <a:solidFill>
-                      <a:srgbClr val="F2F6FE"/>
-                    </a:solidFill>
-                  </a:tcPr>
-                </a:tc>
-                <a:tc>
-                  <a:txBody>
-                    <a:bodyPr/>
-                    <a:lstStyle/>
-                    <a:p>
-                      <a:pPr algn="r" indent="0" marL="0">
-                        <a:buNone/>
-                      </a:pPr>
-                      <a:r>
-                        <a:rPr lang="en-US" sz="1050" dirty="0">
-                          <a:solidFill>
-                            <a:srgbClr val="3B4660"/>
-                          </a:solidFill>
-                          <a:latin typeface="Calibri" pitchFamily="34" charset="0"/>
-                          <a:ea typeface="Calibri" pitchFamily="34" charset="-122"/>
-                          <a:cs typeface="Calibri" pitchFamily="34" charset="-120"/>
-                        </a:rPr>
-                        <a:t>1.45</a:t>
-                      </a:r>
-                      <a:endParaRPr lang="en-US" sz="1050" dirty="0">
-                        <a:latin typeface="Calibri" charset="0"/>
-                        <a:ea typeface="Calibri" charset="0"/>
-                        <a:cs typeface="Calibri" charset="0"/>
-                      </a:endParaRPr>
-                    </a:p>
-                  </a:txBody>
-                  <a:tcPr marL="0" marR="76200" marT="63500" marB="63500" anchor="ctr">
-                    <a:lnL w="0" cap="flat" cmpd="sng" algn="ctr">
-                      <a:solidFill>
-                        <a:srgbClr val="666666"/>
-                      </a:solidFill>
-                      <a:prstDash val="solid"/>
-                      <a:round/>
-                      <a:headEnd type="none" w="med" len="med"/>
-                      <a:tailEnd type="none" w="med" len="med"/>
-                    </a:lnL>
-                    <a:lnR w="0" cap="flat" cmpd="sng" algn="ctr">
-                      <a:solidFill>
-                        <a:srgbClr val="666666"/>
-                      </a:solidFill>
-                      <a:prstDash val="solid"/>
-                      <a:round/>
-                      <a:headEnd type="none" w="med" len="med"/>
-                      <a:tailEnd type="none" w="med" len="med"/>
-                    </a:lnR>
-                    <a:lnT w="0" cap="flat" cmpd="sng" algn="ctr">
-                      <a:solidFill>
-                        <a:srgbClr val="666666"/>
-                      </a:solidFill>
-                      <a:prstDash val="solid"/>
-                      <a:round/>
-                      <a:headEnd type="none" w="med" len="med"/>
-                      <a:tailEnd type="none" w="med" len="med"/>
-                    </a:lnT>
-                    <a:lnB w="7620" cap="flat" cmpd="sng" algn="ctr">
-                      <a:solidFill>
-                        <a:srgbClr val="E2E4EA"/>
-                      </a:solidFill>
-                      <a:prstDash val="solid"/>
-                      <a:round/>
-                      <a:headEnd type="none" w="med" len="med"/>
-                      <a:tailEnd type="none" w="med" len="med"/>
-                    </a:lnB>
-                    <a:solidFill>
-                      <a:srgbClr val="F2F6FE"/>
-                    </a:solidFill>
-                  </a:tcPr>
-                </a:tc>
-                <a:tc>
-                  <a:txBody>
-                    <a:bodyPr/>
-                    <a:lstStyle/>
-                    <a:p>
-                      <a:pPr algn="r" indent="0" marL="0">
-                        <a:buNone/>
-                      </a:pPr>
-                      <a:r>
-                        <a:rPr lang="en-US" sz="1050" dirty="0">
-                          <a:solidFill>
-                            <a:srgbClr val="3B4660"/>
-                          </a:solidFill>
-                          <a:latin typeface="Calibri" pitchFamily="34" charset="0"/>
-                          <a:ea typeface="Calibri" pitchFamily="34" charset="-122"/>
-                          <a:cs typeface="Calibri" pitchFamily="34" charset="-120"/>
-                        </a:rPr>
-                        <a:t>1.71</a:t>
-                      </a:r>
-                      <a:endParaRPr lang="en-US" sz="1050" dirty="0">
-                        <a:latin typeface="Calibri" charset="0"/>
-                        <a:ea typeface="Calibri" charset="0"/>
-                        <a:cs typeface="Calibri" charset="0"/>
-                      </a:endParaRPr>
-                    </a:p>
-                  </a:txBody>
-                  <a:tcPr marL="0" marR="76200" marT="63500" marB="63500" anchor="ctr">
-                    <a:lnL w="0" cap="flat" cmpd="sng" algn="ctr">
-                      <a:solidFill>
-                        <a:srgbClr val="666666"/>
-                      </a:solidFill>
-                      <a:prstDash val="solid"/>
-                      <a:round/>
-                      <a:headEnd type="none" w="med" len="med"/>
-                      <a:tailEnd type="none" w="med" len="med"/>
-                    </a:lnL>
-                    <a:lnR w="0" cap="flat" cmpd="sng" algn="ctr">
-                      <a:solidFill>
-                        <a:srgbClr val="666666"/>
-                      </a:solidFill>
-                      <a:prstDash val="solid"/>
-                      <a:round/>
-                      <a:headEnd type="none" w="med" len="med"/>
-                      <a:tailEnd type="none" w="med" len="med"/>
-                    </a:lnR>
-                    <a:lnT w="0" cap="flat" cmpd="sng" algn="ctr">
-                      <a:solidFill>
-                        <a:srgbClr val="666666"/>
-                      </a:solidFill>
-                      <a:prstDash val="solid"/>
-                      <a:round/>
-                      <a:headEnd type="none" w="med" len="med"/>
-                      <a:tailEnd type="none" w="med" len="med"/>
-                    </a:lnT>
-                    <a:lnB w="7620" cap="flat" cmpd="sng" algn="ctr">
-                      <a:solidFill>
-                        <a:srgbClr val="E2E4EA"/>
-                      </a:solidFill>
-                      <a:prstDash val="solid"/>
-                      <a:round/>
-                      <a:headEnd type="none" w="med" len="med"/>
-                      <a:tailEnd type="none" w="med" len="med"/>
-                    </a:lnB>
-                    <a:solidFill>
-                      <a:srgbClr val="F2F6FE"/>
-                    </a:solidFill>
-                  </a:tcPr>
-                </a:tc>
-              </a:tr>
-              <a:tr h="283464">
-                <a:tc>
-                  <a:txBody>
-                    <a:bodyPr/>
-                    <a:lstStyle/>
-                    <a:p>
-                      <a:pPr algn="l" indent="0" marL="0">
-                        <a:buNone/>
-                      </a:pPr>
-                      <a:r>
-                        <a:rPr lang="en-US" sz="1050" b="1" dirty="0">
-                          <a:solidFill>
-                            <a:srgbClr val="0A1426"/>
-                          </a:solidFill>
-                          <a:latin typeface="Calibri" pitchFamily="34" charset="0"/>
-                          <a:ea typeface="Calibri" pitchFamily="34" charset="-122"/>
-                          <a:cs typeface="Calibri" pitchFamily="34" charset="-120"/>
-                        </a:rPr>
-                        <a:t>EBITDA margin</a:t>
-                      </a:r>
-                      <a:endParaRPr lang="en-US" sz="1050" dirty="0">
-                        <a:latin typeface="Calibri" charset="0"/>
-                        <a:ea typeface="Calibri" charset="0"/>
-                        <a:cs typeface="Calibri" charset="0"/>
-                      </a:endParaRPr>
-                    </a:p>
-                  </a:txBody>
-                  <a:tcPr marL="0" marR="76200" marT="63500" marB="63500" anchor="ctr">
-                    <a:lnL w="0" cap="flat" cmpd="sng" algn="ctr">
-                      <a:solidFill>
-                        <a:srgbClr val="666666"/>
-                      </a:solidFill>
-                      <a:prstDash val="solid"/>
-                      <a:round/>
-                      <a:headEnd type="none" w="med" len="med"/>
-                      <a:tailEnd type="none" w="med" len="med"/>
-                    </a:lnL>
-                    <a:lnR w="0" cap="flat" cmpd="sng" algn="ctr">
-                      <a:solidFill>
-                        <a:srgbClr val="666666"/>
-                      </a:solidFill>
-                      <a:prstDash val="solid"/>
-                      <a:round/>
-                      <a:headEnd type="none" w="med" len="med"/>
-                      <a:tailEnd type="none" w="med" len="med"/>
-                    </a:lnR>
-                    <a:lnT w="0" cap="flat" cmpd="sng" algn="ctr">
-                      <a:solidFill>
-                        <a:srgbClr val="666666"/>
-                      </a:solidFill>
-                      <a:prstDash val="solid"/>
-                      <a:round/>
-                      <a:headEnd type="none" w="med" len="med"/>
-                      <a:tailEnd type="none" w="med" len="med"/>
-                    </a:lnT>
-                    <a:lnB w="7620" cap="flat" cmpd="sng" algn="ctr">
-                      <a:solidFill>
-                        <a:srgbClr val="E2E4EA"/>
-                      </a:solidFill>
-                      <a:prstDash val="solid"/>
-                      <a:round/>
-                      <a:headEnd type="none" w="med" len="med"/>
-                      <a:tailEnd type="none" w="med" len="med"/>
-                    </a:lnB>
-                    <a:solidFill>
-                      <a:srgbClr val="FBF1EE"/>
-                    </a:solidFill>
-                  </a:tcPr>
-                </a:tc>
-                <a:tc>
-                  <a:txBody>
-                    <a:bodyPr/>
-                    <a:lstStyle/>
-                    <a:p>
-                      <a:pPr algn="r" indent="0" marL="0">
-                        <a:buNone/>
-                      </a:pPr>
-                      <a:r>
-                        <a:rPr lang="en-US" sz="1050" b="1" dirty="0">
-                          <a:solidFill>
-                            <a:srgbClr val="0A1426"/>
-                          </a:solidFill>
-                          <a:latin typeface="Calibri" pitchFamily="34" charset="0"/>
-                          <a:ea typeface="Calibri" pitchFamily="34" charset="-122"/>
-                          <a:cs typeface="Calibri" pitchFamily="34" charset="-120"/>
-                        </a:rPr>
-                        <a:t>7%</a:t>
-                      </a:r>
-                      <a:endParaRPr lang="en-US" sz="1050" dirty="0">
-                        <a:latin typeface="Calibri" charset="0"/>
-                        <a:ea typeface="Calibri" charset="0"/>
-                        <a:cs typeface="Calibri" charset="0"/>
-                      </a:endParaRPr>
-                    </a:p>
-                  </a:txBody>
-                  <a:tcPr marL="0" marR="76200" marT="63500" marB="63500" anchor="ctr">
-                    <a:lnL w="0" cap="flat" cmpd="sng" algn="ctr">
-                      <a:solidFill>
-                        <a:srgbClr val="666666"/>
-                      </a:solidFill>
-                      <a:prstDash val="solid"/>
-                      <a:round/>
-                      <a:headEnd type="none" w="med" len="med"/>
-                      <a:tailEnd type="none" w="med" len="med"/>
-                    </a:lnL>
-                    <a:lnR w="0" cap="flat" cmpd="sng" algn="ctr">
-                      <a:solidFill>
-                        <a:srgbClr val="666666"/>
-                      </a:solidFill>
-                      <a:prstDash val="solid"/>
-                      <a:round/>
-                      <a:headEnd type="none" w="med" len="med"/>
-                      <a:tailEnd type="none" w="med" len="med"/>
-                    </a:lnR>
-                    <a:lnT w="0" cap="flat" cmpd="sng" algn="ctr">
-                      <a:solidFill>
-                        <a:srgbClr val="666666"/>
-                      </a:solidFill>
-                      <a:prstDash val="solid"/>
-                      <a:round/>
-                      <a:headEnd type="none" w="med" len="med"/>
-                      <a:tailEnd type="none" w="med" len="med"/>
-                    </a:lnT>
-                    <a:lnB w="7620" cap="flat" cmpd="sng" algn="ctr">
-                      <a:solidFill>
-                        <a:srgbClr val="E2E4EA"/>
-                      </a:solidFill>
-                      <a:prstDash val="solid"/>
-                      <a:round/>
-                      <a:headEnd type="none" w="med" len="med"/>
-                      <a:tailEnd type="none" w="med" len="med"/>
-                    </a:lnB>
-                    <a:solidFill>
-                      <a:srgbClr val="FBF1EE"/>
-                    </a:solidFill>
-                  </a:tcPr>
-                </a:tc>
-                <a:tc>
-                  <a:txBody>
-                    <a:bodyPr/>
-                    <a:lstStyle/>
-                    <a:p>
-                      <a:pPr algn="r" indent="0" marL="0">
-                        <a:buNone/>
-                      </a:pPr>
-                      <a:r>
-                        <a:rPr lang="en-US" sz="1050" b="1" dirty="0">
-                          <a:solidFill>
-                            <a:srgbClr val="0A1426"/>
-                          </a:solidFill>
-                          <a:latin typeface="Calibri" pitchFamily="34" charset="0"/>
-                          <a:ea typeface="Calibri" pitchFamily="34" charset="-122"/>
-                          <a:cs typeface="Calibri" pitchFamily="34" charset="-120"/>
-                        </a:rPr>
-                        <a:t>16%</a:t>
-                      </a:r>
-                      <a:endParaRPr lang="en-US" sz="1050" dirty="0">
-                        <a:latin typeface="Calibri" charset="0"/>
-                        <a:ea typeface="Calibri" charset="0"/>
-                        <a:cs typeface="Calibri" charset="0"/>
-                      </a:endParaRPr>
-                    </a:p>
-                  </a:txBody>
-                  <a:tcPr marL="0" marR="76200" marT="63500" marB="63500" anchor="ctr">
-                    <a:lnL w="0" cap="flat" cmpd="sng" algn="ctr">
-                      <a:solidFill>
-                        <a:srgbClr val="666666"/>
-                      </a:solidFill>
-                      <a:prstDash val="solid"/>
-                      <a:round/>
-                      <a:headEnd type="none" w="med" len="med"/>
-                      <a:tailEnd type="none" w="med" len="med"/>
-                    </a:lnL>
-                    <a:lnR w="0" cap="flat" cmpd="sng" algn="ctr">
-                      <a:solidFill>
-                        <a:srgbClr val="666666"/>
-                      </a:solidFill>
-                      <a:prstDash val="solid"/>
-                      <a:round/>
-                      <a:headEnd type="none" w="med" len="med"/>
-                      <a:tailEnd type="none" w="med" len="med"/>
-                    </a:lnR>
-                    <a:lnT w="0" cap="flat" cmpd="sng" algn="ctr">
-                      <a:solidFill>
-                        <a:srgbClr val="666666"/>
-                      </a:solidFill>
-                      <a:prstDash val="solid"/>
-                      <a:round/>
-                      <a:headEnd type="none" w="med" len="med"/>
-                      <a:tailEnd type="none" w="med" len="med"/>
-                    </a:lnT>
-                    <a:lnB w="7620" cap="flat" cmpd="sng" algn="ctr">
-                      <a:solidFill>
-                        <a:srgbClr val="E2E4EA"/>
-                      </a:solidFill>
-                      <a:prstDash val="solid"/>
-                      <a:round/>
-                      <a:headEnd type="none" w="med" len="med"/>
-                      <a:tailEnd type="none" w="med" len="med"/>
-                    </a:lnB>
-                    <a:solidFill>
-                      <a:srgbClr val="FBF1EE"/>
-                    </a:solidFill>
-                  </a:tcPr>
-                </a:tc>
-                <a:tc>
-                  <a:txBody>
-                    <a:bodyPr/>
-                    <a:lstStyle/>
-                    <a:p>
-                      <a:pPr algn="r" indent="0" marL="0">
-                        <a:buNone/>
-                      </a:pPr>
-                      <a:r>
-                        <a:rPr lang="en-US" sz="1050" b="1" dirty="0">
-                          <a:solidFill>
-                            <a:srgbClr val="0A1426"/>
-                          </a:solidFill>
-                          <a:latin typeface="Calibri" pitchFamily="34" charset="0"/>
-                          <a:ea typeface="Calibri" pitchFamily="34" charset="-122"/>
-                          <a:cs typeface="Calibri" pitchFamily="34" charset="-120"/>
-                        </a:rPr>
-                        <a:t>23%</a:t>
-                      </a:r>
-                      <a:endParaRPr lang="en-US" sz="1050" dirty="0">
-                        <a:latin typeface="Calibri" charset="0"/>
-                        <a:ea typeface="Calibri" charset="0"/>
-                        <a:cs typeface="Calibri" charset="0"/>
-                      </a:endParaRPr>
-                    </a:p>
-                  </a:txBody>
-                  <a:tcPr marL="0" marR="76200" marT="63500" marB="63500" anchor="ctr">
-                    <a:lnL w="0" cap="flat" cmpd="sng" algn="ctr">
-                      <a:solidFill>
-                        <a:srgbClr val="666666"/>
-                      </a:solidFill>
-                      <a:prstDash val="solid"/>
-                      <a:round/>
-                      <a:headEnd type="none" w="med" len="med"/>
-                      <a:tailEnd type="none" w="med" len="med"/>
-                    </a:lnL>
-                    <a:lnR w="0" cap="flat" cmpd="sng" algn="ctr">
-                      <a:solidFill>
-                        <a:srgbClr val="666666"/>
-                      </a:solidFill>
-                      <a:prstDash val="solid"/>
-                      <a:round/>
-                      <a:headEnd type="none" w="med" len="med"/>
-                      <a:tailEnd type="none" w="med" len="med"/>
-                    </a:lnR>
-                    <a:lnT w="0" cap="flat" cmpd="sng" algn="ctr">
-                      <a:solidFill>
-                        <a:srgbClr val="666666"/>
-                      </a:solidFill>
-                      <a:prstDash val="solid"/>
-                      <a:round/>
-                      <a:headEnd type="none" w="med" len="med"/>
-                      <a:tailEnd type="none" w="med" len="med"/>
-                    </a:lnT>
-                    <a:lnB w="7620" cap="flat" cmpd="sng" algn="ctr">
-                      <a:solidFill>
-                        <a:srgbClr val="E2E4EA"/>
-                      </a:solidFill>
-                      <a:prstDash val="solid"/>
-                      <a:round/>
-                      <a:headEnd type="none" w="med" len="med"/>
-                      <a:tailEnd type="none" w="med" len="med"/>
-                    </a:lnB>
-                    <a:solidFill>
-                      <a:srgbClr val="FBF1EE"/>
-                    </a:solidFill>
-                  </a:tcPr>
-                </a:tc>
-                <a:tc>
-                  <a:txBody>
-                    <a:bodyPr/>
-                    <a:lstStyle/>
-                    <a:p>
-                      <a:pPr algn="r" indent="0" marL="0">
-                        <a:buNone/>
-                      </a:pPr>
-                      <a:r>
-                        <a:rPr lang="en-US" sz="1050" b="1" dirty="0">
-                          <a:solidFill>
-                            <a:srgbClr val="0A1426"/>
-                          </a:solidFill>
-                          <a:latin typeface="Calibri" pitchFamily="34" charset="0"/>
-                          <a:ea typeface="Calibri" pitchFamily="34" charset="-122"/>
-                          <a:cs typeface="Calibri" pitchFamily="34" charset="-120"/>
-                        </a:rPr>
-                        <a:t>25%</a:t>
-                      </a:r>
-                      <a:endParaRPr lang="en-US" sz="1050" dirty="0">
-                        <a:latin typeface="Calibri" charset="0"/>
-                        <a:ea typeface="Calibri" charset="0"/>
-                        <a:cs typeface="Calibri" charset="0"/>
-                      </a:endParaRPr>
-                    </a:p>
-                  </a:txBody>
-                  <a:tcPr marL="0" marR="76200" marT="63500" marB="63500" anchor="ctr">
-                    <a:lnL w="0" cap="flat" cmpd="sng" algn="ctr">
-                      <a:solidFill>
-                        <a:srgbClr val="666666"/>
-                      </a:solidFill>
-                      <a:prstDash val="solid"/>
-                      <a:round/>
-                      <a:headEnd type="none" w="med" len="med"/>
-                      <a:tailEnd type="none" w="med" len="med"/>
-                    </a:lnL>
-                    <a:lnR w="0" cap="flat" cmpd="sng" algn="ctr">
-                      <a:solidFill>
-                        <a:srgbClr val="666666"/>
-                      </a:solidFill>
-                      <a:prstDash val="solid"/>
-                      <a:round/>
-                      <a:headEnd type="none" w="med" len="med"/>
-                      <a:tailEnd type="none" w="med" len="med"/>
-                    </a:lnR>
-                    <a:lnT w="0" cap="flat" cmpd="sng" algn="ctr">
-                      <a:solidFill>
-                        <a:srgbClr val="666666"/>
-                      </a:solidFill>
-                      <a:prstDash val="solid"/>
-                      <a:round/>
-                      <a:headEnd type="none" w="med" len="med"/>
-                      <a:tailEnd type="none" w="med" len="med"/>
-                    </a:lnT>
-                    <a:lnB w="7620" cap="flat" cmpd="sng" algn="ctr">
-                      <a:solidFill>
-                        <a:srgbClr val="E2E4EA"/>
-                      </a:solidFill>
-                      <a:prstDash val="solid"/>
-                      <a:round/>
-                      <a:headEnd type="none" w="med" len="med"/>
-                      <a:tailEnd type="none" w="med" len="med"/>
-                    </a:lnB>
-                    <a:solidFill>
-                      <a:srgbClr val="FBF1EE"/>
-                    </a:solidFill>
-                  </a:tcPr>
-                </a:tc>
-                <a:tc>
-                  <a:txBody>
-                    <a:bodyPr/>
-                    <a:lstStyle/>
-                    <a:p>
-                      <a:pPr algn="r" indent="0" marL="0">
-                        <a:buNone/>
-                      </a:pPr>
-                      <a:r>
-                        <a:rPr lang="en-US" sz="1050" b="1" dirty="0">
-                          <a:solidFill>
-                            <a:srgbClr val="0A1426"/>
-                          </a:solidFill>
-                          <a:latin typeface="Calibri" pitchFamily="34" charset="0"/>
-                          <a:ea typeface="Calibri" pitchFamily="34" charset="-122"/>
-                          <a:cs typeface="Calibri" pitchFamily="34" charset="-120"/>
-                        </a:rPr>
-                        <a:t>28%</a:t>
-                      </a:r>
-                      <a:endParaRPr lang="en-US" sz="1050" dirty="0">
-                        <a:latin typeface="Calibri" charset="0"/>
-                        <a:ea typeface="Calibri" charset="0"/>
-                        <a:cs typeface="Calibri" charset="0"/>
-                      </a:endParaRPr>
-                    </a:p>
-                  </a:txBody>
-                  <a:tcPr marL="0" marR="76200" marT="63500" marB="63500" anchor="ctr">
-                    <a:lnL w="0" cap="flat" cmpd="sng" algn="ctr">
-                      <a:solidFill>
-                        <a:srgbClr val="666666"/>
-                      </a:solidFill>
-                      <a:prstDash val="solid"/>
-                      <a:round/>
-                      <a:headEnd type="none" w="med" len="med"/>
-                      <a:tailEnd type="none" w="med" len="med"/>
-                    </a:lnL>
-                    <a:lnR w="0" cap="flat" cmpd="sng" algn="ctr">
-                      <a:solidFill>
-                        <a:srgbClr val="666666"/>
-                      </a:solidFill>
-                      <a:prstDash val="solid"/>
-                      <a:round/>
-                      <a:headEnd type="none" w="med" len="med"/>
-                      <a:tailEnd type="none" w="med" len="med"/>
-                    </a:lnR>
-                    <a:lnT w="0" cap="flat" cmpd="sng" algn="ctr">
-                      <a:solidFill>
-                        <a:srgbClr val="666666"/>
-                      </a:solidFill>
-                      <a:prstDash val="solid"/>
-                      <a:round/>
-                      <a:headEnd type="none" w="med" len="med"/>
-                      <a:tailEnd type="none" w="med" len="med"/>
-                    </a:lnT>
-                    <a:lnB w="7620" cap="flat" cmpd="sng" algn="ctr">
-                      <a:solidFill>
-                        <a:srgbClr val="E2E4EA"/>
-                      </a:solidFill>
-                      <a:prstDash val="solid"/>
-                      <a:round/>
-                      <a:headEnd type="none" w="med" len="med"/>
-                      <a:tailEnd type="none" w="med" len="med"/>
-                    </a:lnB>
-                    <a:solidFill>
-                      <a:srgbClr val="FBF1EE"/>
-                    </a:solidFill>
-                  </a:tcPr>
-                </a:tc>
-                <a:tc>
-                  <a:txBody>
-                    <a:bodyPr/>
-                    <a:lstStyle/>
-                    <a:p>
-                      <a:pPr algn="r" indent="0" marL="0">
-                        <a:buNone/>
-                      </a:pPr>
-                      <a:r>
-                        <a:rPr lang="en-US" sz="1050" b="1" dirty="0">
-                          <a:solidFill>
-                            <a:srgbClr val="0A1426"/>
-                          </a:solidFill>
-                          <a:latin typeface="Calibri" pitchFamily="34" charset="0"/>
-                          <a:ea typeface="Calibri" pitchFamily="34" charset="-122"/>
-                          <a:cs typeface="Calibri" pitchFamily="34" charset="-120"/>
-                        </a:rPr>
-                        <a:t>28%</a:t>
-                      </a:r>
-                      <a:endParaRPr lang="en-US" sz="1050" dirty="0">
-                        <a:latin typeface="Calibri" charset="0"/>
-                        <a:ea typeface="Calibri" charset="0"/>
-                        <a:cs typeface="Calibri" charset="0"/>
-                      </a:endParaRPr>
-                    </a:p>
-                  </a:txBody>
-                  <a:tcPr marL="0" marR="76200" marT="63500" marB="63500" anchor="ctr">
-                    <a:lnL w="0" cap="flat" cmpd="sng" algn="ctr">
-                      <a:solidFill>
-                        <a:srgbClr val="666666"/>
-                      </a:solidFill>
-                      <a:prstDash val="solid"/>
-                      <a:round/>
-                      <a:headEnd type="none" w="med" len="med"/>
-                      <a:tailEnd type="none" w="med" len="med"/>
-                    </a:lnL>
-                    <a:lnR w="0" cap="flat" cmpd="sng" algn="ctr">
-                      <a:solidFill>
-                        <a:srgbClr val="666666"/>
-                      </a:solidFill>
-                      <a:prstDash val="solid"/>
-                      <a:round/>
-                      <a:headEnd type="none" w="med" len="med"/>
-                      <a:tailEnd type="none" w="med" len="med"/>
-                    </a:lnR>
-                    <a:lnT w="0" cap="flat" cmpd="sng" algn="ctr">
-                      <a:solidFill>
-                        <a:srgbClr val="666666"/>
-                      </a:solidFill>
-                      <a:prstDash val="solid"/>
-                      <a:round/>
-                      <a:headEnd type="none" w="med" len="med"/>
-                      <a:tailEnd type="none" w="med" len="med"/>
-                    </a:lnT>
-                    <a:lnB w="7620" cap="flat" cmpd="sng" algn="ctr">
-                      <a:solidFill>
-                        <a:srgbClr val="E2E4EA"/>
-                      </a:solidFill>
-                      <a:prstDash val="solid"/>
-                      <a:round/>
-                      <a:headEnd type="none" w="med" len="med"/>
-                      <a:tailEnd type="none" w="med" len="med"/>
-                    </a:lnB>
-                    <a:solidFill>
-                      <a:srgbClr val="FBF1EE"/>
-                    </a:solidFill>
-                  </a:tcPr>
-                </a:tc>
-                <a:tc>
-                  <a:txBody>
-                    <a:bodyPr/>
-                    <a:lstStyle/>
-                    <a:p>
-                      <a:pPr algn="r" indent="0" marL="0">
-                        <a:buNone/>
-                      </a:pPr>
-                      <a:r>
-                        <a:rPr lang="en-US" sz="1050" b="1" dirty="0">
-                          <a:solidFill>
-                            <a:srgbClr val="0A1426"/>
-                          </a:solidFill>
-                          <a:latin typeface="Calibri" pitchFamily="34" charset="0"/>
-                          <a:ea typeface="Calibri" pitchFamily="34" charset="-122"/>
-                          <a:cs typeface="Calibri" pitchFamily="34" charset="-120"/>
-                        </a:rPr>
-                        <a:t>30%</a:t>
-                      </a:r>
-                      <a:endParaRPr lang="en-US" sz="1050" dirty="0">
+                        <a:t>27%</a:t>
+                      </a:r>
+                      <a:endParaRPr lang="en-US" sz="1000" dirty="0">
                         <a:latin typeface="Calibri" charset="0"/>
                         <a:ea typeface="Calibri" charset="0"/>
                         <a:cs typeface="Calibri" charset="0"/>
@@ -33427,23 +33427,16 @@
         </p:nvSpPr>
         <p:spPr>
           <a:xfrm>
-            <a:off x="566928" y="5138928"/>
-            <a:ext cx="11057839" cy="1188720"/>
+            <a:off x="566928" y="5808980"/>
+            <a:ext cx="11057839" cy="10973"/>
           </a:xfrm>
-          <a:prstGeom prst="roundRect">
-            <a:avLst>
-              <a:gd name="adj" fmla="val 3846"/>
-            </a:avLst>
+          <a:prstGeom prst="rect">
+            <a:avLst/>
           </a:prstGeom>
           <a:solidFill>
-            <a:srgbClr val="F1F5FE"/>
+            <a:srgbClr val="E2E4EA"/>
           </a:solidFill>
-          <a:ln w="15875">
-            <a:solidFill>
-              <a:srgbClr val="2B66EA"/>
-            </a:solidFill>
-            <a:prstDash val="solid"/>
-          </a:ln>
+          <a:ln/>
         </p:spPr>
       </p:sp>
       <p:sp>
@@ -33454,8 +33447,8 @@
         </p:nvSpPr>
         <p:spPr>
           <a:xfrm>
-            <a:off x="804672" y="5248656"/>
-            <a:ext cx="2743200" cy="182880"/>
+            <a:off x="566928" y="5863844"/>
+            <a:ext cx="11057839" cy="173736"/>
           </a:xfrm>
           <a:prstGeom prst="rect">
             <a:avLst/>
@@ -33464,24 +33457,24 @@
           <a:ln/>
         </p:spPr>
         <p:txBody>
-          <a:bodyPr wrap="square" lIns="0" tIns="0" rIns="0" bIns="0" rtlCol="0" anchor="ctr"/>
+          <a:bodyPr wrap="square" lIns="0" tIns="0" rIns="0" bIns="0" rtlCol="0" anchor="t"/>
           <a:lstStyle/>
           <a:p>
             <a:pPr indent="0" marL="0">
               <a:buNone/>
             </a:pPr>
             <a:r>
-              <a:rPr lang="en-US" sz="850" b="1" spc="160" kern="0" dirty="0">
+              <a:rPr lang="en-US" sz="800" b="1" spc="140" kern="0" dirty="0">
                 <a:solidFill>
-                  <a:srgbClr val="2A51A3"/>
+                  <a:srgbClr val="6E7689"/>
                 </a:solidFill>
                 <a:latin typeface="Calibri" pitchFamily="34" charset="0"/>
                 <a:ea typeface="Calibri" pitchFamily="34" charset="-122"/>
                 <a:cs typeface="Calibri" pitchFamily="34" charset="-120"/>
               </a:rPr>
-              <a:t>NOTE</a:t>
+              <a:t>WHAT THE SHOW AMC LINE DOES AND DOES NOT COVER</a:t>
             </a:r>
-            <a:endParaRPr lang="en-US" sz="850" dirty="0"/>
+            <a:endParaRPr lang="en-US" sz="800" dirty="0"/>
           </a:p>
         </p:txBody>
       </p:sp>
@@ -33493,8 +33486,8 @@
         </p:nvSpPr>
         <p:spPr>
           <a:xfrm>
-            <a:off x="804672" y="5431536"/>
-            <a:ext cx="10582351" cy="243027"/>
+            <a:off x="566928" y="6037580"/>
+            <a:ext cx="11057839" cy="343408"/>
           </a:xfrm>
           <a:prstGeom prst="rect">
             <a:avLst/>
@@ -33508,70 +33501,28 @@
           <a:p>
             <a:pPr indent="0" marL="0">
               <a:lnSpc>
-                <a:spcPts val="1840"/>
+                <a:spcPts val="1300"/>
               </a:lnSpc>
               <a:buNone/>
             </a:pPr>
             <a:r>
-              <a:rPr lang="en-US" sz="1600" b="1" dirty="0">
+              <a:rPr lang="en-US" sz="950" dirty="0">
                 <a:solidFill>
-                  <a:srgbClr val="0A1426"/>
+                  <a:srgbClr val="6E7689"/>
                 </a:solidFill>
                 <a:latin typeface="Calibri" pitchFamily="34" charset="0"/>
                 <a:ea typeface="Calibri" pitchFamily="34" charset="-122"/>
                 <a:cs typeface="Calibri" pitchFamily="34" charset="-120"/>
               </a:rPr>
-              <a:t>Obligations carried inside these lines</a:t>
+              <a:t>The line covers servicing and consumable spares only. End-of-life replacement of a laser projector, pump or control unit falls on the agency under the RFP, and no provision for it is carried here — the age and condition of the installed equipment are not known. Open item, section 09.</a:t>
             </a:r>
-            <a:endParaRPr lang="en-US" sz="1600" dirty="0"/>
+            <a:endParaRPr lang="en-US" sz="950" dirty="0"/>
           </a:p>
         </p:txBody>
       </p:sp>
       <p:sp>
         <p:nvSpPr>
           <p:cNvPr id="10" name="Text 7"/>
-          <p:cNvSpPr/>
-          <p:nvPr/>
-        </p:nvSpPr>
-        <p:spPr>
-          <a:xfrm>
-            <a:off x="804672" y="5729427"/>
-            <a:ext cx="10582351" cy="525069"/>
-          </a:xfrm>
-          <a:prstGeom prst="rect">
-            <a:avLst/>
-          </a:prstGeom>
-          <a:noFill/>
-          <a:ln/>
-        </p:spPr>
-        <p:txBody>
-          <a:bodyPr wrap="square" lIns="0" tIns="0" rIns="0" bIns="0" rtlCol="0" anchor="t"/>
-          <a:lstStyle/>
-          <a:p>
-            <a:pPr indent="0" marL="0">
-              <a:lnSpc>
-                <a:spcPts val="1420"/>
-              </a:lnSpc>
-              <a:buNone/>
-            </a:pPr>
-            <a:r>
-              <a:rPr lang="en-US" sz="1000" dirty="0">
-                <a:solidFill>
-                  <a:srgbClr val="3B4660"/>
-                </a:solidFill>
-                <a:latin typeface="Calibri" pitchFamily="34" charset="0"/>
-                <a:ea typeface="Calibri" pitchFamily="34" charset="-122"/>
-                <a:cs typeface="Calibri" pitchFamily="34" charset="-120"/>
-              </a:rPr>
-              <a:t>CCTV integrated with the Agra Smart City centre, ex-servicemen at entry points, police verification, personnel insurance, a dedicated technical supervisor and six-monthly safety audits all sit within payroll, insurance and IT above. Not costed: replacement of any laser or fountain asset reaching end of life, which the RFP places on the agency.</a:t>
-            </a:r>
-            <a:endParaRPr lang="en-US" sz="1000" dirty="0"/>
-          </a:p>
-        </p:txBody>
-      </p:sp>
-      <p:sp>
-        <p:nvSpPr>
-          <p:cNvPr id="11" name="Text 8"/>
           <p:cNvSpPr/>
           <p:nvPr/>
         </p:nvSpPr>
@@ -33939,7 +33890,7 @@
                 <a:ea typeface="Calibri" pitchFamily="34" charset="-122"/>
                 <a:cs typeface="Calibri" pitchFamily="34" charset="-120"/>
               </a:rPr>
-              <a:t>₹0.17 Cr in the opening season</a:t>
+              <a:t>₹0.14 Cr in the opening season</a:t>
             </a:r>
             <a:endParaRPr lang="en-US" sz="950" dirty="0"/>
           </a:p>
@@ -34046,7 +33997,7 @@
                 <a:ea typeface="Calibri" pitchFamily="34" charset="-122"/>
                 <a:cs typeface="Calibri" pitchFamily="34" charset="-120"/>
               </a:rPr>
-              <a:t>29.8%</a:t>
+              <a:t>27.2%</a:t>
             </a:r>
             <a:endParaRPr lang="en-US" sz="2600" dirty="0"/>
           </a:p>
@@ -34195,7 +34146,7 @@
                 <a:ea typeface="Calibri" pitchFamily="34" charset="-122"/>
                 <a:cs typeface="Calibri" pitchFamily="34" charset="-120"/>
               </a:rPr>
-              <a:t>₹7.10 Cr</a:t>
+              <a:t>₹5.78 Cr</a:t>
             </a:r>
             <a:endParaRPr lang="en-US" sz="2600" dirty="0"/>
           </a:p>
@@ -34421,7 +34372,7 @@
         <p:spPr>
           <a:xfrm>
             <a:off x="566928" y="950976"/>
-            <a:ext cx="11057839" cy="231140"/>
+            <a:ext cx="11057839" cy="462280"/>
           </a:xfrm>
           <a:prstGeom prst="rect">
             <a:avLst/>
@@ -34469,7 +34420,7 @@
           </p:nvPr>
         </p:nvGraphicFramePr>
         <p:xfrm>
-          <a:off x="566928" y="1310132"/>
+          <a:off x="566928" y="1541272"/>
           <a:ext cx="11057839" cy="914400"/>
         </p:xfrm>
         <a:graphic>
@@ -35208,7 +35159,7 @@
                           <a:ea typeface="Calibri" pitchFamily="34" charset="-122"/>
                           <a:cs typeface="Calibri" pitchFamily="34" charset="-120"/>
                         </a:rPr>
-                        <a:t>-1.00</a:t>
+                        <a:t>-0.58</a:t>
                       </a:r>
                       <a:endParaRPr lang="en-US" sz="1100" dirty="0">
                         <a:latin typeface="Calibri" charset="0"/>
@@ -35346,7 +35297,7 @@
                           <a:ea typeface="Calibri" pitchFamily="34" charset="-122"/>
                           <a:cs typeface="Calibri" pitchFamily="34" charset="-120"/>
                         </a:rPr>
-                        <a:t>0.17</a:t>
+                        <a:t>0.14</a:t>
                       </a:r>
                       <a:endParaRPr lang="en-US" sz="1100" dirty="0">
                         <a:latin typeface="Calibri" charset="0"/>
@@ -35414,7 +35365,7 @@
                           <a:ea typeface="Calibri" pitchFamily="34" charset="-122"/>
                           <a:cs typeface="Calibri" pitchFamily="34" charset="-120"/>
                         </a:rPr>
-                        <a:t>-0.01</a:t>
+                        <a:t>-0.02</a:t>
                       </a:r>
                       <a:endParaRPr lang="en-US" sz="1100" dirty="0">
                         <a:latin typeface="Calibri" charset="0"/>
@@ -35618,7 +35569,7 @@
                           <a:ea typeface="Calibri" pitchFamily="34" charset="-122"/>
                           <a:cs typeface="Calibri" pitchFamily="34" charset="-120"/>
                         </a:rPr>
-                        <a:t>0.10</a:t>
+                        <a:t>0.07</a:t>
                       </a:r>
                       <a:endParaRPr lang="en-US" sz="1100" dirty="0">
                         <a:latin typeface="Calibri" charset="0"/>
@@ -35756,7 +35707,7 @@
                           <a:ea typeface="Calibri" pitchFamily="34" charset="-122"/>
                           <a:cs typeface="Calibri" pitchFamily="34" charset="-120"/>
                         </a:rPr>
-                        <a:t>0.51</a:t>
+                        <a:t>0.42</a:t>
                       </a:r>
                       <a:endParaRPr lang="en-US" sz="1100" dirty="0">
                         <a:latin typeface="Calibri" charset="0"/>
@@ -35824,7 +35775,7 @@
                           <a:ea typeface="Calibri" pitchFamily="34" charset="-122"/>
                           <a:cs typeface="Calibri" pitchFamily="34" charset="-120"/>
                         </a:rPr>
-                        <a:t>-0.10</a:t>
+                        <a:t>-0.09</a:t>
                       </a:r>
                       <a:endParaRPr lang="en-US" sz="1100" dirty="0">
                         <a:latin typeface="Calibri" charset="0"/>
@@ -36028,7 +35979,7 @@
                           <a:ea typeface="Calibri" pitchFamily="34" charset="-122"/>
                           <a:cs typeface="Calibri" pitchFamily="34" charset="-120"/>
                         </a:rPr>
-                        <a:t>0.35</a:t>
+                        <a:t>0.27</a:t>
                       </a:r>
                       <a:endParaRPr lang="en-US" sz="1100" dirty="0">
                         <a:latin typeface="Calibri" charset="0"/>
@@ -36166,7 +36117,7 @@
                           <a:ea typeface="Calibri" pitchFamily="34" charset="-122"/>
                           <a:cs typeface="Calibri" pitchFamily="34" charset="-120"/>
                         </a:rPr>
-                        <a:t>0.87</a:t>
+                        <a:t>0.73</a:t>
                       </a:r>
                       <a:endParaRPr lang="en-US" sz="1100" dirty="0">
                         <a:latin typeface="Calibri" charset="0"/>
@@ -36234,7 +36185,7 @@
                           <a:ea typeface="Calibri" pitchFamily="34" charset="-122"/>
                           <a:cs typeface="Calibri" pitchFamily="34" charset="-120"/>
                         </a:rPr>
-                        <a:t>-0.19</a:t>
+                        <a:t>-0.17</a:t>
                       </a:r>
                       <a:endParaRPr lang="en-US" sz="1100" dirty="0">
                         <a:latin typeface="Calibri" charset="0"/>
@@ -36302,7 +36253,7 @@
                           <a:ea typeface="Calibri" pitchFamily="34" charset="-122"/>
                           <a:cs typeface="Calibri" pitchFamily="34" charset="-120"/>
                         </a:rPr>
-                        <a:t>-0.08</a:t>
+                        <a:t>-0.07</a:t>
                       </a:r>
                       <a:endParaRPr lang="en-US" sz="1100" dirty="0">
                         <a:latin typeface="Calibri" charset="0"/>
@@ -36438,7 +36389,7 @@
                           <a:ea typeface="Calibri" pitchFamily="34" charset="-122"/>
                           <a:cs typeface="Calibri" pitchFamily="34" charset="-120"/>
                         </a:rPr>
-                        <a:t>0.61</a:t>
+                        <a:t>0.49</a:t>
                       </a:r>
                       <a:endParaRPr lang="en-US" sz="1100" dirty="0">
                         <a:latin typeface="Calibri" charset="0"/>
@@ -36576,7 +36527,7 @@
                           <a:ea typeface="Calibri" pitchFamily="34" charset="-122"/>
                           <a:cs typeface="Calibri" pitchFamily="34" charset="-120"/>
                         </a:rPr>
-                        <a:t>1.06</a:t>
+                        <a:t>0.87</a:t>
                       </a:r>
                       <a:endParaRPr lang="en-US" sz="1100" dirty="0">
                         <a:latin typeface="Calibri" charset="0"/>
@@ -36644,7 +36595,7 @@
                           <a:ea typeface="Calibri" pitchFamily="34" charset="-122"/>
                           <a:cs typeface="Calibri" pitchFamily="34" charset="-120"/>
                         </a:rPr>
-                        <a:t>-0.24</a:t>
+                        <a:t>-0.20</a:t>
                       </a:r>
                       <a:endParaRPr lang="en-US" sz="1100" dirty="0">
                         <a:latin typeface="Calibri" charset="0"/>
@@ -36848,7 +36799,7 @@
                           <a:ea typeface="Calibri" pitchFamily="34" charset="-122"/>
                           <a:cs typeface="Calibri" pitchFamily="34" charset="-120"/>
                         </a:rPr>
-                        <a:t>0.74</a:t>
+                        <a:t>0.59</a:t>
                       </a:r>
                       <a:endParaRPr lang="en-US" sz="1100" dirty="0">
                         <a:latin typeface="Calibri" charset="0"/>
@@ -36986,7 +36937,7 @@
                           <a:ea typeface="Calibri" pitchFamily="34" charset="-122"/>
                           <a:cs typeface="Calibri" pitchFamily="34" charset="-120"/>
                         </a:rPr>
-                        <a:t>1.33</a:t>
+                        <a:t>1.10</a:t>
                       </a:r>
                       <a:endParaRPr lang="en-US" sz="1100" dirty="0">
                         <a:latin typeface="Calibri" charset="0"/>
@@ -37054,7 +37005,7 @@
                           <a:ea typeface="Calibri" pitchFamily="34" charset="-122"/>
                           <a:cs typeface="Calibri" pitchFamily="34" charset="-120"/>
                         </a:rPr>
-                        <a:t>-0.30</a:t>
+                        <a:t>-0.26</a:t>
                       </a:r>
                       <a:endParaRPr lang="en-US" sz="1100" dirty="0">
                         <a:latin typeface="Calibri" charset="0"/>
@@ -37122,7 +37073,7 @@
                           <a:ea typeface="Calibri" pitchFamily="34" charset="-122"/>
                           <a:cs typeface="Calibri" pitchFamily="34" charset="-120"/>
                         </a:rPr>
-                        <a:t>-0.09</a:t>
+                        <a:t>-0.08</a:t>
                       </a:r>
                       <a:endParaRPr lang="en-US" sz="1100" dirty="0">
                         <a:latin typeface="Calibri" charset="0"/>
@@ -37258,7 +37209,7 @@
                           <a:ea typeface="Calibri" pitchFamily="34" charset="-122"/>
                           <a:cs typeface="Calibri" pitchFamily="34" charset="-120"/>
                         </a:rPr>
-                        <a:t>0.93</a:t>
+                        <a:t>0.75</a:t>
                       </a:r>
                       <a:endParaRPr lang="en-US" sz="1100" dirty="0">
                         <a:latin typeface="Calibri" charset="0"/>
@@ -37396,7 +37347,7 @@
                           <a:ea typeface="Calibri" pitchFamily="34" charset="-122"/>
                           <a:cs typeface="Calibri" pitchFamily="34" charset="-120"/>
                         </a:rPr>
-                        <a:t>1.45</a:t>
+                        <a:t>1.15</a:t>
                       </a:r>
                       <a:endParaRPr lang="en-US" sz="1100" dirty="0">
                         <a:latin typeface="Calibri" charset="0"/>
@@ -37464,7 +37415,7 @@
                           <a:ea typeface="Calibri" pitchFamily="34" charset="-122"/>
                           <a:cs typeface="Calibri" pitchFamily="34" charset="-120"/>
                         </a:rPr>
-                        <a:t>-0.33</a:t>
+                        <a:t>-0.27</a:t>
                       </a:r>
                       <a:endParaRPr lang="en-US" sz="1100" dirty="0">
                         <a:latin typeface="Calibri" charset="0"/>
@@ -37532,7 +37483,7 @@
                           <a:ea typeface="Calibri" pitchFamily="34" charset="-122"/>
                           <a:cs typeface="Calibri" pitchFamily="34" charset="-120"/>
                         </a:rPr>
-                        <a:t>-0.10</a:t>
+                        <a:t>-0.09</a:t>
                       </a:r>
                       <a:endParaRPr lang="en-US" sz="1100" dirty="0">
                         <a:latin typeface="Calibri" charset="0"/>
@@ -37668,7 +37619,7 @@
                           <a:ea typeface="Calibri" pitchFamily="34" charset="-122"/>
                           <a:cs typeface="Calibri" pitchFamily="34" charset="-120"/>
                         </a:rPr>
-                        <a:t>1.01</a:t>
+                        <a:t>0.79</a:t>
                       </a:r>
                       <a:endParaRPr lang="en-US" sz="1100" dirty="0">
                         <a:latin typeface="Calibri" charset="0"/>
@@ -37806,7 +37757,7 @@
                           <a:ea typeface="Calibri" pitchFamily="34" charset="-122"/>
                           <a:cs typeface="Calibri" pitchFamily="34" charset="-120"/>
                         </a:rPr>
-                        <a:t>1.71</a:t>
+                        <a:t>1.37</a:t>
                       </a:r>
                       <a:endParaRPr lang="en-US" sz="1100" dirty="0">
                         <a:latin typeface="Calibri" charset="0"/>
@@ -37874,7 +37825,7 @@
                           <a:ea typeface="Calibri" pitchFamily="34" charset="-122"/>
                           <a:cs typeface="Calibri" pitchFamily="34" charset="-120"/>
                         </a:rPr>
-                        <a:t>-0.40</a:t>
+                        <a:t>-0.33</a:t>
                       </a:r>
                       <a:endParaRPr lang="en-US" sz="1100" dirty="0">
                         <a:latin typeface="Calibri" charset="0"/>
@@ -37942,7 +37893,7 @@
                           <a:ea typeface="Calibri" pitchFamily="34" charset="-122"/>
                           <a:cs typeface="Calibri" pitchFamily="34" charset="-120"/>
                         </a:rPr>
-                        <a:t>-0.11</a:t>
+                        <a:t>-0.10</a:t>
                       </a:r>
                       <a:endParaRPr lang="en-US" sz="1100" dirty="0">
                         <a:latin typeface="Calibri" charset="0"/>
@@ -38078,7 +38029,7 @@
                           <a:ea typeface="Calibri" pitchFamily="34" charset="-122"/>
                           <a:cs typeface="Calibri" pitchFamily="34" charset="-120"/>
                         </a:rPr>
-                        <a:t>1.30</a:t>
+                        <a:t>1.04</a:t>
                       </a:r>
                       <a:endParaRPr lang="en-US" sz="1100" dirty="0">
                         <a:latin typeface="Calibri" charset="0"/>
@@ -38142,13 +38093,379 @@
                       <a:r>
                         <a:rPr lang="en-US" sz="1100" b="1" dirty="0">
                           <a:solidFill>
+                            <a:srgbClr val="3B4660"/>
+                          </a:solidFill>
+                          <a:latin typeface="Calibri" pitchFamily="34" charset="0"/>
+                          <a:ea typeface="Calibri" pitchFamily="34" charset="-122"/>
+                          <a:cs typeface="Calibri" pitchFamily="34" charset="-120"/>
+                        </a:rPr>
+                        <a:t>Operating free cash flow, seven years</a:t>
+                      </a:r>
+                      <a:endParaRPr lang="en-US" sz="1100" dirty="0">
+                        <a:latin typeface="Calibri" charset="0"/>
+                        <a:ea typeface="Calibri" charset="0"/>
+                        <a:cs typeface="Calibri" charset="0"/>
+                      </a:endParaRPr>
+                    </a:p>
+                  </a:txBody>
+                  <a:tcPr marL="0" marR="76200" marT="63500" marB="63500" anchor="ctr">
+                    <a:lnL w="0" cap="flat" cmpd="sng" algn="ctr">
+                      <a:solidFill>
+                        <a:srgbClr val="666666"/>
+                      </a:solidFill>
+                      <a:prstDash val="solid"/>
+                      <a:round/>
+                      <a:headEnd type="none" w="med" len="med"/>
+                      <a:tailEnd type="none" w="med" len="med"/>
+                    </a:lnL>
+                    <a:lnR w="0" cap="flat" cmpd="sng" algn="ctr">
+                      <a:solidFill>
+                        <a:srgbClr val="666666"/>
+                      </a:solidFill>
+                      <a:prstDash val="solid"/>
+                      <a:round/>
+                      <a:headEnd type="none" w="med" len="med"/>
+                      <a:tailEnd type="none" w="med" len="med"/>
+                    </a:lnR>
+                    <a:lnT w="0" cap="flat" cmpd="sng" algn="ctr">
+                      <a:solidFill>
+                        <a:srgbClr val="666666"/>
+                      </a:solidFill>
+                      <a:prstDash val="solid"/>
+                      <a:round/>
+                      <a:headEnd type="none" w="med" len="med"/>
+                      <a:tailEnd type="none" w="med" len="med"/>
+                    </a:lnT>
+                    <a:lnB w="7620" cap="flat" cmpd="sng" algn="ctr">
+                      <a:solidFill>
+                        <a:srgbClr val="E2E4EA"/>
+                      </a:solidFill>
+                      <a:prstDash val="solid"/>
+                      <a:round/>
+                      <a:headEnd type="none" w="med" len="med"/>
+                      <a:tailEnd type="none" w="med" len="med"/>
+                    </a:lnB>
+                    <a:solidFill>
+                      <a:srgbClr val="F2F6FE"/>
+                    </a:solidFill>
+                  </a:tcPr>
+                </a:tc>
+                <a:tc>
+                  <a:txBody>
+                    <a:bodyPr/>
+                    <a:lstStyle/>
+                    <a:p>
+                      <a:pPr algn="r" indent="0" marL="0">
+                        <a:buNone/>
+                      </a:pPr>
+                      <a:endParaRPr lang="en-US" sz="1100" dirty="0">
+                        <a:latin typeface="Calibri" charset="0"/>
+                        <a:ea typeface="Calibri" charset="0"/>
+                        <a:cs typeface="Calibri" charset="0"/>
+                      </a:endParaRPr>
+                    </a:p>
+                  </a:txBody>
+                  <a:tcPr marL="0" marR="76200" marT="63500" marB="63500" anchor="ctr">
+                    <a:lnL w="0" cap="flat" cmpd="sng" algn="ctr">
+                      <a:solidFill>
+                        <a:srgbClr val="666666"/>
+                      </a:solidFill>
+                      <a:prstDash val="solid"/>
+                      <a:round/>
+                      <a:headEnd type="none" w="med" len="med"/>
+                      <a:tailEnd type="none" w="med" len="med"/>
+                    </a:lnL>
+                    <a:lnR w="0" cap="flat" cmpd="sng" algn="ctr">
+                      <a:solidFill>
+                        <a:srgbClr val="666666"/>
+                      </a:solidFill>
+                      <a:prstDash val="solid"/>
+                      <a:round/>
+                      <a:headEnd type="none" w="med" len="med"/>
+                      <a:tailEnd type="none" w="med" len="med"/>
+                    </a:lnR>
+                    <a:lnT w="0" cap="flat" cmpd="sng" algn="ctr">
+                      <a:solidFill>
+                        <a:srgbClr val="666666"/>
+                      </a:solidFill>
+                      <a:prstDash val="solid"/>
+                      <a:round/>
+                      <a:headEnd type="none" w="med" len="med"/>
+                      <a:tailEnd type="none" w="med" len="med"/>
+                    </a:lnT>
+                    <a:lnB w="7620" cap="flat" cmpd="sng" algn="ctr">
+                      <a:solidFill>
+                        <a:srgbClr val="E2E4EA"/>
+                      </a:solidFill>
+                      <a:prstDash val="solid"/>
+                      <a:round/>
+                      <a:headEnd type="none" w="med" len="med"/>
+                      <a:tailEnd type="none" w="med" len="med"/>
+                    </a:lnB>
+                    <a:solidFill>
+                      <a:srgbClr val="F2F6FE"/>
+                    </a:solidFill>
+                  </a:tcPr>
+                </a:tc>
+                <a:tc>
+                  <a:txBody>
+                    <a:bodyPr/>
+                    <a:lstStyle/>
+                    <a:p>
+                      <a:pPr algn="r" indent="0" marL="0">
+                        <a:buNone/>
+                      </a:pPr>
+                      <a:endParaRPr lang="en-US" sz="1100" dirty="0">
+                        <a:latin typeface="Calibri" charset="0"/>
+                        <a:ea typeface="Calibri" charset="0"/>
+                        <a:cs typeface="Calibri" charset="0"/>
+                      </a:endParaRPr>
+                    </a:p>
+                  </a:txBody>
+                  <a:tcPr marL="0" marR="76200" marT="63500" marB="63500" anchor="ctr">
+                    <a:lnL w="0" cap="flat" cmpd="sng" algn="ctr">
+                      <a:solidFill>
+                        <a:srgbClr val="666666"/>
+                      </a:solidFill>
+                      <a:prstDash val="solid"/>
+                      <a:round/>
+                      <a:headEnd type="none" w="med" len="med"/>
+                      <a:tailEnd type="none" w="med" len="med"/>
+                    </a:lnL>
+                    <a:lnR w="0" cap="flat" cmpd="sng" algn="ctr">
+                      <a:solidFill>
+                        <a:srgbClr val="666666"/>
+                      </a:solidFill>
+                      <a:prstDash val="solid"/>
+                      <a:round/>
+                      <a:headEnd type="none" w="med" len="med"/>
+                      <a:tailEnd type="none" w="med" len="med"/>
+                    </a:lnR>
+                    <a:lnT w="0" cap="flat" cmpd="sng" algn="ctr">
+                      <a:solidFill>
+                        <a:srgbClr val="666666"/>
+                      </a:solidFill>
+                      <a:prstDash val="solid"/>
+                      <a:round/>
+                      <a:headEnd type="none" w="med" len="med"/>
+                      <a:tailEnd type="none" w="med" len="med"/>
+                    </a:lnT>
+                    <a:lnB w="7620" cap="flat" cmpd="sng" algn="ctr">
+                      <a:solidFill>
+                        <a:srgbClr val="E2E4EA"/>
+                      </a:solidFill>
+                      <a:prstDash val="solid"/>
+                      <a:round/>
+                      <a:headEnd type="none" w="med" len="med"/>
+                      <a:tailEnd type="none" w="med" len="med"/>
+                    </a:lnB>
+                    <a:solidFill>
+                      <a:srgbClr val="F2F6FE"/>
+                    </a:solidFill>
+                  </a:tcPr>
+                </a:tc>
+                <a:tc>
+                  <a:txBody>
+                    <a:bodyPr/>
+                    <a:lstStyle/>
+                    <a:p>
+                      <a:pPr algn="r" indent="0" marL="0">
+                        <a:buNone/>
+                      </a:pPr>
+                      <a:endParaRPr lang="en-US" sz="1100" dirty="0">
+                        <a:latin typeface="Calibri" charset="0"/>
+                        <a:ea typeface="Calibri" charset="0"/>
+                        <a:cs typeface="Calibri" charset="0"/>
+                      </a:endParaRPr>
+                    </a:p>
+                  </a:txBody>
+                  <a:tcPr marL="0" marR="76200" marT="63500" marB="63500" anchor="ctr">
+                    <a:lnL w="0" cap="flat" cmpd="sng" algn="ctr">
+                      <a:solidFill>
+                        <a:srgbClr val="666666"/>
+                      </a:solidFill>
+                      <a:prstDash val="solid"/>
+                      <a:round/>
+                      <a:headEnd type="none" w="med" len="med"/>
+                      <a:tailEnd type="none" w="med" len="med"/>
+                    </a:lnL>
+                    <a:lnR w="0" cap="flat" cmpd="sng" algn="ctr">
+                      <a:solidFill>
+                        <a:srgbClr val="666666"/>
+                      </a:solidFill>
+                      <a:prstDash val="solid"/>
+                      <a:round/>
+                      <a:headEnd type="none" w="med" len="med"/>
+                      <a:tailEnd type="none" w="med" len="med"/>
+                    </a:lnR>
+                    <a:lnT w="0" cap="flat" cmpd="sng" algn="ctr">
+                      <a:solidFill>
+                        <a:srgbClr val="666666"/>
+                      </a:solidFill>
+                      <a:prstDash val="solid"/>
+                      <a:round/>
+                      <a:headEnd type="none" w="med" len="med"/>
+                      <a:tailEnd type="none" w="med" len="med"/>
+                    </a:lnT>
+                    <a:lnB w="7620" cap="flat" cmpd="sng" algn="ctr">
+                      <a:solidFill>
+                        <a:srgbClr val="E2E4EA"/>
+                      </a:solidFill>
+                      <a:prstDash val="solid"/>
+                      <a:round/>
+                      <a:headEnd type="none" w="med" len="med"/>
+                      <a:tailEnd type="none" w="med" len="med"/>
+                    </a:lnB>
+                    <a:solidFill>
+                      <a:srgbClr val="F2F6FE"/>
+                    </a:solidFill>
+                  </a:tcPr>
+                </a:tc>
+                <a:tc>
+                  <a:txBody>
+                    <a:bodyPr/>
+                    <a:lstStyle/>
+                    <a:p>
+                      <a:pPr algn="r" indent="0" marL="0">
+                        <a:buNone/>
+                      </a:pPr>
+                      <a:endParaRPr lang="en-US" sz="1100" dirty="0">
+                        <a:latin typeface="Calibri" charset="0"/>
+                        <a:ea typeface="Calibri" charset="0"/>
+                        <a:cs typeface="Calibri" charset="0"/>
+                      </a:endParaRPr>
+                    </a:p>
+                  </a:txBody>
+                  <a:tcPr marL="0" marR="76200" marT="63500" marB="63500" anchor="ctr">
+                    <a:lnL w="0" cap="flat" cmpd="sng" algn="ctr">
+                      <a:solidFill>
+                        <a:srgbClr val="666666"/>
+                      </a:solidFill>
+                      <a:prstDash val="solid"/>
+                      <a:round/>
+                      <a:headEnd type="none" w="med" len="med"/>
+                      <a:tailEnd type="none" w="med" len="med"/>
+                    </a:lnL>
+                    <a:lnR w="0" cap="flat" cmpd="sng" algn="ctr">
+                      <a:solidFill>
+                        <a:srgbClr val="666666"/>
+                      </a:solidFill>
+                      <a:prstDash val="solid"/>
+                      <a:round/>
+                      <a:headEnd type="none" w="med" len="med"/>
+                      <a:tailEnd type="none" w="med" len="med"/>
+                    </a:lnR>
+                    <a:lnT w="0" cap="flat" cmpd="sng" algn="ctr">
+                      <a:solidFill>
+                        <a:srgbClr val="666666"/>
+                      </a:solidFill>
+                      <a:prstDash val="solid"/>
+                      <a:round/>
+                      <a:headEnd type="none" w="med" len="med"/>
+                      <a:tailEnd type="none" w="med" len="med"/>
+                    </a:lnT>
+                    <a:lnB w="7620" cap="flat" cmpd="sng" algn="ctr">
+                      <a:solidFill>
+                        <a:srgbClr val="E2E4EA"/>
+                      </a:solidFill>
+                      <a:prstDash val="solid"/>
+                      <a:round/>
+                      <a:headEnd type="none" w="med" len="med"/>
+                      <a:tailEnd type="none" w="med" len="med"/>
+                    </a:lnB>
+                    <a:solidFill>
+                      <a:srgbClr val="F2F6FE"/>
+                    </a:solidFill>
+                  </a:tcPr>
+                </a:tc>
+                <a:tc>
+                  <a:txBody>
+                    <a:bodyPr/>
+                    <a:lstStyle/>
+                    <a:p>
+                      <a:pPr algn="r" indent="0" marL="0">
+                        <a:buNone/>
+                      </a:pPr>
+                      <a:r>
+                        <a:rPr lang="en-US" sz="1100" dirty="0">
+                          <a:solidFill>
+                            <a:srgbClr val="3B4660"/>
+                          </a:solidFill>
+                          <a:latin typeface="Calibri" pitchFamily="34" charset="0"/>
+                          <a:ea typeface="Calibri" pitchFamily="34" charset="-122"/>
+                          <a:cs typeface="Calibri" pitchFamily="34" charset="-120"/>
+                        </a:rPr>
+                        <a:t>4.01</a:t>
+                      </a:r>
+                      <a:endParaRPr lang="en-US" sz="1100" dirty="0">
+                        <a:latin typeface="Calibri" charset="0"/>
+                        <a:ea typeface="Calibri" charset="0"/>
+                        <a:cs typeface="Calibri" charset="0"/>
+                      </a:endParaRPr>
+                    </a:p>
+                  </a:txBody>
+                  <a:tcPr marL="0" marR="76200" marT="63500" marB="63500" anchor="ctr">
+                    <a:lnL w="0" cap="flat" cmpd="sng" algn="ctr">
+                      <a:solidFill>
+                        <a:srgbClr val="666666"/>
+                      </a:solidFill>
+                      <a:prstDash val="solid"/>
+                      <a:round/>
+                      <a:headEnd type="none" w="med" len="med"/>
+                      <a:tailEnd type="none" w="med" len="med"/>
+                    </a:lnL>
+                    <a:lnR w="0" cap="flat" cmpd="sng" algn="ctr">
+                      <a:solidFill>
+                        <a:srgbClr val="666666"/>
+                      </a:solidFill>
+                      <a:prstDash val="solid"/>
+                      <a:round/>
+                      <a:headEnd type="none" w="med" len="med"/>
+                      <a:tailEnd type="none" w="med" len="med"/>
+                    </a:lnR>
+                    <a:lnT w="0" cap="flat" cmpd="sng" algn="ctr">
+                      <a:solidFill>
+                        <a:srgbClr val="666666"/>
+                      </a:solidFill>
+                      <a:prstDash val="solid"/>
+                      <a:round/>
+                      <a:headEnd type="none" w="med" len="med"/>
+                      <a:tailEnd type="none" w="med" len="med"/>
+                    </a:lnT>
+                    <a:lnB w="7620" cap="flat" cmpd="sng" algn="ctr">
+                      <a:solidFill>
+                        <a:srgbClr val="E2E4EA"/>
+                      </a:solidFill>
+                      <a:prstDash val="solid"/>
+                      <a:round/>
+                      <a:headEnd type="none" w="med" len="med"/>
+                      <a:tailEnd type="none" w="med" len="med"/>
+                    </a:lnB>
+                    <a:solidFill>
+                      <a:srgbClr val="F2F6FE"/>
+                    </a:solidFill>
+                  </a:tcPr>
+                </a:tc>
+              </a:tr>
+              <a:tr h="283464">
+                <a:tc>
+                  <a:txBody>
+                    <a:bodyPr/>
+                    <a:lstStyle/>
+                    <a:p>
+                      <a:pPr algn="l" indent="0" marL="0">
+                        <a:buNone/>
+                      </a:pPr>
+                      <a:r>
+                        <a:rPr lang="en-US" sz="1100" b="1" dirty="0">
+                          <a:solidFill>
                             <a:srgbClr val="0A1426"/>
                           </a:solidFill>
                           <a:latin typeface="Calibri" pitchFamily="34" charset="0"/>
                           <a:ea typeface="Calibri" pitchFamily="34" charset="-122"/>
                           <a:cs typeface="Calibri" pitchFamily="34" charset="-120"/>
                         </a:rPr>
-                        <a:t>Cumulative free cash flow</a:t>
+                        <a:t>Net of capital deployed</a:t>
                       </a:r>
                       <a:endParaRPr lang="en-US" sz="1100" dirty="0">
                         <a:latin typeface="Calibri" charset="0"/>
@@ -38444,7 +38761,7 @@
                           <a:ea typeface="Calibri" pitchFamily="34" charset="-122"/>
                           <a:cs typeface="Calibri" pitchFamily="34" charset="-120"/>
                         </a:rPr>
-                        <a:t>5.04</a:t>
+                        <a:t>3.43</a:t>
                       </a:r>
                       <a:endParaRPr lang="en-US" sz="1100" dirty="0">
                         <a:latin typeface="Calibri" charset="0"/>
@@ -38508,7 +38825,7 @@
         </p:nvSpPr>
         <p:spPr>
           <a:xfrm>
-            <a:off x="566928" y="4636262"/>
+            <a:off x="566928" y="5177028"/>
             <a:ext cx="2599868" cy="1152144"/>
           </a:xfrm>
           <a:prstGeom prst="roundRect">
@@ -38535,7 +38852,7 @@
         </p:nvSpPr>
         <p:spPr>
           <a:xfrm>
-            <a:off x="749808" y="4755134"/>
+            <a:off x="749808" y="5295900"/>
             <a:ext cx="2234108" cy="237744"/>
           </a:xfrm>
           <a:prstGeom prst="rect">
@@ -38574,7 +38891,7 @@
         </p:nvSpPr>
         <p:spPr>
           <a:xfrm>
-            <a:off x="749808" y="5002022"/>
+            <a:off x="749808" y="5542788"/>
             <a:ext cx="2234108" cy="457200"/>
           </a:xfrm>
           <a:prstGeom prst="rect">
@@ -38601,7 +38918,7 @@
                 <a:ea typeface="Calibri" pitchFamily="34" charset="-122"/>
                 <a:cs typeface="Calibri" pitchFamily="34" charset="-120"/>
               </a:rPr>
-              <a:t>43.3%</a:t>
+              <a:t>55.2%</a:t>
             </a:r>
             <a:endParaRPr lang="en-US" sz="2600" dirty="0"/>
           </a:p>
@@ -38615,7 +38932,7 @@
         </p:nvSpPr>
         <p:spPr>
           <a:xfrm>
-            <a:off x="749808" y="5477510"/>
+            <a:off x="749808" y="6018276"/>
             <a:ext cx="2234108" cy="237744"/>
           </a:xfrm>
           <a:prstGeom prst="rect">
@@ -38657,7 +38974,7 @@
         </p:nvSpPr>
         <p:spPr>
           <a:xfrm>
-            <a:off x="3386252" y="4636262"/>
+            <a:off x="3386252" y="5177028"/>
             <a:ext cx="2599868" cy="1152144"/>
           </a:xfrm>
           <a:prstGeom prst="roundRect">
@@ -38684,7 +39001,7 @@
         </p:nvSpPr>
         <p:spPr>
           <a:xfrm>
-            <a:off x="3569132" y="4755134"/>
+            <a:off x="3569132" y="5295900"/>
             <a:ext cx="2234108" cy="237744"/>
           </a:xfrm>
           <a:prstGeom prst="rect">
@@ -38723,7 +39040,7 @@
         </p:nvSpPr>
         <p:spPr>
           <a:xfrm>
-            <a:off x="3569132" y="5002022"/>
+            <a:off x="3569132" y="5542788"/>
             <a:ext cx="2234108" cy="457200"/>
           </a:xfrm>
           <a:prstGeom prst="rect">
@@ -38750,7 +39067,7 @@
                 <a:ea typeface="Calibri" pitchFamily="34" charset="-122"/>
                 <a:cs typeface="Calibri" pitchFamily="34" charset="-120"/>
               </a:rPr>
-              <a:t>2.9 yrs</a:t>
+              <a:t>2.5 yrs</a:t>
             </a:r>
             <a:endParaRPr lang="en-US" sz="2600" dirty="0"/>
           </a:p>
@@ -38764,7 +39081,7 @@
         </p:nvSpPr>
         <p:spPr>
           <a:xfrm>
-            <a:off x="3569132" y="5477510"/>
+            <a:off x="3569132" y="6018276"/>
             <a:ext cx="2234108" cy="237744"/>
           </a:xfrm>
           <a:prstGeom prst="rect">
@@ -38806,7 +39123,7 @@
         </p:nvSpPr>
         <p:spPr>
           <a:xfrm>
-            <a:off x="6205576" y="4636262"/>
+            <a:off x="6205576" y="5177028"/>
             <a:ext cx="2599868" cy="1152144"/>
           </a:xfrm>
           <a:prstGeom prst="roundRect">
@@ -38833,7 +39150,7 @@
         </p:nvSpPr>
         <p:spPr>
           <a:xfrm>
-            <a:off x="6388456" y="4755134"/>
+            <a:off x="6388456" y="5295900"/>
             <a:ext cx="2234108" cy="237744"/>
           </a:xfrm>
           <a:prstGeom prst="rect">
@@ -38872,7 +39189,7 @@
         </p:nvSpPr>
         <p:spPr>
           <a:xfrm>
-            <a:off x="6388456" y="5002022"/>
+            <a:off x="6388456" y="5542788"/>
             <a:ext cx="2234108" cy="457200"/>
           </a:xfrm>
           <a:prstGeom prst="rect">
@@ -38899,7 +39216,7 @@
                 <a:ea typeface="Calibri" pitchFamily="34" charset="-122"/>
                 <a:cs typeface="Calibri" pitchFamily="34" charset="-120"/>
               </a:rPr>
-              <a:t>₹1.57 Cr</a:t>
+              <a:t>₹1.46 Cr</a:t>
             </a:r>
             <a:endParaRPr lang="en-US" sz="2600" dirty="0"/>
           </a:p>
@@ -38913,7 +39230,7 @@
         </p:nvSpPr>
         <p:spPr>
           <a:xfrm>
-            <a:off x="6388456" y="5477510"/>
+            <a:off x="6388456" y="6018276"/>
             <a:ext cx="2234108" cy="237744"/>
           </a:xfrm>
           <a:prstGeom prst="rect">
@@ -38955,7 +39272,7 @@
         </p:nvSpPr>
         <p:spPr>
           <a:xfrm>
-            <a:off x="9024899" y="4636262"/>
+            <a:off x="9024899" y="5177028"/>
             <a:ext cx="2599868" cy="1152144"/>
           </a:xfrm>
           <a:prstGeom prst="roundRect">
@@ -38982,7 +39299,7 @@
         </p:nvSpPr>
         <p:spPr>
           <a:xfrm>
-            <a:off x="9207779" y="4755134"/>
+            <a:off x="9207779" y="5295900"/>
             <a:ext cx="2234108" cy="237744"/>
           </a:xfrm>
           <a:prstGeom prst="rect">
@@ -39007,7 +39324,7 @@
                 <a:ea typeface="Calibri" pitchFamily="34" charset="-122"/>
                 <a:cs typeface="Calibri" pitchFamily="34" charset="-120"/>
               </a:rPr>
-              <a:t>CUMULATIVE FCF</a:t>
+              <a:t>FCF NET OF CAPITAL</a:t>
             </a:r>
             <a:endParaRPr lang="en-US" sz="850" dirty="0"/>
           </a:p>
@@ -39021,7 +39338,7 @@
         </p:nvSpPr>
         <p:spPr>
           <a:xfrm>
-            <a:off x="9207779" y="5002022"/>
+            <a:off x="9207779" y="5542788"/>
             <a:ext cx="2234108" cy="457200"/>
           </a:xfrm>
           <a:prstGeom prst="rect">
@@ -39048,7 +39365,7 @@
                 <a:ea typeface="Calibri" pitchFamily="34" charset="-122"/>
                 <a:cs typeface="Calibri" pitchFamily="34" charset="-120"/>
               </a:rPr>
-              <a:t>₹5.04 Cr</a:t>
+              <a:t>₹3.43 Cr</a:t>
             </a:r>
             <a:endParaRPr lang="en-US" sz="2600" dirty="0"/>
           </a:p>
@@ -39062,7 +39379,7 @@
         </p:nvSpPr>
         <p:spPr>
           <a:xfrm>
-            <a:off x="9207779" y="5477510"/>
+            <a:off x="9207779" y="6018276"/>
             <a:ext cx="2234108" cy="237744"/>
           </a:xfrm>
           <a:prstGeom prst="rect">
@@ -39090,7 +39407,7 @@
                 <a:ea typeface="Calibri" pitchFamily="34" charset="-122"/>
                 <a:cs typeface="Calibri" pitchFamily="34" charset="-120"/>
               </a:rPr>
-              <a:t>Seven years, after tax and maintenance capex</a:t>
+              <a:t>₹4.01 Cr earned over seven years, less the ₹0.58 Cr deployed</a:t>
             </a:r>
             <a:endParaRPr lang="en-US" sz="950" dirty="0"/>
           </a:p>
@@ -39695,7 +40012,7 @@
                           <a:ea typeface="Calibri" pitchFamily="34" charset="-122"/>
                           <a:cs typeface="Calibri" pitchFamily="34" charset="-120"/>
                         </a:rPr>
-                        <a:t>₹0.80 Cr — mobilisation capex, security deposit, advance licence fee</a:t>
+                        <a:t>₹0.58 Cr — mobilisation capex, security deposit, advance licence fee</a:t>
                       </a:r>
                       <a:endParaRPr lang="en-US" sz="1050" dirty="0">
                         <a:latin typeface="Calibri" charset="0"/>
@@ -39833,7 +40150,7 @@
                           <a:ea typeface="Calibri" pitchFamily="34" charset="-122"/>
                           <a:cs typeface="Calibri" pitchFamily="34" charset="-120"/>
                         </a:rPr>
-                        <a:t>₹0.20 Cr — within-year seasonality standby</a:t>
+                        <a:t>₹0.42 Cr — within-year seasonality standby</a:t>
                       </a:r>
                       <a:endParaRPr lang="en-US" sz="1050" dirty="0">
                         <a:latin typeface="Calibri" charset="0"/>
@@ -40317,7 +40634,7 @@
                           <a:ea typeface="Calibri" pitchFamily="34" charset="-122"/>
                           <a:cs typeface="Calibri" pitchFamily="34" charset="-120"/>
                         </a:rPr>
-                        <a:t>Tenor / moratorium</a:t>
+                        <a:t>Tenor</a:t>
                       </a:r>
                       <a:endParaRPr lang="en-US" sz="1050" dirty="0">
                         <a:latin typeface="Calibri" charset="0"/>
@@ -40385,7 +40702,7 @@
                           <a:ea typeface="Calibri" pitchFamily="34" charset="-122"/>
                           <a:cs typeface="Calibri" pitchFamily="34" charset="-120"/>
                         </a:rPr>
-                        <a:t>7 years / 1-year principal moratorium</a:t>
+                        <a:t>7 years — proposed, to be agreed with the lender. Matched to the licence period so the loan cannot outlive the concession</a:t>
                       </a:r>
                       <a:endParaRPr lang="en-US" sz="1050" dirty="0">
                         <a:latin typeface="Calibri" charset="0"/>
@@ -40455,7 +40772,7 @@
                           <a:ea typeface="Calibri" pitchFamily="34" charset="-122"/>
                           <a:cs typeface="Calibri" pitchFamily="34" charset="-120"/>
                         </a:rPr>
-                        <a:t>Guarantee coverage</a:t>
+                        <a:t>Principal moratorium</a:t>
                       </a:r>
                       <a:endParaRPr lang="en-US" sz="1050" dirty="0">
                         <a:latin typeface="Calibri" charset="0"/>
@@ -40523,7 +40840,7 @@
                           <a:ea typeface="Calibri" pitchFamily="34" charset="-122"/>
                           <a:cs typeface="Calibri" pitchFamily="34" charset="-120"/>
                         </a:rPr>
-                        <a:t>75% · ₹0.75 Cr guaranteed</a:t>
+                        <a:t>1 year — proposed, to be agreed with the lender. CGTMSE prescribes neither tenor nor moratorium</a:t>
                       </a:r>
                       <a:endParaRPr lang="en-US" sz="1050" dirty="0">
                         <a:latin typeface="Calibri" charset="0"/>
@@ -40593,7 +40910,7 @@
                           <a:ea typeface="Calibri" pitchFamily="34" charset="-122"/>
                           <a:cs typeface="Calibri" pitchFamily="34" charset="-120"/>
                         </a:rPr>
-                        <a:t>Security</a:t>
+                        <a:t>Guarantee coverage</a:t>
                       </a:r>
                       <a:endParaRPr lang="en-US" sz="1050" dirty="0">
                         <a:latin typeface="Calibri" charset="0"/>
@@ -40661,7 +40978,7 @@
                           <a:ea typeface="Calibri" pitchFamily="34" charset="-122"/>
                           <a:cs typeface="Calibri" pitchFamily="34" charset="-120"/>
                         </a:rPr>
-                        <a:t>Nil collateral. Hypothecation of assets financed. Director personal guarantee permitted; third-party guarantee is not</a:t>
+                        <a:t>75% · ₹0.75 Cr guaranteed</a:t>
                       </a:r>
                       <a:endParaRPr lang="en-US" sz="1050" dirty="0">
                         <a:latin typeface="Calibri" charset="0"/>
@@ -40723,6 +41040,144 @@
                         <a:buNone/>
                       </a:pPr>
                       <a:r>
+                        <a:rPr lang="en-US" sz="1050" dirty="0">
+                          <a:solidFill>
+                            <a:srgbClr val="3B4660"/>
+                          </a:solidFill>
+                          <a:latin typeface="Calibri" pitchFamily="34" charset="0"/>
+                          <a:ea typeface="Calibri" pitchFamily="34" charset="-122"/>
+                          <a:cs typeface="Calibri" pitchFamily="34" charset="-120"/>
+                        </a:rPr>
+                        <a:t>Security</a:t>
+                      </a:r>
+                      <a:endParaRPr lang="en-US" sz="1050" dirty="0">
+                        <a:latin typeface="Calibri" charset="0"/>
+                        <a:ea typeface="Calibri" charset="0"/>
+                        <a:cs typeface="Calibri" charset="0"/>
+                      </a:endParaRPr>
+                    </a:p>
+                  </a:txBody>
+                  <a:tcPr marL="0" marR="76200" marT="63500" marB="63500" anchor="ctr">
+                    <a:lnL w="0" cap="flat" cmpd="sng" algn="ctr">
+                      <a:solidFill>
+                        <a:srgbClr val="666666"/>
+                      </a:solidFill>
+                      <a:prstDash val="solid"/>
+                      <a:round/>
+                      <a:headEnd type="none" w="med" len="med"/>
+                      <a:tailEnd type="none" w="med" len="med"/>
+                    </a:lnL>
+                    <a:lnR w="0" cap="flat" cmpd="sng" algn="ctr">
+                      <a:solidFill>
+                        <a:srgbClr val="666666"/>
+                      </a:solidFill>
+                      <a:prstDash val="solid"/>
+                      <a:round/>
+                      <a:headEnd type="none" w="med" len="med"/>
+                      <a:tailEnd type="none" w="med" len="med"/>
+                    </a:lnR>
+                    <a:lnT w="0" cap="flat" cmpd="sng" algn="ctr">
+                      <a:solidFill>
+                        <a:srgbClr val="666666"/>
+                      </a:solidFill>
+                      <a:prstDash val="solid"/>
+                      <a:round/>
+                      <a:headEnd type="none" w="med" len="med"/>
+                      <a:tailEnd type="none" w="med" len="med"/>
+                    </a:lnT>
+                    <a:lnB w="7620" cap="flat" cmpd="sng" algn="ctr">
+                      <a:solidFill>
+                        <a:srgbClr val="E2E4EA"/>
+                      </a:solidFill>
+                      <a:prstDash val="solid"/>
+                      <a:round/>
+                      <a:headEnd type="none" w="med" len="med"/>
+                      <a:tailEnd type="none" w="med" len="med"/>
+                    </a:lnB>
+                    <a:solidFill>
+                      <a:srgbClr val="FFFFFF"/>
+                    </a:solidFill>
+                  </a:tcPr>
+                </a:tc>
+                <a:tc>
+                  <a:txBody>
+                    <a:bodyPr/>
+                    <a:lstStyle/>
+                    <a:p>
+                      <a:pPr algn="r" indent="0" marL="0">
+                        <a:buNone/>
+                      </a:pPr>
+                      <a:r>
+                        <a:rPr lang="en-US" sz="1050" dirty="0">
+                          <a:solidFill>
+                            <a:srgbClr val="3B4660"/>
+                          </a:solidFill>
+                          <a:latin typeface="Calibri" pitchFamily="34" charset="0"/>
+                          <a:ea typeface="Calibri" pitchFamily="34" charset="-122"/>
+                          <a:cs typeface="Calibri" pitchFamily="34" charset="-120"/>
+                        </a:rPr>
+                        <a:t>Nil collateral. Hypothecation of assets financed. Director personal guarantee permitted; third-party guarantee is not</a:t>
+                      </a:r>
+                      <a:endParaRPr lang="en-US" sz="1050" dirty="0">
+                        <a:latin typeface="Calibri" charset="0"/>
+                        <a:ea typeface="Calibri" charset="0"/>
+                        <a:cs typeface="Calibri" charset="0"/>
+                      </a:endParaRPr>
+                    </a:p>
+                  </a:txBody>
+                  <a:tcPr marL="0" marR="76200" marT="63500" marB="63500" anchor="ctr">
+                    <a:lnL w="0" cap="flat" cmpd="sng" algn="ctr">
+                      <a:solidFill>
+                        <a:srgbClr val="666666"/>
+                      </a:solidFill>
+                      <a:prstDash val="solid"/>
+                      <a:round/>
+                      <a:headEnd type="none" w="med" len="med"/>
+                      <a:tailEnd type="none" w="med" len="med"/>
+                    </a:lnL>
+                    <a:lnR w="0" cap="flat" cmpd="sng" algn="ctr">
+                      <a:solidFill>
+                        <a:srgbClr val="666666"/>
+                      </a:solidFill>
+                      <a:prstDash val="solid"/>
+                      <a:round/>
+                      <a:headEnd type="none" w="med" len="med"/>
+                      <a:tailEnd type="none" w="med" len="med"/>
+                    </a:lnR>
+                    <a:lnT w="0" cap="flat" cmpd="sng" algn="ctr">
+                      <a:solidFill>
+                        <a:srgbClr val="666666"/>
+                      </a:solidFill>
+                      <a:prstDash val="solid"/>
+                      <a:round/>
+                      <a:headEnd type="none" w="med" len="med"/>
+                      <a:tailEnd type="none" w="med" len="med"/>
+                    </a:lnT>
+                    <a:lnB w="7620" cap="flat" cmpd="sng" algn="ctr">
+                      <a:solidFill>
+                        <a:srgbClr val="E2E4EA"/>
+                      </a:solidFill>
+                      <a:prstDash val="solid"/>
+                      <a:round/>
+                      <a:headEnd type="none" w="med" len="med"/>
+                      <a:tailEnd type="none" w="med" len="med"/>
+                    </a:lnB>
+                    <a:solidFill>
+                      <a:srgbClr val="FFFFFF"/>
+                    </a:solidFill>
+                  </a:tcPr>
+                </a:tc>
+              </a:tr>
+              <a:tr h="283464">
+                <a:tc>
+                  <a:txBody>
+                    <a:bodyPr/>
+                    <a:lstStyle/>
+                    <a:p>
+                      <a:pPr algn="l" indent="0" marL="0">
+                        <a:buNone/>
+                      </a:pPr>
+                      <a:r>
                         <a:rPr lang="en-US" sz="1050" b="1" dirty="0">
                           <a:solidFill>
                             <a:srgbClr val="0A1426"/>
@@ -40799,7 +41254,7 @@
                           <a:ea typeface="Calibri" pitchFamily="34" charset="-122"/>
                           <a:cs typeface="Calibri" pitchFamily="34" charset="-120"/>
                         </a:rPr>
-                        <a:t>₹0.51 Cr</a:t>
+                        <a:t>₹0.45 Cr</a:t>
                       </a:r>
                       <a:endParaRPr lang="en-US" sz="1050" dirty="0">
                         <a:latin typeface="Calibri" charset="0"/>

--- a/pptx/EOD-Geeta-Govind-Vatika-Project-Finance.pptx
+++ b/pptx/EOD-Geeta-Govind-Vatika-Project-Finance.pptx
@@ -464,7 +464,7 @@
               <c:strCache>
                 <c:ptCount val="1"/>
                 <c:pt idx="0">
-                  <c:v>E-O-D activity layer</c:v>
+                  <c:v>Vendor-operated activities</c:v>
                 </c:pt>
               </c:strCache>
             </c:strRef>
@@ -10780,7 +10780,7 @@
                           <a:ea typeface="Calibri" pitchFamily="34" charset="-122"/>
                           <a:cs typeface="Calibri" pitchFamily="34" charset="-120"/>
                         </a:rPr>
-                        <a:t>About 1,590 visits a day</a:t>
+                        <a:t>About 1,589 visits a day</a:t>
                       </a:r>
                       <a:endParaRPr lang="en-US" sz="1000" dirty="0">
                         <a:latin typeface="Calibri" charset="0"/>
@@ -17970,7 +17970,7 @@
         </p:nvSpPr>
         <p:spPr>
           <a:xfrm>
-            <a:off x="6278728" y="1170432"/>
+            <a:off x="566928" y="4572000"/>
             <a:ext cx="182880" cy="182880"/>
           </a:xfrm>
           <a:prstGeom prst="ellipse">
@@ -17990,7 +17990,7 @@
         </p:nvSpPr>
         <p:spPr>
           <a:xfrm>
-            <a:off x="6571336" y="1133856"/>
+            <a:off x="859536" y="4535424"/>
             <a:ext cx="5053432" cy="237744"/>
           </a:xfrm>
           <a:prstGeom prst="rect">
@@ -18029,7 +18029,7 @@
         </p:nvSpPr>
         <p:spPr>
           <a:xfrm>
-            <a:off x="6571336" y="1380744"/>
+            <a:off x="859536" y="4782312"/>
             <a:ext cx="5053432" cy="841248"/>
           </a:xfrm>
           <a:prstGeom prst="rect">
@@ -18071,7 +18071,7 @@
         </p:nvSpPr>
         <p:spPr>
           <a:xfrm>
-            <a:off x="6278728" y="2304288"/>
+            <a:off x="6278728" y="1170432"/>
             <a:ext cx="182880" cy="182880"/>
           </a:xfrm>
           <a:prstGeom prst="ellipse">
@@ -18091,7 +18091,7 @@
         </p:nvSpPr>
         <p:spPr>
           <a:xfrm>
-            <a:off x="6571336" y="2267712"/>
+            <a:off x="6571336" y="1133856"/>
             <a:ext cx="5053432" cy="237744"/>
           </a:xfrm>
           <a:prstGeom prst="rect">
@@ -18130,7 +18130,7 @@
         </p:nvSpPr>
         <p:spPr>
           <a:xfrm>
-            <a:off x="6571336" y="2514600"/>
+            <a:off x="6571336" y="1380744"/>
             <a:ext cx="5053432" cy="841248"/>
           </a:xfrm>
           <a:prstGeom prst="rect">
@@ -18166,7 +18166,209 @@
       </p:sp>
       <p:sp>
         <p:nvSpPr>
-          <p:cNvPr id="20" name="Text 18"/>
+          <p:cNvPr id="20" name="Shape 18"/>
+          <p:cNvSpPr/>
+          <p:nvPr/>
+        </p:nvSpPr>
+        <p:spPr>
+          <a:xfrm>
+            <a:off x="6278728" y="2304288"/>
+            <a:ext cx="182880" cy="182880"/>
+          </a:xfrm>
+          <a:prstGeom prst="ellipse">
+            <a:avLst/>
+          </a:prstGeom>
+          <a:solidFill>
+            <a:srgbClr val="D97706"/>
+          </a:solidFill>
+          <a:ln/>
+        </p:spPr>
+      </p:sp>
+      <p:sp>
+        <p:nvSpPr>
+          <p:cNvPr id="21" name="Text 19"/>
+          <p:cNvSpPr/>
+          <p:nvPr/>
+        </p:nvSpPr>
+        <p:spPr>
+          <a:xfrm>
+            <a:off x="6571336" y="2267712"/>
+            <a:ext cx="5053432" cy="237744"/>
+          </a:xfrm>
+          <a:prstGeom prst="rect">
+            <a:avLst/>
+          </a:prstGeom>
+          <a:noFill/>
+          <a:ln/>
+        </p:spPr>
+        <p:txBody>
+          <a:bodyPr wrap="square" lIns="0" tIns="0" rIns="0" bIns="0" rtlCol="0" anchor="ctr"/>
+          <a:lstStyle/>
+          <a:p>
+            <a:pPr indent="0" marL="0">
+              <a:buNone/>
+            </a:pPr>
+            <a:r>
+              <a:rPr lang="en-US" sz="1250" b="1" dirty="0">
+                <a:solidFill>
+                  <a:srgbClr val="0A1426"/>
+                </a:solidFill>
+                <a:latin typeface="Calibri" pitchFamily="34" charset="0"/>
+                <a:ea typeface="Calibri" pitchFamily="34" charset="-122"/>
+                <a:cs typeface="Calibri" pitchFamily="34" charset="-120"/>
+              </a:rPr>
+              <a:t>Electricity arrears</a:t>
+            </a:r>
+            <a:endParaRPr lang="en-US" sz="1250" dirty="0"/>
+          </a:p>
+        </p:txBody>
+      </p:sp>
+      <p:sp>
+        <p:nvSpPr>
+          <p:cNvPr id="22" name="Text 20"/>
+          <p:cNvSpPr/>
+          <p:nvPr/>
+        </p:nvSpPr>
+        <p:spPr>
+          <a:xfrm>
+            <a:off x="6571336" y="2514600"/>
+            <a:ext cx="5053432" cy="841248"/>
+          </a:xfrm>
+          <a:prstGeom prst="rect">
+            <a:avLst/>
+          </a:prstGeom>
+          <a:noFill/>
+          <a:ln/>
+        </p:spPr>
+        <p:txBody>
+          <a:bodyPr wrap="square" lIns="0" tIns="0" rIns="0" bIns="0" rtlCol="0" anchor="t"/>
+          <a:lstStyle/>
+          <a:p>
+            <a:pPr indent="0" marL="0">
+              <a:lnSpc>
+                <a:spcPts val="1400"/>
+              </a:lnSpc>
+              <a:buNone/>
+            </a:pPr>
+            <a:r>
+              <a:rPr lang="en-US" sz="1050" dirty="0">
+                <a:solidFill>
+                  <a:srgbClr val="3B4660"/>
+                </a:solidFill>
+                <a:latin typeface="Calibri" pitchFamily="34" charset="0"/>
+                <a:ea typeface="Calibri" pitchFamily="34" charset="-122"/>
+                <a:cs typeface="Calibri" pitchFamily="34" charset="-120"/>
+              </a:rPr>
+              <a:t>Electricity is paid direct to the discom monthly. VAPPL carries ₹2.14 Cr of accumulated arrears across the existing estate, which is a condition precedent to any lender sanction.</a:t>
+            </a:r>
+            <a:endParaRPr lang="en-US" sz="1050" dirty="0"/>
+          </a:p>
+        </p:txBody>
+      </p:sp>
+      <p:sp>
+        <p:nvSpPr>
+          <p:cNvPr id="23" name="Shape 21"/>
+          <p:cNvSpPr/>
+          <p:nvPr/>
+        </p:nvSpPr>
+        <p:spPr>
+          <a:xfrm>
+            <a:off x="6278728" y="3438144"/>
+            <a:ext cx="182880" cy="182880"/>
+          </a:xfrm>
+          <a:prstGeom prst="ellipse">
+            <a:avLst/>
+          </a:prstGeom>
+          <a:solidFill>
+            <a:srgbClr val="D97706"/>
+          </a:solidFill>
+          <a:ln/>
+        </p:spPr>
+      </p:sp>
+      <p:sp>
+        <p:nvSpPr>
+          <p:cNvPr id="24" name="Text 22"/>
+          <p:cNvSpPr/>
+          <p:nvPr/>
+        </p:nvSpPr>
+        <p:spPr>
+          <a:xfrm>
+            <a:off x="6571336" y="3401568"/>
+            <a:ext cx="5053432" cy="237744"/>
+          </a:xfrm>
+          <a:prstGeom prst="rect">
+            <a:avLst/>
+          </a:prstGeom>
+          <a:noFill/>
+          <a:ln/>
+        </p:spPr>
+        <p:txBody>
+          <a:bodyPr wrap="square" lIns="0" tIns="0" rIns="0" bIns="0" rtlCol="0" anchor="ctr"/>
+          <a:lstStyle/>
+          <a:p>
+            <a:pPr indent="0" marL="0">
+              <a:buNone/>
+            </a:pPr>
+            <a:r>
+              <a:rPr lang="en-US" sz="1250" b="1" dirty="0">
+                <a:solidFill>
+                  <a:srgbClr val="0A1426"/>
+                </a:solidFill>
+                <a:latin typeface="Calibri" pitchFamily="34" charset="0"/>
+                <a:ea typeface="Calibri" pitchFamily="34" charset="-122"/>
+                <a:cs typeface="Calibri" pitchFamily="34" charset="-120"/>
+              </a:rPr>
+              <a:t>Concession renewal</a:t>
+            </a:r>
+            <a:endParaRPr lang="en-US" sz="1250" dirty="0"/>
+          </a:p>
+        </p:txBody>
+      </p:sp>
+      <p:sp>
+        <p:nvSpPr>
+          <p:cNvPr id="25" name="Text 23"/>
+          <p:cNvSpPr/>
+          <p:nvPr/>
+        </p:nvSpPr>
+        <p:spPr>
+          <a:xfrm>
+            <a:off x="6571336" y="3648456"/>
+            <a:ext cx="5053432" cy="841248"/>
+          </a:xfrm>
+          <a:prstGeom prst="rect">
+            <a:avLst/>
+          </a:prstGeom>
+          <a:noFill/>
+          <a:ln/>
+        </p:spPr>
+        <p:txBody>
+          <a:bodyPr wrap="square" lIns="0" tIns="0" rIns="0" bIns="0" rtlCol="0" anchor="t"/>
+          <a:lstStyle/>
+          <a:p>
+            <a:pPr indent="0" marL="0">
+              <a:lnSpc>
+                <a:spcPts val="1400"/>
+              </a:lnSpc>
+              <a:buNone/>
+            </a:pPr>
+            <a:r>
+              <a:rPr lang="en-US" sz="1050" dirty="0">
+                <a:solidFill>
+                  <a:srgbClr val="3B4660"/>
+                </a:solidFill>
+                <a:latin typeface="Calibri" pitchFamily="34" charset="0"/>
+                <a:ea typeface="Calibri" pitchFamily="34" charset="-122"/>
+                <a:cs typeface="Calibri" pitchFamily="34" charset="-120"/>
+              </a:rPr>
+              <a:t>Seven years, extendable by four at ADA's discretion, with the licence fee revisable for the extended term. No extension value is included in any figure in this deck.</a:t>
+            </a:r>
+            <a:endParaRPr lang="en-US" sz="1050" dirty="0"/>
+          </a:p>
+        </p:txBody>
+      </p:sp>
+      <p:sp>
+        <p:nvSpPr>
+          <p:cNvPr id="26" name="Text 24"/>
           <p:cNvSpPr/>
           <p:nvPr/>
         </p:nvSpPr>
@@ -24910,7 +25112,7 @@
                 <a:ea typeface="Calibri" pitchFamily="34" charset="-122"/>
                 <a:cs typeface="Calibri" pitchFamily="34" charset="-120"/>
               </a:rPr>
-              <a:t>Six streams. Each is footfall multiplied by a capture rate and a tariff, net of GST. Every rate is derived in section 07.</a:t>
+              <a:t>Six streams. Each is footfall multiplied by a capture rate and a tariff, net of GST. Every rate is derived in section 08.</a:t>
             </a:r>
             <a:endParaRPr lang="en-US" sz="1250" dirty="0"/>
           </a:p>

--- a/pptx/EOD-Geeta-Govind-Vatika-Project-Finance.pptx
+++ b/pptx/EOD-Geeta-Govind-Vatika-Project-Finance.pptx
@@ -17754,7 +17754,7 @@
                 <a:ea typeface="Calibri" pitchFamily="34" charset="-122"/>
                 <a:cs typeface="Calibri" pitchFamily="34" charset="-120"/>
               </a:rPr>
-              <a:t>No cap on the forward e-auction, and the fee escalates 5% a year on whatever is bid. Every ₹1 lakh a year above the modelled ₹36 L costs about ₹8.1 lakh across the term. The project stops covering the cost of its debt above ₹76.8 L a year.</a:t>
+              <a:t>No cap on the forward e-auction, and the fee escalates 5% a year on whatever is bid. Every ₹1 lakh a year above the modelled ₹36 L costs about ₹8.1 lakh across the term, so the bid price moves the return further than any operating assumption in this deck. Mitigation: a board-approved ceiling before the auction opens.</a:t>
             </a:r>
             <a:endParaRPr lang="en-US" sz="1050" dirty="0"/>
           </a:p>
